--- a/StockPulse_Manual_Tecnico.pptx
+++ b/StockPulse_Manual_Tecnico.pptx
@@ -3165,7 +3165,7 @@
         <p:spPr>
           <a:xfrm>
             <a:off x="457200" y="457200"/>
-            <a:ext cx="1828800" cy="457200"/>
+            <a:ext cx="1828800" cy="548640"/>
           </a:xfrm>
           <a:prstGeom prst="rect">
             <a:avLst/>
@@ -3195,14 +3195,13 @@
           <a:bodyPr rtlCol="0" anchor="ctr"/>
           <a:lstStyle/>
           <a:p>
-            <a:pPr>
-              <a:defRPr sz="1800" b="1">
+            <a:pPr algn="ctr"/>
+            <a:r>
+              <a:rPr sz="2000" b="1">
                 <a:solidFill>
                   <a:srgbClr val="FFFFFF"/>
                 </a:solidFill>
-              </a:defRPr>
-            </a:pPr>
-            <a:r>
+              </a:rPr>
               <a:t>G360</a:t>
             </a:r>
           </a:p>
@@ -3216,8 +3215,8 @@
         </p:nvSpPr>
         <p:spPr>
           <a:xfrm>
-            <a:off x="457200" y="2286000"/>
-            <a:ext cx="11277295" cy="1371600"/>
+            <a:off x="457200" y="2560320"/>
+            <a:ext cx="11277295" cy="1097280"/>
           </a:xfrm>
           <a:prstGeom prst="rect">
             <a:avLst/>
@@ -3225,19 +3224,17 @@
           <a:noFill/>
         </p:spPr>
         <p:txBody>
-          <a:bodyPr wrap="square">
+          <a:bodyPr wrap="none">
             <a:spAutoFit/>
           </a:bodyPr>
           <a:lstStyle/>
           <a:p>
-            <a:pPr>
-              <a:defRPr sz="4400" b="1">
-                <a:solidFill>
-                  <a:srgbClr val="F0F4F8"/>
-                </a:solidFill>
-              </a:defRPr>
-            </a:pPr>
-            <a:r>
+            <a:r>
+              <a:rPr sz="4400" b="1">
+                <a:solidFill>
+                  <a:srgbClr val="F0F4F8"/>
+                </a:solidFill>
+              </a:rPr>
               <a:t>StockPulse CIPSA</a:t>
             </a:r>
           </a:p>
@@ -3252,7 +3249,7 @@
         <p:spPr>
           <a:xfrm>
             <a:off x="457200" y="3840480"/>
-            <a:ext cx="11277295" cy="914400"/>
+            <a:ext cx="11277295" cy="731520"/>
           </a:xfrm>
           <a:prstGeom prst="rect">
             <a:avLst/>
@@ -3265,14 +3262,12 @@
           </a:bodyPr>
           <a:lstStyle/>
           <a:p>
-            <a:pPr>
-              <a:defRPr sz="2400">
+            <a:r>
+              <a:rPr sz="2200" b="0">
                 <a:solidFill>
                   <a:srgbClr val="94A3B8"/>
                 </a:solidFill>
-              </a:defRPr>
-            </a:pPr>
-            <a:r>
+              </a:rPr>
               <a:t>Manual Técnico del Sistema de Reportes de Stock</a:t>
             </a:r>
           </a:p>
@@ -3300,15 +3295,14 @@
           </a:bodyPr>
           <a:lstStyle/>
           <a:p>
-            <a:pPr algn="r">
-              <a:defRPr sz="1400">
+            <a:pPr algn="r"/>
+            <a:r>
+              <a:rPr sz="1400" b="0">
                 <a:solidFill>
                   <a:srgbClr val="94A3B8"/>
                 </a:solidFill>
-              </a:defRPr>
-            </a:pPr>
-            <a:r>
-              <a:t>CIPSA · Intelligence Division</a:t>
+              </a:rPr>
+              <a:t>CIPSA - Intelligence Division</a:t>
             </a:r>
           </a:p>
         </p:txBody>
@@ -3382,8 +3376,8 @@
         </p:nvSpPr>
         <p:spPr>
           <a:xfrm>
-            <a:off x="457200" y="365760"/>
-            <a:ext cx="11277295" cy="731520"/>
+            <a:off x="457200" y="274320"/>
+            <a:ext cx="11277295" cy="640080"/>
           </a:xfrm>
           <a:prstGeom prst="rect">
             <a:avLst/>
@@ -3396,14 +3390,12 @@
           </a:bodyPr>
           <a:lstStyle/>
           <a:p>
-            <a:pPr>
-              <a:defRPr sz="3200" b="1">
-                <a:solidFill>
-                  <a:srgbClr val="F0F4F8"/>
-                </a:solidFill>
-              </a:defRPr>
-            </a:pPr>
-            <a:r>
+            <a:r>
+              <a:rPr sz="2800" b="1">
+                <a:solidFill>
+                  <a:srgbClr val="F0F4F8"/>
+                </a:solidFill>
+              </a:rPr>
               <a:t>Cálculo de Estado</a:t>
             </a:r>
           </a:p>
@@ -3417,8 +3409,8 @@
         </p:nvSpPr>
         <p:spPr>
           <a:xfrm>
-            <a:off x="457200" y="1280160"/>
-            <a:ext cx="11277295" cy="5029200"/>
+            <a:off x="457200" y="1097280"/>
+            <a:ext cx="11277295" cy="5303520"/>
           </a:xfrm>
           <a:prstGeom prst="rect">
             <a:avLst/>
@@ -3433,205 +3425,195 @@
           <a:p>
             <a:pPr>
               <a:spcBef>
-                <a:spcPts val="2000"/>
-              </a:spcBef>
-              <a:defRPr sz="2400" b="1">
+                <a:spcPts val="1600"/>
+              </a:spcBef>
+            </a:pPr>
+            <a:r>
+              <a:rPr sz="2000" b="1">
                 <a:solidFill>
                   <a:srgbClr val="00D084"/>
                 </a:solidFill>
-              </a:defRPr>
-            </a:pPr>
-            <a:r>
+              </a:rPr>
               <a:t>Fórmula de Cajas (bx)</a:t>
             </a:r>
           </a:p>
           <a:p>
             <a:pPr>
               <a:spcBef>
-                <a:spcPts val="800"/>
-              </a:spcBef>
-              <a:defRPr sz="1800">
-                <a:solidFill>
-                  <a:srgbClr val="F0F4F8"/>
-                </a:solidFill>
-              </a:defRPr>
-            </a:pPr>
-            <a:r>
-              <a:t>bx = Math.floor(stock_disponible / un_bx)</a:t>
-            </a:r>
-          </a:p>
-          <a:p>
-            <a:pPr>
-              <a:spcBef>
-                <a:spcPts val="800"/>
-              </a:spcBef>
-              <a:defRPr sz="1800">
-                <a:solidFill>
-                  <a:srgbClr val="F0F4F8"/>
-                </a:solidFill>
-              </a:defRPr>
-            </a:pPr>
-            <a:r>
-              <a:t>stock_disponible = suma de 'disponible' en almacenes tipo 'venta'</a:t>
-            </a:r>
-          </a:p>
-          <a:p>
-            <a:pPr>
-              <a:spcBef>
-                <a:spcPts val="800"/>
-              </a:spcBef>
-              <a:defRPr sz="1800">
-                <a:solidFill>
-                  <a:srgbClr val="F0F4F8"/>
-                </a:solidFill>
-              </a:defRPr>
-            </a:pPr>
-            <a:r>
-              <a:t>un_bx = unidades por caja (del catálogo maestro)</a:t>
-            </a:r>
-          </a:p>
-          <a:p>
-            <a:pPr>
-              <a:spcBef>
-                <a:spcPts val="800"/>
-              </a:spcBef>
-              <a:defRPr sz="1800">
-                <a:solidFill>
-                  <a:srgbClr val="F0F4F8"/>
-                </a:solidFill>
-              </a:defRPr>
-            </a:pPr>
-          </a:p>
-          <a:p>
-            <a:pPr>
-              <a:spcBef>
-                <a:spcPts val="2000"/>
-              </a:spcBef>
-              <a:defRPr sz="2400" b="1">
+                <a:spcPts val="600"/>
+              </a:spcBef>
+            </a:pPr>
+            <a:r>
+              <a:rPr sz="1600" b="0">
+                <a:solidFill>
+                  <a:srgbClr val="F0F4F8"/>
+                </a:solidFill>
+              </a:rPr>
+              <a:t>  bx = Math.floor(stock_disponible / un_bx)</a:t>
+            </a:r>
+          </a:p>
+          <a:p>
+            <a:pPr>
+              <a:spcBef>
+                <a:spcPts val="600"/>
+              </a:spcBef>
+            </a:pPr>
+            <a:r>
+              <a:rPr sz="1600" b="0">
+                <a:solidFill>
+                  <a:srgbClr val="F0F4F8"/>
+                </a:solidFill>
+              </a:rPr>
+              <a:t>  stock_disponible = suma de 'disponible' en almacenes tipo 'venta'</a:t>
+            </a:r>
+          </a:p>
+          <a:p>
+            <a:pPr>
+              <a:spcBef>
+                <a:spcPts val="600"/>
+              </a:spcBef>
+            </a:pPr>
+            <a:r>
+              <a:rPr sz="1600" b="0">
+                <a:solidFill>
+                  <a:srgbClr val="F0F4F8"/>
+                </a:solidFill>
+              </a:rPr>
+              <a:t>  un_bx = unidades por caja (del catálogo maestro)</a:t>
+            </a:r>
+          </a:p>
+          <a:p>
+            <a:pPr>
+              <a:spcBef>
+                <a:spcPts val="600"/>
+              </a:spcBef>
+            </a:pPr>
+          </a:p>
+          <a:p>
+            <a:pPr>
+              <a:spcBef>
+                <a:spcPts val="1600"/>
+              </a:spcBef>
+            </a:pPr>
+            <a:r>
+              <a:rPr sz="2000" b="1">
                 <a:solidFill>
                   <a:srgbClr val="00D084"/>
                 </a:solidFill>
-              </a:defRPr>
-            </a:pPr>
-            <a:r>
+              </a:rPr>
               <a:t>Estados</a:t>
             </a:r>
           </a:p>
           <a:p>
             <a:pPr>
               <a:spcBef>
-                <a:spcPts val="800"/>
-              </a:spcBef>
-              <a:defRPr sz="1800">
-                <a:solidFill>
-                  <a:srgbClr val="F0F4F8"/>
-                </a:solidFill>
-              </a:defRPr>
-            </a:pPr>
-            <a:r>
-              <a:t>OK → bx &gt;= 10 (10 o más cajas completas)</a:t>
-            </a:r>
-          </a:p>
-          <a:p>
-            <a:pPr>
-              <a:spcBef>
-                <a:spcPts val="800"/>
-              </a:spcBef>
-              <a:defRPr sz="1800">
-                <a:solidFill>
-                  <a:srgbClr val="F0F4F8"/>
-                </a:solidFill>
-              </a:defRPr>
-            </a:pPr>
-            <a:r>
-              <a:t>BAJO → 1 &lt;= bx &lt; 10 (1 a 9 cajas)</a:t>
-            </a:r>
-          </a:p>
-          <a:p>
-            <a:pPr>
-              <a:spcBef>
-                <a:spcPts val="800"/>
-              </a:spcBef>
-              <a:defRPr sz="1800">
-                <a:solidFill>
-                  <a:srgbClr val="F0F4F8"/>
-                </a:solidFill>
-              </a:defRPr>
-            </a:pPr>
-            <a:r>
-              <a:t>AGOTADO → bx == 0 (sin cajas completas)</a:t>
-            </a:r>
-          </a:p>
-          <a:p>
-            <a:pPr>
-              <a:spcBef>
-                <a:spcPts val="800"/>
-              </a:spcBef>
-              <a:defRPr sz="1800">
-                <a:solidFill>
-                  <a:srgbClr val="F0F4F8"/>
-                </a:solidFill>
-              </a:defRPr>
-            </a:pPr>
-          </a:p>
-          <a:p>
-            <a:pPr>
-              <a:spcBef>
-                <a:spcPts val="2000"/>
-              </a:spcBef>
-              <a:defRPr sz="2400" b="1">
+                <a:spcPts val="600"/>
+              </a:spcBef>
+            </a:pPr>
+            <a:r>
+              <a:rPr sz="1600" b="0">
+                <a:solidFill>
+                  <a:srgbClr val="F0F4F8"/>
+                </a:solidFill>
+              </a:rPr>
+              <a:t>  OK → bx &gt;= 10 (10 o más cajas completas)</a:t>
+            </a:r>
+          </a:p>
+          <a:p>
+            <a:pPr>
+              <a:spcBef>
+                <a:spcPts val="600"/>
+              </a:spcBef>
+            </a:pPr>
+            <a:r>
+              <a:rPr sz="1600" b="0">
+                <a:solidFill>
+                  <a:srgbClr val="F0F4F8"/>
+                </a:solidFill>
+              </a:rPr>
+              <a:t>  BAJO → 1 &lt;= bx &lt; 10 (1 a 9 cajas)</a:t>
+            </a:r>
+          </a:p>
+          <a:p>
+            <a:pPr>
+              <a:spcBef>
+                <a:spcPts val="600"/>
+              </a:spcBef>
+            </a:pPr>
+            <a:r>
+              <a:rPr sz="1600" b="0">
+                <a:solidFill>
+                  <a:srgbClr val="F0F4F8"/>
+                </a:solidFill>
+              </a:rPr>
+              <a:t>  AGOTADO → bx == 0 (sin cajas completas)</a:t>
+            </a:r>
+          </a:p>
+          <a:p>
+            <a:pPr>
+              <a:spcBef>
+                <a:spcPts val="600"/>
+              </a:spcBef>
+            </a:pPr>
+          </a:p>
+          <a:p>
+            <a:pPr>
+              <a:spcBef>
+                <a:spcPts val="1600"/>
+              </a:spcBef>
+            </a:pPr>
+            <a:r>
+              <a:rPr sz="2000" b="1">
                 <a:solidFill>
                   <a:srgbClr val="00D084"/>
                 </a:solidFill>
-              </a:defRPr>
-            </a:pPr>
-            <a:r>
+              </a:rPr>
               <a:t>Casos Especiales</a:t>
             </a:r>
           </a:p>
           <a:p>
             <a:pPr>
               <a:spcBef>
-                <a:spcPts val="800"/>
-              </a:spcBef>
-              <a:defRPr sz="1800">
-                <a:solidFill>
-                  <a:srgbClr val="F0F4F8"/>
-                </a:solidFill>
-              </a:defRPr>
-            </a:pPr>
-            <a:r>
-              <a:t>SKUs vendidos por unidad (un_bx &lt;= 1): se muestra en unidades</a:t>
-            </a:r>
-          </a:p>
-          <a:p>
-            <a:pPr>
-              <a:spcBef>
-                <a:spcPts val="800"/>
-              </a:spcBef>
-              <a:defRPr sz="1800">
-                <a:solidFill>
-                  <a:srgbClr val="F0F4F8"/>
-                </a:solidFill>
-              </a:defRPr>
-            </a:pPr>
-            <a:r>
-              <a:t>Stock solo en mktd (ej. 118): aparece como AGOTADO en venta</a:t>
-            </a:r>
-          </a:p>
-          <a:p>
-            <a:pPr>
-              <a:spcBef>
-                <a:spcPts val="800"/>
-              </a:spcBef>
-              <a:defRPr sz="1800">
-                <a:solidFill>
-                  <a:srgbClr val="F0F4F8"/>
-                </a:solidFill>
-              </a:defRPr>
-            </a:pPr>
-            <a:r>
-              <a:t>Inspección (121): opcional incluir/excluir en reportes</a:t>
+                <a:spcPts val="600"/>
+              </a:spcBef>
+            </a:pPr>
+            <a:r>
+              <a:rPr sz="1600" b="0">
+                <a:solidFill>
+                  <a:srgbClr val="F0F4F8"/>
+                </a:solidFill>
+              </a:rPr>
+              <a:t>  SKUs vendidos por unidad (un_bx &lt;= 1): se muestra en unidades</a:t>
+            </a:r>
+          </a:p>
+          <a:p>
+            <a:pPr>
+              <a:spcBef>
+                <a:spcPts val="600"/>
+              </a:spcBef>
+            </a:pPr>
+            <a:r>
+              <a:rPr sz="1600" b="0">
+                <a:solidFill>
+                  <a:srgbClr val="F0F4F8"/>
+                </a:solidFill>
+              </a:rPr>
+              <a:t>  Stock solo en mktd (ej. 118): aparece como AGOTADO en venta</a:t>
+            </a:r>
+          </a:p>
+          <a:p>
+            <a:pPr>
+              <a:spcBef>
+                <a:spcPts val="600"/>
+              </a:spcBef>
+            </a:pPr>
+            <a:r>
+              <a:rPr sz="1600" b="0">
+                <a:solidFill>
+                  <a:srgbClr val="F0F4F8"/>
+                </a:solidFill>
+              </a:rPr>
+              <a:t>  Inspección (121): opcional incluir/excluir en reportes</a:t>
             </a:r>
           </a:p>
         </p:txBody>
@@ -3705,8 +3687,8 @@
         </p:nvSpPr>
         <p:spPr>
           <a:xfrm>
-            <a:off x="457200" y="365760"/>
-            <a:ext cx="11277295" cy="731520"/>
+            <a:off x="457200" y="274320"/>
+            <a:ext cx="11277295" cy="640080"/>
           </a:xfrm>
           <a:prstGeom prst="rect">
             <a:avLst/>
@@ -3719,14 +3701,12 @@
           </a:bodyPr>
           <a:lstStyle/>
           <a:p>
-            <a:pPr>
-              <a:defRPr sz="3200" b="1">
-                <a:solidFill>
-                  <a:srgbClr val="F0F4F8"/>
-                </a:solidFill>
-              </a:defRPr>
-            </a:pPr>
-            <a:r>
+            <a:r>
+              <a:rPr sz="2800" b="1">
+                <a:solidFill>
+                  <a:srgbClr val="F0F4F8"/>
+                </a:solidFill>
+              </a:rPr>
               <a:t>Dashboard Principal</a:t>
             </a:r>
           </a:p>
@@ -3740,8 +3720,8 @@
         </p:nvSpPr>
         <p:spPr>
           <a:xfrm>
-            <a:off x="914400" y="1371600"/>
-            <a:ext cx="10362895" cy="4572000"/>
+            <a:off x="731520" y="1188720"/>
+            <a:ext cx="10728655" cy="4754880"/>
           </a:xfrm>
           <a:prstGeom prst="rect">
             <a:avLst/>
@@ -3773,26 +3753,24 @@
           <a:bodyPr rtlCol="0" anchor="ctr" wrap="square"/>
           <a:lstStyle/>
           <a:p>
-            <a:pPr algn="ctr">
-              <a:defRPr sz="2800" b="1">
+            <a:pPr algn="ctr"/>
+            <a:r>
+              <a:rPr sz="2400" b="1">
                 <a:solidFill>
                   <a:srgbClr val="94A3B8"/>
                 </a:solidFill>
-              </a:defRPr>
-            </a:pPr>
-            <a:r>
+              </a:rPr>
               <a:t>[CAPTURA DE PANTALLA]</a:t>
             </a:r>
           </a:p>
           <a:p>
-            <a:pPr algn="ctr">
-              <a:defRPr sz="1400">
+            <a:pPr algn="ctr"/>
+            <a:r>
+              <a:rPr sz="1400" b="0">
                 <a:solidFill>
                   <a:srgbClr val="94A3B8"/>
                 </a:solidFill>
-              </a:defRPr>
-            </a:pPr>
-            <a:r>
+              </a:rPr>
               <a:t>Captura del panel de estado</a:t>
             </a:r>
           </a:p>
@@ -3867,8 +3845,8 @@
         </p:nvSpPr>
         <p:spPr>
           <a:xfrm>
-            <a:off x="457200" y="2926080"/>
-            <a:ext cx="1828800" cy="73152"/>
+            <a:off x="457200" y="2743200"/>
+            <a:ext cx="1828800" cy="54864"/>
           </a:xfrm>
           <a:prstGeom prst="rect">
             <a:avLst/>
@@ -3910,7 +3888,7 @@
         </p:nvSpPr>
         <p:spPr>
           <a:xfrm>
-            <a:off x="457200" y="2560320"/>
+            <a:off x="457200" y="2377440"/>
             <a:ext cx="10972800" cy="914400"/>
           </a:xfrm>
           <a:prstGeom prst="rect">
@@ -3924,14 +3902,12 @@
           </a:bodyPr>
           <a:lstStyle/>
           <a:p>
-            <a:pPr>
-              <a:defRPr sz="4000" b="1">
-                <a:solidFill>
-                  <a:srgbClr val="F0F4F8"/>
-                </a:solidFill>
-              </a:defRPr>
-            </a:pPr>
-            <a:r>
+            <a:r>
+              <a:rPr sz="4000" b="1">
+                <a:solidFill>
+                  <a:srgbClr val="F0F4F8"/>
+                </a:solidFill>
+              </a:rPr>
               <a:t>Búsqueda Avanzada</a:t>
             </a:r>
           </a:p>
@@ -4006,8 +3982,8 @@
         </p:nvSpPr>
         <p:spPr>
           <a:xfrm>
-            <a:off x="457200" y="365760"/>
-            <a:ext cx="11277295" cy="731520"/>
+            <a:off x="457200" y="274320"/>
+            <a:ext cx="11277295" cy="640080"/>
           </a:xfrm>
           <a:prstGeom prst="rect">
             <a:avLst/>
@@ -4020,14 +3996,12 @@
           </a:bodyPr>
           <a:lstStyle/>
           <a:p>
-            <a:pPr>
-              <a:defRPr sz="3200" b="1">
-                <a:solidFill>
-                  <a:srgbClr val="F0F4F8"/>
-                </a:solidFill>
-              </a:defRPr>
-            </a:pPr>
-            <a:r>
+            <a:r>
+              <a:rPr sz="2800" b="1">
+                <a:solidFill>
+                  <a:srgbClr val="F0F4F8"/>
+                </a:solidFill>
+              </a:rPr>
               <a:t>Motor de Búsqueda (Fuse.js)</a:t>
             </a:r>
           </a:p>
@@ -4041,8 +4015,8 @@
         </p:nvSpPr>
         <p:spPr>
           <a:xfrm>
-            <a:off x="457200" y="1280160"/>
-            <a:ext cx="11277295" cy="5029200"/>
+            <a:off x="457200" y="1097280"/>
+            <a:ext cx="11277295" cy="5303520"/>
           </a:xfrm>
           <a:prstGeom prst="rect">
             <a:avLst/>
@@ -4057,193 +4031,188 @@
           <a:p>
             <a:pPr>
               <a:spcBef>
-                <a:spcPts val="2000"/>
-              </a:spcBef>
-              <a:defRPr sz="2400" b="1">
+                <a:spcPts val="1600"/>
+              </a:spcBef>
+            </a:pPr>
+            <a:r>
+              <a:rPr sz="2000" b="1">
                 <a:solidFill>
                   <a:srgbClr val="00D084"/>
                 </a:solidFill>
-              </a:defRPr>
-            </a:pPr>
-            <a:r>
-              <a:t>Campers Indexados</a:t>
-            </a:r>
-          </a:p>
-          <a:p>
-            <a:pPr>
-              <a:spcBef>
-                <a:spcPts val="800"/>
-              </a:spcBef>
-              <a:defRPr sz="1800">
-                <a:solidFill>
-                  <a:srgbClr val="F0F4F8"/>
-                </a:solidFill>
-              </a:defRPr>
-            </a:pPr>
-            <a:r>
-              <a:t>SKU (peso: 2.0) - coincidencia exacta prioritaria</a:t>
-            </a:r>
-          </a:p>
-          <a:p>
-            <a:pPr>
-              <a:spcBef>
-                <a:spcPts val="800"/>
-              </a:spcBef>
-              <a:defRPr sz="1800">
-                <a:solidFill>
-                  <a:srgbClr val="F0F4F8"/>
-                </a:solidFill>
-              </a:defRPr>
-            </a:pPr>
-            <a:r>
-              <a:t>Nombre corto (peso: 1.5) - nombre abreviado del producto</a:t>
-            </a:r>
-          </a:p>
-          <a:p>
-            <a:pPr>
-              <a:spcBef>
-                <a:spcPts val="800"/>
-              </a:spcBef>
-              <a:defRPr sz="1800">
-                <a:solidFill>
-                  <a:srgbClr val="F0F4F8"/>
-                </a:solidFill>
-              </a:defRPr>
-            </a:pPr>
-            <a:r>
-              <a:t>Descripción completa (peso: 1.0)</a:t>
-            </a:r>
-          </a:p>
-          <a:p>
-            <a:pPr>
-              <a:spcBef>
-                <a:spcPts val="800"/>
-              </a:spcBef>
-              <a:defRPr sz="1800">
-                <a:solidFill>
-                  <a:srgbClr val="F0F4F8"/>
-                </a:solidFill>
-              </a:defRPr>
-            </a:pPr>
-            <a:r>
-              <a:t>Keywords (peso: 0.6) - atributos: color, tipo, marca</a:t>
-            </a:r>
-          </a:p>
-          <a:p>
-            <a:pPr>
-              <a:spcBef>
-                <a:spcPts val="800"/>
-              </a:spcBef>
-              <a:defRPr sz="1800">
-                <a:solidFill>
-                  <a:srgbClr val="F0F4F8"/>
-                </a:solidFill>
-              </a:defRPr>
-            </a:pPr>
-            <a:r>
-              <a:t>EAN13 (peso: 0.8) - código de barras</a:t>
-            </a:r>
-          </a:p>
-          <a:p>
-            <a:pPr>
-              <a:spcBef>
-                <a:spcPts val="800"/>
-              </a:spcBef>
-              <a:defRPr sz="1800">
-                <a:solidFill>
-                  <a:srgbClr val="F0F4F8"/>
-                </a:solidFill>
-              </a:defRPr>
-            </a:pPr>
-            <a:r>
-              <a:t>Línea (peso: 0.5) - ej: ACCESORIOS, PELOTAS</a:t>
-            </a:r>
-          </a:p>
-          <a:p>
-            <a:pPr>
-              <a:spcBef>
-                <a:spcPts val="800"/>
-              </a:spcBef>
-              <a:defRPr sz="1800">
-                <a:solidFill>
-                  <a:srgbClr val="F0F4F8"/>
-                </a:solidFill>
-              </a:defRPr>
-            </a:pPr>
-            <a:r>
-              <a:t>Categoría (peso: 0.5) - VINIBALL, VINIFAN, etc.</a:t>
-            </a:r>
-          </a:p>
-          <a:p>
-            <a:pPr>
-              <a:spcBef>
-                <a:spcPts val="800"/>
-              </a:spcBef>
-              <a:defRPr sz="1800">
-                <a:solidFill>
-                  <a:srgbClr val="F0F4F8"/>
-                </a:solidFill>
-              </a:defRPr>
-            </a:pPr>
-          </a:p>
-          <a:p>
-            <a:pPr>
-              <a:spcBef>
-                <a:spcPts val="2000"/>
-              </a:spcBef>
-              <a:defRPr sz="2400" b="1">
+              </a:rPr>
+              <a:t>Campos Indexados</a:t>
+            </a:r>
+          </a:p>
+          <a:p>
+            <a:pPr>
+              <a:spcBef>
+                <a:spcPts val="600"/>
+              </a:spcBef>
+            </a:pPr>
+            <a:r>
+              <a:rPr sz="1600" b="0">
+                <a:solidFill>
+                  <a:srgbClr val="F0F4F8"/>
+                </a:solidFill>
+              </a:rPr>
+              <a:t>  SKU (peso: 2.0) - coincidencia exacta prioritaria</a:t>
+            </a:r>
+          </a:p>
+          <a:p>
+            <a:pPr>
+              <a:spcBef>
+                <a:spcPts val="600"/>
+              </a:spcBef>
+            </a:pPr>
+            <a:r>
+              <a:rPr sz="1600" b="0">
+                <a:solidFill>
+                  <a:srgbClr val="F0F4F8"/>
+                </a:solidFill>
+              </a:rPr>
+              <a:t>  Nombre corto (peso: 1.5) - nombre abreviado del producto</a:t>
+            </a:r>
+          </a:p>
+          <a:p>
+            <a:pPr>
+              <a:spcBef>
+                <a:spcPts val="600"/>
+              </a:spcBef>
+            </a:pPr>
+            <a:r>
+              <a:rPr sz="1600" b="0">
+                <a:solidFill>
+                  <a:srgbClr val="F0F4F8"/>
+                </a:solidFill>
+              </a:rPr>
+              <a:t>  Descripción completa (peso: 1.0)</a:t>
+            </a:r>
+          </a:p>
+          <a:p>
+            <a:pPr>
+              <a:spcBef>
+                <a:spcPts val="600"/>
+              </a:spcBef>
+            </a:pPr>
+            <a:r>
+              <a:rPr sz="1600" b="0">
+                <a:solidFill>
+                  <a:srgbClr val="F0F4F8"/>
+                </a:solidFill>
+              </a:rPr>
+              <a:t>  Keywords (peso: 0.6) - atributos: color, tipo, marca</a:t>
+            </a:r>
+          </a:p>
+          <a:p>
+            <a:pPr>
+              <a:spcBef>
+                <a:spcPts val="600"/>
+              </a:spcBef>
+            </a:pPr>
+            <a:r>
+              <a:rPr sz="1600" b="0">
+                <a:solidFill>
+                  <a:srgbClr val="F0F4F8"/>
+                </a:solidFill>
+              </a:rPr>
+              <a:t>  EAN13 (peso: 0.8) - código de barras</a:t>
+            </a:r>
+          </a:p>
+          <a:p>
+            <a:pPr>
+              <a:spcBef>
+                <a:spcPts val="600"/>
+              </a:spcBef>
+            </a:pPr>
+            <a:r>
+              <a:rPr sz="1600" b="0">
+                <a:solidFill>
+                  <a:srgbClr val="F0F4F8"/>
+                </a:solidFill>
+              </a:rPr>
+              <a:t>  Línea (peso: 0.5) - ej: ACCESORIOS, PELOTAS</a:t>
+            </a:r>
+          </a:p>
+          <a:p>
+            <a:pPr>
+              <a:spcBef>
+                <a:spcPts val="600"/>
+              </a:spcBef>
+            </a:pPr>
+            <a:r>
+              <a:rPr sz="1600" b="0">
+                <a:solidFill>
+                  <a:srgbClr val="F0F4F8"/>
+                </a:solidFill>
+              </a:rPr>
+              <a:t>  Categoría (peso: 0.5) - VINIBALL, VINIFAN, etc.</a:t>
+            </a:r>
+          </a:p>
+          <a:p>
+            <a:pPr>
+              <a:spcBef>
+                <a:spcPts val="600"/>
+              </a:spcBef>
+            </a:pPr>
+          </a:p>
+          <a:p>
+            <a:pPr>
+              <a:spcBef>
+                <a:spcPts val="1600"/>
+              </a:spcBef>
+            </a:pPr>
+            <a:r>
+              <a:rPr sz="2000" b="1">
                 <a:solidFill>
                   <a:srgbClr val="00D084"/>
                 </a:solidFill>
-              </a:defRPr>
-            </a:pPr>
-            <a:r>
+              </a:rPr>
               <a:t>Normalización</a:t>
             </a:r>
           </a:p>
           <a:p>
             <a:pPr>
               <a:spcBef>
-                <a:spcPts val="800"/>
-              </a:spcBef>
-              <a:defRPr sz="1800">
-                <a:solidFill>
-                  <a:srgbClr val="F0F4F8"/>
-                </a:solidFill>
-              </a:defRPr>
-            </a:pPr>
-            <a:r>
-              <a:t>Ignora ubicación del término</a:t>
-            </a:r>
-          </a:p>
-          <a:p>
-            <a:pPr>
-              <a:spcBef>
-                <a:spcPts val="800"/>
-              </a:spcBef>
-              <a:defRPr sz="1800">
-                <a:solidFill>
-                  <a:srgbClr val="F0F4F8"/>
-                </a:solidFill>
-              </a:defRPr>
-            </a:pPr>
-            <a:r>
-              <a:t>Threshold: 0.3 (tolerancia alta para typo-tolerant)</a:t>
-            </a:r>
-          </a:p>
-          <a:p>
-            <a:pPr>
-              <a:spcBef>
-                <a:spcPts val="800"/>
-              </a:spcBef>
-              <a:defRPr sz="1800">
-                <a:solidFill>
-                  <a:srgbClr val="F0F4F8"/>
-                </a:solidFill>
-              </a:defRPr>
-            </a:pPr>
-            <a:r>
-              <a:t>Mínimo 2 caracteres para iniciar búsqueda</a:t>
+                <a:spcPts val="600"/>
+              </a:spcBef>
+            </a:pPr>
+            <a:r>
+              <a:rPr sz="1600" b="0">
+                <a:solidFill>
+                  <a:srgbClr val="F0F4F8"/>
+                </a:solidFill>
+              </a:rPr>
+              <a:t>  Ignora ubicación del término</a:t>
+            </a:r>
+          </a:p>
+          <a:p>
+            <a:pPr>
+              <a:spcBef>
+                <a:spcPts val="600"/>
+              </a:spcBef>
+            </a:pPr>
+            <a:r>
+              <a:rPr sz="1600" b="0">
+                <a:solidFill>
+                  <a:srgbClr val="F0F4F8"/>
+                </a:solidFill>
+              </a:rPr>
+              <a:t>  Threshold: 0.3 (tolerancia alta para typo-tolerant)</a:t>
+            </a:r>
+          </a:p>
+          <a:p>
+            <a:pPr>
+              <a:spcBef>
+                <a:spcPts val="600"/>
+              </a:spcBef>
+            </a:pPr>
+            <a:r>
+              <a:rPr sz="1600" b="0">
+                <a:solidFill>
+                  <a:srgbClr val="F0F4F8"/>
+                </a:solidFill>
+              </a:rPr>
+              <a:t>  Mínimo 2 caracteres para iniciar búsqueda</a:t>
             </a:r>
           </a:p>
         </p:txBody>
@@ -4317,8 +4286,8 @@
         </p:nvSpPr>
         <p:spPr>
           <a:xfrm>
-            <a:off x="457200" y="365760"/>
-            <a:ext cx="11277295" cy="731520"/>
+            <a:off x="457200" y="274320"/>
+            <a:ext cx="11277295" cy="640080"/>
           </a:xfrm>
           <a:prstGeom prst="rect">
             <a:avLst/>
@@ -4331,14 +4300,12 @@
           </a:bodyPr>
           <a:lstStyle/>
           <a:p>
-            <a:pPr>
-              <a:defRPr sz="3200" b="1">
-                <a:solidFill>
-                  <a:srgbClr val="F0F4F8"/>
-                </a:solidFill>
-              </a:defRPr>
-            </a:pPr>
-            <a:r>
+            <a:r>
+              <a:rPr sz="2800" b="1">
+                <a:solidFill>
+                  <a:srgbClr val="F0F4F8"/>
+                </a:solidFill>
+              </a:rPr>
               <a:t>Búsqueda por Voz</a:t>
             </a:r>
           </a:p>
@@ -4352,8 +4319,8 @@
         </p:nvSpPr>
         <p:spPr>
           <a:xfrm>
-            <a:off x="457200" y="1280160"/>
-            <a:ext cx="11277295" cy="5029200"/>
+            <a:off x="457200" y="1097280"/>
+            <a:ext cx="11277295" cy="5303520"/>
           </a:xfrm>
           <a:prstGeom prst="rect">
             <a:avLst/>
@@ -4368,235 +4335,225 @@
           <a:p>
             <a:pPr>
               <a:spcBef>
-                <a:spcPts val="2000"/>
-              </a:spcBef>
-              <a:defRPr sz="2400" b="1">
+                <a:spcPts val="1600"/>
+              </a:spcBef>
+            </a:pPr>
+            <a:r>
+              <a:rPr sz="2000" b="1">
                 <a:solidFill>
                   <a:srgbClr val="00D084"/>
                 </a:solidFill>
-              </a:defRPr>
-            </a:pPr>
-            <a:r>
+              </a:rPr>
               <a:t>Características</a:t>
             </a:r>
           </a:p>
           <a:p>
             <a:pPr>
               <a:spcBef>
-                <a:spcPts val="800"/>
-              </a:spcBef>
-              <a:defRPr sz="1800">
-                <a:solidFill>
-                  <a:srgbClr val="F0F4F8"/>
-                </a:solidFill>
-              </a:defRPr>
-            </a:pPr>
-            <a:r>
-              <a:t>Web Speech API ( SpeechRecognition )</a:t>
-            </a:r>
-          </a:p>
-          <a:p>
-            <a:pPr>
-              <a:spcBef>
-                <a:spcPts val="800"/>
-              </a:spcBef>
-              <a:defRPr sz="1800">
-                <a:solidFill>
-                  <a:srgbClr val="F0F4F8"/>
-                </a:solidFill>
-              </a:defRPr>
-            </a:pPr>
-            <a:r>
-              <a:t>Idioma: es-PE (Español Perú)</a:t>
-            </a:r>
-          </a:p>
-          <a:p>
-            <a:pPr>
-              <a:spcBef>
-                <a:spcPts val="800"/>
-              </a:spcBef>
-              <a:defRPr sz="1800">
-                <a:solidFill>
-                  <a:srgbClr val="F0F4F8"/>
-                </a:solidFill>
-              </a:defRPr>
-            </a:pPr>
-            <a:r>
-              <a:t>Interim results para feedback en tiempo real</a:t>
-            </a:r>
-          </a:p>
-          <a:p>
-            <a:pPr>
-              <a:spcBef>
-                <a:spcPts val="800"/>
-              </a:spcBef>
-              <a:defRPr sz="1800">
-                <a:solidFill>
-                  <a:srgbClr val="F0F4F8"/>
-                </a:solidFill>
-              </a:defRPr>
-            </a:pPr>
-          </a:p>
-          <a:p>
-            <a:pPr>
-              <a:spcBef>
-                <a:spcPts val="2000"/>
-              </a:spcBef>
-              <a:defRPr sz="2400" b="1">
+                <a:spcPts val="600"/>
+              </a:spcBef>
+            </a:pPr>
+            <a:r>
+              <a:rPr sz="1600" b="0">
+                <a:solidFill>
+                  <a:srgbClr val="F0F4F8"/>
+                </a:solidFill>
+              </a:rPr>
+              <a:t>  Web Speech API (SpeechRecognition)</a:t>
+            </a:r>
+          </a:p>
+          <a:p>
+            <a:pPr>
+              <a:spcBef>
+                <a:spcPts val="600"/>
+              </a:spcBef>
+            </a:pPr>
+            <a:r>
+              <a:rPr sz="1600" b="0">
+                <a:solidFill>
+                  <a:srgbClr val="F0F4F8"/>
+                </a:solidFill>
+              </a:rPr>
+              <a:t>  Idioma: es-PE (Español Perú)</a:t>
+            </a:r>
+          </a:p>
+          <a:p>
+            <a:pPr>
+              <a:spcBef>
+                <a:spcPts val="600"/>
+              </a:spcBef>
+            </a:pPr>
+            <a:r>
+              <a:rPr sz="1600" b="0">
+                <a:solidFill>
+                  <a:srgbClr val="F0F4F8"/>
+                </a:solidFill>
+              </a:rPr>
+              <a:t>  Interim results para feedback en tiempo real</a:t>
+            </a:r>
+          </a:p>
+          <a:p>
+            <a:pPr>
+              <a:spcBef>
+                <a:spcPts val="600"/>
+              </a:spcBef>
+            </a:pPr>
+          </a:p>
+          <a:p>
+            <a:pPr>
+              <a:spcBef>
+                <a:spcPts val="1600"/>
+              </a:spcBef>
+            </a:pPr>
+            <a:r>
+              <a:rPr sz="2000" b="1">
                 <a:solidFill>
                   <a:srgbClr val="00D084"/>
                 </a:solidFill>
-              </a:defRPr>
-            </a:pPr>
-            <a:r>
+              </a:rPr>
               <a:t>Normalización de Voz</a:t>
             </a:r>
           </a:p>
           <a:p>
             <a:pPr>
               <a:spcBef>
-                <a:spcPts val="800"/>
-              </a:spcBef>
-              <a:defRPr sz="1800">
-                <a:solidFill>
-                  <a:srgbClr val="F0F4F8"/>
-                </a:solidFill>
-              </a:defRPr>
-            </a:pPr>
-            <a:r>
-              <a:t>Convierte números hablados a dígitos:</a:t>
-            </a:r>
-          </a:p>
-          <a:p>
-            <a:pPr>
-              <a:spcBef>
-                <a:spcPts val="800"/>
-              </a:spcBef>
-              <a:defRPr sz="1800">
-                <a:solidFill>
-                  <a:srgbClr val="F0F4F8"/>
-                </a:solidFill>
-              </a:defRPr>
-            </a:pPr>
-            <a:r>
-              <a:t>  'cero uno uno cero uno nueve' → '011019'</a:t>
-            </a:r>
-          </a:p>
-          <a:p>
-            <a:pPr>
-              <a:spcBef>
-                <a:spcPts val="800"/>
-              </a:spcBef>
-              <a:defRPr sz="1800">
-                <a:solidFill>
-                  <a:srgbClr val="F0F4F8"/>
-                </a:solidFill>
-              </a:defRPr>
-            </a:pPr>
-            <a:r>
-              <a:t>Elimina ruido: 'sku', 'codigo', 'busca', artículos</a:t>
-            </a:r>
-          </a:p>
-          <a:p>
-            <a:pPr>
-              <a:spcBef>
-                <a:spcPts val="800"/>
-              </a:spcBef>
-              <a:defRPr sz="1800">
-                <a:solidFill>
-                  <a:srgbClr val="F0F4F8"/>
-                </a:solidFill>
-              </a:defRPr>
-            </a:pPr>
-            <a:r>
-              <a:t>Quita tildes y puntuación</a:t>
-            </a:r>
-          </a:p>
-          <a:p>
-            <a:pPr>
-              <a:spcBef>
-                <a:spcPts val="800"/>
-              </a:spcBef>
-              <a:defRPr sz="1800">
-                <a:solidFill>
-                  <a:srgbClr val="F0F4F8"/>
-                </a:solidFill>
-              </a:defRPr>
-            </a:pPr>
-            <a:r>
-              <a:t>Si todo son dígitos → SKU/EAN directo</a:t>
-            </a:r>
-          </a:p>
-          <a:p>
-            <a:pPr>
-              <a:spcBef>
-                <a:spcPts val="800"/>
-              </a:spcBef>
-              <a:defRPr sz="1800">
-                <a:solidFill>
-                  <a:srgbClr val="F0F4F8"/>
-                </a:solidFill>
-              </a:defRPr>
-            </a:pPr>
-            <a:r>
-              <a:t>Si es texto → búsqueda fuzzy por palabras</a:t>
-            </a:r>
-          </a:p>
-          <a:p>
-            <a:pPr>
-              <a:spcBef>
-                <a:spcPts val="800"/>
-              </a:spcBef>
-              <a:defRPr sz="1800">
-                <a:solidFill>
-                  <a:srgbClr val="F0F4F8"/>
-                </a:solidFill>
-              </a:defRPr>
-            </a:pPr>
-          </a:p>
-          <a:p>
-            <a:pPr>
-              <a:spcBef>
-                <a:spcPts val="2000"/>
-              </a:spcBef>
-              <a:defRPr sz="2400" b="1">
+                <a:spcPts val="600"/>
+              </a:spcBef>
+            </a:pPr>
+            <a:r>
+              <a:rPr sz="1600" b="0">
+                <a:solidFill>
+                  <a:srgbClr val="F0F4F8"/>
+                </a:solidFill>
+              </a:rPr>
+              <a:t>  Convierte números hablados a dígitos:</a:t>
+            </a:r>
+          </a:p>
+          <a:p>
+            <a:pPr>
+              <a:spcBef>
+                <a:spcPts val="400"/>
+              </a:spcBef>
+            </a:pPr>
+            <a:r>
+              <a:rPr sz="1400" b="0">
                 <a:solidFill>
                   <a:srgbClr val="00D084"/>
                 </a:solidFill>
-              </a:defRPr>
-            </a:pPr>
-            <a:r>
+              </a:rPr>
+              <a:t>'cero uno uno cero uno nueve' → '011019'</a:t>
+            </a:r>
+          </a:p>
+          <a:p>
+            <a:pPr>
+              <a:spcBef>
+                <a:spcPts val="600"/>
+              </a:spcBef>
+            </a:pPr>
+            <a:r>
+              <a:rPr sz="1600" b="0">
+                <a:solidFill>
+                  <a:srgbClr val="F0F4F8"/>
+                </a:solidFill>
+              </a:rPr>
+              <a:t>  Elimina ruido: 'sku', 'codigo', 'busca', artículos</a:t>
+            </a:r>
+          </a:p>
+          <a:p>
+            <a:pPr>
+              <a:spcBef>
+                <a:spcPts val="600"/>
+              </a:spcBef>
+            </a:pPr>
+            <a:r>
+              <a:rPr sz="1600" b="0">
+                <a:solidFill>
+                  <a:srgbClr val="F0F4F8"/>
+                </a:solidFill>
+              </a:rPr>
+              <a:t>  Quita tildes y puntuación</a:t>
+            </a:r>
+          </a:p>
+          <a:p>
+            <a:pPr>
+              <a:spcBef>
+                <a:spcPts val="600"/>
+              </a:spcBef>
+            </a:pPr>
+            <a:r>
+              <a:rPr sz="1600" b="0">
+                <a:solidFill>
+                  <a:srgbClr val="F0F4F8"/>
+                </a:solidFill>
+              </a:rPr>
+              <a:t>  Si todo son dígitos → SKU/EAN directo</a:t>
+            </a:r>
+          </a:p>
+          <a:p>
+            <a:pPr>
+              <a:spcBef>
+                <a:spcPts val="600"/>
+              </a:spcBef>
+            </a:pPr>
+            <a:r>
+              <a:rPr sz="1600" b="0">
+                <a:solidFill>
+                  <a:srgbClr val="F0F4F8"/>
+                </a:solidFill>
+              </a:rPr>
+              <a:t>  Si es texto → búsqueda fuzzy por palabras</a:t>
+            </a:r>
+          </a:p>
+          <a:p>
+            <a:pPr>
+              <a:spcBef>
+                <a:spcPts val="600"/>
+              </a:spcBef>
+            </a:pPr>
+          </a:p>
+          <a:p>
+            <a:pPr>
+              <a:spcBef>
+                <a:spcPts val="1600"/>
+              </a:spcBef>
+            </a:pPr>
+            <a:r>
+              <a:rPr sz="2000" b="1">
+                <a:solidFill>
+                  <a:srgbClr val="00D084"/>
+                </a:solidFill>
+              </a:rPr>
               <a:t>Ejemplos</a:t>
             </a:r>
           </a:p>
           <a:p>
             <a:pPr>
               <a:spcBef>
-                <a:spcPts val="800"/>
-              </a:spcBef>
-              <a:defRPr sz="1800">
-                <a:solidFill>
-                  <a:srgbClr val="F0F4F8"/>
-                </a:solidFill>
-              </a:defRPr>
-            </a:pPr>
-            <a:r>
-              <a:t>'buscar tijera vinifan' → busca 'tijera vinifan'</a:t>
-            </a:r>
-          </a:p>
-          <a:p>
-            <a:pPr>
-              <a:spcBef>
-                <a:spcPts val="800"/>
-              </a:spcBef>
-              <a:defRPr sz="1800">
-                <a:solidFill>
-                  <a:srgbClr val="F0F4F8"/>
-                </a:solidFill>
-              </a:defRPr>
-            </a:pPr>
-            <a:r>
-              <a:t>'sku cero uno uno cero uno nueve' → busca '011019'</a:t>
+                <a:spcPts val="600"/>
+              </a:spcBef>
+            </a:pPr>
+            <a:r>
+              <a:rPr sz="1600" b="0">
+                <a:solidFill>
+                  <a:srgbClr val="F0F4F8"/>
+                </a:solidFill>
+              </a:rPr>
+              <a:t>  'buscar tijera vinifan' → busca 'tijera vinifan'</a:t>
+            </a:r>
+          </a:p>
+          <a:p>
+            <a:pPr>
+              <a:spcBef>
+                <a:spcPts val="600"/>
+              </a:spcBef>
+            </a:pPr>
+            <a:r>
+              <a:rPr sz="1600" b="0">
+                <a:solidFill>
+                  <a:srgbClr val="F0F4F8"/>
+                </a:solidFill>
+              </a:rPr>
+              <a:t>  'sku cero uno uno cero uno nueve' → busca '011019'</a:t>
             </a:r>
           </a:p>
         </p:txBody>
@@ -4670,8 +4627,8 @@
         </p:nvSpPr>
         <p:spPr>
           <a:xfrm>
-            <a:off x="457200" y="2926080"/>
-            <a:ext cx="1828800" cy="73152"/>
+            <a:off x="457200" y="2743200"/>
+            <a:ext cx="1828800" cy="54864"/>
           </a:xfrm>
           <a:prstGeom prst="rect">
             <a:avLst/>
@@ -4713,7 +4670,7 @@
         </p:nvSpPr>
         <p:spPr>
           <a:xfrm>
-            <a:off x="457200" y="2560320"/>
+            <a:off x="457200" y="2377440"/>
             <a:ext cx="10972800" cy="914400"/>
           </a:xfrm>
           <a:prstGeom prst="rect">
@@ -4727,14 +4684,12 @@
           </a:bodyPr>
           <a:lstStyle/>
           <a:p>
-            <a:pPr>
-              <a:defRPr sz="4000" b="1">
-                <a:solidFill>
-                  <a:srgbClr val="F0F4F8"/>
-                </a:solidFill>
-              </a:defRPr>
-            </a:pPr>
-            <a:r>
+            <a:r>
+              <a:rPr sz="4000" b="1">
+                <a:solidFill>
+                  <a:srgbClr val="F0F4F8"/>
+                </a:solidFill>
+              </a:rPr>
               <a:t>Reportes Exportables</a:t>
             </a:r>
           </a:p>
@@ -4809,8 +4764,8 @@
         </p:nvSpPr>
         <p:spPr>
           <a:xfrm>
-            <a:off x="457200" y="365760"/>
-            <a:ext cx="11277295" cy="731520"/>
+            <a:off x="457200" y="274320"/>
+            <a:ext cx="11277295" cy="640080"/>
           </a:xfrm>
           <a:prstGeom prst="rect">
             <a:avLst/>
@@ -4823,14 +4778,12 @@
           </a:bodyPr>
           <a:lstStyle/>
           <a:p>
-            <a:pPr>
-              <a:defRPr sz="3200" b="1">
-                <a:solidFill>
-                  <a:srgbClr val="F0F4F8"/>
-                </a:solidFill>
-              </a:defRPr>
-            </a:pPr>
-            <a:r>
+            <a:r>
+              <a:rPr sz="2800" b="1">
+                <a:solidFill>
+                  <a:srgbClr val="F0F4F8"/>
+                </a:solidFill>
+              </a:rPr>
               <a:t>Tipos de Reporte</a:t>
             </a:r>
           </a:p>
@@ -4844,8 +4797,8 @@
         </p:nvSpPr>
         <p:spPr>
           <a:xfrm>
-            <a:off x="457200" y="1280160"/>
-            <a:ext cx="11277295" cy="5029200"/>
+            <a:off x="457200" y="1097280"/>
+            <a:ext cx="11277295" cy="5303520"/>
           </a:xfrm>
           <a:prstGeom prst="rect">
             <a:avLst/>
@@ -4860,204 +4813,194 @@
           <a:p>
             <a:pPr>
               <a:spcBef>
-                <a:spcPts val="2000"/>
-              </a:spcBef>
-              <a:defRPr sz="2400" b="1">
+                <a:spcPts val="1600"/>
+              </a:spcBef>
+            </a:pPr>
+            <a:r>
+              <a:rPr sz="2000" b="1">
                 <a:solidFill>
                   <a:srgbClr val="00D084"/>
                 </a:solidFill>
-              </a:defRPr>
-            </a:pPr>
-            <a:r>
+              </a:rPr>
               <a:t>Reporte Completo (Pulso)</a:t>
             </a:r>
           </a:p>
           <a:p>
             <a:pPr>
               <a:spcBef>
-                <a:spcPts val="800"/>
-              </a:spcBef>
-              <a:defRPr sz="1800">
-                <a:solidFill>
-                  <a:srgbClr val="F0F4F8"/>
-                </a:solidFill>
-              </a:defRPr>
-            </a:pPr>
-            <a:r>
-              <a:t>Hoja Resumen: KPIs, totales por categoría y línea</a:t>
-            </a:r>
-          </a:p>
-          <a:p>
-            <a:pPr>
-              <a:spcBef>
-                <a:spcPts val="800"/>
-              </a:spcBef>
-              <a:defRPr sz="1800">
-                <a:solidFill>
-                  <a:srgbClr val="F0F4F8"/>
-                </a:solidFill>
-              </a:defRPr>
-            </a:pPr>
-            <a:r>
-              <a:t>Hojas por línea: datos detallados agrupados</a:t>
-            </a:r>
-          </a:p>
-          <a:p>
-            <a:pPr>
-              <a:spcBef>
-                <a:spcPts val="800"/>
-              </a:spcBef>
-              <a:defRPr sz="1800">
-                <a:solidFill>
-                  <a:srgbClr val="F0F4F8"/>
-                </a:solidFill>
-              </a:defRPr>
-            </a:pPr>
-            <a:r>
-              <a:t>Hoja Sin Catálogo: SKUs sin estado de línea</a:t>
-            </a:r>
-          </a:p>
-          <a:p>
-            <a:pPr>
-              <a:spcBef>
-                <a:spcPts val="800"/>
-              </a:spcBef>
-              <a:defRPr sz="1800">
-                <a:solidFill>
-                  <a:srgbClr val="F0F4F8"/>
-                </a:solidFill>
-              </a:defRPr>
-            </a:pPr>
-            <a:r>
-              <a:t>Opciones: incluir inspección (121), incluir secundarios</a:t>
-            </a:r>
-          </a:p>
-          <a:p>
-            <a:pPr>
-              <a:spcBef>
-                <a:spcPts val="800"/>
-              </a:spcBef>
-              <a:defRPr sz="1800">
-                <a:solidFill>
-                  <a:srgbClr val="F0F4F8"/>
-                </a:solidFill>
-              </a:defRPr>
-            </a:pPr>
-          </a:p>
-          <a:p>
-            <a:pPr>
-              <a:spcBef>
-                <a:spcPts val="2000"/>
-              </a:spcBef>
-              <a:defRPr sz="2400" b="1">
+                <a:spcPts val="600"/>
+              </a:spcBef>
+            </a:pPr>
+            <a:r>
+              <a:rPr sz="1600" b="0">
+                <a:solidFill>
+                  <a:srgbClr val="F0F4F8"/>
+                </a:solidFill>
+              </a:rPr>
+              <a:t>  Hoja Resumen: KPIs, totales por categoría y línea</a:t>
+            </a:r>
+          </a:p>
+          <a:p>
+            <a:pPr>
+              <a:spcBef>
+                <a:spcPts val="600"/>
+              </a:spcBef>
+            </a:pPr>
+            <a:r>
+              <a:rPr sz="1600" b="0">
+                <a:solidFill>
+                  <a:srgbClr val="F0F4F8"/>
+                </a:solidFill>
+              </a:rPr>
+              <a:t>  Hojas por línea: datos detallados agrupados</a:t>
+            </a:r>
+          </a:p>
+          <a:p>
+            <a:pPr>
+              <a:spcBef>
+                <a:spcPts val="600"/>
+              </a:spcBef>
+            </a:pPr>
+            <a:r>
+              <a:rPr sz="1600" b="0">
+                <a:solidFill>
+                  <a:srgbClr val="F0F4F8"/>
+                </a:solidFill>
+              </a:rPr>
+              <a:t>  Hoja Sin Catálogo: SKUs sin estado de línea</a:t>
+            </a:r>
+          </a:p>
+          <a:p>
+            <a:pPr>
+              <a:spcBef>
+                <a:spcPts val="600"/>
+              </a:spcBef>
+            </a:pPr>
+            <a:r>
+              <a:rPr sz="1600" b="0">
+                <a:solidFill>
+                  <a:srgbClr val="F0F4F8"/>
+                </a:solidFill>
+              </a:rPr>
+              <a:t>  Opciones: incluir inspección (121), incluir secundarios</a:t>
+            </a:r>
+          </a:p>
+          <a:p>
+            <a:pPr>
+              <a:spcBef>
+                <a:spcPts val="600"/>
+              </a:spcBef>
+            </a:pPr>
+          </a:p>
+          <a:p>
+            <a:pPr>
+              <a:spcBef>
+                <a:spcPts val="1600"/>
+              </a:spcBef>
+            </a:pPr>
+            <a:r>
+              <a:rPr sz="2000" b="1">
                 <a:solidFill>
                   <a:srgbClr val="00D084"/>
                 </a:solidFill>
-              </a:defRPr>
-            </a:pPr>
-            <a:r>
+              </a:rPr>
               <a:t>Reporte de Estado</a:t>
             </a:r>
           </a:p>
           <a:p>
             <a:pPr>
               <a:spcBef>
-                <a:spcPts val="800"/>
-              </a:spcBef>
-              <a:defRPr sz="1800">
-                <a:solidFill>
-                  <a:srgbClr val="F0F4F8"/>
-                </a:solidFill>
-              </a:defRPr>
-            </a:pPr>
-            <a:r>
-              <a:t>ConStock: SKUs con bx &gt;= 10</a:t>
-            </a:r>
-          </a:p>
-          <a:p>
-            <a:pPr>
-              <a:spcBef>
-                <a:spcPts val="800"/>
-              </a:spcBef>
-              <a:defRPr sz="1800">
-                <a:solidFill>
-                  <a:srgbClr val="F0F4F8"/>
-                </a:solidFill>
-              </a:defRPr>
-            </a:pPr>
-            <a:r>
-              <a:t>BajoStock: SKUs con 1 &lt;= bx &lt; 10</a:t>
-            </a:r>
-          </a:p>
-          <a:p>
-            <a:pPr>
-              <a:spcBef>
-                <a:spcPts val="800"/>
-              </a:spcBef>
-              <a:defRPr sz="1800">
-                <a:solidFill>
-                  <a:srgbClr val="F0F4F8"/>
-                </a:solidFill>
-              </a:defRPr>
-            </a:pPr>
-            <a:r>
-              <a:t>SinStock: SKUs con bx = 0 (agotados)</a:t>
-            </a:r>
-          </a:p>
-          <a:p>
-            <a:pPr>
-              <a:spcBef>
-                <a:spcPts val="800"/>
-              </a:spcBef>
-              <a:defRPr sz="1800">
-                <a:solidFill>
-                  <a:srgbClr val="F0F4F8"/>
-                </a:solidFill>
-              </a:defRPr>
-            </a:pPr>
-            <a:r>
-              <a:t>SinCatalogo: SKUs fuera del catálogo maestro</a:t>
-            </a:r>
-          </a:p>
-          <a:p>
-            <a:pPr>
-              <a:spcBef>
-                <a:spcPts val="800"/>
-              </a:spcBef>
-              <a:defRPr sz="1800">
-                <a:solidFill>
-                  <a:srgbClr val="F0F4F8"/>
-                </a:solidFill>
-              </a:defRPr>
-            </a:pPr>
-          </a:p>
-          <a:p>
-            <a:pPr>
-              <a:spcBef>
-                <a:spcPts val="2000"/>
-              </a:spcBef>
-              <a:defRPr sz="2400" b="1">
+                <a:spcPts val="600"/>
+              </a:spcBef>
+            </a:pPr>
+            <a:r>
+              <a:rPr sz="1600" b="0">
+                <a:solidFill>
+                  <a:srgbClr val="F0F4F8"/>
+                </a:solidFill>
+              </a:rPr>
+              <a:t>  ConStock: SKUs con bx &gt;= 10</a:t>
+            </a:r>
+          </a:p>
+          <a:p>
+            <a:pPr>
+              <a:spcBef>
+                <a:spcPts val="600"/>
+              </a:spcBef>
+            </a:pPr>
+            <a:r>
+              <a:rPr sz="1600" b="0">
+                <a:solidFill>
+                  <a:srgbClr val="F0F4F8"/>
+                </a:solidFill>
+              </a:rPr>
+              <a:t>  BajoStock: SKUs con 1 &lt;= bx &lt; 10</a:t>
+            </a:r>
+          </a:p>
+          <a:p>
+            <a:pPr>
+              <a:spcBef>
+                <a:spcPts val="600"/>
+              </a:spcBef>
+            </a:pPr>
+            <a:r>
+              <a:rPr sz="1600" b="0">
+                <a:solidFill>
+                  <a:srgbClr val="F0F4F8"/>
+                </a:solidFill>
+              </a:rPr>
+              <a:t>  SinStock: SKUs con bx = 0 (agotados)</a:t>
+            </a:r>
+          </a:p>
+          <a:p>
+            <a:pPr>
+              <a:spcBef>
+                <a:spcPts val="600"/>
+              </a:spcBef>
+            </a:pPr>
+            <a:r>
+              <a:rPr sz="1600" b="0">
+                <a:solidFill>
+                  <a:srgbClr val="F0F4F8"/>
+                </a:solidFill>
+              </a:rPr>
+              <a:t>  SinCatalogo: SKUs fuera del catálogo maestro</a:t>
+            </a:r>
+          </a:p>
+          <a:p>
+            <a:pPr>
+              <a:spcBef>
+                <a:spcPts val="600"/>
+              </a:spcBef>
+            </a:pPr>
+          </a:p>
+          <a:p>
+            <a:pPr>
+              <a:spcBef>
+                <a:spcPts val="1600"/>
+              </a:spcBef>
+            </a:pPr>
+            <a:r>
+              <a:rPr sz="2000" b="1">
                 <a:solidFill>
                   <a:srgbClr val="00D084"/>
                 </a:solidFill>
-              </a:defRPr>
-            </a:pPr>
-            <a:r>
+              </a:rPr>
               <a:t>Columnas del Reporte</a:t>
             </a:r>
           </a:p>
           <a:p>
             <a:pPr>
               <a:spcBef>
-                <a:spcPts val="800"/>
-              </a:spcBef>
-              <a:defRPr sz="1800">
-                <a:solidFill>
-                  <a:srgbClr val="F0F4F8"/>
-                </a:solidFill>
-              </a:defRPr>
-            </a:pPr>
-            <a:r>
+                <a:spcPts val="600"/>
+              </a:spcBef>
+            </a:pPr>
+            <a:r>
+              <a:rPr sz="1600" b="0">
+                <a:solidFill>
+                  <a:srgbClr val="F0F4F8"/>
+                </a:solidFill>
+              </a:rPr>
               <a:t>SKU · Nombre · Línea · Categoría · Cajas · Disponible venta · Estado</a:t>
             </a:r>
           </a:p>
@@ -5132,8 +5075,8 @@
         </p:nvSpPr>
         <p:spPr>
           <a:xfrm>
-            <a:off x="457200" y="365760"/>
-            <a:ext cx="11277295" cy="731520"/>
+            <a:off x="457200" y="274320"/>
+            <a:ext cx="11277295" cy="640080"/>
           </a:xfrm>
           <a:prstGeom prst="rect">
             <a:avLst/>
@@ -5146,14 +5089,12 @@
           </a:bodyPr>
           <a:lstStyle/>
           <a:p>
-            <a:pPr>
-              <a:defRPr sz="3200" b="1">
-                <a:solidFill>
-                  <a:srgbClr val="F0F4F8"/>
-                </a:solidFill>
-              </a:defRPr>
-            </a:pPr>
-            <a:r>
+            <a:r>
+              <a:rPr sz="2800" b="1">
+                <a:solidFill>
+                  <a:srgbClr val="F0F4F8"/>
+                </a:solidFill>
+              </a:rPr>
               <a:t>Sistema de Alertas</a:t>
             </a:r>
           </a:p>
@@ -5167,8 +5108,8 @@
         </p:nvSpPr>
         <p:spPr>
           <a:xfrm>
-            <a:off x="457200" y="1280160"/>
-            <a:ext cx="11277295" cy="5029200"/>
+            <a:off x="457200" y="1097280"/>
+            <a:ext cx="11277295" cy="5303520"/>
           </a:xfrm>
           <a:prstGeom prst="rect">
             <a:avLst/>
@@ -5183,175 +5124,165 @@
           <a:p>
             <a:pPr>
               <a:spcBef>
-                <a:spcPts val="2000"/>
-              </a:spcBef>
-              <a:defRPr sz="2400" b="1">
+                <a:spcPts val="1600"/>
+              </a:spcBef>
+            </a:pPr>
+            <a:r>
+              <a:rPr sz="2000" b="1">
                 <a:solidFill>
                   <a:srgbClr val="00D084"/>
                 </a:solidFill>
-              </a:defRPr>
-            </a:pPr>
-            <a:r>
+              </a:rPr>
               <a:t>Tipos de Alerta</a:t>
             </a:r>
           </a:p>
           <a:p>
             <a:pPr>
               <a:spcBef>
-                <a:spcPts val="800"/>
-              </a:spcBef>
-              <a:defRPr sz="1800">
-                <a:solidFill>
-                  <a:srgbClr val="F0F4F8"/>
-                </a:solidFill>
-              </a:defRPr>
-            </a:pPr>
-            <a:r>
-              <a:t>Crítico (rojo): bx = 0, SKU agotado</a:t>
-            </a:r>
-          </a:p>
-          <a:p>
-            <a:pPr>
-              <a:spcBef>
-                <a:spcPts val="800"/>
-              </a:spcBef>
-              <a:defRPr sz="1800">
-                <a:solidFill>
-                  <a:srgbClr val="F0F4F8"/>
-                </a:solidFill>
-              </a:defRPr>
-            </a:pPr>
-            <a:r>
-              <a:t>Advertencia (amarillo): 1 &lt;= bx &lt; 10, stock bajo</a:t>
-            </a:r>
-          </a:p>
-          <a:p>
-            <a:pPr>
-              <a:spcBef>
-                <a:spcPts val="800"/>
-              </a:spcBef>
-              <a:defRPr sz="1800">
-                <a:solidFill>
-                  <a:srgbClr val="F0F4F8"/>
-                </a:solidFill>
-              </a:defRPr>
-            </a:pPr>
-          </a:p>
-          <a:p>
-            <a:pPr>
-              <a:spcBef>
-                <a:spcPts val="2000"/>
-              </a:spcBef>
-              <a:defRPr sz="2400" b="1">
+                <a:spcPts val="600"/>
+              </a:spcBef>
+            </a:pPr>
+            <a:r>
+              <a:rPr sz="1600" b="0">
+                <a:solidFill>
+                  <a:srgbClr val="F0F4F8"/>
+                </a:solidFill>
+              </a:rPr>
+              <a:t>  Crítico (rojo): bx = 0, SKU agotado</a:t>
+            </a:r>
+          </a:p>
+          <a:p>
+            <a:pPr>
+              <a:spcBef>
+                <a:spcPts val="600"/>
+              </a:spcBef>
+            </a:pPr>
+            <a:r>
+              <a:rPr sz="1600" b="0">
+                <a:solidFill>
+                  <a:srgbClr val="F0F4F8"/>
+                </a:solidFill>
+              </a:rPr>
+              <a:t>  Advertencia (amarillo): 1 &lt;= bx &lt; 10, stock bajo</a:t>
+            </a:r>
+          </a:p>
+          <a:p>
+            <a:pPr>
+              <a:spcBef>
+                <a:spcPts val="600"/>
+              </a:spcBef>
+            </a:pPr>
+          </a:p>
+          <a:p>
+            <a:pPr>
+              <a:spcBef>
+                <a:spcPts val="1600"/>
+              </a:spcBef>
+            </a:pPr>
+            <a:r>
+              <a:rPr sz="2000" b="1">
                 <a:solidFill>
                   <a:srgbClr val="00D084"/>
                 </a:solidFill>
-              </a:defRPr>
-            </a:pPr>
-            <a:r>
+              </a:rPr>
               <a:t>Ordenamiento</a:t>
             </a:r>
           </a:p>
           <a:p>
             <a:pPr>
               <a:spcBef>
-                <a:spcPts val="800"/>
-              </a:spcBef>
-              <a:defRPr sz="1800">
-                <a:solidFill>
-                  <a:srgbClr val="F0F4F8"/>
-                </a:solidFill>
-              </a:defRPr>
-            </a:pPr>
-            <a:r>
-              <a:t>Primero críticos, luego advertencias</a:t>
-            </a:r>
-          </a:p>
-          <a:p>
-            <a:pPr>
-              <a:spcBef>
-                <a:spcPts val="800"/>
-              </a:spcBef>
-              <a:defRPr sz="1800">
-                <a:solidFill>
-                  <a:srgbClr val="F0F4F8"/>
-                </a:solidFill>
-              </a:defRPr>
-            </a:pPr>
-            <a:r>
-              <a:t>Dentro de cada tipo: ordenado por bx ascendente</a:t>
-            </a:r>
-          </a:p>
-          <a:p>
-            <a:pPr>
-              <a:spcBef>
-                <a:spcPts val="800"/>
-              </a:spcBef>
-              <a:defRPr sz="1800">
-                <a:solidFill>
-                  <a:srgbClr val="F0F4F8"/>
-                </a:solidFill>
-              </a:defRPr>
-            </a:pPr>
-            <a:r>
-              <a:t>Solo SKUs con estado_linea definido (catálogo)</a:t>
-            </a:r>
-          </a:p>
-          <a:p>
-            <a:pPr>
-              <a:spcBef>
-                <a:spcPts val="800"/>
-              </a:spcBef>
-              <a:defRPr sz="1800">
-                <a:solidFill>
-                  <a:srgbClr val="F0F4F8"/>
-                </a:solidFill>
-              </a:defRPr>
-            </a:pPr>
-          </a:p>
-          <a:p>
-            <a:pPr>
-              <a:spcBef>
-                <a:spcPts val="2000"/>
-              </a:spcBef>
-              <a:defRPr sz="2400" b="1">
+                <a:spcPts val="600"/>
+              </a:spcBef>
+            </a:pPr>
+            <a:r>
+              <a:rPr sz="1600" b="0">
+                <a:solidFill>
+                  <a:srgbClr val="F0F4F8"/>
+                </a:solidFill>
+              </a:rPr>
+              <a:t>  Primero críticos, luego advertencias</a:t>
+            </a:r>
+          </a:p>
+          <a:p>
+            <a:pPr>
+              <a:spcBef>
+                <a:spcPts val="600"/>
+              </a:spcBef>
+            </a:pPr>
+            <a:r>
+              <a:rPr sz="1600" b="0">
+                <a:solidFill>
+                  <a:srgbClr val="F0F4F8"/>
+                </a:solidFill>
+              </a:rPr>
+              <a:t>  Dentro de cada tipo: ordenado por bx ascendente</a:t>
+            </a:r>
+          </a:p>
+          <a:p>
+            <a:pPr>
+              <a:spcBef>
+                <a:spcPts val="600"/>
+              </a:spcBef>
+            </a:pPr>
+            <a:r>
+              <a:rPr sz="1600" b="0">
+                <a:solidFill>
+                  <a:srgbClr val="F0F4F8"/>
+                </a:solidFill>
+              </a:rPr>
+              <a:t>  Solo SKUs con estado_linea definido (catálogo)</a:t>
+            </a:r>
+          </a:p>
+          <a:p>
+            <a:pPr>
+              <a:spcBef>
+                <a:spcPts val="600"/>
+              </a:spcBef>
+            </a:pPr>
+          </a:p>
+          <a:p>
+            <a:pPr>
+              <a:spcBef>
+                <a:spcPts val="1600"/>
+              </a:spcBef>
+            </a:pPr>
+            <a:r>
+              <a:rPr sz="2000" b="1">
                 <a:solidFill>
                   <a:srgbClr val="00D084"/>
                 </a:solidFill>
-              </a:defRPr>
-            </a:pPr>
-            <a:r>
+              </a:rPr>
               <a:t>Notificación</a:t>
             </a:r>
           </a:p>
           <a:p>
             <a:pPr>
               <a:spcBef>
-                <a:spcPts val="800"/>
-              </a:spcBef>
-              <a:defRPr sz="1800">
-                <a:solidFill>
-                  <a:srgbClr val="F0F4F8"/>
-                </a:solidFill>
-              </a:defRPr>
-            </a:pPr>
-            <a:r>
-              <a:t>Badge en navegación con contador de alertas críticas</a:t>
-            </a:r>
-          </a:p>
-          <a:p>
-            <a:pPr>
-              <a:spcBef>
-                <a:spcPts val="800"/>
-              </a:spcBef>
-              <a:defRPr sz="1800">
-                <a:solidFill>
-                  <a:srgbClr val="F0F4F8"/>
-                </a:solidFill>
-              </a:defRPr>
-            </a:pPr>
-            <a:r>
-              <a:t>Panel dedicado con filtros: Todos, Sin Stock, Bajo Stock</a:t>
+                <a:spcPts val="600"/>
+              </a:spcBef>
+            </a:pPr>
+            <a:r>
+              <a:rPr sz="1600" b="0">
+                <a:solidFill>
+                  <a:srgbClr val="F0F4F8"/>
+                </a:solidFill>
+              </a:rPr>
+              <a:t>  Badge en navegación con contador de alertas críticas</a:t>
+            </a:r>
+          </a:p>
+          <a:p>
+            <a:pPr>
+              <a:spcBef>
+                <a:spcPts val="600"/>
+              </a:spcBef>
+            </a:pPr>
+            <a:r>
+              <a:rPr sz="1600" b="0">
+                <a:solidFill>
+                  <a:srgbClr val="F0F4F8"/>
+                </a:solidFill>
+              </a:rPr>
+              <a:t>  Panel dedicado con filtros: Todos, Sin Stock, Bajo Stock</a:t>
             </a:r>
           </a:p>
         </p:txBody>
@@ -5425,8 +5356,8 @@
         </p:nvSpPr>
         <p:spPr>
           <a:xfrm>
-            <a:off x="457200" y="2926080"/>
-            <a:ext cx="1828800" cy="73152"/>
+            <a:off x="457200" y="2743200"/>
+            <a:ext cx="1828800" cy="54864"/>
           </a:xfrm>
           <a:prstGeom prst="rect">
             <a:avLst/>
@@ -5468,7 +5399,7 @@
         </p:nvSpPr>
         <p:spPr>
           <a:xfrm>
-            <a:off x="457200" y="2560320"/>
+            <a:off x="457200" y="2377440"/>
             <a:ext cx="10972800" cy="914400"/>
           </a:xfrm>
           <a:prstGeom prst="rect">
@@ -5482,14 +5413,12 @@
           </a:bodyPr>
           <a:lstStyle/>
           <a:p>
-            <a:pPr>
-              <a:defRPr sz="4000" b="1">
-                <a:solidFill>
-                  <a:srgbClr val="F0F4F8"/>
-                </a:solidFill>
-              </a:defRPr>
-            </a:pPr>
-            <a:r>
+            <a:r>
+              <a:rPr sz="4000" b="1">
+                <a:solidFill>
+                  <a:srgbClr val="F0F4F8"/>
+                </a:solidFill>
+              </a:rPr>
               <a:t>Seguridad y Acceso</a:t>
             </a:r>
           </a:p>
@@ -5564,8 +5493,8 @@
         </p:nvSpPr>
         <p:spPr>
           <a:xfrm>
-            <a:off x="457200" y="365760"/>
-            <a:ext cx="11277295" cy="731520"/>
+            <a:off x="457200" y="274320"/>
+            <a:ext cx="11277295" cy="640080"/>
           </a:xfrm>
           <a:prstGeom prst="rect">
             <a:avLst/>
@@ -5578,14 +5507,12 @@
           </a:bodyPr>
           <a:lstStyle/>
           <a:p>
-            <a:pPr>
-              <a:defRPr sz="3200" b="1">
-                <a:solidFill>
-                  <a:srgbClr val="F0F4F8"/>
-                </a:solidFill>
-              </a:defRPr>
-            </a:pPr>
-            <a:r>
+            <a:r>
+              <a:rPr sz="2800" b="1">
+                <a:solidFill>
+                  <a:srgbClr val="F0F4F8"/>
+                </a:solidFill>
+              </a:rPr>
               <a:t>Autenticación</a:t>
             </a:r>
           </a:p>
@@ -5599,8 +5526,8 @@
         </p:nvSpPr>
         <p:spPr>
           <a:xfrm>
-            <a:off x="457200" y="1280160"/>
-            <a:ext cx="11277295" cy="5029200"/>
+            <a:off x="457200" y="1097280"/>
+            <a:ext cx="11277295" cy="5303520"/>
           </a:xfrm>
           <a:prstGeom prst="rect">
             <a:avLst/>
@@ -5615,205 +5542,195 @@
           <a:p>
             <a:pPr>
               <a:spcBef>
-                <a:spcPts val="2000"/>
-              </a:spcBef>
-              <a:defRPr sz="2400" b="1">
+                <a:spcPts val="1600"/>
+              </a:spcBef>
+            </a:pPr>
+            <a:r>
+              <a:rPr sz="2000" b="1">
                 <a:solidFill>
                   <a:srgbClr val="00D084"/>
                 </a:solidFill>
-              </a:defRPr>
-            </a:pPr>
-            <a:r>
+              </a:rPr>
               <a:t>Claves de Acceso</a:t>
             </a:r>
           </a:p>
           <a:p>
             <a:pPr>
               <a:spcBef>
-                <a:spcPts val="800"/>
-              </a:spcBef>
-              <a:defRPr sz="1800">
-                <a:solidFill>
-                  <a:srgbClr val="F0F4F8"/>
-                </a:solidFill>
-              </a:defRPr>
-            </a:pPr>
-            <a:r>
-              <a:t>S1_API_KEY: Administrativa (upload, catalogo, resumen)</a:t>
-            </a:r>
-          </a:p>
-          <a:p>
-            <a:pPr>
-              <a:spcBef>
-                <a:spcPts val="800"/>
-              </a:spcBef>
-              <a:defRPr sz="1800">
-                <a:solidFill>
-                  <a:srgbClr val="F0F4F8"/>
-                </a:solidFill>
-              </a:defRPr>
-            </a:pPr>
-            <a:r>
-              <a:t>S1_READ_API_KEY: Lectura para frontend estático</a:t>
-            </a:r>
-          </a:p>
-          <a:p>
-            <a:pPr>
-              <a:spcBef>
-                <a:spcPts val="800"/>
-              </a:spcBef>
-              <a:defRPr sz="1800">
-                <a:solidFill>
-                  <a:srgbClr val="F0F4F8"/>
-                </a:solidFill>
-              </a:defRPr>
-            </a:pPr>
-          </a:p>
-          <a:p>
-            <a:pPr>
-              <a:spcBef>
-                <a:spcPts val="2000"/>
-              </a:spcBef>
-              <a:defRPr sz="2400" b="1">
+                <a:spcPts val="600"/>
+              </a:spcBef>
+            </a:pPr>
+            <a:r>
+              <a:rPr sz="1600" b="0">
+                <a:solidFill>
+                  <a:srgbClr val="F0F4F8"/>
+                </a:solidFill>
+              </a:rPr>
+              <a:t>  S1_API_KEY: Administrativa (upload, catalogo, resumen)</a:t>
+            </a:r>
+          </a:p>
+          <a:p>
+            <a:pPr>
+              <a:spcBef>
+                <a:spcPts val="600"/>
+              </a:spcBef>
+            </a:pPr>
+            <a:r>
+              <a:rPr sz="1600" b="0">
+                <a:solidFill>
+                  <a:srgbClr val="F0F4F8"/>
+                </a:solidFill>
+              </a:rPr>
+              <a:t>  S1_READ_API_KEY: Lectura para frontend estático</a:t>
+            </a:r>
+          </a:p>
+          <a:p>
+            <a:pPr>
+              <a:spcBef>
+                <a:spcPts val="600"/>
+              </a:spcBef>
+            </a:pPr>
+          </a:p>
+          <a:p>
+            <a:pPr>
+              <a:spcBef>
+                <a:spcPts val="1600"/>
+              </a:spcBef>
+            </a:pPr>
+            <a:r>
+              <a:rPr sz="2000" b="1">
                 <a:solidFill>
                   <a:srgbClr val="00D084"/>
                 </a:solidFill>
-              </a:defRPr>
-            </a:pPr>
-            <a:r>
+              </a:rPr>
               <a:t>Endpoints Protegidos</a:t>
             </a:r>
           </a:p>
           <a:p>
             <a:pPr>
               <a:spcBef>
-                <a:spcPts val="800"/>
-              </a:spcBef>
-              <a:defRPr sz="1800">
-                <a:solidFill>
-                  <a:srgbClr val="F0F4F8"/>
-                </a:solidFill>
-              </a:defRPr>
-            </a:pPr>
-            <a:r>
-              <a:t>GET /api/v1/stock → requiere S1_READ_API_KEY</a:t>
-            </a:r>
-          </a:p>
-          <a:p>
-            <a:pPr>
-              <a:spcBef>
-                <a:spcPts val="800"/>
-              </a:spcBef>
-              <a:defRPr sz="1800">
-                <a:solidFill>
-                  <a:srgbClr val="F0F4F8"/>
-                </a:solidFill>
-              </a:defRPr>
-            </a:pPr>
-            <a:r>
-              <a:t>GET /api/v1/health → requiere S1_READ_API_KEY</a:t>
-            </a:r>
-          </a:p>
-          <a:p>
-            <a:pPr>
-              <a:spcBef>
-                <a:spcPts val="800"/>
-              </a:spcBef>
-              <a:defRPr sz="1800">
-                <a:solidFill>
-                  <a:srgbClr val="F0F4F8"/>
-                </a:solidFill>
-              </a:defRPr>
-            </a:pPr>
-            <a:r>
-              <a:t>POST /api/v1/catalog/upload → requiere S1_API_KEY</a:t>
-            </a:r>
-          </a:p>
-          <a:p>
-            <a:pPr>
-              <a:spcBef>
-                <a:spcPts val="800"/>
-              </a:spcBef>
-              <a:defRPr sz="1800">
-                <a:solidFill>
-                  <a:srgbClr val="F0F4F8"/>
-                </a:solidFill>
-              </a:defRPr>
-            </a:pPr>
-            <a:r>
-              <a:t>GET /api/v1/resumen → requiere S1_API_KEY</a:t>
-            </a:r>
-          </a:p>
-          <a:p>
-            <a:pPr>
-              <a:spcBef>
-                <a:spcPts val="800"/>
-              </a:spcBef>
-              <a:defRPr sz="1800">
-                <a:solidFill>
-                  <a:srgbClr val="F0F4F8"/>
-                </a:solidFill>
-              </a:defRPr>
-            </a:pPr>
-          </a:p>
-          <a:p>
-            <a:pPr>
-              <a:spcBef>
-                <a:spcPts val="2000"/>
-              </a:spcBef>
-              <a:defRPr sz="2400" b="1">
+                <a:spcPts val="600"/>
+              </a:spcBef>
+            </a:pPr>
+            <a:r>
+              <a:rPr sz="1600" b="0">
+                <a:solidFill>
+                  <a:srgbClr val="F0F4F8"/>
+                </a:solidFill>
+              </a:rPr>
+              <a:t>  GET /api/v1/stock → requiere S1_READ_API_KEY</a:t>
+            </a:r>
+          </a:p>
+          <a:p>
+            <a:pPr>
+              <a:spcBef>
+                <a:spcPts val="600"/>
+              </a:spcBef>
+            </a:pPr>
+            <a:r>
+              <a:rPr sz="1600" b="0">
+                <a:solidFill>
+                  <a:srgbClr val="F0F4F8"/>
+                </a:solidFill>
+              </a:rPr>
+              <a:t>  GET /api/v1/health → requiere S1_READ_API_KEY</a:t>
+            </a:r>
+          </a:p>
+          <a:p>
+            <a:pPr>
+              <a:spcBef>
+                <a:spcPts val="600"/>
+              </a:spcBef>
+            </a:pPr>
+            <a:r>
+              <a:rPr sz="1600" b="0">
+                <a:solidFill>
+                  <a:srgbClr val="F0F4F8"/>
+                </a:solidFill>
+              </a:rPr>
+              <a:t>  POST /api/v1/catalog/upload → requiere S1_API_KEY</a:t>
+            </a:r>
+          </a:p>
+          <a:p>
+            <a:pPr>
+              <a:spcBef>
+                <a:spcPts val="600"/>
+              </a:spcBef>
+            </a:pPr>
+            <a:r>
+              <a:rPr sz="1600" b="0">
+                <a:solidFill>
+                  <a:srgbClr val="F0F4F8"/>
+                </a:solidFill>
+              </a:rPr>
+              <a:t>  GET /api/v1/resumen → requiere S1_API_KEY</a:t>
+            </a:r>
+          </a:p>
+          <a:p>
+            <a:pPr>
+              <a:spcBef>
+                <a:spcPts val="600"/>
+              </a:spcBef>
+            </a:pPr>
+          </a:p>
+          <a:p>
+            <a:pPr>
+              <a:spcBef>
+                <a:spcPts val="1600"/>
+              </a:spcBef>
+            </a:pPr>
+            <a:r>
+              <a:rPr sz="2000" b="1">
                 <a:solidFill>
                   <a:srgbClr val="00D084"/>
                 </a:solidFill>
-              </a:defRPr>
-            </a:pPr>
-            <a:r>
+              </a:rPr>
               <a:t>CORS</a:t>
             </a:r>
           </a:p>
           <a:p>
             <a:pPr>
               <a:spcBef>
-                <a:spcPts val="800"/>
-              </a:spcBef>
-              <a:defRPr sz="1800">
-                <a:solidFill>
-                  <a:srgbClr val="F0F4F8"/>
-                </a:solidFill>
-              </a:defRPr>
-            </a:pPr>
-            <a:r>
-              <a:t>Permitido: https://carloscus.github.io</a:t>
-            </a:r>
-          </a:p>
-          <a:p>
-            <a:pPr>
-              <a:spcBef>
-                <a:spcPts val="800"/>
-              </a:spcBef>
-              <a:defRPr sz="1800">
-                <a:solidFill>
-                  <a:srgbClr val="F0F4F8"/>
-                </a:solidFill>
-              </a:defRPr>
-            </a:pPr>
-            <a:r>
-              <a:t>Desarrollo: http://localhost:3000, :5173</a:t>
-            </a:r>
-          </a:p>
-          <a:p>
-            <a:pPr>
-              <a:spcBef>
-                <a:spcPts val="800"/>
-              </a:spcBef>
-              <a:defRPr sz="1800">
-                <a:solidFill>
-                  <a:srgbClr val="F0F4F8"/>
-                </a:solidFill>
-              </a:defRPr>
-            </a:pPr>
-            <a:r>
-              <a:t>Rate limit: 60 requests/minute por IP</a:t>
+                <a:spcPts val="600"/>
+              </a:spcBef>
+            </a:pPr>
+            <a:r>
+              <a:rPr sz="1600" b="0">
+                <a:solidFill>
+                  <a:srgbClr val="F0F4F8"/>
+                </a:solidFill>
+              </a:rPr>
+              <a:t>  Permitido: https://carloscus.github.io</a:t>
+            </a:r>
+          </a:p>
+          <a:p>
+            <a:pPr>
+              <a:spcBef>
+                <a:spcPts val="600"/>
+              </a:spcBef>
+            </a:pPr>
+            <a:r>
+              <a:rPr sz="1600" b="0">
+                <a:solidFill>
+                  <a:srgbClr val="F0F4F8"/>
+                </a:solidFill>
+              </a:rPr>
+              <a:t>  Desarrollo: http://localhost:3000, :5173</a:t>
+            </a:r>
+          </a:p>
+          <a:p>
+            <a:pPr>
+              <a:spcBef>
+                <a:spcPts val="600"/>
+              </a:spcBef>
+            </a:pPr>
+            <a:r>
+              <a:rPr sz="1600" b="0">
+                <a:solidFill>
+                  <a:srgbClr val="F0F4F8"/>
+                </a:solidFill>
+              </a:rPr>
+              <a:t>  Rate limit: 60 requests/minute por IP</a:t>
             </a:r>
           </a:p>
         </p:txBody>
@@ -5887,8 +5804,8 @@
         </p:nvSpPr>
         <p:spPr>
           <a:xfrm>
-            <a:off x="457200" y="365760"/>
-            <a:ext cx="11277295" cy="731520"/>
+            <a:off x="457200" y="274320"/>
+            <a:ext cx="11277295" cy="640080"/>
           </a:xfrm>
           <a:prstGeom prst="rect">
             <a:avLst/>
@@ -5901,14 +5818,12 @@
           </a:bodyPr>
           <a:lstStyle/>
           <a:p>
-            <a:pPr>
-              <a:defRPr sz="3200" b="1">
-                <a:solidFill>
-                  <a:srgbClr val="F0F4F8"/>
-                </a:solidFill>
-              </a:defRPr>
-            </a:pPr>
-            <a:r>
+            <a:r>
+              <a:rPr sz="2800" b="1">
+                <a:solidFill>
+                  <a:srgbClr val="F0F4F8"/>
+                </a:solidFill>
+              </a:rPr>
               <a:t>Contenido</a:t>
             </a:r>
           </a:p>
@@ -5922,8 +5837,8 @@
         </p:nvSpPr>
         <p:spPr>
           <a:xfrm>
-            <a:off x="457200" y="1280160"/>
-            <a:ext cx="11277295" cy="5029200"/>
+            <a:off x="457200" y="1097280"/>
+            <a:ext cx="11277295" cy="5303520"/>
           </a:xfrm>
           <a:prstGeom prst="rect">
             <a:avLst/>
@@ -5938,334 +5853,314 @@
           <a:p>
             <a:pPr>
               <a:spcBef>
-                <a:spcPts val="2000"/>
-              </a:spcBef>
-              <a:defRPr sz="2400" b="1">
+                <a:spcPts val="1600"/>
+              </a:spcBef>
+            </a:pPr>
+            <a:r>
+              <a:rPr sz="2000" b="1">
                 <a:solidFill>
                   <a:srgbClr val="00D084"/>
                 </a:solidFill>
-              </a:defRPr>
-            </a:pPr>
-            <a:r>
+              </a:rPr>
               <a:t>Arquitectura del Sistema</a:t>
             </a:r>
           </a:p>
           <a:p>
             <a:pPr>
               <a:spcBef>
-                <a:spcPts val="800"/>
-              </a:spcBef>
-              <a:defRPr sz="1800">
-                <a:solidFill>
-                  <a:srgbClr val="F0F4F8"/>
-                </a:solidFill>
-              </a:defRPr>
-            </a:pPr>
-            <a:r>
-              <a:t>Frontend PWA (Lit Web Components)</a:t>
-            </a:r>
-          </a:p>
-          <a:p>
-            <a:pPr>
-              <a:spcBef>
-                <a:spcPts val="800"/>
-              </a:spcBef>
-              <a:defRPr sz="1800">
-                <a:solidFill>
-                  <a:srgbClr val="F0F4F8"/>
-                </a:solidFill>
-              </a:defRPr>
-            </a:pPr>
-            <a:r>
-              <a:t>Backend API (FastAPI + Render)</a:t>
-            </a:r>
-          </a:p>
-          <a:p>
-            <a:pPr>
-              <a:spcBef>
-                <a:spcPts val="800"/>
-              </a:spcBef>
-              <a:defRPr sz="1800">
-                <a:solidFill>
-                  <a:srgbClr val="F0F4F8"/>
-                </a:solidFill>
-              </a:defRPr>
-            </a:pPr>
-            <a:r>
-              <a:t>Flujo de datos y capas de caché</a:t>
-            </a:r>
-          </a:p>
-          <a:p>
-            <a:pPr>
-              <a:spcBef>
-                <a:spcPts val="800"/>
-              </a:spcBef>
-              <a:defRPr sz="1800">
-                <a:solidFill>
-                  <a:srgbClr val="F0F4F8"/>
-                </a:solidFill>
-              </a:defRPr>
-            </a:pPr>
-          </a:p>
-          <a:p>
-            <a:pPr>
-              <a:spcBef>
-                <a:spcPts val="2000"/>
-              </a:spcBef>
-              <a:defRPr sz="2400" b="1">
+                <a:spcPts val="600"/>
+              </a:spcBef>
+            </a:pPr>
+            <a:r>
+              <a:rPr sz="1600" b="0">
+                <a:solidFill>
+                  <a:srgbClr val="F0F4F8"/>
+                </a:solidFill>
+              </a:rPr>
+              <a:t>  Frontend PWA (Lit Web Components)</a:t>
+            </a:r>
+          </a:p>
+          <a:p>
+            <a:pPr>
+              <a:spcBef>
+                <a:spcPts val="600"/>
+              </a:spcBef>
+            </a:pPr>
+            <a:r>
+              <a:rPr sz="1600" b="0">
+                <a:solidFill>
+                  <a:srgbClr val="F0F4F8"/>
+                </a:solidFill>
+              </a:rPr>
+              <a:t>  Backend API (FastAPI + Render)</a:t>
+            </a:r>
+          </a:p>
+          <a:p>
+            <a:pPr>
+              <a:spcBef>
+                <a:spcPts val="600"/>
+              </a:spcBef>
+            </a:pPr>
+            <a:r>
+              <a:rPr sz="1600" b="0">
+                <a:solidFill>
+                  <a:srgbClr val="F0F4F8"/>
+                </a:solidFill>
+              </a:rPr>
+              <a:t>  Flujo de datos y capas de caché</a:t>
+            </a:r>
+          </a:p>
+          <a:p>
+            <a:pPr>
+              <a:spcBef>
+                <a:spcPts val="600"/>
+              </a:spcBef>
+            </a:pPr>
+          </a:p>
+          <a:p>
+            <a:pPr>
+              <a:spcBef>
+                <a:spcPts val="1600"/>
+              </a:spcBef>
+            </a:pPr>
+            <a:r>
+              <a:rPr sz="2000" b="1">
                 <a:solidFill>
                   <a:srgbClr val="00D084"/>
                 </a:solidFill>
-              </a:defRPr>
-            </a:pPr>
-            <a:r>
-              <a:t>Categorias de Negocio</a:t>
-            </a:r>
-          </a:p>
-          <a:p>
-            <a:pPr>
-              <a:spcBef>
-                <a:spcPts val="800"/>
-              </a:spcBef>
-              <a:defRPr sz="1800">
-                <a:solidFill>
-                  <a:srgbClr val="F0F4F8"/>
-                </a:solidFill>
-              </a:defRPr>
-            </a:pPr>
-            <a:r>
-              <a:t>VINIBALL, VINIFAN, REPRESENTADAS</a:t>
-            </a:r>
-          </a:p>
-          <a:p>
-            <a:pPr>
-              <a:spcBef>
-                <a:spcPts val="800"/>
-              </a:spcBef>
-              <a:defRPr sz="1800">
-                <a:solidFill>
-                  <a:srgbClr val="F0F4F8"/>
-                </a:solidFill>
-              </a:defRPr>
-            </a:pPr>
-            <a:r>
-              <a:t>Mapeo por línea de producto</a:t>
-            </a:r>
-          </a:p>
-          <a:p>
-            <a:pPr>
-              <a:spcBef>
-                <a:spcPts val="800"/>
-              </a:spcBef>
-              <a:defRPr sz="1800">
-                <a:solidFill>
-                  <a:srgbClr val="F0F4F8"/>
-                </a:solidFill>
-              </a:defRPr>
-            </a:pPr>
-          </a:p>
-          <a:p>
-            <a:pPr>
-              <a:spcBef>
-                <a:spcPts val="2000"/>
-              </a:spcBef>
-              <a:defRPr sz="2400" b="1">
+              </a:rPr>
+              <a:t>Categorías de Negocio</a:t>
+            </a:r>
+          </a:p>
+          <a:p>
+            <a:pPr>
+              <a:spcBef>
+                <a:spcPts val="600"/>
+              </a:spcBef>
+            </a:pPr>
+            <a:r>
+              <a:rPr sz="1600" b="0">
+                <a:solidFill>
+                  <a:srgbClr val="F0F4F8"/>
+                </a:solidFill>
+              </a:rPr>
+              <a:t>  VINIBALL, VINIFAN, REPRESENTADAS</a:t>
+            </a:r>
+          </a:p>
+          <a:p>
+            <a:pPr>
+              <a:spcBef>
+                <a:spcPts val="600"/>
+              </a:spcBef>
+            </a:pPr>
+            <a:r>
+              <a:rPr sz="1600" b="0">
+                <a:solidFill>
+                  <a:srgbClr val="F0F4F8"/>
+                </a:solidFill>
+              </a:rPr>
+              <a:t>  Mapeo por línea de producto</a:t>
+            </a:r>
+          </a:p>
+          <a:p>
+            <a:pPr>
+              <a:spcBef>
+                <a:spcPts val="600"/>
+              </a:spcBef>
+            </a:pPr>
+          </a:p>
+          <a:p>
+            <a:pPr>
+              <a:spcBef>
+                <a:spcPts val="1600"/>
+              </a:spcBef>
+            </a:pPr>
+            <a:r>
+              <a:rPr sz="2000" b="1">
                 <a:solidFill>
                   <a:srgbClr val="00D084"/>
                 </a:solidFill>
-              </a:defRPr>
-            </a:pPr>
-            <a:r>
+              </a:rPr>
               <a:t>Estados de Stock</a:t>
             </a:r>
           </a:p>
           <a:p>
             <a:pPr>
               <a:spcBef>
-                <a:spcPts val="800"/>
-              </a:spcBef>
-              <a:defRPr sz="1800">
-                <a:solidFill>
-                  <a:srgbClr val="F0F4F8"/>
-                </a:solidFill>
-              </a:defRPr>
-            </a:pPr>
-            <a:r>
-              <a:t>OK, BAJO, AGOTADO</a:t>
-            </a:r>
-          </a:p>
-          <a:p>
-            <a:pPr>
-              <a:spcBef>
-                <a:spcPts val="800"/>
-              </a:spcBef>
-              <a:defRPr sz="1800">
-                <a:solidFill>
-                  <a:srgbClr val="F0F4F8"/>
-                </a:solidFill>
-              </a:defRPr>
-            </a:pPr>
-            <a:r>
-              <a:t>Cálculo por cajas (bx) y unidades</a:t>
-            </a:r>
-          </a:p>
-          <a:p>
-            <a:pPr>
-              <a:spcBef>
-                <a:spcPts val="800"/>
-              </a:spcBef>
-              <a:defRPr sz="1800">
-                <a:solidFill>
-                  <a:srgbClr val="F0F4F8"/>
-                </a:solidFill>
-              </a:defRPr>
-            </a:pPr>
-          </a:p>
-          <a:p>
-            <a:pPr>
-              <a:spcBef>
-                <a:spcPts val="2000"/>
-              </a:spcBef>
-              <a:defRPr sz="2400" b="1">
+                <a:spcPts val="600"/>
+              </a:spcBef>
+            </a:pPr>
+            <a:r>
+              <a:rPr sz="1600" b="0">
+                <a:solidFill>
+                  <a:srgbClr val="F0F4F8"/>
+                </a:solidFill>
+              </a:rPr>
+              <a:t>  OK, BAJO, AGOTADO</a:t>
+            </a:r>
+          </a:p>
+          <a:p>
+            <a:pPr>
+              <a:spcBef>
+                <a:spcPts val="600"/>
+              </a:spcBef>
+            </a:pPr>
+            <a:r>
+              <a:rPr sz="1600" b="0">
+                <a:solidFill>
+                  <a:srgbClr val="F0F4F8"/>
+                </a:solidFill>
+              </a:rPr>
+              <a:t>  Cálculo por cajas (bx) y unidades</a:t>
+            </a:r>
+          </a:p>
+          <a:p>
+            <a:pPr>
+              <a:spcBef>
+                <a:spcPts val="600"/>
+              </a:spcBef>
+            </a:pPr>
+          </a:p>
+          <a:p>
+            <a:pPr>
+              <a:spcBef>
+                <a:spcPts val="1600"/>
+              </a:spcBef>
+            </a:pPr>
+            <a:r>
+              <a:rPr sz="2000" b="1">
                 <a:solidFill>
                   <a:srgbClr val="00D084"/>
                 </a:solidFill>
-              </a:defRPr>
-            </a:pPr>
-            <a:r>
+              </a:rPr>
               <a:t>Funcionalidades Principales</a:t>
             </a:r>
           </a:p>
           <a:p>
             <a:pPr>
               <a:spcBef>
-                <a:spcPts val="800"/>
-              </a:spcBef>
-              <a:defRPr sz="1800">
-                <a:solidFill>
-                  <a:srgbClr val="F0F4F8"/>
-                </a:solidFill>
-              </a:defRPr>
-            </a:pPr>
-            <a:r>
-              <a:t>Dashboard y panel de estado</a:t>
-            </a:r>
-          </a:p>
-          <a:p>
-            <a:pPr>
-              <a:spcBef>
-                <a:spcPts val="800"/>
-              </a:spcBef>
-              <a:defRPr sz="1800">
-                <a:solidFill>
-                  <a:srgbClr val="F0F4F8"/>
-                </a:solidFill>
-              </a:defRPr>
-            </a:pPr>
-            <a:r>
-              <a:t>Búsqueda avanzada con Fuse.js</a:t>
-            </a:r>
-          </a:p>
-          <a:p>
-            <a:pPr>
-              <a:spcBef>
-                <a:spcPts val="800"/>
-              </a:spcBef>
-              <a:defRPr sz="1800">
-                <a:solidFill>
-                  <a:srgbClr val="F0F4F8"/>
-                </a:solidFill>
-              </a:defRPr>
-            </a:pPr>
-            <a:r>
-              <a:t>Reportes XLSX exportables</a:t>
-            </a:r>
-          </a:p>
-          <a:p>
-            <a:pPr>
-              <a:spcBef>
-                <a:spcPts val="800"/>
-              </a:spcBef>
-              <a:defRPr sz="1800">
-                <a:solidFill>
-                  <a:srgbClr val="F0F4F8"/>
-                </a:solidFill>
-              </a:defRPr>
-            </a:pPr>
-            <a:r>
-              <a:t>Alertas de stock crítico</a:t>
-            </a:r>
-          </a:p>
-          <a:p>
-            <a:pPr>
-              <a:spcBef>
-                <a:spcPts val="800"/>
-              </a:spcBef>
-              <a:defRPr sz="1800">
-                <a:solidFill>
-                  <a:srgbClr val="F0F4F8"/>
-                </a:solidFill>
-              </a:defRPr>
-            </a:pPr>
-          </a:p>
-          <a:p>
-            <a:pPr>
-              <a:spcBef>
-                <a:spcPts val="2000"/>
-              </a:spcBef>
-              <a:defRPr sz="2400" b="1">
+                <a:spcPts val="600"/>
+              </a:spcBef>
+            </a:pPr>
+            <a:r>
+              <a:rPr sz="1600" b="0">
+                <a:solidFill>
+                  <a:srgbClr val="F0F4F8"/>
+                </a:solidFill>
+              </a:rPr>
+              <a:t>  Dashboard y panel de estado</a:t>
+            </a:r>
+          </a:p>
+          <a:p>
+            <a:pPr>
+              <a:spcBef>
+                <a:spcPts val="600"/>
+              </a:spcBef>
+            </a:pPr>
+            <a:r>
+              <a:rPr sz="1600" b="0">
+                <a:solidFill>
+                  <a:srgbClr val="F0F4F8"/>
+                </a:solidFill>
+              </a:rPr>
+              <a:t>  Búsqueda avanzada con Fuse.js</a:t>
+            </a:r>
+          </a:p>
+          <a:p>
+            <a:pPr>
+              <a:spcBef>
+                <a:spcPts val="600"/>
+              </a:spcBef>
+            </a:pPr>
+            <a:r>
+              <a:rPr sz="1600" b="0">
+                <a:solidFill>
+                  <a:srgbClr val="F0F4F8"/>
+                </a:solidFill>
+              </a:rPr>
+              <a:t>  Reportes XLSX exportables</a:t>
+            </a:r>
+          </a:p>
+          <a:p>
+            <a:pPr>
+              <a:spcBef>
+                <a:spcPts val="600"/>
+              </a:spcBef>
+            </a:pPr>
+            <a:r>
+              <a:rPr sz="1600" b="0">
+                <a:solidFill>
+                  <a:srgbClr val="F0F4F8"/>
+                </a:solidFill>
+              </a:rPr>
+              <a:t>  Alertas de stock crítico</a:t>
+            </a:r>
+          </a:p>
+          <a:p>
+            <a:pPr>
+              <a:spcBef>
+                <a:spcPts val="600"/>
+              </a:spcBef>
+            </a:pPr>
+          </a:p>
+          <a:p>
+            <a:pPr>
+              <a:spcBef>
+                <a:spcPts val="1600"/>
+              </a:spcBef>
+            </a:pPr>
+            <a:r>
+              <a:rPr sz="2000" b="1">
                 <a:solidFill>
                   <a:srgbClr val="00D084"/>
                 </a:solidFill>
-              </a:defRPr>
-            </a:pPr>
-            <a:r>
+              </a:rPr>
               <a:t>Flujo de Operaciones</a:t>
             </a:r>
           </a:p>
           <a:p>
             <a:pPr>
               <a:spcBef>
-                <a:spcPts val="800"/>
-              </a:spcBef>
-              <a:defRPr sz="1800">
-                <a:solidFill>
-                  <a:srgbClr val="F0F4F8"/>
-                </a:solidFill>
-              </a:defRPr>
-            </a:pPr>
-            <a:r>
-              <a:t>Descarga desde appweb</a:t>
-            </a:r>
-          </a:p>
-          <a:p>
-            <a:pPr>
-              <a:spcBef>
-                <a:spcPts val="800"/>
-              </a:spcBef>
-              <a:defRPr sz="1800">
-                <a:solidFill>
-                  <a:srgbClr val="F0F4F8"/>
-                </a:solidFill>
-              </a:defRPr>
-            </a:pPr>
-            <a:r>
-              <a:t>Enriquecimiento con catálogo maestro</a:t>
-            </a:r>
-          </a:p>
-          <a:p>
-            <a:pPr>
-              <a:spcBef>
-                <a:spcPts val="800"/>
-              </a:spcBef>
-              <a:defRPr sz="1800">
-                <a:solidFill>
-                  <a:srgbClr val="F0F4F8"/>
-                </a:solidFill>
-              </a:defRPr>
-            </a:pPr>
-            <a:r>
-              <a:t>Generación de reportes</a:t>
+                <a:spcPts val="600"/>
+              </a:spcBef>
+            </a:pPr>
+            <a:r>
+              <a:rPr sz="1600" b="0">
+                <a:solidFill>
+                  <a:srgbClr val="F0F4F8"/>
+                </a:solidFill>
+              </a:rPr>
+              <a:t>  Descarga desde appweb</a:t>
+            </a:r>
+          </a:p>
+          <a:p>
+            <a:pPr>
+              <a:spcBef>
+                <a:spcPts val="600"/>
+              </a:spcBef>
+            </a:pPr>
+            <a:r>
+              <a:rPr sz="1600" b="0">
+                <a:solidFill>
+                  <a:srgbClr val="F0F4F8"/>
+                </a:solidFill>
+              </a:rPr>
+              <a:t>  Enriquecimiento con catálogo maestro</a:t>
+            </a:r>
+          </a:p>
+          <a:p>
+            <a:pPr>
+              <a:spcBef>
+                <a:spcPts val="600"/>
+              </a:spcBef>
+            </a:pPr>
+            <a:r>
+              <a:rPr sz="1600" b="0">
+                <a:solidFill>
+                  <a:srgbClr val="F0F4F8"/>
+                </a:solidFill>
+              </a:rPr>
+              <a:t>  Generación de reportes</a:t>
             </a:r>
           </a:p>
         </p:txBody>
@@ -6339,8 +6234,8 @@
         </p:nvSpPr>
         <p:spPr>
           <a:xfrm>
-            <a:off x="457200" y="2926080"/>
-            <a:ext cx="1828800" cy="73152"/>
+            <a:off x="457200" y="2743200"/>
+            <a:ext cx="1828800" cy="54864"/>
           </a:xfrm>
           <a:prstGeom prst="rect">
             <a:avLst/>
@@ -6382,7 +6277,7 @@
         </p:nvSpPr>
         <p:spPr>
           <a:xfrm>
-            <a:off x="457200" y="2560320"/>
+            <a:off x="457200" y="2377440"/>
             <a:ext cx="10972800" cy="914400"/>
           </a:xfrm>
           <a:prstGeom prst="rect">
@@ -6396,14 +6291,12 @@
           </a:bodyPr>
           <a:lstStyle/>
           <a:p>
-            <a:pPr>
-              <a:defRPr sz="4000" b="1">
-                <a:solidFill>
-                  <a:srgbClr val="F0F4F8"/>
-                </a:solidFill>
-              </a:defRPr>
-            </a:pPr>
-            <a:r>
+            <a:r>
+              <a:rPr sz="4000" b="1">
+                <a:solidFill>
+                  <a:srgbClr val="F0F4F8"/>
+                </a:solidFill>
+              </a:rPr>
               <a:t>Despliegue y Operación</a:t>
             </a:r>
           </a:p>
@@ -6478,8 +6371,8 @@
         </p:nvSpPr>
         <p:spPr>
           <a:xfrm>
-            <a:off x="457200" y="365760"/>
-            <a:ext cx="11277295" cy="731520"/>
+            <a:off x="457200" y="274320"/>
+            <a:ext cx="11277295" cy="640080"/>
           </a:xfrm>
           <a:prstGeom prst="rect">
             <a:avLst/>
@@ -6492,14 +6385,12 @@
           </a:bodyPr>
           <a:lstStyle/>
           <a:p>
-            <a:pPr>
-              <a:defRPr sz="3200" b="1">
-                <a:solidFill>
-                  <a:srgbClr val="F0F4F8"/>
-                </a:solidFill>
-              </a:defRPr>
-            </a:pPr>
-            <a:r>
+            <a:r>
+              <a:rPr sz="2800" b="1">
+                <a:solidFill>
+                  <a:srgbClr val="F0F4F8"/>
+                </a:solidFill>
+              </a:rPr>
               <a:t>Infraestructura</a:t>
             </a:r>
           </a:p>
@@ -6513,8 +6404,8 @@
         </p:nvSpPr>
         <p:spPr>
           <a:xfrm>
-            <a:off x="457200" y="1280160"/>
-            <a:ext cx="11277295" cy="5029200"/>
+            <a:off x="457200" y="1097280"/>
+            <a:ext cx="11277295" cy="5303520"/>
           </a:xfrm>
           <a:prstGeom prst="rect">
             <a:avLst/>
@@ -6529,220 +6420,210 @@
           <a:p>
             <a:pPr>
               <a:spcBef>
-                <a:spcPts val="2000"/>
-              </a:spcBef>
-              <a:defRPr sz="2400" b="1">
+                <a:spcPts val="1600"/>
+              </a:spcBef>
+            </a:pPr>
+            <a:r>
+              <a:rPr sz="2000" b="1">
                 <a:solidFill>
                   <a:srgbClr val="00D084"/>
                 </a:solidFill>
-              </a:defRPr>
-            </a:pPr>
-            <a:r>
+              </a:rPr>
               <a:t>Frontend</a:t>
             </a:r>
           </a:p>
           <a:p>
             <a:pPr>
               <a:spcBef>
-                <a:spcPts val="800"/>
-              </a:spcBef>
-              <a:defRPr sz="1800">
-                <a:solidFill>
-                  <a:srgbClr val="F0F4F8"/>
-                </a:solidFill>
-              </a:defRPr>
-            </a:pPr>
-            <a:r>
-              <a:t>GitHub Pages (deploy automático desde main)</a:t>
-            </a:r>
-          </a:p>
-          <a:p>
-            <a:pPr>
-              <a:spcBef>
-                <a:spcPts val="800"/>
-              </a:spcBef>
-              <a:defRPr sz="1800">
-                <a:solidFill>
-                  <a:srgbClr val="F0F4F8"/>
-                </a:solidFill>
-              </a:defRPr>
-            </a:pPr>
-            <a:r>
-              <a:t>Build: Vite + Lit</a:t>
-            </a:r>
-          </a:p>
-          <a:p>
-            <a:pPr>
-              <a:spcBef>
-                <a:spcPts val="800"/>
-              </a:spcBef>
-              <a:defRPr sz="1800">
-                <a:solidFill>
-                  <a:srgbClr val="F0F4F8"/>
-                </a:solidFill>
-              </a:defRPr>
-            </a:pPr>
-            <a:r>
-              <a:t>URL: https://carloscus.github.io/g360-stock-reporter/</a:t>
-            </a:r>
-          </a:p>
-          <a:p>
-            <a:pPr>
-              <a:spcBef>
-                <a:spcPts val="800"/>
-              </a:spcBef>
-              <a:defRPr sz="1800">
-                <a:solidFill>
-                  <a:srgbClr val="F0F4F8"/>
-                </a:solidFill>
-              </a:defRPr>
-            </a:pPr>
-          </a:p>
-          <a:p>
-            <a:pPr>
-              <a:spcBef>
-                <a:spcPts val="2000"/>
-              </a:spcBef>
-              <a:defRPr sz="2400" b="1">
+                <a:spcPts val="600"/>
+              </a:spcBef>
+            </a:pPr>
+            <a:r>
+              <a:rPr sz="1600" b="0">
+                <a:solidFill>
+                  <a:srgbClr val="F0F4F8"/>
+                </a:solidFill>
+              </a:rPr>
+              <a:t>  GitHub Pages (deploy automático desde main)</a:t>
+            </a:r>
+          </a:p>
+          <a:p>
+            <a:pPr>
+              <a:spcBef>
+                <a:spcPts val="600"/>
+              </a:spcBef>
+            </a:pPr>
+            <a:r>
+              <a:rPr sz="1600" b="0">
+                <a:solidFill>
+                  <a:srgbClr val="F0F4F8"/>
+                </a:solidFill>
+              </a:rPr>
+              <a:t>  Build: Vite + Lit</a:t>
+            </a:r>
+          </a:p>
+          <a:p>
+            <a:pPr>
+              <a:spcBef>
+                <a:spcPts val="600"/>
+              </a:spcBef>
+            </a:pPr>
+            <a:r>
+              <a:rPr sz="1600" b="0">
+                <a:solidFill>
+                  <a:srgbClr val="F0F4F8"/>
+                </a:solidFill>
+              </a:rPr>
+              <a:t>  URL: https://carloscus.github.io/g360-stock-reporter/</a:t>
+            </a:r>
+          </a:p>
+          <a:p>
+            <a:pPr>
+              <a:spcBef>
+                <a:spcPts val="600"/>
+              </a:spcBef>
+            </a:pPr>
+          </a:p>
+          <a:p>
+            <a:pPr>
+              <a:spcBef>
+                <a:spcPts val="1600"/>
+              </a:spcBef>
+            </a:pPr>
+            <a:r>
+              <a:rPr sz="2000" b="1">
                 <a:solidFill>
                   <a:srgbClr val="00D084"/>
                 </a:solidFill>
-              </a:defRPr>
-            </a:pPr>
-            <a:r>
+              </a:rPr>
               <a:t>Backend</a:t>
             </a:r>
           </a:p>
           <a:p>
             <a:pPr>
               <a:spcBef>
-                <a:spcPts val="800"/>
-              </a:spcBef>
-              <a:defRPr sz="1800">
-                <a:solidFill>
-                  <a:srgbClr val="F0F4F8"/>
-                </a:solidFill>
-              </a:defRPr>
-            </a:pPr>
-            <a:r>
-              <a:t>Render (servicio gratuito)</a:t>
-            </a:r>
-          </a:p>
-          <a:p>
-            <a:pPr>
-              <a:spcBef>
-                <a:spcPts val="800"/>
-              </a:spcBef>
-              <a:defRPr sz="1800">
-                <a:solidFill>
-                  <a:srgbClr val="F0F4F8"/>
-                </a:solidFill>
-              </a:defRPr>
-            </a:pPr>
-            <a:r>
-              <a:t>URL: https://g360-stock-api.onrender.com</a:t>
-            </a:r>
-          </a:p>
-          <a:p>
-            <a:pPr>
-              <a:spcBef>
-                <a:spcPts val="800"/>
-              </a:spcBef>
-              <a:defRPr sz="1800">
-                <a:solidFill>
-                  <a:srgbClr val="F0F4F8"/>
-                </a:solidFill>
-              </a:defRPr>
-            </a:pPr>
-            <a:r>
-              <a:t>Variables de entorno: S1_API_KEY, S1_READ_API_KEY</a:t>
-            </a:r>
-          </a:p>
-          <a:p>
-            <a:pPr>
-              <a:spcBef>
-                <a:spcPts val="800"/>
-              </a:spcBef>
-              <a:defRPr sz="1800">
-                <a:solidFill>
-                  <a:srgbClr val="F0F4F8"/>
-                </a:solidFill>
-              </a:defRPr>
-            </a:pPr>
-            <a:r>
-              <a:t>Auto-restart si falla (keep-alive cada 15 min)</a:t>
-            </a:r>
-          </a:p>
-          <a:p>
-            <a:pPr>
-              <a:spcBef>
-                <a:spcPts val="800"/>
-              </a:spcBef>
-              <a:defRPr sz="1800">
-                <a:solidFill>
-                  <a:srgbClr val="F0F4F8"/>
-                </a:solidFill>
-              </a:defRPr>
-            </a:pPr>
-          </a:p>
-          <a:p>
-            <a:pPr>
-              <a:spcBef>
-                <a:spcPts val="2000"/>
-              </a:spcBef>
-              <a:defRPr sz="2400" b="1">
+                <a:spcPts val="600"/>
+              </a:spcBef>
+            </a:pPr>
+            <a:r>
+              <a:rPr sz="1600" b="0">
+                <a:solidFill>
+                  <a:srgbClr val="F0F4F8"/>
+                </a:solidFill>
+              </a:rPr>
+              <a:t>  Render (servicio gratuito)</a:t>
+            </a:r>
+          </a:p>
+          <a:p>
+            <a:pPr>
+              <a:spcBef>
+                <a:spcPts val="600"/>
+              </a:spcBef>
+            </a:pPr>
+            <a:r>
+              <a:rPr sz="1600" b="0">
+                <a:solidFill>
+                  <a:srgbClr val="F0F4F8"/>
+                </a:solidFill>
+              </a:rPr>
+              <a:t>  URL: https://g360-stock-api.onrender.com</a:t>
+            </a:r>
+          </a:p>
+          <a:p>
+            <a:pPr>
+              <a:spcBef>
+                <a:spcPts val="600"/>
+              </a:spcBef>
+            </a:pPr>
+            <a:r>
+              <a:rPr sz="1600" b="0">
+                <a:solidFill>
+                  <a:srgbClr val="F0F4F8"/>
+                </a:solidFill>
+              </a:rPr>
+              <a:t>  Variables de entorno: S1_API_KEY, S1_READ_API_KEY</a:t>
+            </a:r>
+          </a:p>
+          <a:p>
+            <a:pPr>
+              <a:spcBef>
+                <a:spcPts val="600"/>
+              </a:spcBef>
+            </a:pPr>
+            <a:r>
+              <a:rPr sz="1600" b="0">
+                <a:solidFill>
+                  <a:srgbClr val="F0F4F8"/>
+                </a:solidFill>
+              </a:rPr>
+              <a:t>  Auto-restart si falla (keep-alive cada 15 min)</a:t>
+            </a:r>
+          </a:p>
+          <a:p>
+            <a:pPr>
+              <a:spcBef>
+                <a:spcPts val="600"/>
+              </a:spcBef>
+            </a:pPr>
+          </a:p>
+          <a:p>
+            <a:pPr>
+              <a:spcBef>
+                <a:spcPts val="1600"/>
+              </a:spcBef>
+            </a:pPr>
+            <a:r>
+              <a:rPr sz="2000" b="1">
                 <a:solidFill>
                   <a:srgbClr val="00D084"/>
                 </a:solidFill>
-              </a:defRPr>
-            </a:pPr>
-            <a:r>
+              </a:rPr>
               <a:t>Ventana Operativa</a:t>
             </a:r>
           </a:p>
           <a:p>
             <a:pPr>
               <a:spcBef>
-                <a:spcPts val="800"/>
-              </a:spcBef>
-              <a:defRPr sz="1800">
-                <a:solidFill>
-                  <a:srgbClr val="F0F4F8"/>
-                </a:solidFill>
-              </a:defRPr>
-            </a:pPr>
-            <a:r>
-              <a:t>Lunes a Sábado, 07:00 - 22:59 (hora Lima)</a:t>
-            </a:r>
-          </a:p>
-          <a:p>
-            <a:pPr>
-              <a:spcBef>
-                <a:spcPts val="800"/>
-              </a:spcBef>
-              <a:defRPr sz="1800">
-                <a:solidFill>
-                  <a:srgbClr val="F0F4F8"/>
-                </a:solidFill>
-              </a:defRPr>
-            </a:pPr>
-            <a:r>
-              <a:t>Domingo y madrugada: no se regenera reporte</a:t>
-            </a:r>
-          </a:p>
-          <a:p>
-            <a:pPr>
-              <a:spcBef>
-                <a:spcPts val="800"/>
-              </a:spcBef>
-              <a:defRPr sz="1800">
-                <a:solidFill>
-                  <a:srgbClr val="F0F4F8"/>
-                </a:solidFill>
-              </a:defRPr>
-            </a:pPr>
-            <a:r>
-              <a:t>Cache sirve datos del último ciclo válido</a:t>
+                <a:spcPts val="600"/>
+              </a:spcBef>
+            </a:pPr>
+            <a:r>
+              <a:rPr sz="1600" b="0">
+                <a:solidFill>
+                  <a:srgbClr val="F0F4F8"/>
+                </a:solidFill>
+              </a:rPr>
+              <a:t>  Lunes a Sábado, 07:00 - 22:59 (hora Lima)</a:t>
+            </a:r>
+          </a:p>
+          <a:p>
+            <a:pPr>
+              <a:spcBef>
+                <a:spcPts val="600"/>
+              </a:spcBef>
+            </a:pPr>
+            <a:r>
+              <a:rPr sz="1600" b="0">
+                <a:solidFill>
+                  <a:srgbClr val="F0F4F8"/>
+                </a:solidFill>
+              </a:rPr>
+              <a:t>  Domingo y madrugada: no se regenera reporte</a:t>
+            </a:r>
+          </a:p>
+          <a:p>
+            <a:pPr>
+              <a:spcBef>
+                <a:spcPts val="600"/>
+              </a:spcBef>
+            </a:pPr>
+            <a:r>
+              <a:rPr sz="1600" b="0">
+                <a:solidFill>
+                  <a:srgbClr val="F0F4F8"/>
+                </a:solidFill>
+              </a:rPr>
+              <a:t>  Cache sirve datos del último ciclo válido</a:t>
             </a:r>
           </a:p>
         </p:txBody>
@@ -6816,8 +6697,8 @@
         </p:nvSpPr>
         <p:spPr>
           <a:xfrm>
-            <a:off x="457200" y="365760"/>
-            <a:ext cx="11277295" cy="731520"/>
+            <a:off x="457200" y="274320"/>
+            <a:ext cx="11277295" cy="640080"/>
           </a:xfrm>
           <a:prstGeom prst="rect">
             <a:avLst/>
@@ -6830,14 +6711,12 @@
           </a:bodyPr>
           <a:lstStyle/>
           <a:p>
-            <a:pPr>
-              <a:defRPr sz="3200" b="1">
-                <a:solidFill>
-                  <a:srgbClr val="F0F4F8"/>
-                </a:solidFill>
-              </a:defRPr>
-            </a:pPr>
-            <a:r>
+            <a:r>
+              <a:rPr sz="2800" b="1">
+                <a:solidFill>
+                  <a:srgbClr val="F0F4F8"/>
+                </a:solidFill>
+              </a:rPr>
               <a:t>Instalación y Desarrollo</a:t>
             </a:r>
           </a:p>
@@ -6851,8 +6730,8 @@
         </p:nvSpPr>
         <p:spPr>
           <a:xfrm>
-            <a:off x="457200" y="1280160"/>
-            <a:ext cx="11277295" cy="5029200"/>
+            <a:off x="457200" y="1097280"/>
+            <a:ext cx="11277295" cy="5303520"/>
           </a:xfrm>
           <a:prstGeom prst="rect">
             <a:avLst/>
@@ -6867,220 +6746,210 @@
           <a:p>
             <a:pPr>
               <a:spcBef>
-                <a:spcPts val="2000"/>
-              </a:spcBef>
-              <a:defRPr sz="2400" b="1">
+                <a:spcPts val="1600"/>
+              </a:spcBef>
+            </a:pPr>
+            <a:r>
+              <a:rPr sz="2000" b="1">
                 <a:solidFill>
                   <a:srgbClr val="00D084"/>
                 </a:solidFill>
-              </a:defRPr>
-            </a:pPr>
-            <a:r>
+              </a:rPr>
               <a:t>Frontend</a:t>
             </a:r>
           </a:p>
           <a:p>
             <a:pPr>
               <a:spcBef>
-                <a:spcPts val="800"/>
-              </a:spcBef>
-              <a:defRPr sz="1800">
-                <a:solidFill>
-                  <a:srgbClr val="F0F4F8"/>
-                </a:solidFill>
-              </a:defRPr>
-            </a:pPr>
-            <a:r>
-              <a:t>npm install</a:t>
-            </a:r>
-          </a:p>
-          <a:p>
-            <a:pPr>
-              <a:spcBef>
-                <a:spcPts val="800"/>
-              </a:spcBef>
-              <a:defRPr sz="1800">
-                <a:solidFill>
-                  <a:srgbClr val="F0F4F8"/>
-                </a:solidFill>
-              </a:defRPr>
-            </a:pPr>
-            <a:r>
-              <a:t>npm run dev (puerto 3000)</a:t>
-            </a:r>
-          </a:p>
-          <a:p>
-            <a:pPr>
-              <a:spcBef>
-                <a:spcPts val="800"/>
-              </a:spcBef>
-              <a:defRPr sz="1800">
-                <a:solidFill>
-                  <a:srgbClr val="F0F4F8"/>
-                </a:solidFill>
-              </a:defRPr>
-            </a:pPr>
-            <a:r>
-              <a:t>npm run build (genera dist/)</a:t>
-            </a:r>
-          </a:p>
-          <a:p>
-            <a:pPr>
-              <a:spcBef>
-                <a:spcPts val="800"/>
-              </a:spcBef>
-              <a:defRPr sz="1800">
-                <a:solidFill>
-                  <a:srgbClr val="F0F4F8"/>
-                </a:solidFill>
-              </a:defRPr>
-            </a:pPr>
-          </a:p>
-          <a:p>
-            <a:pPr>
-              <a:spcBef>
-                <a:spcPts val="2000"/>
-              </a:spcBef>
-              <a:defRPr sz="2400" b="1">
+                <a:spcPts val="600"/>
+              </a:spcBef>
+            </a:pPr>
+            <a:r>
+              <a:rPr sz="1600" b="0">
+                <a:solidFill>
+                  <a:srgbClr val="F0F4F8"/>
+                </a:solidFill>
+              </a:rPr>
+              <a:t>  npm install</a:t>
+            </a:r>
+          </a:p>
+          <a:p>
+            <a:pPr>
+              <a:spcBef>
+                <a:spcPts val="600"/>
+              </a:spcBef>
+            </a:pPr>
+            <a:r>
+              <a:rPr sz="1600" b="0">
+                <a:solidFill>
+                  <a:srgbClr val="F0F4F8"/>
+                </a:solidFill>
+              </a:rPr>
+              <a:t>  npm run dev (puerto 3000)</a:t>
+            </a:r>
+          </a:p>
+          <a:p>
+            <a:pPr>
+              <a:spcBef>
+                <a:spcPts val="600"/>
+              </a:spcBef>
+            </a:pPr>
+            <a:r>
+              <a:rPr sz="1600" b="0">
+                <a:solidFill>
+                  <a:srgbClr val="F0F4F8"/>
+                </a:solidFill>
+              </a:rPr>
+              <a:t>  npm run build (genera dist/)</a:t>
+            </a:r>
+          </a:p>
+          <a:p>
+            <a:pPr>
+              <a:spcBef>
+                <a:spcPts val="600"/>
+              </a:spcBef>
+            </a:pPr>
+          </a:p>
+          <a:p>
+            <a:pPr>
+              <a:spcBef>
+                <a:spcPts val="1600"/>
+              </a:spcBef>
+            </a:pPr>
+            <a:r>
+              <a:rPr sz="2000" b="1">
                 <a:solidFill>
                   <a:srgbClr val="00D084"/>
                 </a:solidFill>
-              </a:defRPr>
-            </a:pPr>
-            <a:r>
+              </a:rPr>
               <a:t>Backend</a:t>
             </a:r>
           </a:p>
           <a:p>
             <a:pPr>
               <a:spcBef>
-                <a:spcPts val="800"/>
-              </a:spcBef>
-              <a:defRPr sz="1800">
-                <a:solidFill>
-                  <a:srgbClr val="F0F4F8"/>
-                </a:solidFill>
-              </a:defRPr>
-            </a:pPr>
-            <a:r>
-              <a:t>cd g360-stock-api</a:t>
-            </a:r>
-          </a:p>
-          <a:p>
-            <a:pPr>
-              <a:spcBef>
-                <a:spcPts val="800"/>
-              </a:spcBef>
-              <a:defRPr sz="1800">
-                <a:solidFill>
-                  <a:srgbClr val="F0F4F8"/>
-                </a:solidFill>
-              </a:defRPr>
-            </a:pPr>
-            <a:r>
-              <a:t>pip install -r requirements.txt</a:t>
-            </a:r>
-          </a:p>
-          <a:p>
-            <a:pPr>
-              <a:spcBef>
-                <a:spcPts val="800"/>
-              </a:spcBef>
-              <a:defRPr sz="1800">
-                <a:solidFill>
-                  <a:srgbClr val="F0F4F8"/>
-                </a:solidFill>
-              </a:defRPr>
-            </a:pPr>
-            <a:r>
-              <a:t>uvicorn app.main:app --reload --port 8000</a:t>
-            </a:r>
-          </a:p>
-          <a:p>
-            <a:pPr>
-              <a:spcBef>
-                <a:spcPts val="800"/>
-              </a:spcBef>
-              <a:defRPr sz="1800">
-                <a:solidFill>
-                  <a:srgbClr val="F0F4F8"/>
-                </a:solidFill>
-              </a:defRPr>
-            </a:pPr>
-          </a:p>
-          <a:p>
-            <a:pPr>
-              <a:spcBef>
-                <a:spcPts val="2000"/>
-              </a:spcBef>
-              <a:defRPr sz="2400" b="1">
+                <a:spcPts val="600"/>
+              </a:spcBef>
+            </a:pPr>
+            <a:r>
+              <a:rPr sz="1600" b="0">
+                <a:solidFill>
+                  <a:srgbClr val="F0F4F8"/>
+                </a:solidFill>
+              </a:rPr>
+              <a:t>  cd g360-stock-api</a:t>
+            </a:r>
+          </a:p>
+          <a:p>
+            <a:pPr>
+              <a:spcBef>
+                <a:spcPts val="600"/>
+              </a:spcBef>
+            </a:pPr>
+            <a:r>
+              <a:rPr sz="1600" b="0">
+                <a:solidFill>
+                  <a:srgbClr val="F0F4F8"/>
+                </a:solidFill>
+              </a:rPr>
+              <a:t>  pip install -r requirements.txt</a:t>
+            </a:r>
+          </a:p>
+          <a:p>
+            <a:pPr>
+              <a:spcBef>
+                <a:spcPts val="600"/>
+              </a:spcBef>
+            </a:pPr>
+            <a:r>
+              <a:rPr sz="1600" b="0">
+                <a:solidFill>
+                  <a:srgbClr val="F0F4F8"/>
+                </a:solidFill>
+              </a:rPr>
+              <a:t>  uvicorn app.main:app --reload --port 8000</a:t>
+            </a:r>
+          </a:p>
+          <a:p>
+            <a:pPr>
+              <a:spcBef>
+                <a:spcPts val="600"/>
+              </a:spcBef>
+            </a:pPr>
+          </a:p>
+          <a:p>
+            <a:pPr>
+              <a:spcBef>
+                <a:spcPts val="1600"/>
+              </a:spcBef>
+            </a:pPr>
+            <a:r>
+              <a:rPr sz="2000" b="1">
                 <a:solidFill>
                   <a:srgbClr val="00D084"/>
                 </a:solidFill>
-              </a:defRPr>
-            </a:pPr>
-            <a:r>
+              </a:rPr>
               <a:t>Variables de Entorno (.env)</a:t>
             </a:r>
           </a:p>
           <a:p>
             <a:pPr>
               <a:spcBef>
-                <a:spcPts val="800"/>
-              </a:spcBef>
-              <a:defRPr sz="1800">
-                <a:solidFill>
-                  <a:srgbClr val="F0F4F8"/>
-                </a:solidFill>
-              </a:defRPr>
-            </a:pPr>
-            <a:r>
-              <a:t>S1_SOURCE1_URL, S1_SOURCE2_URL (appweb)</a:t>
-            </a:r>
-          </a:p>
-          <a:p>
-            <a:pPr>
-              <a:spcBef>
-                <a:spcPts val="800"/>
-              </a:spcBef>
-              <a:defRPr sz="1800">
-                <a:solidFill>
-                  <a:srgbClr val="F0F4F8"/>
-                </a:solidFill>
-              </a:defRPr>
-            </a:pPr>
-            <a:r>
-              <a:t>S1_CACHE_TTL_SEGUNDOS (default: 900)</a:t>
-            </a:r>
-          </a:p>
-          <a:p>
-            <a:pPr>
-              <a:spcBef>
-                <a:spcPts val="800"/>
-              </a:spcBef>
-              <a:defRPr sz="1800">
-                <a:solidFill>
-                  <a:srgbClr val="F0F4F8"/>
-                </a:solidFill>
-              </a:defRPr>
-            </a:pPr>
-            <a:r>
-              <a:t>S1_API_KEY, S1_READ_API_KEY</a:t>
-            </a:r>
-          </a:p>
-          <a:p>
-            <a:pPr>
-              <a:spcBef>
-                <a:spcPts val="800"/>
-              </a:spcBef>
-              <a:defRPr sz="1800">
-                <a:solidFill>
-                  <a:srgbClr val="F0F4F8"/>
-                </a:solidFill>
-              </a:defRPr>
-            </a:pPr>
-            <a:r>
-              <a:t>S1_CORS_ORIGINS</a:t>
+                <a:spcPts val="600"/>
+              </a:spcBef>
+            </a:pPr>
+            <a:r>
+              <a:rPr sz="1600" b="0">
+                <a:solidFill>
+                  <a:srgbClr val="F0F4F8"/>
+                </a:solidFill>
+              </a:rPr>
+              <a:t>  S1_SOURCE1_URL, S1_SOURCE2_URL (appweb)</a:t>
+            </a:r>
+          </a:p>
+          <a:p>
+            <a:pPr>
+              <a:spcBef>
+                <a:spcPts val="600"/>
+              </a:spcBef>
+            </a:pPr>
+            <a:r>
+              <a:rPr sz="1600" b="0">
+                <a:solidFill>
+                  <a:srgbClr val="F0F4F8"/>
+                </a:solidFill>
+              </a:rPr>
+              <a:t>  S1_CACHE_TTL_SEGUNDOS (default: 900)</a:t>
+            </a:r>
+          </a:p>
+          <a:p>
+            <a:pPr>
+              <a:spcBef>
+                <a:spcPts val="600"/>
+              </a:spcBef>
+            </a:pPr>
+            <a:r>
+              <a:rPr sz="1600" b="0">
+                <a:solidFill>
+                  <a:srgbClr val="F0F4F8"/>
+                </a:solidFill>
+              </a:rPr>
+              <a:t>  S1_API_KEY, S1_READ_API_KEY</a:t>
+            </a:r>
+          </a:p>
+          <a:p>
+            <a:pPr>
+              <a:spcBef>
+                <a:spcPts val="600"/>
+              </a:spcBef>
+            </a:pPr>
+            <a:r>
+              <a:rPr sz="1600" b="0">
+                <a:solidFill>
+                  <a:srgbClr val="F0F4F8"/>
+                </a:solidFill>
+              </a:rPr>
+              <a:t>  S1_CORS_ORIGINS</a:t>
             </a:r>
           </a:p>
         </p:txBody>
@@ -7154,8 +7023,8 @@
         </p:nvSpPr>
         <p:spPr>
           <a:xfrm>
-            <a:off x="457200" y="2926080"/>
-            <a:ext cx="1828800" cy="73152"/>
+            <a:off x="457200" y="2743200"/>
+            <a:ext cx="1828800" cy="54864"/>
           </a:xfrm>
           <a:prstGeom prst="rect">
             <a:avLst/>
@@ -7197,7 +7066,7 @@
         </p:nvSpPr>
         <p:spPr>
           <a:xfrm>
-            <a:off x="457200" y="2560320"/>
+            <a:off x="457200" y="2377440"/>
             <a:ext cx="10972800" cy="914400"/>
           </a:xfrm>
           <a:prstGeom prst="rect">
@@ -7211,14 +7080,12 @@
           </a:bodyPr>
           <a:lstStyle/>
           <a:p>
-            <a:pPr>
-              <a:defRPr sz="4000" b="1">
-                <a:solidFill>
-                  <a:srgbClr val="F0F4F8"/>
-                </a:solidFill>
-              </a:defRPr>
-            </a:pPr>
-            <a:r>
+            <a:r>
+              <a:rPr sz="4000" b="1">
+                <a:solidFill>
+                  <a:srgbClr val="F0F4F8"/>
+                </a:solidFill>
+              </a:rPr>
               <a:t>Troubleshooting</a:t>
             </a:r>
           </a:p>
@@ -7293,8 +7160,8 @@
         </p:nvSpPr>
         <p:spPr>
           <a:xfrm>
-            <a:off x="457200" y="365760"/>
-            <a:ext cx="11277295" cy="731520"/>
+            <a:off x="457200" y="274320"/>
+            <a:ext cx="11277295" cy="640080"/>
           </a:xfrm>
           <a:prstGeom prst="rect">
             <a:avLst/>
@@ -7307,14 +7174,12 @@
           </a:bodyPr>
           <a:lstStyle/>
           <a:p>
-            <a:pPr>
-              <a:defRPr sz="3200" b="1">
-                <a:solidFill>
-                  <a:srgbClr val="F0F4F8"/>
-                </a:solidFill>
-              </a:defRPr>
-            </a:pPr>
-            <a:r>
+            <a:r>
+              <a:rPr sz="2800" b="1">
+                <a:solidFill>
+                  <a:srgbClr val="F0F4F8"/>
+                </a:solidFill>
+              </a:rPr>
               <a:t>Problemas Comunes</a:t>
             </a:r>
           </a:p>
@@ -7328,8 +7193,8 @@
         </p:nvSpPr>
         <p:spPr>
           <a:xfrm>
-            <a:off x="457200" y="1280160"/>
-            <a:ext cx="11277295" cy="5029200"/>
+            <a:off x="457200" y="1097280"/>
+            <a:ext cx="11277295" cy="5303520"/>
           </a:xfrm>
           <a:prstGeom prst="rect">
             <a:avLst/>
@@ -7344,247 +7209,232 @@
           <a:p>
             <a:pPr>
               <a:spcBef>
-                <a:spcPts val="2000"/>
-              </a:spcBef>
-              <a:defRPr sz="2400" b="1">
+                <a:spcPts val="1600"/>
+              </a:spcBef>
+            </a:pPr>
+            <a:r>
+              <a:rPr sz="2000" b="1">
                 <a:solidFill>
                   <a:srgbClr val="00D084"/>
                 </a:solidFill>
-              </a:defRPr>
-            </a:pPr>
-            <a:r>
+              </a:rPr>
               <a:t>Cache Stale</a:t>
             </a:r>
           </a:p>
           <a:p>
             <a:pPr>
               <a:spcBef>
-                <a:spcPts val="800"/>
-              </a:spcBef>
-              <a:defRPr sz="1800">
-                <a:solidFill>
-                  <a:srgbClr val="F0F4F8"/>
-                </a:solidFill>
-              </a:defRPr>
-            </a:pPr>
-            <a:r>
-              <a:t>Problema: datos viejos, no se actualizan</a:t>
-            </a:r>
-          </a:p>
-          <a:p>
-            <a:pPr>
-              <a:spcBef>
-                <a:spcPts val="800"/>
-              </a:spcBef>
-              <a:defRPr sz="1800">
-                <a:solidFill>
-                  <a:srgbClr val="F0F4F8"/>
-                </a:solidFill>
-              </a:defRPr>
-            </a:pPr>
-            <a:r>
-              <a:t>Solución: Forzar refresh en UI o limpiar localStorage</a:t>
-            </a:r>
-          </a:p>
-          <a:p>
-            <a:pPr>
-              <a:spcBef>
-                <a:spcPts val="800"/>
-              </a:spcBef>
-              <a:defRPr sz="1800">
-                <a:solidFill>
-                  <a:srgbClr val="F0F4F8"/>
-                </a:solidFill>
-              </a:defRPr>
-            </a:pPr>
-          </a:p>
-          <a:p>
-            <a:pPr>
-              <a:spcBef>
-                <a:spcPts val="2000"/>
-              </a:spcBef>
-              <a:defRPr sz="2400" b="1">
+                <a:spcPts val="600"/>
+              </a:spcBef>
+            </a:pPr>
+            <a:r>
+              <a:rPr sz="1600" b="0">
+                <a:solidFill>
+                  <a:srgbClr val="F0F4F8"/>
+                </a:solidFill>
+              </a:rPr>
+              <a:t>  Problema: datos viejos, no se actualizan</a:t>
+            </a:r>
+          </a:p>
+          <a:p>
+            <a:pPr>
+              <a:spcBef>
+                <a:spcPts val="600"/>
+              </a:spcBef>
+            </a:pPr>
+            <a:r>
+              <a:rPr sz="1600" b="0">
+                <a:solidFill>
+                  <a:srgbClr val="F0F4F8"/>
+                </a:solidFill>
+              </a:rPr>
+              <a:t>  Solución: Forzar refresh en UI o limpiar localStorage</a:t>
+            </a:r>
+          </a:p>
+          <a:p>
+            <a:pPr>
+              <a:spcBef>
+                <a:spcPts val="600"/>
+              </a:spcBef>
+            </a:pPr>
+          </a:p>
+          <a:p>
+            <a:pPr>
+              <a:spcBef>
+                <a:spcPts val="1600"/>
+              </a:spcBef>
+            </a:pPr>
+            <a:r>
+              <a:rPr sz="2000" b="1">
                 <a:solidFill>
                   <a:srgbClr val="00D084"/>
                 </a:solidFill>
-              </a:defRPr>
-            </a:pPr>
-            <a:r>
+              </a:rPr>
               <a:t>SKUs Sin Categoría</a:t>
             </a:r>
           </a:p>
           <a:p>
             <a:pPr>
               <a:spcBef>
-                <a:spcPts val="800"/>
-              </a:spcBef>
-              <a:defRPr sz="1800">
-                <a:solidFill>
-                  <a:srgbClr val="F0F4F8"/>
-                </a:solidFill>
-              </a:defRPr>
-            </a:pPr>
-            <a:r>
-              <a:t>Problema: categoria muestra 'OTROS'</a:t>
-            </a:r>
-          </a:p>
-          <a:p>
-            <a:pPr>
-              <a:spcBef>
-                <a:spcPts val="800"/>
-              </a:spcBef>
-              <a:defRPr sz="1800">
-                <a:solidFill>
-                  <a:srgbClr val="F0F4F8"/>
-                </a:solidFill>
-              </a:defRPr>
-            </a:pPr>
-            <a:r>
-              <a:t>Causa: línea no mapeada en CATEGORIAS dict</a:t>
-            </a:r>
-          </a:p>
-          <a:p>
-            <a:pPr>
-              <a:spcBef>
-                <a:spcPts val="800"/>
-              </a:spcBef>
-              <a:defRPr sz="1800">
-                <a:solidFill>
-                  <a:srgbClr val="F0F4F8"/>
-                </a:solidFill>
-              </a:defRPr>
-            </a:pPr>
-            <a:r>
-              <a:t>Solución: Agregar código de línea al mapeo</a:t>
-            </a:r>
-          </a:p>
-          <a:p>
-            <a:pPr>
-              <a:spcBef>
-                <a:spcPts val="800"/>
-              </a:spcBef>
-              <a:defRPr sz="1800">
-                <a:solidFill>
-                  <a:srgbClr val="F0F4F8"/>
-                </a:solidFill>
-              </a:defRPr>
-            </a:pPr>
-          </a:p>
-          <a:p>
-            <a:pPr>
-              <a:spcBef>
-                <a:spcPts val="2000"/>
-              </a:spcBef>
-              <a:defRPr sz="2400" b="1">
+                <a:spcPts val="600"/>
+              </a:spcBef>
+            </a:pPr>
+            <a:r>
+              <a:rPr sz="1600" b="0">
+                <a:solidFill>
+                  <a:srgbClr val="F0F4F8"/>
+                </a:solidFill>
+              </a:rPr>
+              <a:t>  Problema: categoria muestra 'OTROS'</a:t>
+            </a:r>
+          </a:p>
+          <a:p>
+            <a:pPr>
+              <a:spcBef>
+                <a:spcPts val="600"/>
+              </a:spcBef>
+            </a:pPr>
+            <a:r>
+              <a:rPr sz="1600" b="0">
+                <a:solidFill>
+                  <a:srgbClr val="F0F4F8"/>
+                </a:solidFill>
+              </a:rPr>
+              <a:t>  Causa: línea no mapeada en CATEGORIAS dict</a:t>
+            </a:r>
+          </a:p>
+          <a:p>
+            <a:pPr>
+              <a:spcBef>
+                <a:spcPts val="600"/>
+              </a:spcBef>
+            </a:pPr>
+            <a:r>
+              <a:rPr sz="1600" b="0">
+                <a:solidFill>
+                  <a:srgbClr val="F0F4F8"/>
+                </a:solidFill>
+              </a:rPr>
+              <a:t>  Solución: Agregar código de línea al mapeo</a:t>
+            </a:r>
+          </a:p>
+          <a:p>
+            <a:pPr>
+              <a:spcBef>
+                <a:spcPts val="600"/>
+              </a:spcBef>
+            </a:pPr>
+          </a:p>
+          <a:p>
+            <a:pPr>
+              <a:spcBef>
+                <a:spcPts val="1600"/>
+              </a:spcBef>
+            </a:pPr>
+            <a:r>
+              <a:rPr sz="2000" b="1">
                 <a:solidFill>
                   <a:srgbClr val="00D084"/>
                 </a:solidFill>
-              </a:defRPr>
-            </a:pPr>
-            <a:r>
+              </a:rPr>
               <a:t>Stock 0 Incorrecto</a:t>
             </a:r>
           </a:p>
           <a:p>
             <a:pPr>
               <a:spcBef>
-                <a:spcPts val="800"/>
-              </a:spcBef>
-              <a:defRPr sz="1800">
-                <a:solidFill>
-                  <a:srgbClr val="F0F4F8"/>
-                </a:solidFill>
-              </a:defRPr>
-            </a:pPr>
-            <a:r>
-              <a:t>Problema: SKU con stock en 118 muestra 0</a:t>
-            </a:r>
-          </a:p>
-          <a:p>
-            <a:pPr>
-              <a:spcBef>
-                <a:spcPts val="800"/>
-              </a:spcBef>
-              <a:defRPr sz="1800">
-                <a:solidFill>
-                  <a:srgbClr val="F0F4F8"/>
-                </a:solidFill>
-              </a:defRPr>
-            </a:pPr>
-            <a:r>
-              <a:t>Causa: 118 es tipo mktd, no cuenta para venta</a:t>
-            </a:r>
-          </a:p>
-          <a:p>
-            <a:pPr>
-              <a:spcBef>
-                <a:spcPts val="800"/>
-              </a:spcBef>
-              <a:defRPr sz="1800">
-                <a:solidFill>
-                  <a:srgbClr val="F0F4F8"/>
-                </a:solidFill>
-              </a:defRPr>
-            </a:pPr>
-            <a:r>
-              <a:t>Solución: Verificar si el SKU tiene almacenes de venta</a:t>
-            </a:r>
-          </a:p>
-          <a:p>
-            <a:pPr>
-              <a:spcBef>
-                <a:spcPts val="800"/>
-              </a:spcBef>
-              <a:defRPr sz="1800">
-                <a:solidFill>
-                  <a:srgbClr val="F0F4F8"/>
-                </a:solidFill>
-              </a:defRPr>
-            </a:pPr>
-          </a:p>
-          <a:p>
-            <a:pPr>
-              <a:spcBef>
-                <a:spcPts val="2000"/>
-              </a:spcBef>
-              <a:defRPr sz="2400" b="1">
+                <a:spcPts val="600"/>
+              </a:spcBef>
+            </a:pPr>
+            <a:r>
+              <a:rPr sz="1600" b="0">
+                <a:solidFill>
+                  <a:srgbClr val="F0F4F8"/>
+                </a:solidFill>
+              </a:rPr>
+              <a:t>  Problema: SKU con stock en 118 muestra 0</a:t>
+            </a:r>
+          </a:p>
+          <a:p>
+            <a:pPr>
+              <a:spcBef>
+                <a:spcPts val="600"/>
+              </a:spcBef>
+            </a:pPr>
+            <a:r>
+              <a:rPr sz="1600" b="0">
+                <a:solidFill>
+                  <a:srgbClr val="F0F4F8"/>
+                </a:solidFill>
+              </a:rPr>
+              <a:t>  Causa: 118 es tipo mktd, no cuenta para venta</a:t>
+            </a:r>
+          </a:p>
+          <a:p>
+            <a:pPr>
+              <a:spcBef>
+                <a:spcPts val="600"/>
+              </a:spcBef>
+            </a:pPr>
+            <a:r>
+              <a:rPr sz="1600" b="0">
+                <a:solidFill>
+                  <a:srgbClr val="F0F4F8"/>
+                </a:solidFill>
+              </a:rPr>
+              <a:t>  Solución: Verificar si el SKU tiene almacenes de venta</a:t>
+            </a:r>
+          </a:p>
+          <a:p>
+            <a:pPr>
+              <a:spcBef>
+                <a:spcPts val="600"/>
+              </a:spcBef>
+            </a:pPr>
+          </a:p>
+          <a:p>
+            <a:pPr>
+              <a:spcBef>
+                <a:spcPts val="1600"/>
+              </a:spcBef>
+            </a:pPr>
+            <a:r>
+              <a:rPr sz="2000" b="1">
                 <a:solidFill>
                   <a:srgbClr val="00D084"/>
                 </a:solidFill>
-              </a:defRPr>
-            </a:pPr>
-            <a:r>
+              </a:rPr>
               <a:t>API No Responde</a:t>
             </a:r>
           </a:p>
           <a:p>
             <a:pPr>
               <a:spcBef>
-                <a:spcPts val="800"/>
-              </a:spcBef>
-              <a:defRPr sz="1800">
-                <a:solidFill>
-                  <a:srgbClr val="F0F4F8"/>
-                </a:solidFill>
-              </a:defRPr>
-            </a:pPr>
-            <a:r>
-              <a:t>Verificar que S1_API_KEY esté configurada en Render</a:t>
-            </a:r>
-          </a:p>
-          <a:p>
-            <a:pPr>
-              <a:spcBef>
-                <a:spcPts val="800"/>
-              </a:spcBef>
-              <a:defRPr sz="1800">
-                <a:solidFill>
-                  <a:srgbClr val="F0F4F8"/>
-                </a:solidFill>
-              </a:defRPr>
-            </a:pPr>
-            <a:r>
-              <a:t>Check logs de Render si el servicio está awake</a:t>
+                <a:spcPts val="600"/>
+              </a:spcBef>
+            </a:pPr>
+            <a:r>
+              <a:rPr sz="1600" b="0">
+                <a:solidFill>
+                  <a:srgbClr val="F0F4F8"/>
+                </a:solidFill>
+              </a:rPr>
+              <a:t>  Verificar que S1_API_KEY esté configurada en Render</a:t>
+            </a:r>
+          </a:p>
+          <a:p>
+            <a:pPr>
+              <a:spcBef>
+                <a:spcPts val="600"/>
+              </a:spcBef>
+            </a:pPr>
+            <a:r>
+              <a:rPr sz="1600" b="0">
+                <a:solidFill>
+                  <a:srgbClr val="F0F4F8"/>
+                </a:solidFill>
+              </a:rPr>
+              <a:t>  Check logs de Render si el servicio está awake</a:t>
             </a:r>
           </a:p>
         </p:txBody>
@@ -7658,8 +7508,8 @@
         </p:nvSpPr>
         <p:spPr>
           <a:xfrm>
-            <a:off x="457200" y="365760"/>
-            <a:ext cx="11277295" cy="731520"/>
+            <a:off x="457200" y="274320"/>
+            <a:ext cx="11277295" cy="640080"/>
           </a:xfrm>
           <a:prstGeom prst="rect">
             <a:avLst/>
@@ -7672,14 +7522,12 @@
           </a:bodyPr>
           <a:lstStyle/>
           <a:p>
-            <a:pPr>
-              <a:defRPr sz="3200" b="1">
-                <a:solidFill>
-                  <a:srgbClr val="F0F4F8"/>
-                </a:solidFill>
-              </a:defRPr>
-            </a:pPr>
-            <a:r>
+            <a:r>
+              <a:rPr sz="2800" b="1">
+                <a:solidFill>
+                  <a:srgbClr val="F0F4F8"/>
+                </a:solidFill>
+              </a:rPr>
               <a:t>Mejoras Futuras Planeadas</a:t>
             </a:r>
           </a:p>
@@ -7693,8 +7541,8 @@
         </p:nvSpPr>
         <p:spPr>
           <a:xfrm>
-            <a:off x="457200" y="1280160"/>
-            <a:ext cx="11277295" cy="5029200"/>
+            <a:off x="457200" y="1097280"/>
+            <a:ext cx="11277295" cy="5303520"/>
           </a:xfrm>
           <a:prstGeom prst="rect">
             <a:avLst/>
@@ -7709,106 +7557,106 @@
           <a:p>
             <a:pPr>
               <a:spcBef>
-                <a:spcPts val="800"/>
-              </a:spcBef>
-              <a:defRPr sz="1800">
-                <a:solidFill>
-                  <a:srgbClr val="F0F4F8"/>
-                </a:solidFill>
-              </a:defRPr>
-            </a:pPr>
-            <a:r>
-              <a:t>Integración con ERP para rotación de SKUs</a:t>
-            </a:r>
-          </a:p>
-          <a:p>
-            <a:pPr>
-              <a:spcBef>
-                <a:spcPts val="800"/>
-              </a:spcBef>
-              <a:defRPr sz="1800">
-                <a:solidFill>
-                  <a:srgbClr val="F0F4F8"/>
-                </a:solidFill>
-              </a:defRPr>
-            </a:pPr>
-            <a:r>
-              <a:t>Alertas push/notificaciones en tiempo real</a:t>
-            </a:r>
-          </a:p>
-          <a:p>
-            <a:pPr>
-              <a:spcBef>
-                <a:spcPts val="800"/>
-              </a:spcBef>
-              <a:defRPr sz="1800">
-                <a:solidFill>
-                  <a:srgbClr val="F0F4F8"/>
-                </a:solidFill>
-              </a:defRPr>
-            </a:pPr>
-            <a:r>
-              <a:t>Reportes por almacén específico</a:t>
-            </a:r>
-          </a:p>
-          <a:p>
-            <a:pPr>
-              <a:spcBef>
-                <a:spcPts val="800"/>
-              </a:spcBef>
-              <a:defRPr sz="1800">
-                <a:solidFill>
-                  <a:srgbClr val="F0F4F8"/>
-                </a:solidFill>
-              </a:defRPr>
-            </a:pPr>
-            <a:r>
-              <a:t>Gráficos de tendencia histórica</a:t>
-            </a:r>
-          </a:p>
-          <a:p>
-            <a:pPr>
-              <a:spcBef>
-                <a:spcPts val="800"/>
-              </a:spcBef>
-              <a:defRPr sz="1800">
-                <a:solidFill>
-                  <a:srgbClr val="F0F4F8"/>
-                </a:solidFill>
-              </a:defRPr>
-            </a:pPr>
-            <a:r>
-              <a:t>Módulo de reposición automática</a:t>
-            </a:r>
-          </a:p>
-          <a:p>
-            <a:pPr>
-              <a:spcBef>
-                <a:spcPts val="800"/>
-              </a:spcBef>
-              <a:defRPr sz="1800">
-                <a:solidFill>
-                  <a:srgbClr val="F0F4F8"/>
-                </a:solidFill>
-              </a:defRPr>
-            </a:pPr>
-            <a:r>
-              <a:t>App nativa móvil (React Native/Flutter)</a:t>
-            </a:r>
-          </a:p>
-          <a:p>
-            <a:pPr>
-              <a:spcBef>
-                <a:spcPts val="800"/>
-              </a:spcBef>
-              <a:defRPr sz="1800">
-                <a:solidFill>
-                  <a:srgbClr val="F0F4F8"/>
-                </a:solidFill>
-              </a:defRPr>
-            </a:pPr>
-            <a:r>
-              <a:t>Dashboard ejecutivo con KPIs avanzados</a:t>
+                <a:spcPts val="600"/>
+              </a:spcBef>
+            </a:pPr>
+            <a:r>
+              <a:rPr sz="1600" b="0">
+                <a:solidFill>
+                  <a:srgbClr val="F0F4F8"/>
+                </a:solidFill>
+              </a:rPr>
+              <a:t>  Integración con ERP para rotación de SKUs</a:t>
+            </a:r>
+          </a:p>
+          <a:p>
+            <a:pPr>
+              <a:spcBef>
+                <a:spcPts val="600"/>
+              </a:spcBef>
+            </a:pPr>
+            <a:r>
+              <a:rPr sz="1600" b="0">
+                <a:solidFill>
+                  <a:srgbClr val="F0F4F8"/>
+                </a:solidFill>
+              </a:rPr>
+              <a:t>  Alertas push/notificaciones en tiempo real</a:t>
+            </a:r>
+          </a:p>
+          <a:p>
+            <a:pPr>
+              <a:spcBef>
+                <a:spcPts val="600"/>
+              </a:spcBef>
+            </a:pPr>
+            <a:r>
+              <a:rPr sz="1600" b="0">
+                <a:solidFill>
+                  <a:srgbClr val="F0F4F8"/>
+                </a:solidFill>
+              </a:rPr>
+              <a:t>  Reportes por almacén específico</a:t>
+            </a:r>
+          </a:p>
+          <a:p>
+            <a:pPr>
+              <a:spcBef>
+                <a:spcPts val="600"/>
+              </a:spcBef>
+            </a:pPr>
+            <a:r>
+              <a:rPr sz="1600" b="0">
+                <a:solidFill>
+                  <a:srgbClr val="F0F4F8"/>
+                </a:solidFill>
+              </a:rPr>
+              <a:t>  Gráficos de tendencia histórica</a:t>
+            </a:r>
+          </a:p>
+          <a:p>
+            <a:pPr>
+              <a:spcBef>
+                <a:spcPts val="600"/>
+              </a:spcBef>
+            </a:pPr>
+            <a:r>
+              <a:rPr sz="1600" b="0">
+                <a:solidFill>
+                  <a:srgbClr val="F0F4F8"/>
+                </a:solidFill>
+              </a:rPr>
+              <a:t>  Módulo de reposición automática</a:t>
+            </a:r>
+          </a:p>
+          <a:p>
+            <a:pPr>
+              <a:spcBef>
+                <a:spcPts val="600"/>
+              </a:spcBef>
+            </a:pPr>
+            <a:r>
+              <a:rPr sz="1600" b="0">
+                <a:solidFill>
+                  <a:srgbClr val="F0F4F8"/>
+                </a:solidFill>
+              </a:rPr>
+              <a:t>  App nativa móvil (React Native/Flutter)</a:t>
+            </a:r>
+          </a:p>
+          <a:p>
+            <a:pPr>
+              <a:spcBef>
+                <a:spcPts val="600"/>
+              </a:spcBef>
+            </a:pPr>
+            <a:r>
+              <a:rPr sz="1600" b="0">
+                <a:solidFill>
+                  <a:srgbClr val="F0F4F8"/>
+                </a:solidFill>
+              </a:rPr>
+              <a:t>  Dashboard ejecutivo con KPIs avanzados</a:t>
             </a:r>
           </a:p>
         </p:txBody>
@@ -7883,7 +7731,7 @@
         <p:spPr>
           <a:xfrm>
             <a:off x="457200" y="2286000"/>
-            <a:ext cx="11277295" cy="1371600"/>
+            <a:ext cx="11277295" cy="1097280"/>
           </a:xfrm>
           <a:prstGeom prst="rect">
             <a:avLst/>
@@ -7896,14 +7744,13 @@
           </a:bodyPr>
           <a:lstStyle/>
           <a:p>
-            <a:pPr algn="ctr">
-              <a:defRPr sz="4800" b="1">
-                <a:solidFill>
-                  <a:srgbClr val="F0F4F8"/>
-                </a:solidFill>
-              </a:defRPr>
-            </a:pPr>
-            <a:r>
+            <a:pPr algn="ctr"/>
+            <a:r>
+              <a:rPr sz="4400" b="1">
+                <a:solidFill>
+                  <a:srgbClr val="F0F4F8"/>
+                </a:solidFill>
+              </a:rPr>
               <a:t>StockPulse CIPSA</a:t>
             </a:r>
           </a:p>
@@ -7917,8 +7764,8 @@
         </p:nvSpPr>
         <p:spPr>
           <a:xfrm>
-            <a:off x="457200" y="3840480"/>
-            <a:ext cx="11277295" cy="914400"/>
+            <a:off x="457200" y="3657600"/>
+            <a:ext cx="11277295" cy="731520"/>
           </a:xfrm>
           <a:prstGeom prst="rect">
             <a:avLst/>
@@ -7931,14 +7778,13 @@
           </a:bodyPr>
           <a:lstStyle/>
           <a:p>
-            <a:pPr algn="ctr">
-              <a:defRPr sz="2400">
+            <a:pPr algn="ctr"/>
+            <a:r>
+              <a:rPr sz="2200" b="0">
                 <a:solidFill>
                   <a:srgbClr val="94A3B8"/>
                 </a:solidFill>
-              </a:defRPr>
-            </a:pPr>
-            <a:r>
+              </a:rPr>
               <a:t>Inteligencia de Stock en Tiempo Real</a:t>
             </a:r>
           </a:p>
@@ -7952,7 +7798,7 @@
         </p:nvSpPr>
         <p:spPr>
           <a:xfrm>
-            <a:off x="457200" y="5486400"/>
+            <a:off x="457200" y="5303520"/>
             <a:ext cx="11277295" cy="457200"/>
           </a:xfrm>
           <a:prstGeom prst="rect">
@@ -7966,14 +7812,13 @@
           </a:bodyPr>
           <a:lstStyle/>
           <a:p>
-            <a:pPr algn="ctr">
-              <a:defRPr sz="1600">
+            <a:pPr algn="ctr"/>
+            <a:r>
+              <a:rPr sz="1600" b="0">
                 <a:solidFill>
                   <a:srgbClr val="00D084"/>
                 </a:solidFill>
-              </a:defRPr>
-            </a:pPr>
-            <a:r>
+              </a:rPr>
               <a:t>¿Consultas? Contactar al equipo G360</a:t>
             </a:r>
           </a:p>
@@ -8048,8 +7893,8 @@
         </p:nvSpPr>
         <p:spPr>
           <a:xfrm>
-            <a:off x="457200" y="2926080"/>
-            <a:ext cx="1828800" cy="73152"/>
+            <a:off x="457200" y="2743200"/>
+            <a:ext cx="1828800" cy="54864"/>
           </a:xfrm>
           <a:prstGeom prst="rect">
             <a:avLst/>
@@ -8091,7 +7936,7 @@
         </p:nvSpPr>
         <p:spPr>
           <a:xfrm>
-            <a:off x="457200" y="2560320"/>
+            <a:off x="457200" y="2377440"/>
             <a:ext cx="10972800" cy="914400"/>
           </a:xfrm>
           <a:prstGeom prst="rect">
@@ -8105,14 +7950,12 @@
           </a:bodyPr>
           <a:lstStyle/>
           <a:p>
-            <a:pPr>
-              <a:defRPr sz="4000" b="1">
-                <a:solidFill>
-                  <a:srgbClr val="F0F4F8"/>
-                </a:solidFill>
-              </a:defRPr>
-            </a:pPr>
-            <a:r>
+            <a:r>
+              <a:rPr sz="4000" b="1">
+                <a:solidFill>
+                  <a:srgbClr val="F0F4F8"/>
+                </a:solidFill>
+              </a:rPr>
               <a:t>Arquitectura del Sistema</a:t>
             </a:r>
           </a:p>
@@ -8187,8 +8030,8 @@
         </p:nvSpPr>
         <p:spPr>
           <a:xfrm>
-            <a:off x="457200" y="365760"/>
-            <a:ext cx="11277295" cy="731520"/>
+            <a:off x="457200" y="274320"/>
+            <a:ext cx="11277295" cy="640080"/>
           </a:xfrm>
           <a:prstGeom prst="rect">
             <a:avLst/>
@@ -8201,14 +8044,12 @@
           </a:bodyPr>
           <a:lstStyle/>
           <a:p>
-            <a:pPr>
-              <a:defRPr sz="3200" b="1">
-                <a:solidFill>
-                  <a:srgbClr val="F0F4F8"/>
-                </a:solidFill>
-              </a:defRPr>
-            </a:pPr>
-            <a:r>
+            <a:r>
+              <a:rPr sz="2800" b="1">
+                <a:solidFill>
+                  <a:srgbClr val="F0F4F8"/>
+                </a:solidFill>
+              </a:rPr>
               <a:t>Componentes Principales</a:t>
             </a:r>
           </a:p>
@@ -8222,8 +8063,8 @@
         </p:nvSpPr>
         <p:spPr>
           <a:xfrm>
-            <a:off x="457200" y="1280160"/>
-            <a:ext cx="11277295" cy="5029200"/>
+            <a:off x="457200" y="1097280"/>
+            <a:ext cx="11277295" cy="5303520"/>
           </a:xfrm>
           <a:prstGeom prst="rect">
             <a:avLst/>
@@ -8238,220 +8079,210 @@
           <a:p>
             <a:pPr>
               <a:spcBef>
-                <a:spcPts val="2000"/>
-              </a:spcBef>
-              <a:defRPr sz="2400" b="1">
+                <a:spcPts val="1600"/>
+              </a:spcBef>
+            </a:pPr>
+            <a:r>
+              <a:rPr sz="2000" b="1">
                 <a:solidFill>
                   <a:srgbClr val="00D084"/>
                 </a:solidFill>
-              </a:defRPr>
-            </a:pPr>
-            <a:r>
+              </a:rPr>
               <a:t>Frontend (GitHub Pages)</a:t>
             </a:r>
           </a:p>
           <a:p>
             <a:pPr>
               <a:spcBef>
-                <a:spcPts val="800"/>
-              </a:spcBef>
-              <a:defRPr sz="1800">
-                <a:solidFill>
-                  <a:srgbClr val="F0F4F8"/>
-                </a:solidFill>
-              </a:defRPr>
-            </a:pPr>
-            <a:r>
-              <a:t>g360-stock-reporter-lit (Lit 3 PWA)</a:t>
-            </a:r>
-          </a:p>
-          <a:p>
-            <a:pPr>
-              <a:spcBef>
-                <a:spcPts val="800"/>
-              </a:spcBef>
-              <a:defRPr sz="1800">
-                <a:solidFill>
-                  <a:srgbClr val="F0F4F8"/>
-                </a:solidFill>
-              </a:defRPr>
-            </a:pPr>
-            <a:r>
-              <a:t>Service Worker para offline/respaldo</a:t>
-            </a:r>
-          </a:p>
-          <a:p>
-            <a:pPr>
-              <a:spcBef>
-                <a:spcPts val="800"/>
-              </a:spcBef>
-              <a:defRPr sz="1800">
-                <a:solidFill>
-                  <a:srgbClr val="F0F4F8"/>
-                </a:solidFill>
-              </a:defRPr>
-            </a:pPr>
-            <a:r>
-              <a:t>Cache de 3 capas: memoria → sessionStorage → localStorage</a:t>
-            </a:r>
-          </a:p>
-          <a:p>
-            <a:pPr>
-              <a:spcBef>
-                <a:spcPts val="800"/>
-              </a:spcBef>
-              <a:defRPr sz="1800">
-                <a:solidFill>
-                  <a:srgbClr val="F0F4F8"/>
-                </a:solidFill>
-              </a:defRPr>
-            </a:pPr>
-          </a:p>
-          <a:p>
-            <a:pPr>
-              <a:spcBef>
-                <a:spcPts val="2000"/>
-              </a:spcBef>
-              <a:defRPr sz="2400" b="1">
+                <a:spcPts val="600"/>
+              </a:spcBef>
+            </a:pPr>
+            <a:r>
+              <a:rPr sz="1600" b="0">
+                <a:solidFill>
+                  <a:srgbClr val="F0F4F8"/>
+                </a:solidFill>
+              </a:rPr>
+              <a:t>  g360-stock-reporter-lit (Lit 3 PWA)</a:t>
+            </a:r>
+          </a:p>
+          <a:p>
+            <a:pPr>
+              <a:spcBef>
+                <a:spcPts val="600"/>
+              </a:spcBef>
+            </a:pPr>
+            <a:r>
+              <a:rPr sz="1600" b="0">
+                <a:solidFill>
+                  <a:srgbClr val="F0F4F8"/>
+                </a:solidFill>
+              </a:rPr>
+              <a:t>  Service Worker para offline/respaldo</a:t>
+            </a:r>
+          </a:p>
+          <a:p>
+            <a:pPr>
+              <a:spcBef>
+                <a:spcPts val="600"/>
+              </a:spcBef>
+            </a:pPr>
+            <a:r>
+              <a:rPr sz="1600" b="0">
+                <a:solidFill>
+                  <a:srgbClr val="F0F4F8"/>
+                </a:solidFill>
+              </a:rPr>
+              <a:t>  Cache de 3 capas: memoria → sessionStorage → localStorage</a:t>
+            </a:r>
+          </a:p>
+          <a:p>
+            <a:pPr>
+              <a:spcBef>
+                <a:spcPts val="600"/>
+              </a:spcBef>
+            </a:pPr>
+          </a:p>
+          <a:p>
+            <a:pPr>
+              <a:spcBef>
+                <a:spcPts val="1600"/>
+              </a:spcBef>
+            </a:pPr>
+            <a:r>
+              <a:rPr sz="2000" b="1">
                 <a:solidFill>
                   <a:srgbClr val="00D084"/>
                 </a:solidFill>
-              </a:defRPr>
-            </a:pPr>
-            <a:r>
+              </a:rPr>
               <a:t>Backend (Render)</a:t>
             </a:r>
           </a:p>
           <a:p>
             <a:pPr>
               <a:spcBef>
-                <a:spcPts val="800"/>
-              </a:spcBef>
-              <a:defRPr sz="1800">
-                <a:solidFill>
-                  <a:srgbClr val="F0F4F8"/>
-                </a:solidFill>
-              </a:defRPr>
-            </a:pPr>
-            <a:r>
-              <a:t>g360-stock-api (FastAPI + Python)</a:t>
-            </a:r>
-          </a:p>
-          <a:p>
-            <a:pPr>
-              <a:spcBef>
-                <a:spcPts val="800"/>
-              </a:spcBef>
-              <a:defRPr sz="1800">
-                <a:solidFill>
-                  <a:srgbClr val="F0F4F8"/>
-                </a:solidFill>
-              </a:defRPr>
-            </a:pPr>
-            <a:r>
-              <a:t>Fuente: appweb.cipsa.com.pe:8054</a:t>
-            </a:r>
-          </a:p>
-          <a:p>
-            <a:pPr>
-              <a:spcBef>
-                <a:spcPts val="800"/>
-              </a:spcBef>
-              <a:defRPr sz="1800">
-                <a:solidFill>
-                  <a:srgbClr val="F0F4F8"/>
-                </a:solidFill>
-              </a:defRPr>
-            </a:pPr>
-            <a:r>
-              <a:t>Enriquecimiento con catálogo maestro</a:t>
-            </a:r>
-          </a:p>
-          <a:p>
-            <a:pPr>
-              <a:spcBef>
-                <a:spcPts val="800"/>
-              </a:spcBef>
-              <a:defRPr sz="1800">
-                <a:solidFill>
-                  <a:srgbClr val="F0F4F8"/>
-                </a:solidFill>
-              </a:defRPr>
-            </a:pPr>
-            <a:r>
-              <a:t>TTL de caché: 15 minutos</a:t>
-            </a:r>
-          </a:p>
-          <a:p>
-            <a:pPr>
-              <a:spcBef>
-                <a:spcPts val="800"/>
-              </a:spcBef>
-              <a:defRPr sz="1800">
-                <a:solidFill>
-                  <a:srgbClr val="F0F4F8"/>
-                </a:solidFill>
-              </a:defRPr>
-            </a:pPr>
-          </a:p>
-          <a:p>
-            <a:pPr>
-              <a:spcBef>
-                <a:spcPts val="2000"/>
-              </a:spcBef>
-              <a:defRPr sz="2400" b="1">
+                <a:spcPts val="600"/>
+              </a:spcBef>
+            </a:pPr>
+            <a:r>
+              <a:rPr sz="1600" b="0">
+                <a:solidFill>
+                  <a:srgbClr val="F0F4F8"/>
+                </a:solidFill>
+              </a:rPr>
+              <a:t>  g360-stock-api (FastAPI + Python)</a:t>
+            </a:r>
+          </a:p>
+          <a:p>
+            <a:pPr>
+              <a:spcBef>
+                <a:spcPts val="600"/>
+              </a:spcBef>
+            </a:pPr>
+            <a:r>
+              <a:rPr sz="1600" b="0">
+                <a:solidFill>
+                  <a:srgbClr val="F0F4F8"/>
+                </a:solidFill>
+              </a:rPr>
+              <a:t>  Fuente: appweb.cipsa.com.pe:8054</a:t>
+            </a:r>
+          </a:p>
+          <a:p>
+            <a:pPr>
+              <a:spcBef>
+                <a:spcPts val="600"/>
+              </a:spcBef>
+            </a:pPr>
+            <a:r>
+              <a:rPr sz="1600" b="0">
+                <a:solidFill>
+                  <a:srgbClr val="F0F4F8"/>
+                </a:solidFill>
+              </a:rPr>
+              <a:t>  Enriquecimiento con catálogo maestro</a:t>
+            </a:r>
+          </a:p>
+          <a:p>
+            <a:pPr>
+              <a:spcBef>
+                <a:spcPts val="600"/>
+              </a:spcBef>
+            </a:pPr>
+            <a:r>
+              <a:rPr sz="1600" b="0">
+                <a:solidFill>
+                  <a:srgbClr val="F0F4F8"/>
+                </a:solidFill>
+              </a:rPr>
+              <a:t>  TTL de caché: 15 minutos</a:t>
+            </a:r>
+          </a:p>
+          <a:p>
+            <a:pPr>
+              <a:spcBef>
+                <a:spcPts val="600"/>
+              </a:spcBef>
+            </a:pPr>
+          </a:p>
+          <a:p>
+            <a:pPr>
+              <a:spcBef>
+                <a:spcPts val="1600"/>
+              </a:spcBef>
+            </a:pPr>
+            <a:r>
+              <a:rPr sz="2000" b="1">
                 <a:solidFill>
                   <a:srgbClr val="00D084"/>
                 </a:solidFill>
-              </a:defRPr>
-            </a:pPr>
-            <a:r>
+              </a:rPr>
               <a:t>Catálogo Maestro</a:t>
             </a:r>
           </a:p>
           <a:p>
             <a:pPr>
               <a:spcBef>
-                <a:spcPts val="800"/>
-              </a:spcBef>
-              <a:defRPr sz="1800">
-                <a:solidFill>
-                  <a:srgbClr val="F0F4F8"/>
-                </a:solidFill>
-              </a:defRPr>
-            </a:pPr>
-            <a:r>
-              <a:t>g360-master-data (JSON)</a:t>
-            </a:r>
-          </a:p>
-          <a:p>
-            <a:pPr>
-              <a:spcBef>
-                <a:spcPts val="800"/>
-              </a:spcBef>
-              <a:defRPr sz="1800">
-                <a:solidFill>
-                  <a:srgbClr val="F0F4F8"/>
-                </a:solidFill>
-              </a:defRPr>
-            </a:pPr>
-            <a:r>
-              <a:t>Campos: SKU, descripción, un_bx, peso, líneas, categorías</a:t>
-            </a:r>
-          </a:p>
-          <a:p>
-            <a:pPr>
-              <a:spcBef>
-                <a:spcPts val="800"/>
-              </a:spcBef>
-              <a:defRPr sz="1800">
-                <a:solidFill>
-                  <a:srgbClr val="F0F4F8"/>
-                </a:solidFill>
-              </a:defRPr>
-            </a:pPr>
-            <a:r>
-              <a:t>Auto-carga desde GitHub en cada reinicio</a:t>
+                <a:spcPts val="600"/>
+              </a:spcBef>
+            </a:pPr>
+            <a:r>
+              <a:rPr sz="1600" b="0">
+                <a:solidFill>
+                  <a:srgbClr val="F0F4F8"/>
+                </a:solidFill>
+              </a:rPr>
+              <a:t>  g360-master-data (JSON)</a:t>
+            </a:r>
+          </a:p>
+          <a:p>
+            <a:pPr>
+              <a:spcBef>
+                <a:spcPts val="600"/>
+              </a:spcBef>
+            </a:pPr>
+            <a:r>
+              <a:rPr sz="1600" b="0">
+                <a:solidFill>
+                  <a:srgbClr val="F0F4F8"/>
+                </a:solidFill>
+              </a:rPr>
+              <a:t>  Campos: SKU, descripción, un_bx, peso, líneas, categorías</a:t>
+            </a:r>
+          </a:p>
+          <a:p>
+            <a:pPr>
+              <a:spcBef>
+                <a:spcPts val="600"/>
+              </a:spcBef>
+            </a:pPr>
+            <a:r>
+              <a:rPr sz="1600" b="0">
+                <a:solidFill>
+                  <a:srgbClr val="F0F4F8"/>
+                </a:solidFill>
+              </a:rPr>
+              <a:t>  Auto-carga desde GitHub en cada reinicio</a:t>
             </a:r>
           </a:p>
         </p:txBody>
@@ -8525,8 +8356,8 @@
         </p:nvSpPr>
         <p:spPr>
           <a:xfrm>
-            <a:off x="457200" y="365760"/>
-            <a:ext cx="11277295" cy="731520"/>
+            <a:off x="457200" y="274320"/>
+            <a:ext cx="11277295" cy="640080"/>
           </a:xfrm>
           <a:prstGeom prst="rect">
             <a:avLst/>
@@ -8539,14 +8370,12 @@
           </a:bodyPr>
           <a:lstStyle/>
           <a:p>
-            <a:pPr>
-              <a:defRPr sz="3200" b="1">
-                <a:solidFill>
-                  <a:srgbClr val="F0F4F8"/>
-                </a:solidFill>
-              </a:defRPr>
-            </a:pPr>
-            <a:r>
+            <a:r>
+              <a:rPr sz="2800" b="1">
+                <a:solidFill>
+                  <a:srgbClr val="F0F4F8"/>
+                </a:solidFill>
+              </a:rPr>
               <a:t>Diagrama de Flujo de Datos</a:t>
             </a:r>
           </a:p>
@@ -8560,8 +8389,8 @@
         </p:nvSpPr>
         <p:spPr>
           <a:xfrm>
-            <a:off x="914400" y="1371600"/>
-            <a:ext cx="10362895" cy="4572000"/>
+            <a:off x="731520" y="1188720"/>
+            <a:ext cx="10728655" cy="4754880"/>
           </a:xfrm>
           <a:prstGeom prst="rect">
             <a:avLst/>
@@ -8593,26 +8422,24 @@
           <a:bodyPr rtlCol="0" anchor="ctr" wrap="square"/>
           <a:lstStyle/>
           <a:p>
-            <a:pPr algn="ctr">
-              <a:defRPr sz="2800" b="1">
+            <a:pPr algn="ctr"/>
+            <a:r>
+              <a:rPr sz="2400" b="1">
                 <a:solidFill>
                   <a:srgbClr val="94A3B8"/>
                 </a:solidFill>
-              </a:defRPr>
-            </a:pPr>
-            <a:r>
+              </a:rPr>
               <a:t>[CAPTURA DE PANTALLA]</a:t>
             </a:r>
           </a:p>
           <a:p>
-            <a:pPr algn="ctr">
-              <a:defRPr sz="1400">
+            <a:pPr algn="ctr"/>
+            <a:r>
+              <a:rPr sz="1400" b="0">
                 <a:solidFill>
                   <a:srgbClr val="94A3B8"/>
                 </a:solidFill>
-              </a:defRPr>
-            </a:pPr>
-            <a:r>
+              </a:rPr>
               <a:t>Captura del diagrama arquitectura</a:t>
             </a:r>
           </a:p>
@@ -8687,8 +8514,8 @@
         </p:nvSpPr>
         <p:spPr>
           <a:xfrm>
-            <a:off x="457200" y="365760"/>
-            <a:ext cx="11277295" cy="731520"/>
+            <a:off x="457200" y="274320"/>
+            <a:ext cx="11277295" cy="640080"/>
           </a:xfrm>
           <a:prstGeom prst="rect">
             <a:avLst/>
@@ -8701,14 +8528,12 @@
           </a:bodyPr>
           <a:lstStyle/>
           <a:p>
-            <a:pPr>
-              <a:defRPr sz="3200" b="1">
-                <a:solidFill>
-                  <a:srgbClr val="F0F4F8"/>
-                </a:solidFill>
-              </a:defRPr>
-            </a:pPr>
-            <a:r>
+            <a:r>
+              <a:rPr sz="2800" b="1">
+                <a:solidFill>
+                  <a:srgbClr val="F0F4F8"/>
+                </a:solidFill>
+              </a:rPr>
               <a:t>Fuentes de Datos (appweb)</a:t>
             </a:r>
           </a:p>
@@ -8722,8 +8547,8 @@
         </p:nvSpPr>
         <p:spPr>
           <a:xfrm>
-            <a:off x="457200" y="1280160"/>
-            <a:ext cx="11277295" cy="5029200"/>
+            <a:off x="457200" y="1097280"/>
+            <a:ext cx="11277295" cy="5303520"/>
           </a:xfrm>
           <a:prstGeom prst="rect">
             <a:avLst/>
@@ -8738,175 +8563,165 @@
           <a:p>
             <a:pPr>
               <a:spcBef>
-                <a:spcPts val="2000"/>
-              </a:spcBef>
-              <a:defRPr sz="2400" b="1">
+                <a:spcPts val="1600"/>
+              </a:spcBef>
+            </a:pPr>
+            <a:r>
+              <a:rPr sz="2000" b="1">
                 <a:solidFill>
                   <a:srgbClr val="00D084"/>
                 </a:solidFill>
-              </a:defRPr>
-            </a:pPr>
-            <a:r>
+              </a:rPr>
               <a:t>Appweb 1 - General</a:t>
             </a:r>
           </a:p>
           <a:p>
             <a:pPr>
               <a:spcBef>
-                <a:spcPts val="800"/>
-              </a:spcBef>
-              <a:defRPr sz="1800">
-                <a:solidFill>
-                  <a:srgbClr val="F0F4F8"/>
-                </a:solidFill>
-              </a:defRPr>
-            </a:pPr>
-            <a:r>
-              <a:t>Almacenes: VES, 40, 118, 121, 122, 129</a:t>
-            </a:r>
-          </a:p>
-          <a:p>
-            <a:pPr>
-              <a:spcBef>
-                <a:spcPts val="800"/>
-              </a:spcBef>
-              <a:defRPr sz="1800">
-                <a:solidFill>
-                  <a:srgbClr val="F0F4F8"/>
-                </a:solidFill>
-              </a:defRPr>
-            </a:pPr>
-            <a:r>
-              <a:t>Fuente principal de stock de venta</a:t>
-            </a:r>
-          </a:p>
-          <a:p>
-            <a:pPr>
-              <a:spcBef>
-                <a:spcPts val="800"/>
-              </a:spcBef>
-              <a:defRPr sz="1800">
-                <a:solidFill>
-                  <a:srgbClr val="F0F4F8"/>
-                </a:solidFill>
-              </a:defRPr>
-            </a:pPr>
-          </a:p>
-          <a:p>
-            <a:pPr>
-              <a:spcBef>
-                <a:spcPts val="2000"/>
-              </a:spcBef>
-              <a:defRPr sz="2400" b="1">
+                <a:spcPts val="600"/>
+              </a:spcBef>
+            </a:pPr>
+            <a:r>
+              <a:rPr sz="1600" b="0">
+                <a:solidFill>
+                  <a:srgbClr val="F0F4F8"/>
+                </a:solidFill>
+              </a:rPr>
+              <a:t>  Almacenes: VES, 40, 118, 121, 122, 129</a:t>
+            </a:r>
+          </a:p>
+          <a:p>
+            <a:pPr>
+              <a:spcBef>
+                <a:spcPts val="600"/>
+              </a:spcBef>
+            </a:pPr>
+            <a:r>
+              <a:rPr sz="1600" b="0">
+                <a:solidFill>
+                  <a:srgbClr val="F0F4F8"/>
+                </a:solidFill>
+              </a:rPr>
+              <a:t>  Fuente principal de stock de venta</a:t>
+            </a:r>
+          </a:p>
+          <a:p>
+            <a:pPr>
+              <a:spcBef>
+                <a:spcPts val="600"/>
+              </a:spcBef>
+            </a:pPr>
+          </a:p>
+          <a:p>
+            <a:pPr>
+              <a:spcBef>
+                <a:spcPts val="1600"/>
+              </a:spcBef>
+            </a:pPr>
+            <a:r>
+              <a:rPr sz="2000" b="1">
                 <a:solidFill>
                   <a:srgbClr val="00D084"/>
                 </a:solidFill>
-              </a:defRPr>
-            </a:pPr>
-            <a:r>
+              </a:rPr>
               <a:t>Appweb 2 - Sucursales</a:t>
             </a:r>
           </a:p>
           <a:p>
             <a:pPr>
               <a:spcBef>
-                <a:spcPts val="800"/>
-              </a:spcBef>
-              <a:defRPr sz="1800">
-                <a:solidFill>
-                  <a:srgbClr val="F0F4F8"/>
-                </a:solidFill>
-              </a:defRPr>
-            </a:pPr>
-            <a:r>
-              <a:t>Almacenes: S1, S2, S3, S5, S6, S9, S11, S14, S17</a:t>
-            </a:r>
-          </a:p>
-          <a:p>
-            <a:pPr>
-              <a:spcBef>
-                <a:spcPts val="800"/>
-              </a:spcBef>
-              <a:defRPr sz="1800">
-                <a:solidFill>
-                  <a:srgbClr val="F0F4F8"/>
-                </a:solidFill>
-              </a:defRPr>
-            </a:pPr>
-            <a:r>
-              <a:t>Datos consolidados de sucursales</a:t>
-            </a:r>
-          </a:p>
-          <a:p>
-            <a:pPr>
-              <a:spcBef>
-                <a:spcPts val="800"/>
-              </a:spcBef>
-              <a:defRPr sz="1800">
-                <a:solidFill>
-                  <a:srgbClr val="F0F4F8"/>
-                </a:solidFill>
-              </a:defRPr>
-            </a:pPr>
-          </a:p>
-          <a:p>
-            <a:pPr>
-              <a:spcBef>
-                <a:spcPts val="2000"/>
-              </a:spcBef>
-              <a:defRPr sz="2400" b="1">
+                <a:spcPts val="600"/>
+              </a:spcBef>
+            </a:pPr>
+            <a:r>
+              <a:rPr sz="1600" b="0">
+                <a:solidFill>
+                  <a:srgbClr val="F0F4F8"/>
+                </a:solidFill>
+              </a:rPr>
+              <a:t>  Almacenes: S1, S2, S3, S5, S6, S9, S11, S14, S17</a:t>
+            </a:r>
+          </a:p>
+          <a:p>
+            <a:pPr>
+              <a:spcBef>
+                <a:spcPts val="600"/>
+              </a:spcBef>
+            </a:pPr>
+            <a:r>
+              <a:rPr sz="1600" b="0">
+                <a:solidFill>
+                  <a:srgbClr val="F0F4F8"/>
+                </a:solidFill>
+              </a:rPr>
+              <a:t>  Datos consolidados de sucursales</a:t>
+            </a:r>
+          </a:p>
+          <a:p>
+            <a:pPr>
+              <a:spcBef>
+                <a:spcPts val="600"/>
+              </a:spcBef>
+            </a:pPr>
+          </a:p>
+          <a:p>
+            <a:pPr>
+              <a:spcBef>
+                <a:spcPts val="1600"/>
+              </a:spcBef>
+            </a:pPr>
+            <a:r>
+              <a:rPr sz="2000" b="1">
                 <a:solidFill>
                   <a:srgbClr val="00D084"/>
                 </a:solidFill>
-              </a:defRPr>
-            </a:pPr>
-            <a:r>
+              </a:rPr>
               <a:t>Tipo de Almacén</a:t>
             </a:r>
           </a:p>
           <a:p>
             <a:pPr>
               <a:spcBef>
-                <a:spcPts val="800"/>
-              </a:spcBef>
-              <a:defRPr sz="1800">
-                <a:solidFill>
-                  <a:srgbClr val="F0F4F8"/>
-                </a:solidFill>
-              </a:defRPr>
-            </a:pPr>
-            <a:r>
-              <a:t>venta: VES, 40, 121 (inspección), 122, 129</a:t>
-            </a:r>
-          </a:p>
-          <a:p>
-            <a:pPr>
-              <a:spcBef>
-                <a:spcPts val="800"/>
-              </a:spcBef>
-              <a:defRPr sz="1800">
-                <a:solidFill>
-                  <a:srgbClr val="F0F4F8"/>
-                </a:solidFill>
-              </a:defRPr>
-            </a:pPr>
-            <a:r>
-              <a:t>mktd: 118, S* (sucursales)</a:t>
-            </a:r>
-          </a:p>
-          <a:p>
-            <a:pPr>
-              <a:spcBef>
-                <a:spcPts val="800"/>
-              </a:spcBef>
-              <a:defRPr sz="1800">
-                <a:solidFill>
-                  <a:srgbClr val="F0F4F8"/>
-                </a:solidFill>
-              </a:defRPr>
-            </a:pPr>
-            <a:r>
-              <a:t>Solo almacenes tipo 'venta' cuentan para el stock comercial</a:t>
+                <a:spcPts val="600"/>
+              </a:spcBef>
+            </a:pPr>
+            <a:r>
+              <a:rPr sz="1600" b="0">
+                <a:solidFill>
+                  <a:srgbClr val="F0F4F8"/>
+                </a:solidFill>
+              </a:rPr>
+              <a:t>  venta: VES, 40, 121 (inspección), 122, 129</a:t>
+            </a:r>
+          </a:p>
+          <a:p>
+            <a:pPr>
+              <a:spcBef>
+                <a:spcPts val="600"/>
+              </a:spcBef>
+            </a:pPr>
+            <a:r>
+              <a:rPr sz="1600" b="0">
+                <a:solidFill>
+                  <a:srgbClr val="F0F4F8"/>
+                </a:solidFill>
+              </a:rPr>
+              <a:t>  mktd: 118, S* (sucursales)</a:t>
+            </a:r>
+          </a:p>
+          <a:p>
+            <a:pPr>
+              <a:spcBef>
+                <a:spcPts val="600"/>
+              </a:spcBef>
+            </a:pPr>
+            <a:r>
+              <a:rPr sz="1600" b="0">
+                <a:solidFill>
+                  <a:srgbClr val="F0F4F8"/>
+                </a:solidFill>
+              </a:rPr>
+              <a:t>  Solo almacenes tipo 'venta' cuentan para el stock comercial</a:t>
             </a:r>
           </a:p>
         </p:txBody>
@@ -8980,8 +8795,8 @@
         </p:nvSpPr>
         <p:spPr>
           <a:xfrm>
-            <a:off x="457200" y="2926080"/>
-            <a:ext cx="1828800" cy="73152"/>
+            <a:off x="457200" y="2743200"/>
+            <a:ext cx="1828800" cy="54864"/>
           </a:xfrm>
           <a:prstGeom prst="rect">
             <a:avLst/>
@@ -9023,7 +8838,7 @@
         </p:nvSpPr>
         <p:spPr>
           <a:xfrm>
-            <a:off x="457200" y="2560320"/>
+            <a:off x="457200" y="2377440"/>
             <a:ext cx="10972800" cy="914400"/>
           </a:xfrm>
           <a:prstGeom prst="rect">
@@ -9037,14 +8852,12 @@
           </a:bodyPr>
           <a:lstStyle/>
           <a:p>
-            <a:pPr>
-              <a:defRPr sz="4000" b="1">
-                <a:solidFill>
-                  <a:srgbClr val="F0F4F8"/>
-                </a:solidFill>
-              </a:defRPr>
-            </a:pPr>
-            <a:r>
+            <a:r>
+              <a:rPr sz="4000" b="1">
+                <a:solidFill>
+                  <a:srgbClr val="F0F4F8"/>
+                </a:solidFill>
+              </a:rPr>
               <a:t>Categorías de Negocio</a:t>
             </a:r>
           </a:p>
@@ -9119,8 +8932,8 @@
         </p:nvSpPr>
         <p:spPr>
           <a:xfrm>
-            <a:off x="457200" y="365760"/>
-            <a:ext cx="11277295" cy="731520"/>
+            <a:off x="457200" y="274320"/>
+            <a:ext cx="11277295" cy="640080"/>
           </a:xfrm>
           <a:prstGeom prst="rect">
             <a:avLst/>
@@ -9133,14 +8946,12 @@
           </a:bodyPr>
           <a:lstStyle/>
           <a:p>
-            <a:pPr>
-              <a:defRPr sz="3200" b="1">
-                <a:solidFill>
-                  <a:srgbClr val="F0F4F8"/>
-                </a:solidFill>
-              </a:defRPr>
-            </a:pPr>
-            <a:r>
+            <a:r>
+              <a:rPr sz="2800" b="1">
+                <a:solidFill>
+                  <a:srgbClr val="F0F4F8"/>
+                </a:solidFill>
+              </a:rPr>
               <a:t>Lineas y Categorías</a:t>
             </a:r>
           </a:p>
@@ -9154,8 +8965,8 @@
         </p:nvSpPr>
         <p:spPr>
           <a:xfrm>
-            <a:off x="457200" y="1280160"/>
-            <a:ext cx="11277295" cy="5029200"/>
+            <a:off x="457200" y="1097280"/>
+            <a:ext cx="11277295" cy="5303520"/>
           </a:xfrm>
           <a:prstGeom prst="rect">
             <a:avLst/>
@@ -9170,178 +8981,173 @@
           <a:p>
             <a:pPr>
               <a:spcBef>
-                <a:spcPts val="2000"/>
-              </a:spcBef>
-              <a:defRPr sz="2400" b="1">
+                <a:spcPts val="1600"/>
+              </a:spcBef>
+            </a:pPr>
+            <a:r>
+              <a:rPr sz="2000" b="1">
                 <a:solidFill>
                   <a:srgbClr val="00D084"/>
                 </a:solidFill>
-              </a:defRPr>
-            </a:pPr>
-            <a:r>
+              </a:rPr>
               <a:t>Mapeo Automático por Código de Línea</a:t>
             </a:r>
           </a:p>
           <a:p>
             <a:pPr>
               <a:spcBef>
-                <a:spcPts val="800"/>
-              </a:spcBef>
-              <a:defRPr sz="1800">
-                <a:solidFill>
-                  <a:srgbClr val="F0F4F8"/>
-                </a:solidFill>
-              </a:defRPr>
-            </a:pPr>
-            <a:r>
-              <a:t>VINIBALL → líneas: 01, MA, 14, AD</a:t>
-            </a:r>
-          </a:p>
-          <a:p>
-            <a:pPr>
-              <a:spcBef>
-                <a:spcPts val="800"/>
-              </a:spcBef>
-              <a:defRPr sz="1800">
-                <a:solidFill>
-                  <a:srgbClr val="F0F4F8"/>
-                </a:solidFill>
-              </a:defRPr>
-            </a:pPr>
-            <a:r>
-              <a:t>VINIFAN → líneas: 02, 09, 11, 72-79, CE, CF</a:t>
-            </a:r>
-          </a:p>
-          <a:p>
-            <a:pPr>
-              <a:spcBef>
-                <a:spcPts val="800"/>
-              </a:spcBef>
-              <a:defRPr sz="1800">
-                <a:solidFill>
-                  <a:srgbClr val="F0F4F8"/>
-                </a:solidFill>
-              </a:defRPr>
-            </a:pPr>
-            <a:r>
-              <a:t>INDUMENTARIA → líneas: 57, 52</a:t>
-            </a:r>
-          </a:p>
-          <a:p>
-            <a:pPr>
-              <a:spcBef>
-                <a:spcPts val="800"/>
-              </a:spcBef>
-              <a:defRPr sz="1800">
-                <a:solidFill>
-                  <a:srgbClr val="F0F4F8"/>
-                </a:solidFill>
-              </a:defRPr>
-            </a:pPr>
-            <a:r>
-              <a:t>REPRESENTADAS → línea: 85</a:t>
-            </a:r>
-          </a:p>
-          <a:p>
-            <a:pPr>
-              <a:spcBef>
-                <a:spcPts val="800"/>
-              </a:spcBef>
-              <a:defRPr sz="1800">
-                <a:solidFill>
-                  <a:srgbClr val="F0F4F8"/>
-                </a:solidFill>
-              </a:defRPr>
-            </a:pPr>
-            <a:r>
-              <a:t>PUBLICIDAD → líneas: 80, 81</a:t>
-            </a:r>
-          </a:p>
-          <a:p>
-            <a:pPr>
-              <a:spcBef>
-                <a:spcPts val="800"/>
-              </a:spcBef>
-              <a:defRPr sz="1800">
-                <a:solidFill>
-                  <a:srgbClr val="F0F4F8"/>
-                </a:solidFill>
-              </a:defRPr>
-            </a:pPr>
-          </a:p>
-          <a:p>
-            <a:pPr>
-              <a:spcBef>
-                <a:spcPts val="2000"/>
-              </a:spcBef>
-              <a:defRPr sz="2400" b="1">
+                <a:spcPts val="600"/>
+              </a:spcBef>
+            </a:pPr>
+            <a:r>
+              <a:rPr sz="1600" b="0">
+                <a:solidFill>
+                  <a:srgbClr val="F0F4F8"/>
+                </a:solidFill>
+              </a:rPr>
+              <a:t>  VINIBALL → líneas: 01, MA, 14, AD</a:t>
+            </a:r>
+          </a:p>
+          <a:p>
+            <a:pPr>
+              <a:spcBef>
+                <a:spcPts val="600"/>
+              </a:spcBef>
+            </a:pPr>
+            <a:r>
+              <a:rPr sz="1600" b="0">
+                <a:solidFill>
+                  <a:srgbClr val="F0F4F8"/>
+                </a:solidFill>
+              </a:rPr>
+              <a:t>  VINIFAN → líneas: 02, 09, 11, 72-79, CE, CF</a:t>
+            </a:r>
+          </a:p>
+          <a:p>
+            <a:pPr>
+              <a:spcBef>
+                <a:spcPts val="600"/>
+              </a:spcBef>
+            </a:pPr>
+            <a:r>
+              <a:rPr sz="1600" b="0">
+                <a:solidFill>
+                  <a:srgbClr val="F0F4F8"/>
+                </a:solidFill>
+              </a:rPr>
+              <a:t>  INDUMENTARIA → líneas: 57, 52</a:t>
+            </a:r>
+          </a:p>
+          <a:p>
+            <a:pPr>
+              <a:spcBef>
+                <a:spcPts val="600"/>
+              </a:spcBef>
+            </a:pPr>
+            <a:r>
+              <a:rPr sz="1600" b="0">
+                <a:solidFill>
+                  <a:srgbClr val="F0F4F8"/>
+                </a:solidFill>
+              </a:rPr>
+              <a:t>  REPRESENTADAS → línea: 85</a:t>
+            </a:r>
+          </a:p>
+          <a:p>
+            <a:pPr>
+              <a:spcBef>
+                <a:spcPts val="600"/>
+              </a:spcBef>
+            </a:pPr>
+            <a:r>
+              <a:rPr sz="1600" b="0">
+                <a:solidFill>
+                  <a:srgbClr val="F0F4F8"/>
+                </a:solidFill>
+              </a:rPr>
+              <a:t>  PUBLICIDAD → líneas: 80, 81</a:t>
+            </a:r>
+          </a:p>
+          <a:p>
+            <a:pPr>
+              <a:spcBef>
+                <a:spcPts val="600"/>
+              </a:spcBef>
+            </a:pPr>
+          </a:p>
+          <a:p>
+            <a:pPr>
+              <a:spcBef>
+                <a:spcPts val="1600"/>
+              </a:spcBef>
+            </a:pPr>
+            <a:r>
+              <a:rPr sz="2000" b="1">
                 <a:solidFill>
                   <a:srgbClr val="00D084"/>
                 </a:solidFill>
-              </a:defRPr>
-            </a:pPr>
-            <a:r>
+              </a:rPr>
               <a:t>Reglas de Asignación</a:t>
             </a:r>
           </a:p>
           <a:p>
             <a:pPr>
               <a:spcBef>
-                <a:spcPts val="800"/>
-              </a:spcBef>
-              <a:defRPr sz="1800">
-                <a:solidFill>
-                  <a:srgbClr val="F0F4F8"/>
-                </a:solidFill>
-              </a:defRPr>
-            </a:pPr>
-            <a:r>
-              <a:t>El código de línea se extrae del reporte appweb</a:t>
-            </a:r>
-          </a:p>
-          <a:p>
-            <a:pPr>
-              <a:spcBef>
-                <a:spcPts val="800"/>
-              </a:spcBef>
-              <a:defRPr sz="1800">
-                <a:solidFill>
-                  <a:srgbClr val="F0F4F8"/>
-                </a:solidFill>
-              </a:defRPr>
-            </a:pPr>
-            <a:r>
-              <a:t>Normalización: '0179 - ACCESORIOS' → '79 - ACCESORIOS'</a:t>
-            </a:r>
-          </a:p>
-          <a:p>
-            <a:pPr>
-              <a:spcBef>
-                <a:spcPts val="800"/>
-              </a:spcBef>
-              <a:defRPr sz="1800">
-                <a:solidFill>
-                  <a:srgbClr val="F0F4F8"/>
-                </a:solidFill>
-              </a:defRPr>
-            </a:pPr>
-            <a:r>
-              <a:t>Código '79' → categoría VINIFAN</a:t>
-            </a:r>
-          </a:p>
-          <a:p>
-            <a:pPr>
-              <a:spcBef>
-                <a:spcPts val="800"/>
-              </a:spcBef>
-              <a:defRPr sz="1800">
-                <a:solidFill>
-                  <a:srgbClr val="F0F4F8"/>
-                </a:solidFill>
-              </a:defRPr>
-            </a:pPr>
-            <a:r>
-              <a:t>SKUs sin línea asignada → 'OTROS'</a:t>
+                <a:spcPts val="600"/>
+              </a:spcBef>
+            </a:pPr>
+            <a:r>
+              <a:rPr sz="1600" b="0">
+                <a:solidFill>
+                  <a:srgbClr val="F0F4F8"/>
+                </a:solidFill>
+              </a:rPr>
+              <a:t>  El código de línea se extrae del reporte appweb</a:t>
+            </a:r>
+          </a:p>
+          <a:p>
+            <a:pPr>
+              <a:spcBef>
+                <a:spcPts val="600"/>
+              </a:spcBef>
+            </a:pPr>
+            <a:r>
+              <a:rPr sz="1600" b="0">
+                <a:solidFill>
+                  <a:srgbClr val="F0F4F8"/>
+                </a:solidFill>
+              </a:rPr>
+              <a:t>  Normalización: '0179 - ACCESORIOS' → '79 - ACCESORIOS'</a:t>
+            </a:r>
+          </a:p>
+          <a:p>
+            <a:pPr>
+              <a:spcBef>
+                <a:spcPts val="600"/>
+              </a:spcBef>
+            </a:pPr>
+            <a:r>
+              <a:rPr sz="1600" b="0">
+                <a:solidFill>
+                  <a:srgbClr val="F0F4F8"/>
+                </a:solidFill>
+              </a:rPr>
+              <a:t>  Código '79' → categoría VINIFAN</a:t>
+            </a:r>
+          </a:p>
+          <a:p>
+            <a:pPr>
+              <a:spcBef>
+                <a:spcPts val="600"/>
+              </a:spcBef>
+            </a:pPr>
+            <a:r>
+              <a:rPr sz="1600" b="0">
+                <a:solidFill>
+                  <a:srgbClr val="F0F4F8"/>
+                </a:solidFill>
+              </a:rPr>
+              <a:t>  SKUs sin línea asignada → 'OTROS'</a:t>
             </a:r>
           </a:p>
         </p:txBody>
@@ -9415,8 +9221,8 @@
         </p:nvSpPr>
         <p:spPr>
           <a:xfrm>
-            <a:off x="457200" y="2926080"/>
-            <a:ext cx="1828800" cy="73152"/>
+            <a:off x="457200" y="2743200"/>
+            <a:ext cx="1828800" cy="54864"/>
           </a:xfrm>
           <a:prstGeom prst="rect">
             <a:avLst/>
@@ -9458,7 +9264,7 @@
         </p:nvSpPr>
         <p:spPr>
           <a:xfrm>
-            <a:off x="457200" y="2560320"/>
+            <a:off x="457200" y="2377440"/>
             <a:ext cx="10972800" cy="914400"/>
           </a:xfrm>
           <a:prstGeom prst="rect">
@@ -9472,14 +9278,12 @@
           </a:bodyPr>
           <a:lstStyle/>
           <a:p>
-            <a:pPr>
-              <a:defRPr sz="4000" b="1">
-                <a:solidFill>
-                  <a:srgbClr val="F0F4F8"/>
-                </a:solidFill>
-              </a:defRPr>
-            </a:pPr>
-            <a:r>
+            <a:r>
+              <a:rPr sz="4000" b="1">
+                <a:solidFill>
+                  <a:srgbClr val="F0F4F8"/>
+                </a:solidFill>
+              </a:rPr>
               <a:t>Estados de Stock</a:t>
             </a:r>
           </a:p>

--- a/StockPulse_Manual_Tecnico.pptx
+++ b/StockPulse_Manual_Tecnico.pptx
@@ -3164,8 +3164,8 @@
         </p:nvSpPr>
         <p:spPr>
           <a:xfrm>
-            <a:off x="457200" y="457200"/>
-            <a:ext cx="1828800" cy="548640"/>
+            <a:off x="457200" y="365760"/>
+            <a:ext cx="73152" cy="731520"/>
           </a:xfrm>
           <a:prstGeom prst="rect">
             <a:avLst/>
@@ -3196,14 +3196,6 @@
           <a:lstStyle/>
           <a:p>
             <a:pPr algn="ctr"/>
-            <a:r>
-              <a:rPr sz="2000" b="1">
-                <a:solidFill>
-                  <a:srgbClr val="FFFFFF"/>
-                </a:solidFill>
-              </a:rPr>
-              <a:t>G360</a:t>
-            </a:r>
           </a:p>
         </p:txBody>
       </p:sp>
@@ -3215,8 +3207,8 @@
         </p:nvSpPr>
         <p:spPr>
           <a:xfrm>
-            <a:off x="457200" y="2560320"/>
-            <a:ext cx="11277295" cy="1097280"/>
+            <a:off x="640080" y="411480"/>
+            <a:ext cx="1371600" cy="457200"/>
           </a:xfrm>
           <a:prstGeom prst="rect">
             <a:avLst/>
@@ -3230,12 +3222,13 @@
           <a:lstStyle/>
           <a:p>
             <a:r>
-              <a:rPr sz="4400" b="1">
-                <a:solidFill>
-                  <a:srgbClr val="F0F4F8"/>
-                </a:solidFill>
-              </a:rPr>
-              <a:t>StockPulse CIPSA</a:t>
+              <a:rPr sz="2000" b="1">
+                <a:solidFill>
+                  <a:srgbClr val="00D084"/>
+                </a:solidFill>
+                <a:latin typeface="Segoe UI"/>
+              </a:rPr>
+              <a:t>G360</a:t>
             </a:r>
           </a:p>
         </p:txBody>
@@ -3248,8 +3241,8 @@
         </p:nvSpPr>
         <p:spPr>
           <a:xfrm>
-            <a:off x="457200" y="3840480"/>
-            <a:ext cx="11277295" cy="731520"/>
+            <a:off x="457200" y="2286000"/>
+            <a:ext cx="11277295" cy="1097280"/>
           </a:xfrm>
           <a:prstGeom prst="rect">
             <a:avLst/>
@@ -3263,12 +3256,13 @@
           <a:lstStyle/>
           <a:p>
             <a:r>
-              <a:rPr sz="2200" b="0">
-                <a:solidFill>
-                  <a:srgbClr val="94A3B8"/>
-                </a:solidFill>
-              </a:rPr>
-              <a:t>Manual Técnico del Sistema de Reportes de Stock</a:t>
+              <a:rPr sz="4800" b="1">
+                <a:solidFill>
+                  <a:srgbClr val="F0F4F8"/>
+                </a:solidFill>
+                <a:latin typeface="Segoe UI"/>
+              </a:rPr>
+              <a:t>StockPulse CIPSA</a:t>
             </a:r>
           </a:p>
         </p:txBody>
@@ -3281,8 +3275,8 @@
         </p:nvSpPr>
         <p:spPr>
           <a:xfrm>
-            <a:off x="457200" y="6217920"/>
-            <a:ext cx="11277295" cy="365760"/>
+            <a:off x="457200" y="3566160"/>
+            <a:ext cx="11277295" cy="731520"/>
           </a:xfrm>
           <a:prstGeom prst="rect">
             <a:avLst/>
@@ -3295,14 +3289,92 @@
           </a:bodyPr>
           <a:lstStyle/>
           <a:p>
+            <a:r>
+              <a:rPr sz="2200" b="0">
+                <a:solidFill>
+                  <a:srgbClr val="94A3B8"/>
+                </a:solidFill>
+                <a:latin typeface="Segoe UI"/>
+              </a:rPr>
+              <a:t>Manual Técnico del Sistema de Reportes de Stock</a:t>
+            </a:r>
+          </a:p>
+        </p:txBody>
+      </p:sp>
+      <p:sp>
+        <p:nvSpPr>
+          <p:cNvPr id="7" name="Rectangle 6"/>
+          <p:cNvSpPr/>
+          <p:nvPr/>
+        </p:nvSpPr>
+        <p:spPr>
+          <a:xfrm>
+            <a:off x="457200" y="6217920"/>
+            <a:ext cx="2743200" cy="36576"/>
+          </a:xfrm>
+          <a:prstGeom prst="rect">
+            <a:avLst/>
+          </a:prstGeom>
+          <a:solidFill>
+            <a:srgbClr val="00D084"/>
+          </a:solidFill>
+          <a:ln>
+            <a:noFill/>
+          </a:ln>
+        </p:spPr>
+        <p:style>
+          <a:lnRef idx="1">
+            <a:schemeClr val="accent1"/>
+          </a:lnRef>
+          <a:fillRef idx="3">
+            <a:schemeClr val="accent1"/>
+          </a:fillRef>
+          <a:effectRef idx="2">
+            <a:schemeClr val="accent1"/>
+          </a:effectRef>
+          <a:fontRef idx="minor">
+            <a:schemeClr val="lt1"/>
+          </a:fontRef>
+        </p:style>
+        <p:txBody>
+          <a:bodyPr rtlCol="0" anchor="ctr"/>
+          <a:lstStyle/>
+          <a:p>
+            <a:pPr algn="ctr"/>
+          </a:p>
+        </p:txBody>
+      </p:sp>
+      <p:sp>
+        <p:nvSpPr>
+          <p:cNvPr id="8" name="TextBox 7"/>
+          <p:cNvSpPr txBox="1"/>
+          <p:nvPr/>
+        </p:nvSpPr>
+        <p:spPr>
+          <a:xfrm>
+            <a:off x="457200" y="6309360"/>
+            <a:ext cx="11277295" cy="365760"/>
+          </a:xfrm>
+          <a:prstGeom prst="rect">
+            <a:avLst/>
+          </a:prstGeom>
+          <a:noFill/>
+        </p:spPr>
+        <p:txBody>
+          <a:bodyPr wrap="none">
+            <a:spAutoFit/>
+          </a:bodyPr>
+          <a:lstStyle/>
+          <a:p>
             <a:pPr algn="r"/>
             <a:r>
-              <a:rPr sz="1400" b="0">
+              <a:rPr sz="1200" b="0">
                 <a:solidFill>
                   <a:srgbClr val="94A3B8"/>
                 </a:solidFill>
-              </a:rPr>
-              <a:t>CIPSA - Intelligence Division</a:t>
+                <a:latin typeface="Segoe UI"/>
+              </a:rPr>
+              <a:t>CIPSA · Intelligence Division</a:t>
             </a:r>
           </a:p>
         </p:txBody>
@@ -3376,8 +3448,8 @@
         </p:nvSpPr>
         <p:spPr>
           <a:xfrm>
-            <a:off x="457200" y="274320"/>
-            <a:ext cx="11277295" cy="640080"/>
+            <a:off x="457200" y="228600"/>
+            <a:ext cx="11277295" cy="548640"/>
           </a:xfrm>
           <a:prstGeom prst="rect">
             <a:avLst/>
@@ -3395,6 +3467,7 @@
                 <a:solidFill>
                   <a:srgbClr val="F0F4F8"/>
                 </a:solidFill>
+                <a:latin typeface="Segoe UI"/>
               </a:rPr>
               <a:t>Cálculo de Estado</a:t>
             </a:r>
@@ -3403,13 +3476,56 @@
       </p:sp>
       <p:sp>
         <p:nvSpPr>
-          <p:cNvPr id="4" name="TextBox 3"/>
+          <p:cNvPr id="4" name="Rectangle 3"/>
+          <p:cNvSpPr/>
+          <p:nvPr/>
+        </p:nvSpPr>
+        <p:spPr>
+          <a:xfrm>
+            <a:off x="457200" y="777240"/>
+            <a:ext cx="1371600" cy="27432"/>
+          </a:xfrm>
+          <a:prstGeom prst="rect">
+            <a:avLst/>
+          </a:prstGeom>
+          <a:solidFill>
+            <a:srgbClr val="00D084"/>
+          </a:solidFill>
+          <a:ln>
+            <a:noFill/>
+          </a:ln>
+        </p:spPr>
+        <p:style>
+          <a:lnRef idx="1">
+            <a:schemeClr val="accent1"/>
+          </a:lnRef>
+          <a:fillRef idx="3">
+            <a:schemeClr val="accent1"/>
+          </a:fillRef>
+          <a:effectRef idx="2">
+            <a:schemeClr val="accent1"/>
+          </a:effectRef>
+          <a:fontRef idx="minor">
+            <a:schemeClr val="lt1"/>
+          </a:fontRef>
+        </p:style>
+        <p:txBody>
+          <a:bodyPr rtlCol="0" anchor="ctr"/>
+          <a:lstStyle/>
+          <a:p>
+            <a:pPr algn="ctr"/>
+          </a:p>
+        </p:txBody>
+      </p:sp>
+      <p:sp>
+        <p:nvSpPr>
+          <p:cNvPr id="5" name="TextBox 4"/>
           <p:cNvSpPr txBox="1"/>
           <p:nvPr/>
         </p:nvSpPr>
         <p:spPr>
           <a:xfrm>
-            <a:off x="457200" y="1097280"/>
+            <a:off x="457200" y="914400"/>
             <a:ext cx="11277295" cy="5303520"/>
           </a:xfrm>
           <a:prstGeom prst="rect">
@@ -3425,195 +3541,230 @@
           <a:p>
             <a:pPr>
               <a:spcBef>
-                <a:spcPts val="1600"/>
-              </a:spcBef>
-            </a:pPr>
-            <a:r>
-              <a:rPr sz="2000" b="1">
+                <a:spcPts val="1400"/>
+              </a:spcBef>
+              <a:spcAft>
+                <a:spcPts val="400"/>
+              </a:spcAft>
+            </a:pPr>
+            <a:r>
+              <a:rPr sz="1800" b="1">
                 <a:solidFill>
                   <a:srgbClr val="00D084"/>
                 </a:solidFill>
-              </a:rPr>
-              <a:t>Fórmula de Cajas (bx)</a:t>
-            </a:r>
-          </a:p>
-          <a:p>
-            <a:pPr>
-              <a:spcBef>
-                <a:spcPts val="600"/>
-              </a:spcBef>
-            </a:pPr>
-            <a:r>
-              <a:rPr sz="1600" b="0">
-                <a:solidFill>
-                  <a:srgbClr val="F0F4F8"/>
-                </a:solidFill>
-              </a:rPr>
-              <a:t>  bx = Math.floor(stock_disponible / un_bx)</a:t>
-            </a:r>
-          </a:p>
-          <a:p>
-            <a:pPr>
-              <a:spcBef>
-                <a:spcPts val="600"/>
-              </a:spcBef>
-            </a:pPr>
-            <a:r>
-              <a:rPr sz="1600" b="0">
-                <a:solidFill>
-                  <a:srgbClr val="F0F4F8"/>
-                </a:solidFill>
-              </a:rPr>
-              <a:t>  stock_disponible = suma de 'disponible' en almacenes tipo 'venta'</a:t>
-            </a:r>
-          </a:p>
-          <a:p>
-            <a:pPr>
-              <a:spcBef>
-                <a:spcPts val="600"/>
-              </a:spcBef>
-            </a:pPr>
-            <a:r>
-              <a:rPr sz="1600" b="0">
-                <a:solidFill>
-                  <a:srgbClr val="F0F4F8"/>
-                </a:solidFill>
-              </a:rPr>
-              <a:t>  un_bx = unidades por caja (del catálogo maestro)</a:t>
-            </a:r>
-          </a:p>
-          <a:p>
-            <a:pPr>
-              <a:spcBef>
-                <a:spcPts val="600"/>
-              </a:spcBef>
-            </a:pPr>
-          </a:p>
-          <a:p>
-            <a:pPr>
-              <a:spcBef>
-                <a:spcPts val="1600"/>
-              </a:spcBef>
-            </a:pPr>
-            <a:r>
-              <a:rPr sz="2000" b="1">
+                <a:latin typeface="Segoe UI"/>
+              </a:rPr>
+              <a:t>Fórmula Principal</a:t>
+            </a:r>
+          </a:p>
+          <a:p>
+            <a:pPr>
+              <a:spcBef>
+                <a:spcPts val="500"/>
+              </a:spcBef>
+              <a:spcAft>
+                <a:spcPts val="200"/>
+              </a:spcAft>
+            </a:pPr>
+            <a:r>
+              <a:rPr sz="1400" b="0">
+                <a:solidFill>
+                  <a:srgbClr val="F0F4F8"/>
+                </a:solidFill>
+                <a:latin typeface="Segoe UI"/>
+              </a:rPr>
+              <a:t>▸ bx = Math.floor(stock_disponible / un_bx)</a:t>
+            </a:r>
+          </a:p>
+          <a:p>
+            <a:pPr>
+              <a:spcBef>
+                <a:spcPts val="300"/>
+              </a:spcBef>
+              <a:spcAft>
+                <a:spcPts val="300"/>
+              </a:spcAft>
+            </a:pPr>
+            <a:r>
+              <a:rPr sz="1200" b="0">
                 <a:solidFill>
                   <a:srgbClr val="00D084"/>
                 </a:solidFill>
-              </a:rPr>
-              <a:t>Estados</a:t>
-            </a:r>
-          </a:p>
-          <a:p>
-            <a:pPr>
-              <a:spcBef>
-                <a:spcPts val="600"/>
-              </a:spcBef>
-            </a:pPr>
-            <a:r>
-              <a:rPr sz="1600" b="0">
-                <a:solidFill>
-                  <a:srgbClr val="F0F4F8"/>
-                </a:solidFill>
-              </a:rPr>
-              <a:t>  OK → bx &gt;= 10 (10 o más cajas completas)</a:t>
-            </a:r>
-          </a:p>
-          <a:p>
-            <a:pPr>
-              <a:spcBef>
-                <a:spcPts val="600"/>
-              </a:spcBef>
-            </a:pPr>
-            <a:r>
-              <a:rPr sz="1600" b="0">
-                <a:solidFill>
-                  <a:srgbClr val="F0F4F8"/>
-                </a:solidFill>
-              </a:rPr>
-              <a:t>  BAJO → 1 &lt;= bx &lt; 10 (1 a 9 cajas)</a:t>
-            </a:r>
-          </a:p>
-          <a:p>
-            <a:pPr>
-              <a:spcBef>
-                <a:spcPts val="600"/>
-              </a:spcBef>
-            </a:pPr>
-            <a:r>
-              <a:rPr sz="1600" b="0">
-                <a:solidFill>
-                  <a:srgbClr val="F0F4F8"/>
-                </a:solidFill>
-              </a:rPr>
-              <a:t>  AGOTADO → bx == 0 (sin cajas completas)</a:t>
-            </a:r>
-          </a:p>
-          <a:p>
-            <a:pPr>
-              <a:spcBef>
-                <a:spcPts val="600"/>
-              </a:spcBef>
-            </a:pPr>
-          </a:p>
-          <a:p>
-            <a:pPr>
-              <a:spcBef>
-                <a:spcPts val="1600"/>
-              </a:spcBef>
-            </a:pPr>
-            <a:r>
-              <a:rPr sz="2000" b="1">
+                <a:latin typeface="Segoe UI"/>
+              </a:rPr>
+              <a:t>「 Donde: stock_disponible = suma de 'disponible' en almacenes de venta 」</a:t>
+            </a:r>
+          </a:p>
+          <a:p>
+            <a:pPr>
+              <a:spcBef>
+                <a:spcPts val="400"/>
+              </a:spcBef>
+              <a:spcAft>
+                <a:spcPts val="400"/>
+              </a:spcAft>
+            </a:pPr>
+          </a:p>
+          <a:p>
+            <a:pPr>
+              <a:spcBef>
+                <a:spcPts val="1400"/>
+              </a:spcBef>
+              <a:spcAft>
+                <a:spcPts val="400"/>
+              </a:spcAft>
+            </a:pPr>
+            <a:r>
+              <a:rPr sz="1800" b="1">
                 <a:solidFill>
                   <a:srgbClr val="00D084"/>
                 </a:solidFill>
-              </a:rPr>
-              <a:t>Casos Especiales</a:t>
-            </a:r>
-          </a:p>
-          <a:p>
-            <a:pPr>
-              <a:spcBef>
-                <a:spcPts val="600"/>
-              </a:spcBef>
-            </a:pPr>
-            <a:r>
-              <a:rPr sz="1600" b="0">
-                <a:solidFill>
-                  <a:srgbClr val="F0F4F8"/>
-                </a:solidFill>
-              </a:rPr>
-              <a:t>  SKUs vendidos por unidad (un_bx &lt;= 1): se muestra en unidades</a:t>
-            </a:r>
-          </a:p>
-          <a:p>
-            <a:pPr>
-              <a:spcBef>
-                <a:spcPts val="600"/>
-              </a:spcBef>
-            </a:pPr>
-            <a:r>
-              <a:rPr sz="1600" b="0">
-                <a:solidFill>
-                  <a:srgbClr val="F0F4F8"/>
-                </a:solidFill>
-              </a:rPr>
-              <a:t>  Stock solo en mktd (ej. 118): aparece como AGOTADO en venta</a:t>
-            </a:r>
-          </a:p>
-          <a:p>
-            <a:pPr>
-              <a:spcBef>
-                <a:spcPts val="600"/>
-              </a:spcBef>
-            </a:pPr>
-            <a:r>
-              <a:rPr sz="1600" b="0">
-                <a:solidFill>
-                  <a:srgbClr val="F0F4F8"/>
-                </a:solidFill>
-              </a:rPr>
-              <a:t>  Inspección (121): opcional incluir/excluir en reportes</a:t>
+                <a:latin typeface="Segoe UI"/>
+              </a:rPr>
+              <a:t>Definición de Estados</a:t>
+            </a:r>
+          </a:p>
+          <a:p>
+            <a:pPr>
+              <a:spcBef>
+                <a:spcPts val="500"/>
+              </a:spcBef>
+              <a:spcAft>
+                <a:spcPts val="200"/>
+              </a:spcAft>
+            </a:pPr>
+            <a:r>
+              <a:rPr sz="1400" b="0">
+                <a:solidFill>
+                  <a:srgbClr val="F0F4F8"/>
+                </a:solidFill>
+                <a:latin typeface="Segoe UI"/>
+              </a:rPr>
+              <a:t>▸ OK → bx &gt;= 10 (10 o más cajas completas)</a:t>
+            </a:r>
+          </a:p>
+          <a:p>
+            <a:pPr>
+              <a:spcBef>
+                <a:spcPts val="500"/>
+              </a:spcBef>
+              <a:spcAft>
+                <a:spcPts val="200"/>
+              </a:spcAft>
+            </a:pPr>
+            <a:r>
+              <a:rPr sz="1400" b="0">
+                <a:solidFill>
+                  <a:srgbClr val="F0F4F8"/>
+                </a:solidFill>
+                <a:latin typeface="Segoe UI"/>
+              </a:rPr>
+              <a:t>▸ BAJO → 1 &lt;= bx &lt; 10 (1 a 9 cajas)</a:t>
+            </a:r>
+          </a:p>
+          <a:p>
+            <a:pPr>
+              <a:spcBef>
+                <a:spcPts val="500"/>
+              </a:spcBef>
+              <a:spcAft>
+                <a:spcPts val="200"/>
+              </a:spcAft>
+            </a:pPr>
+            <a:r>
+              <a:rPr sz="1400" b="0">
+                <a:solidFill>
+                  <a:srgbClr val="F0F4F8"/>
+                </a:solidFill>
+                <a:latin typeface="Segoe UI"/>
+              </a:rPr>
+              <a:t>▸ AGOTADO → bx == 0 (sin cajas completas)</a:t>
+            </a:r>
+          </a:p>
+          <a:p>
+            <a:pPr>
+              <a:spcBef>
+                <a:spcPts val="400"/>
+              </a:spcBef>
+              <a:spcAft>
+                <a:spcPts val="400"/>
+              </a:spcAft>
+            </a:pPr>
+          </a:p>
+          <a:p>
+            <a:pPr>
+              <a:spcBef>
+                <a:spcPts val="1400"/>
+              </a:spcBef>
+              <a:spcAft>
+                <a:spcPts val="400"/>
+              </a:spcAft>
+            </a:pPr>
+            <a:r>
+              <a:rPr sz="1800" b="1">
+                <a:solidFill>
+                  <a:srgbClr val="00D084"/>
+                </a:solidFill>
+                <a:latin typeface="Segoe UI"/>
+              </a:rPr>
+              <a:t>Casos Particulares</a:t>
+            </a:r>
+          </a:p>
+          <a:p>
+            <a:pPr>
+              <a:spcBef>
+                <a:spcPts val="500"/>
+              </a:spcBef>
+              <a:spcAft>
+                <a:spcPts val="200"/>
+              </a:spcAft>
+            </a:pPr>
+            <a:r>
+              <a:rPr sz="1400" b="0">
+                <a:solidFill>
+                  <a:srgbClr val="F0F4F8"/>
+                </a:solidFill>
+                <a:latin typeface="Segoe UI"/>
+              </a:rPr>
+              <a:t>▸ un_bx &lt;= 1: SKU vendido por unidad, muestra 'N u'</a:t>
+            </a:r>
+          </a:p>
+          <a:p>
+            <a:pPr>
+              <a:spcBef>
+                <a:spcPts val="500"/>
+              </a:spcBef>
+              <a:spcAft>
+                <a:spcPts val="200"/>
+              </a:spcAft>
+            </a:pPr>
+            <a:r>
+              <a:rPr sz="1400" b="0">
+                <a:solidFill>
+                  <a:srgbClr val="F0F4F8"/>
+                </a:solidFill>
+                <a:latin typeface="Segoe UI"/>
+              </a:rPr>
+              <a:t>▸ Stock solo en mktd (ej. 118): AGOTADO en venta</a:t>
+            </a:r>
+          </a:p>
+          <a:p>
+            <a:pPr>
+              <a:spcBef>
+                <a:spcPts val="500"/>
+              </a:spcBef>
+              <a:spcAft>
+                <a:spcPts val="200"/>
+              </a:spcAft>
+            </a:pPr>
+            <a:r>
+              <a:rPr sz="1400" b="0">
+                <a:solidFill>
+                  <a:srgbClr val="F0F4F8"/>
+                </a:solidFill>
+                <a:latin typeface="Segoe UI"/>
+              </a:rPr>
+              <a:t>▸ Inspección (121): opcional incluir en reportes</a:t>
             </a:r>
           </a:p>
         </p:txBody>
@@ -3687,8 +3838,8 @@
         </p:nvSpPr>
         <p:spPr>
           <a:xfrm>
-            <a:off x="457200" y="274320"/>
-            <a:ext cx="11277295" cy="640080"/>
+            <a:off x="457200" y="228600"/>
+            <a:ext cx="11277295" cy="548640"/>
           </a:xfrm>
           <a:prstGeom prst="rect">
             <a:avLst/>
@@ -3706,6 +3857,7 @@
                 <a:solidFill>
                   <a:srgbClr val="F0F4F8"/>
                 </a:solidFill>
+                <a:latin typeface="Segoe UI"/>
               </a:rPr>
               <a:t>Dashboard Principal</a:t>
             </a:r>
@@ -3720,18 +3872,61 @@
         </p:nvSpPr>
         <p:spPr>
           <a:xfrm>
-            <a:off x="731520" y="1188720"/>
-            <a:ext cx="10728655" cy="4754880"/>
+            <a:off x="457200" y="777240"/>
+            <a:ext cx="1371600" cy="27432"/>
           </a:xfrm>
           <a:prstGeom prst="rect">
+            <a:avLst/>
+          </a:prstGeom>
+          <a:solidFill>
+            <a:srgbClr val="00D084"/>
+          </a:solidFill>
+          <a:ln>
+            <a:noFill/>
+          </a:ln>
+        </p:spPr>
+        <p:style>
+          <a:lnRef idx="1">
+            <a:schemeClr val="accent1"/>
+          </a:lnRef>
+          <a:fillRef idx="3">
+            <a:schemeClr val="accent1"/>
+          </a:fillRef>
+          <a:effectRef idx="2">
+            <a:schemeClr val="accent1"/>
+          </a:effectRef>
+          <a:fontRef idx="minor">
+            <a:schemeClr val="lt1"/>
+          </a:fontRef>
+        </p:style>
+        <p:txBody>
+          <a:bodyPr rtlCol="0" anchor="ctr"/>
+          <a:lstStyle/>
+          <a:p>
+            <a:pPr algn="ctr"/>
+          </a:p>
+        </p:txBody>
+      </p:sp>
+      <p:sp>
+        <p:nvSpPr>
+          <p:cNvPr id="5" name="Rounded Rectangle 4"/>
+          <p:cNvSpPr/>
+          <p:nvPr/>
+        </p:nvSpPr>
+        <p:spPr>
+          <a:xfrm>
+            <a:off x="548640" y="1097280"/>
+            <a:ext cx="11064240" cy="5120640"/>
+          </a:xfrm>
+          <a:prstGeom prst="roundRect">
             <a:avLst/>
           </a:prstGeom>
           <a:solidFill>
             <a:srgbClr val="1E293B"/>
           </a:solidFill>
-          <a:ln w="25400">
+          <a:ln w="19050">
             <a:solidFill>
-              <a:srgbClr val="00D084"/>
+              <a:srgbClr val="334155"/>
             </a:solidFill>
           </a:ln>
         </p:spPr>
@@ -3753,25 +3948,31 @@
           <a:bodyPr rtlCol="0" anchor="ctr" wrap="square"/>
           <a:lstStyle/>
           <a:p>
+            <a:pPr algn="ctr">
+              <a:spcBef>
+                <a:spcPts val="2000"/>
+              </a:spcBef>
+            </a:pPr>
+            <a:r>
+              <a:rPr sz="2400" b="1">
+                <a:solidFill>
+                  <a:srgbClr val="94A3B8"/>
+                </a:solidFill>
+                <a:latin typeface="Segoe UI"/>
+              </a:rPr>
+              <a:t>[ CAPTURA DE PANTALLA ]</a:t>
+            </a:r>
+          </a:p>
+          <a:p>
             <a:pPr algn="ctr"/>
             <a:r>
-              <a:rPr sz="2400" b="1">
+              <a:rPr sz="1200" b="0">
                 <a:solidFill>
                   <a:srgbClr val="94A3B8"/>
                 </a:solidFill>
-              </a:rPr>
-              <a:t>[CAPTURA DE PANTALLA]</a:t>
-            </a:r>
-          </a:p>
-          <a:p>
-            <a:pPr algn="ctr"/>
-            <a:r>
-              <a:rPr sz="1400" b="0">
-                <a:solidFill>
-                  <a:srgbClr val="94A3B8"/>
-                </a:solidFill>
-              </a:rPr>
-              <a:t>Captura del panel de estado</a:t>
+                <a:latin typeface="Segoe UI"/>
+              </a:rPr>
+              <a:t>Captura del panel de estado y KPIs</a:t>
             </a:r>
           </a:p>
         </p:txBody>
@@ -3845,8 +4046,8 @@
         </p:nvSpPr>
         <p:spPr>
           <a:xfrm>
-            <a:off x="457200" y="2743200"/>
-            <a:ext cx="1828800" cy="54864"/>
+            <a:off x="457200" y="2377440"/>
+            <a:ext cx="2286000" cy="36576"/>
           </a:xfrm>
           <a:prstGeom prst="rect">
             <a:avLst/>
@@ -3888,8 +4089,8 @@
         </p:nvSpPr>
         <p:spPr>
           <a:xfrm>
-            <a:off x="457200" y="2377440"/>
-            <a:ext cx="10972800" cy="914400"/>
+            <a:off x="457200" y="2011680"/>
+            <a:ext cx="11277295" cy="914400"/>
           </a:xfrm>
           <a:prstGeom prst="rect">
             <a:avLst/>
@@ -3907,6 +4108,7 @@
                 <a:solidFill>
                   <a:srgbClr val="F0F4F8"/>
                 </a:solidFill>
+                <a:latin typeface="Segoe UI"/>
               </a:rPr>
               <a:t>Búsqueda Avanzada</a:t>
             </a:r>
@@ -3982,8 +4184,8 @@
         </p:nvSpPr>
         <p:spPr>
           <a:xfrm>
-            <a:off x="457200" y="274320"/>
-            <a:ext cx="11277295" cy="640080"/>
+            <a:off x="457200" y="228600"/>
+            <a:ext cx="11277295" cy="548640"/>
           </a:xfrm>
           <a:prstGeom prst="rect">
             <a:avLst/>
@@ -4001,6 +4203,7 @@
                 <a:solidFill>
                   <a:srgbClr val="F0F4F8"/>
                 </a:solidFill>
+                <a:latin typeface="Segoe UI"/>
               </a:rPr>
               <a:t>Motor de Búsqueda (Fuse.js)</a:t>
             </a:r>
@@ -4009,13 +4212,56 @@
       </p:sp>
       <p:sp>
         <p:nvSpPr>
-          <p:cNvPr id="4" name="TextBox 3"/>
+          <p:cNvPr id="4" name="Rectangle 3"/>
+          <p:cNvSpPr/>
+          <p:nvPr/>
+        </p:nvSpPr>
+        <p:spPr>
+          <a:xfrm>
+            <a:off x="457200" y="777240"/>
+            <a:ext cx="1371600" cy="27432"/>
+          </a:xfrm>
+          <a:prstGeom prst="rect">
+            <a:avLst/>
+          </a:prstGeom>
+          <a:solidFill>
+            <a:srgbClr val="00D084"/>
+          </a:solidFill>
+          <a:ln>
+            <a:noFill/>
+          </a:ln>
+        </p:spPr>
+        <p:style>
+          <a:lnRef idx="1">
+            <a:schemeClr val="accent1"/>
+          </a:lnRef>
+          <a:fillRef idx="3">
+            <a:schemeClr val="accent1"/>
+          </a:fillRef>
+          <a:effectRef idx="2">
+            <a:schemeClr val="accent1"/>
+          </a:effectRef>
+          <a:fontRef idx="minor">
+            <a:schemeClr val="lt1"/>
+          </a:fontRef>
+        </p:style>
+        <p:txBody>
+          <a:bodyPr rtlCol="0" anchor="ctr"/>
+          <a:lstStyle/>
+          <a:p>
+            <a:pPr algn="ctr"/>
+          </a:p>
+        </p:txBody>
+      </p:sp>
+      <p:sp>
+        <p:nvSpPr>
+          <p:cNvPr id="5" name="TextBox 4"/>
           <p:cNvSpPr txBox="1"/>
           <p:nvPr/>
         </p:nvSpPr>
         <p:spPr>
           <a:xfrm>
-            <a:off x="457200" y="1097280"/>
+            <a:off x="457200" y="914400"/>
             <a:ext cx="11277295" cy="5303520"/>
           </a:xfrm>
           <a:prstGeom prst="rect">
@@ -4031,188 +4277,220 @@
           <a:p>
             <a:pPr>
               <a:spcBef>
-                <a:spcPts val="1600"/>
-              </a:spcBef>
-            </a:pPr>
-            <a:r>
-              <a:rPr sz="2000" b="1">
+                <a:spcPts val="1400"/>
+              </a:spcBef>
+              <a:spcAft>
+                <a:spcPts val="400"/>
+              </a:spcAft>
+            </a:pPr>
+            <a:r>
+              <a:rPr sz="1800" b="1">
                 <a:solidFill>
                   <a:srgbClr val="00D084"/>
                 </a:solidFill>
-              </a:rPr>
-              <a:t>Campos Indexados</a:t>
-            </a:r>
-          </a:p>
-          <a:p>
-            <a:pPr>
-              <a:spcBef>
-                <a:spcPts val="600"/>
-              </a:spcBef>
-            </a:pPr>
-            <a:r>
-              <a:rPr sz="1600" b="0">
-                <a:solidFill>
-                  <a:srgbClr val="F0F4F8"/>
-                </a:solidFill>
-              </a:rPr>
-              <a:t>  SKU (peso: 2.0) - coincidencia exacta prioritaria</a:t>
-            </a:r>
-          </a:p>
-          <a:p>
-            <a:pPr>
-              <a:spcBef>
-                <a:spcPts val="600"/>
-              </a:spcBef>
-            </a:pPr>
-            <a:r>
-              <a:rPr sz="1600" b="0">
-                <a:solidFill>
-                  <a:srgbClr val="F0F4F8"/>
-                </a:solidFill>
-              </a:rPr>
-              <a:t>  Nombre corto (peso: 1.5) - nombre abreviado del producto</a:t>
-            </a:r>
-          </a:p>
-          <a:p>
-            <a:pPr>
-              <a:spcBef>
-                <a:spcPts val="600"/>
-              </a:spcBef>
-            </a:pPr>
-            <a:r>
-              <a:rPr sz="1600" b="0">
-                <a:solidFill>
-                  <a:srgbClr val="F0F4F8"/>
-                </a:solidFill>
-              </a:rPr>
-              <a:t>  Descripción completa (peso: 1.0)</a:t>
-            </a:r>
-          </a:p>
-          <a:p>
-            <a:pPr>
-              <a:spcBef>
-                <a:spcPts val="600"/>
-              </a:spcBef>
-            </a:pPr>
-            <a:r>
-              <a:rPr sz="1600" b="0">
-                <a:solidFill>
-                  <a:srgbClr val="F0F4F8"/>
-                </a:solidFill>
-              </a:rPr>
-              <a:t>  Keywords (peso: 0.6) - atributos: color, tipo, marca</a:t>
-            </a:r>
-          </a:p>
-          <a:p>
-            <a:pPr>
-              <a:spcBef>
-                <a:spcPts val="600"/>
-              </a:spcBef>
-            </a:pPr>
-            <a:r>
-              <a:rPr sz="1600" b="0">
-                <a:solidFill>
-                  <a:srgbClr val="F0F4F8"/>
-                </a:solidFill>
-              </a:rPr>
-              <a:t>  EAN13 (peso: 0.8) - código de barras</a:t>
-            </a:r>
-          </a:p>
-          <a:p>
-            <a:pPr>
-              <a:spcBef>
-                <a:spcPts val="600"/>
-              </a:spcBef>
-            </a:pPr>
-            <a:r>
-              <a:rPr sz="1600" b="0">
-                <a:solidFill>
-                  <a:srgbClr val="F0F4F8"/>
-                </a:solidFill>
-              </a:rPr>
-              <a:t>  Línea (peso: 0.5) - ej: ACCESORIOS, PELOTAS</a:t>
-            </a:r>
-          </a:p>
-          <a:p>
-            <a:pPr>
-              <a:spcBef>
-                <a:spcPts val="600"/>
-              </a:spcBef>
-            </a:pPr>
-            <a:r>
-              <a:rPr sz="1600" b="0">
-                <a:solidFill>
-                  <a:srgbClr val="F0F4F8"/>
-                </a:solidFill>
-              </a:rPr>
-              <a:t>  Categoría (peso: 0.5) - VINIBALL, VINIFAN, etc.</a:t>
-            </a:r>
-          </a:p>
-          <a:p>
-            <a:pPr>
-              <a:spcBef>
-                <a:spcPts val="600"/>
-              </a:spcBef>
-            </a:pPr>
-          </a:p>
-          <a:p>
-            <a:pPr>
-              <a:spcBef>
-                <a:spcPts val="1600"/>
-              </a:spcBef>
-            </a:pPr>
-            <a:r>
-              <a:rPr sz="2000" b="1">
+                <a:latin typeface="Segoe UI"/>
+              </a:rPr>
+              <a:t>Campos Indexados con Pesos</a:t>
+            </a:r>
+          </a:p>
+          <a:p>
+            <a:pPr>
+              <a:spcBef>
+                <a:spcPts val="500"/>
+              </a:spcBef>
+              <a:spcAft>
+                <a:spcPts val="200"/>
+              </a:spcAft>
+            </a:pPr>
+            <a:r>
+              <a:rPr sz="1400" b="0">
+                <a:solidFill>
+                  <a:srgbClr val="F0F4F8"/>
+                </a:solidFill>
+                <a:latin typeface="Segoe UI"/>
+              </a:rPr>
+              <a:t>▸ SKU (peso: 2.0) — coincidencia exacta prioritaria</a:t>
+            </a:r>
+          </a:p>
+          <a:p>
+            <a:pPr>
+              <a:spcBef>
+                <a:spcPts val="500"/>
+              </a:spcBef>
+              <a:spcAft>
+                <a:spcPts val="200"/>
+              </a:spcAft>
+            </a:pPr>
+            <a:r>
+              <a:rPr sz="1400" b="0">
+                <a:solidFill>
+                  <a:srgbClr val="F0F4F8"/>
+                </a:solidFill>
+                <a:latin typeface="Segoe UI"/>
+              </a:rPr>
+              <a:t>▸ Nombre corto (peso: 1.5) — nombre abreviado</a:t>
+            </a:r>
+          </a:p>
+          <a:p>
+            <a:pPr>
+              <a:spcBef>
+                <a:spcPts val="500"/>
+              </a:spcBef>
+              <a:spcAft>
+                <a:spcPts val="200"/>
+              </a:spcAft>
+            </a:pPr>
+            <a:r>
+              <a:rPr sz="1400" b="0">
+                <a:solidFill>
+                  <a:srgbClr val="F0F4F8"/>
+                </a:solidFill>
+                <a:latin typeface="Segoe UI"/>
+              </a:rPr>
+              <a:t>▸ Descripción completa (peso: 1.0)</a:t>
+            </a:r>
+          </a:p>
+          <a:p>
+            <a:pPr>
+              <a:spcBef>
+                <a:spcPts val="500"/>
+              </a:spcBef>
+              <a:spcAft>
+                <a:spcPts val="200"/>
+              </a:spcAft>
+            </a:pPr>
+            <a:r>
+              <a:rPr sz="1400" b="0">
+                <a:solidFill>
+                  <a:srgbClr val="F0F4F8"/>
+                </a:solidFill>
+                <a:latin typeface="Segoe UI"/>
+              </a:rPr>
+              <a:t>▸ Keywords (peso: 0.6) — atributos: color, tipo, marca</a:t>
+            </a:r>
+          </a:p>
+          <a:p>
+            <a:pPr>
+              <a:spcBef>
+                <a:spcPts val="500"/>
+              </a:spcBef>
+              <a:spcAft>
+                <a:spcPts val="200"/>
+              </a:spcAft>
+            </a:pPr>
+            <a:r>
+              <a:rPr sz="1400" b="0">
+                <a:solidFill>
+                  <a:srgbClr val="F0F4F8"/>
+                </a:solidFill>
+                <a:latin typeface="Segoe UI"/>
+              </a:rPr>
+              <a:t>▸ EAN13 (peso: 0.8) — código de barras</a:t>
+            </a:r>
+          </a:p>
+          <a:p>
+            <a:pPr>
+              <a:spcBef>
+                <a:spcPts val="500"/>
+              </a:spcBef>
+              <a:spcAft>
+                <a:spcPts val="200"/>
+              </a:spcAft>
+            </a:pPr>
+            <a:r>
+              <a:rPr sz="1400" b="0">
+                <a:solidFill>
+                  <a:srgbClr val="F0F4F8"/>
+                </a:solidFill>
+                <a:latin typeface="Segoe UI"/>
+              </a:rPr>
+              <a:t>▸ Línea (peso: 0.5) — ACCESORIOS, PELOTAS, etc.</a:t>
+            </a:r>
+          </a:p>
+          <a:p>
+            <a:pPr>
+              <a:spcBef>
+                <a:spcPts val="500"/>
+              </a:spcBef>
+              <a:spcAft>
+                <a:spcPts val="200"/>
+              </a:spcAft>
+            </a:pPr>
+            <a:r>
+              <a:rPr sz="1400" b="0">
+                <a:solidFill>
+                  <a:srgbClr val="F0F4F8"/>
+                </a:solidFill>
+                <a:latin typeface="Segoe UI"/>
+              </a:rPr>
+              <a:t>▸ Categoría (peso: 0.5) — VINIFAN, VINIBALL, etc.</a:t>
+            </a:r>
+          </a:p>
+          <a:p>
+            <a:pPr>
+              <a:spcBef>
+                <a:spcPts val="400"/>
+              </a:spcBef>
+              <a:spcAft>
+                <a:spcPts val="400"/>
+              </a:spcAft>
+            </a:pPr>
+          </a:p>
+          <a:p>
+            <a:pPr>
+              <a:spcBef>
+                <a:spcPts val="1400"/>
+              </a:spcBef>
+              <a:spcAft>
+                <a:spcPts val="400"/>
+              </a:spcAft>
+            </a:pPr>
+            <a:r>
+              <a:rPr sz="1800" b="1">
                 <a:solidFill>
                   <a:srgbClr val="00D084"/>
                 </a:solidFill>
-              </a:rPr>
-              <a:t>Normalización</a:t>
-            </a:r>
-          </a:p>
-          <a:p>
-            <a:pPr>
-              <a:spcBef>
-                <a:spcPts val="600"/>
-              </a:spcBef>
-            </a:pPr>
-            <a:r>
-              <a:rPr sz="1600" b="0">
-                <a:solidFill>
-                  <a:srgbClr val="F0F4F8"/>
-                </a:solidFill>
-              </a:rPr>
-              <a:t>  Ignora ubicación del término</a:t>
-            </a:r>
-          </a:p>
-          <a:p>
-            <a:pPr>
-              <a:spcBef>
-                <a:spcPts val="600"/>
-              </a:spcBef>
-            </a:pPr>
-            <a:r>
-              <a:rPr sz="1600" b="0">
-                <a:solidFill>
-                  <a:srgbClr val="F0F4F8"/>
-                </a:solidFill>
-              </a:rPr>
-              <a:t>  Threshold: 0.3 (tolerancia alta para typo-tolerant)</a:t>
-            </a:r>
-          </a:p>
-          <a:p>
-            <a:pPr>
-              <a:spcBef>
-                <a:spcPts val="600"/>
-              </a:spcBef>
-            </a:pPr>
-            <a:r>
-              <a:rPr sz="1600" b="0">
-                <a:solidFill>
-                  <a:srgbClr val="F0F4F8"/>
-                </a:solidFill>
-              </a:rPr>
-              <a:t>  Mínimo 2 caracteres para iniciar búsqueda</a:t>
+                <a:latin typeface="Segoe UI"/>
+              </a:rPr>
+              <a:t>Configuración</a:t>
+            </a:r>
+          </a:p>
+          <a:p>
+            <a:pPr>
+              <a:spcBef>
+                <a:spcPts val="500"/>
+              </a:spcBef>
+              <a:spcAft>
+                <a:spcPts val="200"/>
+              </a:spcAft>
+            </a:pPr>
+            <a:r>
+              <a:rPr sz="1400" b="0">
+                <a:solidFill>
+                  <a:srgbClr val="F0F4F8"/>
+                </a:solidFill>
+                <a:latin typeface="Segoe UI"/>
+              </a:rPr>
+              <a:t>▸ Threshold: 0.3 (tolerante a errores de tipeo)</a:t>
+            </a:r>
+          </a:p>
+          <a:p>
+            <a:pPr>
+              <a:spcBef>
+                <a:spcPts val="500"/>
+              </a:spcBef>
+              <a:spcAft>
+                <a:spcPts val="200"/>
+              </a:spcAft>
+            </a:pPr>
+            <a:r>
+              <a:rPr sz="1400" b="0">
+                <a:solidFill>
+                  <a:srgbClr val="F0F4F8"/>
+                </a:solidFill>
+                <a:latin typeface="Segoe UI"/>
+              </a:rPr>
+              <a:t>▸ Mínimo: 2 caracteres para iniciar búsqueda</a:t>
             </a:r>
           </a:p>
         </p:txBody>
@@ -4286,8 +4564,8 @@
         </p:nvSpPr>
         <p:spPr>
           <a:xfrm>
-            <a:off x="457200" y="274320"/>
-            <a:ext cx="11277295" cy="640080"/>
+            <a:off x="457200" y="228600"/>
+            <a:ext cx="11277295" cy="548640"/>
           </a:xfrm>
           <a:prstGeom prst="rect">
             <a:avLst/>
@@ -4305,6 +4583,7 @@
                 <a:solidFill>
                   <a:srgbClr val="F0F4F8"/>
                 </a:solidFill>
+                <a:latin typeface="Segoe UI"/>
               </a:rPr>
               <a:t>Búsqueda por Voz</a:t>
             </a:r>
@@ -4313,13 +4592,56 @@
       </p:sp>
       <p:sp>
         <p:nvSpPr>
-          <p:cNvPr id="4" name="TextBox 3"/>
+          <p:cNvPr id="4" name="Rectangle 3"/>
+          <p:cNvSpPr/>
+          <p:nvPr/>
+        </p:nvSpPr>
+        <p:spPr>
+          <a:xfrm>
+            <a:off x="457200" y="777240"/>
+            <a:ext cx="1371600" cy="27432"/>
+          </a:xfrm>
+          <a:prstGeom prst="rect">
+            <a:avLst/>
+          </a:prstGeom>
+          <a:solidFill>
+            <a:srgbClr val="00D084"/>
+          </a:solidFill>
+          <a:ln>
+            <a:noFill/>
+          </a:ln>
+        </p:spPr>
+        <p:style>
+          <a:lnRef idx="1">
+            <a:schemeClr val="accent1"/>
+          </a:lnRef>
+          <a:fillRef idx="3">
+            <a:schemeClr val="accent1"/>
+          </a:fillRef>
+          <a:effectRef idx="2">
+            <a:schemeClr val="accent1"/>
+          </a:effectRef>
+          <a:fontRef idx="minor">
+            <a:schemeClr val="lt1"/>
+          </a:fontRef>
+        </p:style>
+        <p:txBody>
+          <a:bodyPr rtlCol="0" anchor="ctr"/>
+          <a:lstStyle/>
+          <a:p>
+            <a:pPr algn="ctr"/>
+          </a:p>
+        </p:txBody>
+      </p:sp>
+      <p:sp>
+        <p:nvSpPr>
+          <p:cNvPr id="5" name="TextBox 4"/>
           <p:cNvSpPr txBox="1"/>
           <p:nvPr/>
         </p:nvSpPr>
         <p:spPr>
           <a:xfrm>
-            <a:off x="457200" y="1097280"/>
+            <a:off x="457200" y="914400"/>
             <a:ext cx="11277295" cy="5303520"/>
           </a:xfrm>
           <a:prstGeom prst="rect">
@@ -4335,98 +4657,201 @@
           <a:p>
             <a:pPr>
               <a:spcBef>
-                <a:spcPts val="1600"/>
-              </a:spcBef>
-            </a:pPr>
-            <a:r>
-              <a:rPr sz="2000" b="1">
+                <a:spcPts val="1400"/>
+              </a:spcBef>
+              <a:spcAft>
+                <a:spcPts val="400"/>
+              </a:spcAft>
+            </a:pPr>
+            <a:r>
+              <a:rPr sz="1800" b="1">
                 <a:solidFill>
                   <a:srgbClr val="00D084"/>
                 </a:solidFill>
-              </a:rPr>
-              <a:t>Características</a:t>
-            </a:r>
-          </a:p>
-          <a:p>
-            <a:pPr>
-              <a:spcBef>
-                <a:spcPts val="600"/>
-              </a:spcBef>
-            </a:pPr>
-            <a:r>
-              <a:rPr sz="1600" b="0">
-                <a:solidFill>
-                  <a:srgbClr val="F0F4F8"/>
-                </a:solidFill>
-              </a:rPr>
-              <a:t>  Web Speech API (SpeechRecognition)</a:t>
-            </a:r>
-          </a:p>
-          <a:p>
-            <a:pPr>
-              <a:spcBef>
-                <a:spcPts val="600"/>
-              </a:spcBef>
-            </a:pPr>
-            <a:r>
-              <a:rPr sz="1600" b="0">
-                <a:solidFill>
-                  <a:srgbClr val="F0F4F8"/>
-                </a:solidFill>
-              </a:rPr>
-              <a:t>  Idioma: es-PE (Español Perú)</a:t>
-            </a:r>
-          </a:p>
-          <a:p>
-            <a:pPr>
-              <a:spcBef>
-                <a:spcPts val="600"/>
-              </a:spcBef>
-            </a:pPr>
-            <a:r>
-              <a:rPr sz="1600" b="0">
-                <a:solidFill>
-                  <a:srgbClr val="F0F4F8"/>
-                </a:solidFill>
-              </a:rPr>
-              <a:t>  Interim results para feedback en tiempo real</a:t>
-            </a:r>
-          </a:p>
-          <a:p>
-            <a:pPr>
-              <a:spcBef>
-                <a:spcPts val="600"/>
-              </a:spcBef>
-            </a:pPr>
-          </a:p>
-          <a:p>
-            <a:pPr>
-              <a:spcBef>
-                <a:spcPts val="1600"/>
-              </a:spcBef>
-            </a:pPr>
-            <a:r>
-              <a:rPr sz="2000" b="1">
+                <a:latin typeface="Segoe UI"/>
+              </a:rPr>
+              <a:t>Características Técnicas</a:t>
+            </a:r>
+          </a:p>
+          <a:p>
+            <a:pPr>
+              <a:spcBef>
+                <a:spcPts val="500"/>
+              </a:spcBef>
+              <a:spcAft>
+                <a:spcPts val="200"/>
+              </a:spcAft>
+            </a:pPr>
+            <a:r>
+              <a:rPr sz="1400" b="0">
+                <a:solidFill>
+                  <a:srgbClr val="F0F4F8"/>
+                </a:solidFill>
+                <a:latin typeface="Segoe UI"/>
+              </a:rPr>
+              <a:t>▸ Web Speech API (SpeechRecognition)</a:t>
+            </a:r>
+          </a:p>
+          <a:p>
+            <a:pPr>
+              <a:spcBef>
+                <a:spcPts val="500"/>
+              </a:spcBef>
+              <a:spcAft>
+                <a:spcPts val="200"/>
+              </a:spcAft>
+            </a:pPr>
+            <a:r>
+              <a:rPr sz="1400" b="0">
+                <a:solidFill>
+                  <a:srgbClr val="F0F4F8"/>
+                </a:solidFill>
+                <a:latin typeface="Segoe UI"/>
+              </a:rPr>
+              <a:t>▸ Idioma: es-PE (Español Perú)</a:t>
+            </a:r>
+          </a:p>
+          <a:p>
+            <a:pPr>
+              <a:spcBef>
+                <a:spcPts val="500"/>
+              </a:spcBef>
+              <a:spcAft>
+                <a:spcPts val="200"/>
+              </a:spcAft>
+            </a:pPr>
+            <a:r>
+              <a:rPr sz="1400" b="0">
+                <a:solidFill>
+                  <a:srgbClr val="F0F4F8"/>
+                </a:solidFill>
+                <a:latin typeface="Segoe UI"/>
+              </a:rPr>
+              <a:t>▸ Interim results para feedback en tiempo real</a:t>
+            </a:r>
+          </a:p>
+          <a:p>
+            <a:pPr>
+              <a:spcBef>
+                <a:spcPts val="400"/>
+              </a:spcBef>
+              <a:spcAft>
+                <a:spcPts val="400"/>
+              </a:spcAft>
+            </a:pPr>
+          </a:p>
+          <a:p>
+            <a:pPr>
+              <a:spcBef>
+                <a:spcPts val="1400"/>
+              </a:spcBef>
+              <a:spcAft>
+                <a:spcPts val="400"/>
+              </a:spcAft>
+            </a:pPr>
+            <a:r>
+              <a:rPr sz="1800" b="1">
                 <a:solidFill>
                   <a:srgbClr val="00D084"/>
                 </a:solidFill>
-              </a:rPr>
-              <a:t>Normalización de Voz</a:t>
-            </a:r>
-          </a:p>
-          <a:p>
-            <a:pPr>
-              <a:spcBef>
-                <a:spcPts val="600"/>
-              </a:spcBef>
-            </a:pPr>
-            <a:r>
-              <a:rPr sz="1600" b="0">
-                <a:solidFill>
-                  <a:srgbClr val="F0F4F8"/>
-                </a:solidFill>
-              </a:rPr>
-              <a:t>  Convierte números hablados a dígitos:</a:t>
+                <a:latin typeface="Segoe UI"/>
+              </a:rPr>
+              <a:t>Normalización Inteligente</a:t>
+            </a:r>
+          </a:p>
+          <a:p>
+            <a:pPr>
+              <a:spcBef>
+                <a:spcPts val="500"/>
+              </a:spcBef>
+              <a:spcAft>
+                <a:spcPts val="200"/>
+              </a:spcAft>
+            </a:pPr>
+            <a:r>
+              <a:rPr sz="1400" b="0">
+                <a:solidFill>
+                  <a:srgbClr val="F0F4F8"/>
+                </a:solidFill>
+                <a:latin typeface="Segoe UI"/>
+              </a:rPr>
+              <a:t>▸ Convierte números hablados a dígitos:</a:t>
+            </a:r>
+          </a:p>
+          <a:p>
+            <a:pPr>
+              <a:spcBef>
+                <a:spcPts val="300"/>
+              </a:spcBef>
+              <a:spcAft>
+                <a:spcPts val="300"/>
+              </a:spcAft>
+            </a:pPr>
+            <a:r>
+              <a:rPr sz="1200" b="0">
+                <a:solidFill>
+                  <a:srgbClr val="00D084"/>
+                </a:solidFill>
+                <a:latin typeface="Segoe UI"/>
+              </a:rPr>
+              <a:t>「 'cero uno uno cero uno nueve' → '011019' 」</a:t>
+            </a:r>
+          </a:p>
+          <a:p>
+            <a:pPr>
+              <a:spcBef>
+                <a:spcPts val="500"/>
+              </a:spcBef>
+              <a:spcAft>
+                <a:spcPts val="200"/>
+              </a:spcAft>
+            </a:pPr>
+            <a:r>
+              <a:rPr sz="1400" b="0">
+                <a:solidFill>
+                  <a:srgbClr val="F0F4F8"/>
+                </a:solidFill>
+                <a:latin typeface="Segoe UI"/>
+              </a:rPr>
+              <a:t>▸ Elimina ruido: sku, codigo, busca, artículos</a:t>
+            </a:r>
+          </a:p>
+          <a:p>
+            <a:pPr>
+              <a:spcBef>
+                <a:spcPts val="500"/>
+              </a:spcBef>
+              <a:spcAft>
+                <a:spcPts val="200"/>
+              </a:spcAft>
+            </a:pPr>
+            <a:r>
+              <a:rPr sz="1400" b="0">
+                <a:solidFill>
+                  <a:srgbClr val="F0F4F8"/>
+                </a:solidFill>
+                <a:latin typeface="Segoe UI"/>
+              </a:rPr>
+              <a:t>▸ Quita tildes y puntuación</a:t>
+            </a:r>
+          </a:p>
+          <a:p>
+            <a:pPr>
+              <a:spcBef>
+                <a:spcPts val="500"/>
+              </a:spcBef>
+              <a:spcAft>
+                <a:spcPts val="200"/>
+              </a:spcAft>
+            </a:pPr>
+            <a:r>
+              <a:rPr sz="1400" b="0">
+                <a:solidFill>
+                  <a:srgbClr val="F0F4F8"/>
+                </a:solidFill>
+                <a:latin typeface="Segoe UI"/>
+              </a:rPr>
+              <a:t>▸ Detecta si es código (todo dígitos) vs nombre</a:t>
             </a:r>
           </a:p>
           <a:p>
@@ -4434,126 +4859,66 @@
               <a:spcBef>
                 <a:spcPts val="400"/>
               </a:spcBef>
-            </a:pPr>
-            <a:r>
-              <a:rPr sz="1400" b="0">
+              <a:spcAft>
+                <a:spcPts val="400"/>
+              </a:spcAft>
+            </a:pPr>
+          </a:p>
+          <a:p>
+            <a:pPr>
+              <a:spcBef>
+                <a:spcPts val="1400"/>
+              </a:spcBef>
+              <a:spcAft>
+                <a:spcPts val="400"/>
+              </a:spcAft>
+            </a:pPr>
+            <a:r>
+              <a:rPr sz="1800" b="1">
                 <a:solidFill>
                   <a:srgbClr val="00D084"/>
                 </a:solidFill>
-              </a:rPr>
-              <a:t>'cero uno uno cero uno nueve' → '011019'</a:t>
-            </a:r>
-          </a:p>
-          <a:p>
-            <a:pPr>
-              <a:spcBef>
-                <a:spcPts val="600"/>
-              </a:spcBef>
-            </a:pPr>
-            <a:r>
-              <a:rPr sz="1600" b="0">
-                <a:solidFill>
-                  <a:srgbClr val="F0F4F8"/>
-                </a:solidFill>
-              </a:rPr>
-              <a:t>  Elimina ruido: 'sku', 'codigo', 'busca', artículos</a:t>
-            </a:r>
-          </a:p>
-          <a:p>
-            <a:pPr>
-              <a:spcBef>
-                <a:spcPts val="600"/>
-              </a:spcBef>
-            </a:pPr>
-            <a:r>
-              <a:rPr sz="1600" b="0">
-                <a:solidFill>
-                  <a:srgbClr val="F0F4F8"/>
-                </a:solidFill>
-              </a:rPr>
-              <a:t>  Quita tildes y puntuación</a:t>
-            </a:r>
-          </a:p>
-          <a:p>
-            <a:pPr>
-              <a:spcBef>
-                <a:spcPts val="600"/>
-              </a:spcBef>
-            </a:pPr>
-            <a:r>
-              <a:rPr sz="1600" b="0">
-                <a:solidFill>
-                  <a:srgbClr val="F0F4F8"/>
-                </a:solidFill>
-              </a:rPr>
-              <a:t>  Si todo son dígitos → SKU/EAN directo</a:t>
-            </a:r>
-          </a:p>
-          <a:p>
-            <a:pPr>
-              <a:spcBef>
-                <a:spcPts val="600"/>
-              </a:spcBef>
-            </a:pPr>
-            <a:r>
-              <a:rPr sz="1600" b="0">
-                <a:solidFill>
-                  <a:srgbClr val="F0F4F8"/>
-                </a:solidFill>
-              </a:rPr>
-              <a:t>  Si es texto → búsqueda fuzzy por palabras</a:t>
-            </a:r>
-          </a:p>
-          <a:p>
-            <a:pPr>
-              <a:spcBef>
-                <a:spcPts val="600"/>
-              </a:spcBef>
-            </a:pPr>
-          </a:p>
-          <a:p>
-            <a:pPr>
-              <a:spcBef>
-                <a:spcPts val="1600"/>
-              </a:spcBef>
-            </a:pPr>
-            <a:r>
-              <a:rPr sz="2000" b="1">
-                <a:solidFill>
-                  <a:srgbClr val="00D084"/>
-                </a:solidFill>
-              </a:rPr>
-              <a:t>Ejemplos</a:t>
-            </a:r>
-          </a:p>
-          <a:p>
-            <a:pPr>
-              <a:spcBef>
-                <a:spcPts val="600"/>
-              </a:spcBef>
-            </a:pPr>
-            <a:r>
-              <a:rPr sz="1600" b="0">
-                <a:solidFill>
-                  <a:srgbClr val="F0F4F8"/>
-                </a:solidFill>
-              </a:rPr>
-              <a:t>  'buscar tijera vinifan' → busca 'tijera vinifan'</a:t>
-            </a:r>
-          </a:p>
-          <a:p>
-            <a:pPr>
-              <a:spcBef>
-                <a:spcPts val="600"/>
-              </a:spcBef>
-            </a:pPr>
-            <a:r>
-              <a:rPr sz="1600" b="0">
-                <a:solidFill>
-                  <a:srgbClr val="F0F4F8"/>
-                </a:solidFill>
-              </a:rPr>
-              <a:t>  'sku cero uno uno cero uno nueve' → busca '011019'</a:t>
+                <a:latin typeface="Segoe UI"/>
+              </a:rPr>
+              <a:t>Ejemplos de Uso</a:t>
+            </a:r>
+          </a:p>
+          <a:p>
+            <a:pPr>
+              <a:spcBef>
+                <a:spcPts val="500"/>
+              </a:spcBef>
+              <a:spcAft>
+                <a:spcPts val="200"/>
+              </a:spcAft>
+            </a:pPr>
+            <a:r>
+              <a:rPr sz="1400" b="0">
+                <a:solidFill>
+                  <a:srgbClr val="F0F4F8"/>
+                </a:solidFill>
+                <a:latin typeface="Segoe UI"/>
+              </a:rPr>
+              <a:t>▸ 'buscar tijera vinifan pastel' → busca por nombre</a:t>
+            </a:r>
+          </a:p>
+          <a:p>
+            <a:pPr>
+              <a:spcBef>
+                <a:spcPts val="500"/>
+              </a:spcBef>
+              <a:spcAft>
+                <a:spcPts val="200"/>
+              </a:spcAft>
+            </a:pPr>
+            <a:r>
+              <a:rPr sz="1400" b="0">
+                <a:solidFill>
+                  <a:srgbClr val="F0F4F8"/>
+                </a:solidFill>
+                <a:latin typeface="Segoe UI"/>
+              </a:rPr>
+              <a:t>▸ 'sku cero uno uno cero uno nueve' → busca SKU directo</a:t>
             </a:r>
           </a:p>
         </p:txBody>
@@ -4627,8 +4992,8 @@
         </p:nvSpPr>
         <p:spPr>
           <a:xfrm>
-            <a:off x="457200" y="2743200"/>
-            <a:ext cx="1828800" cy="54864"/>
+            <a:off x="457200" y="2377440"/>
+            <a:ext cx="2286000" cy="36576"/>
           </a:xfrm>
           <a:prstGeom prst="rect">
             <a:avLst/>
@@ -4670,8 +5035,8 @@
         </p:nvSpPr>
         <p:spPr>
           <a:xfrm>
-            <a:off x="457200" y="2377440"/>
-            <a:ext cx="10972800" cy="914400"/>
+            <a:off x="457200" y="2011680"/>
+            <a:ext cx="11277295" cy="914400"/>
           </a:xfrm>
           <a:prstGeom prst="rect">
             <a:avLst/>
@@ -4689,6 +5054,7 @@
                 <a:solidFill>
                   <a:srgbClr val="F0F4F8"/>
                 </a:solidFill>
+                <a:latin typeface="Segoe UI"/>
               </a:rPr>
               <a:t>Reportes Exportables</a:t>
             </a:r>
@@ -4764,8 +5130,8 @@
         </p:nvSpPr>
         <p:spPr>
           <a:xfrm>
-            <a:off x="457200" y="274320"/>
-            <a:ext cx="11277295" cy="640080"/>
+            <a:off x="457200" y="228600"/>
+            <a:ext cx="11277295" cy="548640"/>
           </a:xfrm>
           <a:prstGeom prst="rect">
             <a:avLst/>
@@ -4783,21 +5149,65 @@
                 <a:solidFill>
                   <a:srgbClr val="F0F4F8"/>
                 </a:solidFill>
-              </a:rPr>
-              <a:t>Tipos de Reporte</a:t>
-            </a:r>
-          </a:p>
-        </p:txBody>
-      </p:sp>
-      <p:sp>
-        <p:nvSpPr>
-          <p:cNvPr id="4" name="TextBox 3"/>
+                <a:latin typeface="Segoe UI"/>
+              </a:rPr>
+              <a:t>Tipos de Reporte XLSX</a:t>
+            </a:r>
+          </a:p>
+        </p:txBody>
+      </p:sp>
+      <p:sp>
+        <p:nvSpPr>
+          <p:cNvPr id="4" name="Rectangle 3"/>
+          <p:cNvSpPr/>
+          <p:nvPr/>
+        </p:nvSpPr>
+        <p:spPr>
+          <a:xfrm>
+            <a:off x="457200" y="777240"/>
+            <a:ext cx="1371600" cy="27432"/>
+          </a:xfrm>
+          <a:prstGeom prst="rect">
+            <a:avLst/>
+          </a:prstGeom>
+          <a:solidFill>
+            <a:srgbClr val="00D084"/>
+          </a:solidFill>
+          <a:ln>
+            <a:noFill/>
+          </a:ln>
+        </p:spPr>
+        <p:style>
+          <a:lnRef idx="1">
+            <a:schemeClr val="accent1"/>
+          </a:lnRef>
+          <a:fillRef idx="3">
+            <a:schemeClr val="accent1"/>
+          </a:fillRef>
+          <a:effectRef idx="2">
+            <a:schemeClr val="accent1"/>
+          </a:effectRef>
+          <a:fontRef idx="minor">
+            <a:schemeClr val="lt1"/>
+          </a:fontRef>
+        </p:style>
+        <p:txBody>
+          <a:bodyPr rtlCol="0" anchor="ctr"/>
+          <a:lstStyle/>
+          <a:p>
+            <a:pPr algn="ctr"/>
+          </a:p>
+        </p:txBody>
+      </p:sp>
+      <p:sp>
+        <p:nvSpPr>
+          <p:cNvPr id="5" name="TextBox 4"/>
           <p:cNvSpPr txBox="1"/>
           <p:nvPr/>
         </p:nvSpPr>
         <p:spPr>
           <a:xfrm>
-            <a:off x="457200" y="1097280"/>
+            <a:off x="457200" y="914400"/>
             <a:ext cx="11277295" cy="5303520"/>
           </a:xfrm>
           <a:prstGeom prst="rect">
@@ -4813,14 +5223,18 @@
           <a:p>
             <a:pPr>
               <a:spcBef>
-                <a:spcPts val="1600"/>
-              </a:spcBef>
-            </a:pPr>
-            <a:r>
-              <a:rPr sz="2000" b="1">
+                <a:spcPts val="1400"/>
+              </a:spcBef>
+              <a:spcAft>
+                <a:spcPts val="400"/>
+              </a:spcAft>
+            </a:pPr>
+            <a:r>
+              <a:rPr sz="1800" b="1">
                 <a:solidFill>
                   <a:srgbClr val="00D084"/>
                 </a:solidFill>
+                <a:latin typeface="Segoe UI"/>
               </a:rPr>
               <a:t>Reporte Completo (Pulso)</a:t>
             </a:r>
@@ -4828,81 +5242,104 @@
           <a:p>
             <a:pPr>
               <a:spcBef>
-                <a:spcPts val="600"/>
-              </a:spcBef>
-            </a:pPr>
-            <a:r>
-              <a:rPr sz="1600" b="0">
-                <a:solidFill>
-                  <a:srgbClr val="F0F4F8"/>
-                </a:solidFill>
-              </a:rPr>
-              <a:t>  Hoja Resumen: KPIs, totales por categoría y línea</a:t>
-            </a:r>
-          </a:p>
-          <a:p>
-            <a:pPr>
-              <a:spcBef>
-                <a:spcPts val="600"/>
-              </a:spcBef>
-            </a:pPr>
-            <a:r>
-              <a:rPr sz="1600" b="0">
-                <a:solidFill>
-                  <a:srgbClr val="F0F4F8"/>
-                </a:solidFill>
-              </a:rPr>
-              <a:t>  Hojas por línea: datos detallados agrupados</a:t>
-            </a:r>
-          </a:p>
-          <a:p>
-            <a:pPr>
-              <a:spcBef>
-                <a:spcPts val="600"/>
-              </a:spcBef>
-            </a:pPr>
-            <a:r>
-              <a:rPr sz="1600" b="0">
-                <a:solidFill>
-                  <a:srgbClr val="F0F4F8"/>
-                </a:solidFill>
-              </a:rPr>
-              <a:t>  Hoja Sin Catálogo: SKUs sin estado de línea</a:t>
-            </a:r>
-          </a:p>
-          <a:p>
-            <a:pPr>
-              <a:spcBef>
-                <a:spcPts val="600"/>
-              </a:spcBef>
-            </a:pPr>
-            <a:r>
-              <a:rPr sz="1600" b="0">
-                <a:solidFill>
-                  <a:srgbClr val="F0F4F8"/>
-                </a:solidFill>
-              </a:rPr>
-              <a:t>  Opciones: incluir inspección (121), incluir secundarios</a:t>
-            </a:r>
-          </a:p>
-          <a:p>
-            <a:pPr>
-              <a:spcBef>
-                <a:spcPts val="600"/>
-              </a:spcBef>
-            </a:pPr>
-          </a:p>
-          <a:p>
-            <a:pPr>
-              <a:spcBef>
-                <a:spcPts val="1600"/>
-              </a:spcBef>
-            </a:pPr>
-            <a:r>
-              <a:rPr sz="2000" b="1">
+                <a:spcPts val="500"/>
+              </a:spcBef>
+              <a:spcAft>
+                <a:spcPts val="200"/>
+              </a:spcAft>
+            </a:pPr>
+            <a:r>
+              <a:rPr sz="1400" b="0">
+                <a:solidFill>
+                  <a:srgbClr val="F0F4F8"/>
+                </a:solidFill>
+                <a:latin typeface="Segoe UI"/>
+              </a:rPr>
+              <a:t>▸ Hoja Resumen: KPIs, totales por categoría y línea</a:t>
+            </a:r>
+          </a:p>
+          <a:p>
+            <a:pPr>
+              <a:spcBef>
+                <a:spcPts val="500"/>
+              </a:spcBef>
+              <a:spcAft>
+                <a:spcPts val="200"/>
+              </a:spcAft>
+            </a:pPr>
+            <a:r>
+              <a:rPr sz="1400" b="0">
+                <a:solidFill>
+                  <a:srgbClr val="F0F4F8"/>
+                </a:solidFill>
+                <a:latin typeface="Segoe UI"/>
+              </a:rPr>
+              <a:t>▸ Hojas por línea: datos detallados agrupados</a:t>
+            </a:r>
+          </a:p>
+          <a:p>
+            <a:pPr>
+              <a:spcBef>
+                <a:spcPts val="500"/>
+              </a:spcBef>
+              <a:spcAft>
+                <a:spcPts val="200"/>
+              </a:spcAft>
+            </a:pPr>
+            <a:r>
+              <a:rPr sz="1400" b="0">
+                <a:solidFill>
+                  <a:srgbClr val="F0F4F8"/>
+                </a:solidFill>
+                <a:latin typeface="Segoe UI"/>
+              </a:rPr>
+              <a:t>▸ Hoja Sin Catálogo: SKUs sin estado de línea</a:t>
+            </a:r>
+          </a:p>
+          <a:p>
+            <a:pPr>
+              <a:spcBef>
+                <a:spcPts val="500"/>
+              </a:spcBef>
+              <a:spcAft>
+                <a:spcPts val="200"/>
+              </a:spcAft>
+            </a:pPr>
+            <a:r>
+              <a:rPr sz="1400" b="0">
+                <a:solidFill>
+                  <a:srgbClr val="F0F4F8"/>
+                </a:solidFill>
+                <a:latin typeface="Segoe UI"/>
+              </a:rPr>
+              <a:t>▸ Opciones: incluir inspección (121), incluir secundarios</a:t>
+            </a:r>
+          </a:p>
+          <a:p>
+            <a:pPr>
+              <a:spcBef>
+                <a:spcPts val="400"/>
+              </a:spcBef>
+              <a:spcAft>
+                <a:spcPts val="400"/>
+              </a:spcAft>
+            </a:pPr>
+          </a:p>
+          <a:p>
+            <a:pPr>
+              <a:spcBef>
+                <a:spcPts val="1400"/>
+              </a:spcBef>
+              <a:spcAft>
+                <a:spcPts val="400"/>
+              </a:spcAft>
+            </a:pPr>
+            <a:r>
+              <a:rPr sz="1800" b="1">
                 <a:solidFill>
                   <a:srgbClr val="00D084"/>
                 </a:solidFill>
+                <a:latin typeface="Segoe UI"/>
               </a:rPr>
               <a:t>Reporte de Estado</a:t>
             </a:r>
@@ -4910,81 +5347,104 @@
           <a:p>
             <a:pPr>
               <a:spcBef>
-                <a:spcPts val="600"/>
-              </a:spcBef>
-            </a:pPr>
-            <a:r>
-              <a:rPr sz="1600" b="0">
-                <a:solidFill>
-                  <a:srgbClr val="F0F4F8"/>
-                </a:solidFill>
-              </a:rPr>
-              <a:t>  ConStock: SKUs con bx &gt;= 10</a:t>
-            </a:r>
-          </a:p>
-          <a:p>
-            <a:pPr>
-              <a:spcBef>
-                <a:spcPts val="600"/>
-              </a:spcBef>
-            </a:pPr>
-            <a:r>
-              <a:rPr sz="1600" b="0">
-                <a:solidFill>
-                  <a:srgbClr val="F0F4F8"/>
-                </a:solidFill>
-              </a:rPr>
-              <a:t>  BajoStock: SKUs con 1 &lt;= bx &lt; 10</a:t>
-            </a:r>
-          </a:p>
-          <a:p>
-            <a:pPr>
-              <a:spcBef>
-                <a:spcPts val="600"/>
-              </a:spcBef>
-            </a:pPr>
-            <a:r>
-              <a:rPr sz="1600" b="0">
-                <a:solidFill>
-                  <a:srgbClr val="F0F4F8"/>
-                </a:solidFill>
-              </a:rPr>
-              <a:t>  SinStock: SKUs con bx = 0 (agotados)</a:t>
-            </a:r>
-          </a:p>
-          <a:p>
-            <a:pPr>
-              <a:spcBef>
-                <a:spcPts val="600"/>
-              </a:spcBef>
-            </a:pPr>
-            <a:r>
-              <a:rPr sz="1600" b="0">
-                <a:solidFill>
-                  <a:srgbClr val="F0F4F8"/>
-                </a:solidFill>
-              </a:rPr>
-              <a:t>  SinCatalogo: SKUs fuera del catálogo maestro</a:t>
-            </a:r>
-          </a:p>
-          <a:p>
-            <a:pPr>
-              <a:spcBef>
-                <a:spcPts val="600"/>
-              </a:spcBef>
-            </a:pPr>
-          </a:p>
-          <a:p>
-            <a:pPr>
-              <a:spcBef>
-                <a:spcPts val="1600"/>
-              </a:spcBef>
-            </a:pPr>
-            <a:r>
-              <a:rPr sz="2000" b="1">
+                <a:spcPts val="500"/>
+              </a:spcBef>
+              <a:spcAft>
+                <a:spcPts val="200"/>
+              </a:spcAft>
+            </a:pPr>
+            <a:r>
+              <a:rPr sz="1400" b="0">
+                <a:solidFill>
+                  <a:srgbClr val="F0F4F8"/>
+                </a:solidFill>
+                <a:latin typeface="Segoe UI"/>
+              </a:rPr>
+              <a:t>▸ ConStock: SKUs con bx &gt;= 10</a:t>
+            </a:r>
+          </a:p>
+          <a:p>
+            <a:pPr>
+              <a:spcBef>
+                <a:spcPts val="500"/>
+              </a:spcBef>
+              <a:spcAft>
+                <a:spcPts val="200"/>
+              </a:spcAft>
+            </a:pPr>
+            <a:r>
+              <a:rPr sz="1400" b="0">
+                <a:solidFill>
+                  <a:srgbClr val="F0F4F8"/>
+                </a:solidFill>
+                <a:latin typeface="Segoe UI"/>
+              </a:rPr>
+              <a:t>▸ BajoStock: SKUs con 1 &lt;= bx &lt; 10</a:t>
+            </a:r>
+          </a:p>
+          <a:p>
+            <a:pPr>
+              <a:spcBef>
+                <a:spcPts val="500"/>
+              </a:spcBef>
+              <a:spcAft>
+                <a:spcPts val="200"/>
+              </a:spcAft>
+            </a:pPr>
+            <a:r>
+              <a:rPr sz="1400" b="0">
+                <a:solidFill>
+                  <a:srgbClr val="F0F4F8"/>
+                </a:solidFill>
+                <a:latin typeface="Segoe UI"/>
+              </a:rPr>
+              <a:t>▸ SinStock: SKUs con bx = 0 (agotados)</a:t>
+            </a:r>
+          </a:p>
+          <a:p>
+            <a:pPr>
+              <a:spcBef>
+                <a:spcPts val="500"/>
+              </a:spcBef>
+              <a:spcAft>
+                <a:spcPts val="200"/>
+              </a:spcAft>
+            </a:pPr>
+            <a:r>
+              <a:rPr sz="1400" b="0">
+                <a:solidFill>
+                  <a:srgbClr val="F0F4F8"/>
+                </a:solidFill>
+                <a:latin typeface="Segoe UI"/>
+              </a:rPr>
+              <a:t>▸ SinCatalogo: SKUs fuera del catálogo maestro</a:t>
+            </a:r>
+          </a:p>
+          <a:p>
+            <a:pPr>
+              <a:spcBef>
+                <a:spcPts val="400"/>
+              </a:spcBef>
+              <a:spcAft>
+                <a:spcPts val="400"/>
+              </a:spcAft>
+            </a:pPr>
+          </a:p>
+          <a:p>
+            <a:pPr>
+              <a:spcBef>
+                <a:spcPts val="1400"/>
+              </a:spcBef>
+              <a:spcAft>
+                <a:spcPts val="400"/>
+              </a:spcAft>
+            </a:pPr>
+            <a:r>
+              <a:rPr sz="1800" b="1">
                 <a:solidFill>
                   <a:srgbClr val="00D084"/>
                 </a:solidFill>
+                <a:latin typeface="Segoe UI"/>
               </a:rPr>
               <a:t>Columnas del Reporte</a:t>
             </a:r>
@@ -4992,16 +5452,20 @@
           <a:p>
             <a:pPr>
               <a:spcBef>
-                <a:spcPts val="600"/>
-              </a:spcBef>
-            </a:pPr>
-            <a:r>
-              <a:rPr sz="1600" b="0">
-                <a:solidFill>
-                  <a:srgbClr val="F0F4F8"/>
-                </a:solidFill>
-              </a:rPr>
-              <a:t>SKU · Nombre · Línea · Categoría · Cajas · Disponible venta · Estado</a:t>
+                <a:spcPts val="500"/>
+              </a:spcBef>
+              <a:spcAft>
+                <a:spcPts val="200"/>
+              </a:spcAft>
+            </a:pPr>
+            <a:r>
+              <a:rPr sz="1400" b="0">
+                <a:solidFill>
+                  <a:srgbClr val="F0F4F8"/>
+                </a:solidFill>
+                <a:latin typeface="Segoe UI"/>
+              </a:rPr>
+              <a:t>SKU | Nombre | Línea | Categoría | Cajas | Disponible venta | Estado</a:t>
             </a:r>
           </a:p>
         </p:txBody>
@@ -5075,8 +5539,8 @@
         </p:nvSpPr>
         <p:spPr>
           <a:xfrm>
-            <a:off x="457200" y="274320"/>
-            <a:ext cx="11277295" cy="640080"/>
+            <a:off x="457200" y="228600"/>
+            <a:ext cx="11277295" cy="548640"/>
           </a:xfrm>
           <a:prstGeom prst="rect">
             <a:avLst/>
@@ -5094,6 +5558,7 @@
                 <a:solidFill>
                   <a:srgbClr val="F0F4F8"/>
                 </a:solidFill>
+                <a:latin typeface="Segoe UI"/>
               </a:rPr>
               <a:t>Sistema de Alertas</a:t>
             </a:r>
@@ -5102,13 +5567,56 @@
       </p:sp>
       <p:sp>
         <p:nvSpPr>
-          <p:cNvPr id="4" name="TextBox 3"/>
+          <p:cNvPr id="4" name="Rectangle 3"/>
+          <p:cNvSpPr/>
+          <p:nvPr/>
+        </p:nvSpPr>
+        <p:spPr>
+          <a:xfrm>
+            <a:off x="457200" y="777240"/>
+            <a:ext cx="1371600" cy="27432"/>
+          </a:xfrm>
+          <a:prstGeom prst="rect">
+            <a:avLst/>
+          </a:prstGeom>
+          <a:solidFill>
+            <a:srgbClr val="00D084"/>
+          </a:solidFill>
+          <a:ln>
+            <a:noFill/>
+          </a:ln>
+        </p:spPr>
+        <p:style>
+          <a:lnRef idx="1">
+            <a:schemeClr val="accent1"/>
+          </a:lnRef>
+          <a:fillRef idx="3">
+            <a:schemeClr val="accent1"/>
+          </a:fillRef>
+          <a:effectRef idx="2">
+            <a:schemeClr val="accent1"/>
+          </a:effectRef>
+          <a:fontRef idx="minor">
+            <a:schemeClr val="lt1"/>
+          </a:fontRef>
+        </p:style>
+        <p:txBody>
+          <a:bodyPr rtlCol="0" anchor="ctr"/>
+          <a:lstStyle/>
+          <a:p>
+            <a:pPr algn="ctr"/>
+          </a:p>
+        </p:txBody>
+      </p:sp>
+      <p:sp>
+        <p:nvSpPr>
+          <p:cNvPr id="5" name="TextBox 4"/>
           <p:cNvSpPr txBox="1"/>
           <p:nvPr/>
         </p:nvSpPr>
         <p:spPr>
           <a:xfrm>
-            <a:off x="457200" y="1097280"/>
+            <a:off x="457200" y="914400"/>
             <a:ext cx="11277295" cy="5303520"/>
           </a:xfrm>
           <a:prstGeom prst="rect">
@@ -5124,14 +5632,18 @@
           <a:p>
             <a:pPr>
               <a:spcBef>
-                <a:spcPts val="1600"/>
-              </a:spcBef>
-            </a:pPr>
-            <a:r>
-              <a:rPr sz="2000" b="1">
+                <a:spcPts val="1400"/>
+              </a:spcBef>
+              <a:spcAft>
+                <a:spcPts val="400"/>
+              </a:spcAft>
+            </a:pPr>
+            <a:r>
+              <a:rPr sz="1800" b="1">
                 <a:solidFill>
                   <a:srgbClr val="00D084"/>
                 </a:solidFill>
+                <a:latin typeface="Segoe UI"/>
               </a:rPr>
               <a:t>Tipos de Alerta</a:t>
             </a:r>
@@ -5139,150 +5651,211 @@
           <a:p>
             <a:pPr>
               <a:spcBef>
-                <a:spcPts val="600"/>
-              </a:spcBef>
-            </a:pPr>
-            <a:r>
-              <a:rPr sz="1600" b="0">
-                <a:solidFill>
-                  <a:srgbClr val="F0F4F8"/>
-                </a:solidFill>
-              </a:rPr>
-              <a:t>  Crítico (rojo): bx = 0, SKU agotado</a:t>
-            </a:r>
-          </a:p>
-          <a:p>
-            <a:pPr>
-              <a:spcBef>
-                <a:spcPts val="600"/>
-              </a:spcBef>
-            </a:pPr>
-            <a:r>
-              <a:rPr sz="1600" b="0">
-                <a:solidFill>
-                  <a:srgbClr val="F0F4F8"/>
-                </a:solidFill>
-              </a:rPr>
-              <a:t>  Advertencia (amarillo): 1 &lt;= bx &lt; 10, stock bajo</a:t>
-            </a:r>
-          </a:p>
-          <a:p>
-            <a:pPr>
-              <a:spcBef>
-                <a:spcPts val="600"/>
-              </a:spcBef>
-            </a:pPr>
-          </a:p>
-          <a:p>
-            <a:pPr>
-              <a:spcBef>
-                <a:spcPts val="1600"/>
-              </a:spcBef>
-            </a:pPr>
-            <a:r>
-              <a:rPr sz="2000" b="1">
+                <a:spcPts val="500"/>
+              </a:spcBef>
+              <a:spcAft>
+                <a:spcPts val="200"/>
+              </a:spcAft>
+            </a:pPr>
+            <a:r>
+              <a:rPr sz="1400" b="0">
+                <a:solidFill>
+                  <a:srgbClr val="F0F4F8"/>
+                </a:solidFill>
+                <a:latin typeface="Segoe UI"/>
+              </a:rPr>
+              <a:t>▸ Crítico (rojo): bx = 0, SKU completamente agotado</a:t>
+            </a:r>
+          </a:p>
+          <a:p>
+            <a:pPr>
+              <a:spcBef>
+                <a:spcPts val="500"/>
+              </a:spcBef>
+              <a:spcAft>
+                <a:spcPts val="200"/>
+              </a:spcAft>
+            </a:pPr>
+            <a:r>
+              <a:rPr sz="1400" b="0">
+                <a:solidFill>
+                  <a:srgbClr val="F0F4F8"/>
+                </a:solidFill>
+                <a:latin typeface="Segoe UI"/>
+              </a:rPr>
+              <a:t>▸ Advertencia (amarillo): 1 &lt;= bx &lt; 10, stock bajo</a:t>
+            </a:r>
+          </a:p>
+          <a:p>
+            <a:pPr>
+              <a:spcBef>
+                <a:spcPts val="400"/>
+              </a:spcBef>
+              <a:spcAft>
+                <a:spcPts val="400"/>
+              </a:spcAft>
+            </a:pPr>
+          </a:p>
+          <a:p>
+            <a:pPr>
+              <a:spcBef>
+                <a:spcPts val="1400"/>
+              </a:spcBef>
+              <a:spcAft>
+                <a:spcPts val="400"/>
+              </a:spcAft>
+            </a:pPr>
+            <a:r>
+              <a:rPr sz="1800" b="1">
                 <a:solidFill>
                   <a:srgbClr val="00D084"/>
                 </a:solidFill>
-              </a:rPr>
-              <a:t>Ordenamiento</a:t>
-            </a:r>
-          </a:p>
-          <a:p>
-            <a:pPr>
-              <a:spcBef>
-                <a:spcPts val="600"/>
-              </a:spcBef>
-            </a:pPr>
-            <a:r>
-              <a:rPr sz="1600" b="0">
-                <a:solidFill>
-                  <a:srgbClr val="F0F4F8"/>
-                </a:solidFill>
-              </a:rPr>
-              <a:t>  Primero críticos, luego advertencias</a:t>
-            </a:r>
-          </a:p>
-          <a:p>
-            <a:pPr>
-              <a:spcBef>
-                <a:spcPts val="600"/>
-              </a:spcBef>
-            </a:pPr>
-            <a:r>
-              <a:rPr sz="1600" b="0">
-                <a:solidFill>
-                  <a:srgbClr val="F0F4F8"/>
-                </a:solidFill>
-              </a:rPr>
-              <a:t>  Dentro de cada tipo: ordenado por bx ascendente</a:t>
-            </a:r>
-          </a:p>
-          <a:p>
-            <a:pPr>
-              <a:spcBef>
-                <a:spcPts val="600"/>
-              </a:spcBef>
-            </a:pPr>
-            <a:r>
-              <a:rPr sz="1600" b="0">
-                <a:solidFill>
-                  <a:srgbClr val="F0F4F8"/>
-                </a:solidFill>
-              </a:rPr>
-              <a:t>  Solo SKUs con estado_linea definido (catálogo)</a:t>
-            </a:r>
-          </a:p>
-          <a:p>
-            <a:pPr>
-              <a:spcBef>
-                <a:spcPts val="600"/>
-              </a:spcBef>
-            </a:pPr>
-          </a:p>
-          <a:p>
-            <a:pPr>
-              <a:spcBef>
-                <a:spcPts val="1600"/>
-              </a:spcBef>
-            </a:pPr>
-            <a:r>
-              <a:rPr sz="2000" b="1">
+                <a:latin typeface="Segoe UI"/>
+              </a:rPr>
+              <a:t>Criterios de Generación</a:t>
+            </a:r>
+          </a:p>
+          <a:p>
+            <a:pPr>
+              <a:spcBef>
+                <a:spcPts val="500"/>
+              </a:spcBef>
+              <a:spcAft>
+                <a:spcPts val="200"/>
+              </a:spcAft>
+            </a:pPr>
+            <a:r>
+              <a:rPr sz="1400" b="0">
+                <a:solidFill>
+                  <a:srgbClr val="F0F4F8"/>
+                </a:solidFill>
+                <a:latin typeface="Segoe UI"/>
+              </a:rPr>
+              <a:t>▸ Solo SKUs con estado_linea definido (catálogo)</a:t>
+            </a:r>
+          </a:p>
+          <a:p>
+            <a:pPr>
+              <a:spcBef>
+                <a:spcPts val="500"/>
+              </a:spcBef>
+              <a:spcAft>
+                <a:spcPts val="200"/>
+              </a:spcAft>
+            </a:pPr>
+            <a:r>
+              <a:rPr sz="1400" b="0">
+                <a:solidFill>
+                  <a:srgbClr val="F0F4F8"/>
+                </a:solidFill>
+                <a:latin typeface="Segoe UI"/>
+              </a:rPr>
+              <a:t>▸ Ordenados: críticos primero, luego por bx ascendente</a:t>
+            </a:r>
+          </a:p>
+          <a:p>
+            <a:pPr>
+              <a:spcBef>
+                <a:spcPts val="500"/>
+              </a:spcBef>
+              <a:spcAft>
+                <a:spcPts val="200"/>
+              </a:spcAft>
+            </a:pPr>
+            <a:r>
+              <a:rPr sz="1400" b="0">
+                <a:solidFill>
+                  <a:srgbClr val="F0F4F8"/>
+                </a:solidFill>
+                <a:latin typeface="Segoe UI"/>
+              </a:rPr>
+              <a:t>▸ Contador en badge de navegación</a:t>
+            </a:r>
+          </a:p>
+          <a:p>
+            <a:pPr>
+              <a:spcBef>
+                <a:spcPts val="400"/>
+              </a:spcBef>
+              <a:spcAft>
+                <a:spcPts val="400"/>
+              </a:spcAft>
+            </a:pPr>
+          </a:p>
+          <a:p>
+            <a:pPr>
+              <a:spcBef>
+                <a:spcPts val="1400"/>
+              </a:spcBef>
+              <a:spcAft>
+                <a:spcPts val="400"/>
+              </a:spcAft>
+            </a:pPr>
+            <a:r>
+              <a:rPr sz="1800" b="1">
                 <a:solidFill>
                   <a:srgbClr val="00D084"/>
                 </a:solidFill>
-              </a:rPr>
-              <a:t>Notificación</a:t>
-            </a:r>
-          </a:p>
-          <a:p>
-            <a:pPr>
-              <a:spcBef>
-                <a:spcPts val="600"/>
-              </a:spcBef>
-            </a:pPr>
-            <a:r>
-              <a:rPr sz="1600" b="0">
-                <a:solidFill>
-                  <a:srgbClr val="F0F4F8"/>
-                </a:solidFill>
-              </a:rPr>
-              <a:t>  Badge en navegación con contador de alertas críticas</a:t>
-            </a:r>
-          </a:p>
-          <a:p>
-            <a:pPr>
-              <a:spcBef>
-                <a:spcPts val="600"/>
-              </a:spcBef>
-            </a:pPr>
-            <a:r>
-              <a:rPr sz="1600" b="0">
-                <a:solidFill>
-                  <a:srgbClr val="F0F4F8"/>
-                </a:solidFill>
-              </a:rPr>
-              <a:t>  Panel dedicado con filtros: Todos, Sin Stock, Bajo Stock</a:t>
+                <a:latin typeface="Segoe UI"/>
+              </a:rPr>
+              <a:t>Panel de Alertas</a:t>
+            </a:r>
+          </a:p>
+          <a:p>
+            <a:pPr>
+              <a:spcBef>
+                <a:spcPts val="500"/>
+              </a:spcBef>
+              <a:spcAft>
+                <a:spcPts val="200"/>
+              </a:spcAft>
+            </a:pPr>
+            <a:r>
+              <a:rPr sz="1400" b="0">
+                <a:solidFill>
+                  <a:srgbClr val="F0F4F8"/>
+                </a:solidFill>
+                <a:latin typeface="Segoe UI"/>
+              </a:rPr>
+              <a:t>▸ Filtros: Todos, Sin Stock, Bajo Stock</a:t>
+            </a:r>
+          </a:p>
+          <a:p>
+            <a:pPr>
+              <a:spcBef>
+                <a:spcPts val="500"/>
+              </a:spcBef>
+              <a:spcAft>
+                <a:spcPts val="200"/>
+              </a:spcAft>
+            </a:pPr>
+            <a:r>
+              <a:rPr sz="1400" b="0">
+                <a:solidFill>
+                  <a:srgbClr val="F0F4F8"/>
+                </a:solidFill>
+                <a:latin typeface="Segoe UI"/>
+              </a:rPr>
+              <a:t>▸ Lista expandible con detalle por SKU</a:t>
+            </a:r>
+          </a:p>
+          <a:p>
+            <a:pPr>
+              <a:spcBef>
+                <a:spcPts val="500"/>
+              </a:spcBef>
+              <a:spcAft>
+                <a:spcPts val="200"/>
+              </a:spcAft>
+            </a:pPr>
+            <a:r>
+              <a:rPr sz="1400" b="0">
+                <a:solidFill>
+                  <a:srgbClr val="F0F4F8"/>
+                </a:solidFill>
+                <a:latin typeface="Segoe UI"/>
+              </a:rPr>
+              <a:t>▸ Acceso rápido desde navegación principal</a:t>
             </a:r>
           </a:p>
         </p:txBody>
@@ -5356,8 +5929,8 @@
         </p:nvSpPr>
         <p:spPr>
           <a:xfrm>
-            <a:off x="457200" y="2743200"/>
-            <a:ext cx="1828800" cy="54864"/>
+            <a:off x="457200" y="2377440"/>
+            <a:ext cx="2286000" cy="36576"/>
           </a:xfrm>
           <a:prstGeom prst="rect">
             <a:avLst/>
@@ -5399,8 +5972,8 @@
         </p:nvSpPr>
         <p:spPr>
           <a:xfrm>
-            <a:off x="457200" y="2377440"/>
-            <a:ext cx="10972800" cy="914400"/>
+            <a:off x="457200" y="2011680"/>
+            <a:ext cx="11277295" cy="914400"/>
           </a:xfrm>
           <a:prstGeom prst="rect">
             <a:avLst/>
@@ -5418,6 +5991,7 @@
                 <a:solidFill>
                   <a:srgbClr val="F0F4F8"/>
                 </a:solidFill>
+                <a:latin typeface="Segoe UI"/>
               </a:rPr>
               <a:t>Seguridad y Acceso</a:t>
             </a:r>
@@ -5493,8 +6067,8 @@
         </p:nvSpPr>
         <p:spPr>
           <a:xfrm>
-            <a:off x="457200" y="274320"/>
-            <a:ext cx="11277295" cy="640080"/>
+            <a:off x="457200" y="228600"/>
+            <a:ext cx="11277295" cy="548640"/>
           </a:xfrm>
           <a:prstGeom prst="rect">
             <a:avLst/>
@@ -5512,21 +6086,65 @@
                 <a:solidFill>
                   <a:srgbClr val="F0F4F8"/>
                 </a:solidFill>
-              </a:rPr>
-              <a:t>Autenticación</a:t>
-            </a:r>
-          </a:p>
-        </p:txBody>
-      </p:sp>
-      <p:sp>
-        <p:nvSpPr>
-          <p:cNvPr id="4" name="TextBox 3"/>
+                <a:latin typeface="Segoe UI"/>
+              </a:rPr>
+              <a:t>Modelo de Autenticación</a:t>
+            </a:r>
+          </a:p>
+        </p:txBody>
+      </p:sp>
+      <p:sp>
+        <p:nvSpPr>
+          <p:cNvPr id="4" name="Rectangle 3"/>
+          <p:cNvSpPr/>
+          <p:nvPr/>
+        </p:nvSpPr>
+        <p:spPr>
+          <a:xfrm>
+            <a:off x="457200" y="777240"/>
+            <a:ext cx="1371600" cy="27432"/>
+          </a:xfrm>
+          <a:prstGeom prst="rect">
+            <a:avLst/>
+          </a:prstGeom>
+          <a:solidFill>
+            <a:srgbClr val="00D084"/>
+          </a:solidFill>
+          <a:ln>
+            <a:noFill/>
+          </a:ln>
+        </p:spPr>
+        <p:style>
+          <a:lnRef idx="1">
+            <a:schemeClr val="accent1"/>
+          </a:lnRef>
+          <a:fillRef idx="3">
+            <a:schemeClr val="accent1"/>
+          </a:fillRef>
+          <a:effectRef idx="2">
+            <a:schemeClr val="accent1"/>
+          </a:effectRef>
+          <a:fontRef idx="minor">
+            <a:schemeClr val="lt1"/>
+          </a:fontRef>
+        </p:style>
+        <p:txBody>
+          <a:bodyPr rtlCol="0" anchor="ctr"/>
+          <a:lstStyle/>
+          <a:p>
+            <a:pPr algn="ctr"/>
+          </a:p>
+        </p:txBody>
+      </p:sp>
+      <p:sp>
+        <p:nvSpPr>
+          <p:cNvPr id="5" name="TextBox 4"/>
           <p:cNvSpPr txBox="1"/>
           <p:nvPr/>
         </p:nvSpPr>
         <p:spPr>
           <a:xfrm>
-            <a:off x="457200" y="1097280"/>
+            <a:off x="457200" y="914400"/>
             <a:ext cx="11277295" cy="5303520"/>
           </a:xfrm>
           <a:prstGeom prst="rect">
@@ -5542,195 +6160,249 @@
           <a:p>
             <a:pPr>
               <a:spcBef>
-                <a:spcPts val="1600"/>
-              </a:spcBef>
-            </a:pPr>
-            <a:r>
-              <a:rPr sz="2000" b="1">
+                <a:spcPts val="1400"/>
+              </a:spcBef>
+              <a:spcAft>
+                <a:spcPts val="400"/>
+              </a:spcAft>
+            </a:pPr>
+            <a:r>
+              <a:rPr sz="1800" b="1">
                 <a:solidFill>
                   <a:srgbClr val="00D084"/>
                 </a:solidFill>
-              </a:rPr>
-              <a:t>Claves de Acceso</a:t>
-            </a:r>
-          </a:p>
-          <a:p>
-            <a:pPr>
-              <a:spcBef>
-                <a:spcPts val="600"/>
-              </a:spcBef>
-            </a:pPr>
-            <a:r>
-              <a:rPr sz="1600" b="0">
-                <a:solidFill>
-                  <a:srgbClr val="F0F4F8"/>
-                </a:solidFill>
-              </a:rPr>
-              <a:t>  S1_API_KEY: Administrativa (upload, catalogo, resumen)</a:t>
-            </a:r>
-          </a:p>
-          <a:p>
-            <a:pPr>
-              <a:spcBef>
-                <a:spcPts val="600"/>
-              </a:spcBef>
-            </a:pPr>
-            <a:r>
-              <a:rPr sz="1600" b="0">
-                <a:solidFill>
-                  <a:srgbClr val="F0F4F8"/>
-                </a:solidFill>
-              </a:rPr>
-              <a:t>  S1_READ_API_KEY: Lectura para frontend estático</a:t>
-            </a:r>
-          </a:p>
-          <a:p>
-            <a:pPr>
-              <a:spcBef>
-                <a:spcPts val="600"/>
-              </a:spcBef>
-            </a:pPr>
-          </a:p>
-          <a:p>
-            <a:pPr>
-              <a:spcBef>
-                <a:spcPts val="1600"/>
-              </a:spcBef>
-            </a:pPr>
-            <a:r>
-              <a:rPr sz="2000" b="1">
+                <a:latin typeface="Segoe UI"/>
+              </a:rPr>
+              <a:t>Dos Niveles de Clave</a:t>
+            </a:r>
+          </a:p>
+          <a:p>
+            <a:pPr>
+              <a:spcBef>
+                <a:spcPts val="500"/>
+              </a:spcBef>
+              <a:spcAft>
+                <a:spcPts val="200"/>
+              </a:spcAft>
+            </a:pPr>
+            <a:r>
+              <a:rPr sz="1400" b="0">
+                <a:solidFill>
+                  <a:srgbClr val="F0F4F8"/>
+                </a:solidFill>
+                <a:latin typeface="Segoe UI"/>
+              </a:rPr>
+              <a:t>▸ S1_API_KEY: Administrativa (upload, catálogo, resumen)</a:t>
+            </a:r>
+          </a:p>
+          <a:p>
+            <a:pPr>
+              <a:spcBef>
+                <a:spcPts val="500"/>
+              </a:spcBef>
+              <a:spcAft>
+                <a:spcPts val="200"/>
+              </a:spcAft>
+            </a:pPr>
+            <a:r>
+              <a:rPr sz="1400" b="0">
+                <a:solidFill>
+                  <a:srgbClr val="F0F4F8"/>
+                </a:solidFill>
+                <a:latin typeface="Segoe UI"/>
+              </a:rPr>
+              <a:t>▸ S1_READ_API_KEY: Lectura para frontend estático</a:t>
+            </a:r>
+          </a:p>
+          <a:p>
+            <a:pPr>
+              <a:spcBef>
+                <a:spcPts val="400"/>
+              </a:spcBef>
+              <a:spcAft>
+                <a:spcPts val="400"/>
+              </a:spcAft>
+            </a:pPr>
+          </a:p>
+          <a:p>
+            <a:pPr>
+              <a:spcBef>
+                <a:spcPts val="1400"/>
+              </a:spcBef>
+              <a:spcAft>
+                <a:spcPts val="400"/>
+              </a:spcAft>
+            </a:pPr>
+            <a:r>
+              <a:rPr sz="1800" b="1">
                 <a:solidFill>
                   <a:srgbClr val="00D084"/>
                 </a:solidFill>
-              </a:rPr>
-              <a:t>Endpoints Protegidos</a:t>
-            </a:r>
-          </a:p>
-          <a:p>
-            <a:pPr>
-              <a:spcBef>
-                <a:spcPts val="600"/>
-              </a:spcBef>
-            </a:pPr>
-            <a:r>
-              <a:rPr sz="1600" b="0">
-                <a:solidFill>
-                  <a:srgbClr val="F0F4F8"/>
-                </a:solidFill>
-              </a:rPr>
-              <a:t>  GET /api/v1/stock → requiere S1_READ_API_KEY</a:t>
-            </a:r>
-          </a:p>
-          <a:p>
-            <a:pPr>
-              <a:spcBef>
-                <a:spcPts val="600"/>
-              </a:spcBef>
-            </a:pPr>
-            <a:r>
-              <a:rPr sz="1600" b="0">
-                <a:solidFill>
-                  <a:srgbClr val="F0F4F8"/>
-                </a:solidFill>
-              </a:rPr>
-              <a:t>  GET /api/v1/health → requiere S1_READ_API_KEY</a:t>
-            </a:r>
-          </a:p>
-          <a:p>
-            <a:pPr>
-              <a:spcBef>
-                <a:spcPts val="600"/>
-              </a:spcBef>
-            </a:pPr>
-            <a:r>
-              <a:rPr sz="1600" b="0">
-                <a:solidFill>
-                  <a:srgbClr val="F0F4F8"/>
-                </a:solidFill>
-              </a:rPr>
-              <a:t>  POST /api/v1/catalog/upload → requiere S1_API_KEY</a:t>
-            </a:r>
-          </a:p>
-          <a:p>
-            <a:pPr>
-              <a:spcBef>
-                <a:spcPts val="600"/>
-              </a:spcBef>
-            </a:pPr>
-            <a:r>
-              <a:rPr sz="1600" b="0">
-                <a:solidFill>
-                  <a:srgbClr val="F0F4F8"/>
-                </a:solidFill>
-              </a:rPr>
-              <a:t>  GET /api/v1/resumen → requiere S1_API_KEY</a:t>
-            </a:r>
-          </a:p>
-          <a:p>
-            <a:pPr>
-              <a:spcBef>
-                <a:spcPts val="600"/>
-              </a:spcBef>
-            </a:pPr>
-          </a:p>
-          <a:p>
-            <a:pPr>
-              <a:spcBef>
-                <a:spcPts val="1600"/>
-              </a:spcBef>
-            </a:pPr>
-            <a:r>
-              <a:rPr sz="2000" b="1">
+                <a:latin typeface="Segoe UI"/>
+              </a:rPr>
+              <a:t>Endpoints y Permisos</a:t>
+            </a:r>
+          </a:p>
+          <a:p>
+            <a:pPr>
+              <a:spcBef>
+                <a:spcPts val="500"/>
+              </a:spcBef>
+              <a:spcAft>
+                <a:spcPts val="200"/>
+              </a:spcAft>
+            </a:pPr>
+            <a:r>
+              <a:rPr sz="1400" b="0">
+                <a:solidFill>
+                  <a:srgbClr val="F0F4F8"/>
+                </a:solidFill>
+                <a:latin typeface="Segoe UI"/>
+              </a:rPr>
+              <a:t>▸ GET /api/v1/stock → requiere READ_KEY</a:t>
+            </a:r>
+          </a:p>
+          <a:p>
+            <a:pPr>
+              <a:spcBef>
+                <a:spcPts val="500"/>
+              </a:spcBef>
+              <a:spcAft>
+                <a:spcPts val="200"/>
+              </a:spcAft>
+            </a:pPr>
+            <a:r>
+              <a:rPr sz="1400" b="0">
+                <a:solidFill>
+                  <a:srgbClr val="F0F4F8"/>
+                </a:solidFill>
+                <a:latin typeface="Segoe UI"/>
+              </a:rPr>
+              <a:t>▸ GET /api/v1/health → requiere READ_KEY</a:t>
+            </a:r>
+          </a:p>
+          <a:p>
+            <a:pPr>
+              <a:spcBef>
+                <a:spcPts val="500"/>
+              </a:spcBef>
+              <a:spcAft>
+                <a:spcPts val="200"/>
+              </a:spcAft>
+            </a:pPr>
+            <a:r>
+              <a:rPr sz="1400" b="0">
+                <a:solidFill>
+                  <a:srgbClr val="F0F4F8"/>
+                </a:solidFill>
+                <a:latin typeface="Segoe UI"/>
+              </a:rPr>
+              <a:t>▸ POST /api/v1/catalog/upload → requiere ADMIN_KEY</a:t>
+            </a:r>
+          </a:p>
+          <a:p>
+            <a:pPr>
+              <a:spcBef>
+                <a:spcPts val="500"/>
+              </a:spcBef>
+              <a:spcAft>
+                <a:spcPts val="200"/>
+              </a:spcAft>
+            </a:pPr>
+            <a:r>
+              <a:rPr sz="1400" b="0">
+                <a:solidFill>
+                  <a:srgbClr val="F0F4F8"/>
+                </a:solidFill>
+                <a:latin typeface="Segoe UI"/>
+              </a:rPr>
+              <a:t>▸ GET /api/v1/resumen → requiere ADMIN_KEY</a:t>
+            </a:r>
+          </a:p>
+          <a:p>
+            <a:pPr>
+              <a:spcBef>
+                <a:spcPts val="400"/>
+              </a:spcBef>
+              <a:spcAft>
+                <a:spcPts val="400"/>
+              </a:spcAft>
+            </a:pPr>
+          </a:p>
+          <a:p>
+            <a:pPr>
+              <a:spcBef>
+                <a:spcPts val="1400"/>
+              </a:spcBef>
+              <a:spcAft>
+                <a:spcPts val="400"/>
+              </a:spcAft>
+            </a:pPr>
+            <a:r>
+              <a:rPr sz="1800" b="1">
                 <a:solidFill>
                   <a:srgbClr val="00D084"/>
                 </a:solidFill>
-              </a:rPr>
-              <a:t>CORS</a:t>
-            </a:r>
-          </a:p>
-          <a:p>
-            <a:pPr>
-              <a:spcBef>
-                <a:spcPts val="600"/>
-              </a:spcBef>
-            </a:pPr>
-            <a:r>
-              <a:rPr sz="1600" b="0">
-                <a:solidFill>
-                  <a:srgbClr val="F0F4F8"/>
-                </a:solidFill>
-              </a:rPr>
-              <a:t>  Permitido: https://carloscus.github.io</a:t>
-            </a:r>
-          </a:p>
-          <a:p>
-            <a:pPr>
-              <a:spcBef>
-                <a:spcPts val="600"/>
-              </a:spcBef>
-            </a:pPr>
-            <a:r>
-              <a:rPr sz="1600" b="0">
-                <a:solidFill>
-                  <a:srgbClr val="F0F4F8"/>
-                </a:solidFill>
-              </a:rPr>
-              <a:t>  Desarrollo: http://localhost:3000, :5173</a:t>
-            </a:r>
-          </a:p>
-          <a:p>
-            <a:pPr>
-              <a:spcBef>
-                <a:spcPts val="600"/>
-              </a:spcBef>
-            </a:pPr>
-            <a:r>
-              <a:rPr sz="1600" b="0">
-                <a:solidFill>
-                  <a:srgbClr val="F0F4F8"/>
-                </a:solidFill>
-              </a:rPr>
-              <a:t>  Rate limit: 60 requests/minute por IP</a:t>
+                <a:latin typeface="Segoe UI"/>
+              </a:rPr>
+              <a:t>Controles Operativos</a:t>
+            </a:r>
+          </a:p>
+          <a:p>
+            <a:pPr>
+              <a:spcBef>
+                <a:spcPts val="500"/>
+              </a:spcBef>
+              <a:spcAft>
+                <a:spcPts val="200"/>
+              </a:spcAft>
+            </a:pPr>
+            <a:r>
+              <a:rPr sz="1400" b="0">
+                <a:solidFill>
+                  <a:srgbClr val="F0F4F8"/>
+                </a:solidFill>
+                <a:latin typeface="Segoe UI"/>
+              </a:rPr>
+              <a:t>▸ CORS restringido a github.io + localhost</a:t>
+            </a:r>
+          </a:p>
+          <a:p>
+            <a:pPr>
+              <a:spcBef>
+                <a:spcPts val="500"/>
+              </a:spcBef>
+              <a:spcAft>
+                <a:spcPts val="200"/>
+              </a:spcAft>
+            </a:pPr>
+            <a:r>
+              <a:rPr sz="1400" b="0">
+                <a:solidFill>
+                  <a:srgbClr val="F0F4F8"/>
+                </a:solidFill>
+                <a:latin typeface="Segoe UI"/>
+              </a:rPr>
+              <a:t>▸ Rate limit: 60 requests/minute por IP</a:t>
+            </a:r>
+          </a:p>
+          <a:p>
+            <a:pPr>
+              <a:spcBef>
+                <a:spcPts val="500"/>
+              </a:spcBef>
+              <a:spcAft>
+                <a:spcPts val="200"/>
+              </a:spcAft>
+            </a:pPr>
+            <a:r>
+              <a:rPr sz="1400" b="0">
+                <a:solidFill>
+                  <a:srgbClr val="F0F4F8"/>
+                </a:solidFill>
+                <a:latin typeface="Segoe UI"/>
+              </a:rPr>
+              <a:t>▸ La clave de lectura puede estar en el frontend (pública)</a:t>
             </a:r>
           </a:p>
         </p:txBody>
@@ -5804,8 +6476,8 @@
         </p:nvSpPr>
         <p:spPr>
           <a:xfrm>
-            <a:off x="457200" y="274320"/>
-            <a:ext cx="11277295" cy="640080"/>
+            <a:off x="457200" y="228600"/>
+            <a:ext cx="11277295" cy="548640"/>
           </a:xfrm>
           <a:prstGeom prst="rect">
             <a:avLst/>
@@ -5823,6 +6495,7 @@
                 <a:solidFill>
                   <a:srgbClr val="F0F4F8"/>
                 </a:solidFill>
+                <a:latin typeface="Segoe UI"/>
               </a:rPr>
               <a:t>Contenido</a:t>
             </a:r>
@@ -5831,13 +6504,56 @@
       </p:sp>
       <p:sp>
         <p:nvSpPr>
-          <p:cNvPr id="4" name="TextBox 3"/>
+          <p:cNvPr id="4" name="Rectangle 3"/>
+          <p:cNvSpPr/>
+          <p:nvPr/>
+        </p:nvSpPr>
+        <p:spPr>
+          <a:xfrm>
+            <a:off x="457200" y="777240"/>
+            <a:ext cx="1371600" cy="27432"/>
+          </a:xfrm>
+          <a:prstGeom prst="rect">
+            <a:avLst/>
+          </a:prstGeom>
+          <a:solidFill>
+            <a:srgbClr val="00D084"/>
+          </a:solidFill>
+          <a:ln>
+            <a:noFill/>
+          </a:ln>
+        </p:spPr>
+        <p:style>
+          <a:lnRef idx="1">
+            <a:schemeClr val="accent1"/>
+          </a:lnRef>
+          <a:fillRef idx="3">
+            <a:schemeClr val="accent1"/>
+          </a:fillRef>
+          <a:effectRef idx="2">
+            <a:schemeClr val="accent1"/>
+          </a:effectRef>
+          <a:fontRef idx="minor">
+            <a:schemeClr val="lt1"/>
+          </a:fontRef>
+        </p:style>
+        <p:txBody>
+          <a:bodyPr rtlCol="0" anchor="ctr"/>
+          <a:lstStyle/>
+          <a:p>
+            <a:pPr algn="ctr"/>
+          </a:p>
+        </p:txBody>
+      </p:sp>
+      <p:sp>
+        <p:nvSpPr>
+          <p:cNvPr id="5" name="TextBox 4"/>
           <p:cNvSpPr txBox="1"/>
           <p:nvPr/>
         </p:nvSpPr>
         <p:spPr>
           <a:xfrm>
-            <a:off x="457200" y="1097280"/>
+            <a:off x="457200" y="914400"/>
             <a:ext cx="11277295" cy="5303520"/>
           </a:xfrm>
           <a:prstGeom prst="rect">
@@ -5853,14 +6569,18 @@
           <a:p>
             <a:pPr>
               <a:spcBef>
-                <a:spcPts val="1600"/>
-              </a:spcBef>
-            </a:pPr>
-            <a:r>
-              <a:rPr sz="2000" b="1">
+                <a:spcPts val="1400"/>
+              </a:spcBef>
+              <a:spcAft>
+                <a:spcPts val="400"/>
+              </a:spcAft>
+            </a:pPr>
+            <a:r>
+              <a:rPr sz="1800" b="1">
                 <a:solidFill>
                   <a:srgbClr val="00D084"/>
                 </a:solidFill>
+                <a:latin typeface="Segoe UI"/>
               </a:rPr>
               <a:t>Arquitectura del Sistema</a:t>
             </a:r>
@@ -5868,66 +6588,85 @@
           <a:p>
             <a:pPr>
               <a:spcBef>
-                <a:spcPts val="600"/>
-              </a:spcBef>
-            </a:pPr>
-            <a:r>
-              <a:rPr sz="1600" b="0">
-                <a:solidFill>
-                  <a:srgbClr val="F0F4F8"/>
-                </a:solidFill>
-              </a:rPr>
-              <a:t>  Frontend PWA (Lit Web Components)</a:t>
-            </a:r>
-          </a:p>
-          <a:p>
-            <a:pPr>
-              <a:spcBef>
-                <a:spcPts val="600"/>
-              </a:spcBef>
-            </a:pPr>
-            <a:r>
-              <a:rPr sz="1600" b="0">
-                <a:solidFill>
-                  <a:srgbClr val="F0F4F8"/>
-                </a:solidFill>
-              </a:rPr>
-              <a:t>  Backend API (FastAPI + Render)</a:t>
-            </a:r>
-          </a:p>
-          <a:p>
-            <a:pPr>
-              <a:spcBef>
-                <a:spcPts val="600"/>
-              </a:spcBef>
-            </a:pPr>
-            <a:r>
-              <a:rPr sz="1600" b="0">
-                <a:solidFill>
-                  <a:srgbClr val="F0F4F8"/>
-                </a:solidFill>
-              </a:rPr>
-              <a:t>  Flujo de datos y capas de caché</a:t>
-            </a:r>
-          </a:p>
-          <a:p>
-            <a:pPr>
-              <a:spcBef>
-                <a:spcPts val="600"/>
-              </a:spcBef>
-            </a:pPr>
-          </a:p>
-          <a:p>
-            <a:pPr>
-              <a:spcBef>
-                <a:spcPts val="1600"/>
-              </a:spcBef>
-            </a:pPr>
-            <a:r>
-              <a:rPr sz="2000" b="1">
+                <a:spcPts val="500"/>
+              </a:spcBef>
+              <a:spcAft>
+                <a:spcPts val="200"/>
+              </a:spcAft>
+            </a:pPr>
+            <a:r>
+              <a:rPr sz="1400" b="0">
+                <a:solidFill>
+                  <a:srgbClr val="F0F4F8"/>
+                </a:solidFill>
+                <a:latin typeface="Segoe UI"/>
+              </a:rPr>
+              <a:t>▸ Frontend PWA (Lit Web Components)</a:t>
+            </a:r>
+          </a:p>
+          <a:p>
+            <a:pPr>
+              <a:spcBef>
+                <a:spcPts val="500"/>
+              </a:spcBef>
+              <a:spcAft>
+                <a:spcPts val="200"/>
+              </a:spcAft>
+            </a:pPr>
+            <a:r>
+              <a:rPr sz="1400" b="0">
+                <a:solidFill>
+                  <a:srgbClr val="F0F4F8"/>
+                </a:solidFill>
+                <a:latin typeface="Segoe UI"/>
+              </a:rPr>
+              <a:t>▸ Backend API (FastAPI + Render)</a:t>
+            </a:r>
+          </a:p>
+          <a:p>
+            <a:pPr>
+              <a:spcBef>
+                <a:spcPts val="500"/>
+              </a:spcBef>
+              <a:spcAft>
+                <a:spcPts val="200"/>
+              </a:spcAft>
+            </a:pPr>
+            <a:r>
+              <a:rPr sz="1400" b="0">
+                <a:solidFill>
+                  <a:srgbClr val="F0F4F8"/>
+                </a:solidFill>
+                <a:latin typeface="Segoe UI"/>
+              </a:rPr>
+              <a:t>▸ Flujo de datos y capas de caché</a:t>
+            </a:r>
+          </a:p>
+          <a:p>
+            <a:pPr>
+              <a:spcBef>
+                <a:spcPts val="400"/>
+              </a:spcBef>
+              <a:spcAft>
+                <a:spcPts val="400"/>
+              </a:spcAft>
+            </a:pPr>
+          </a:p>
+          <a:p>
+            <a:pPr>
+              <a:spcBef>
+                <a:spcPts val="1400"/>
+              </a:spcBef>
+              <a:spcAft>
+                <a:spcPts val="400"/>
+              </a:spcAft>
+            </a:pPr>
+            <a:r>
+              <a:rPr sz="1800" b="1">
                 <a:solidFill>
                   <a:srgbClr val="00D084"/>
                 </a:solidFill>
+                <a:latin typeface="Segoe UI"/>
               </a:rPr>
               <a:t>Categorías de Negocio</a:t>
             </a:r>
@@ -5935,51 +6674,66 @@
           <a:p>
             <a:pPr>
               <a:spcBef>
-                <a:spcPts val="600"/>
-              </a:spcBef>
-            </a:pPr>
-            <a:r>
-              <a:rPr sz="1600" b="0">
-                <a:solidFill>
-                  <a:srgbClr val="F0F4F8"/>
-                </a:solidFill>
-              </a:rPr>
-              <a:t>  VINIBALL, VINIFAN, REPRESENTADAS</a:t>
-            </a:r>
-          </a:p>
-          <a:p>
-            <a:pPr>
-              <a:spcBef>
-                <a:spcPts val="600"/>
-              </a:spcBef>
-            </a:pPr>
-            <a:r>
-              <a:rPr sz="1600" b="0">
-                <a:solidFill>
-                  <a:srgbClr val="F0F4F8"/>
-                </a:solidFill>
-              </a:rPr>
-              <a:t>  Mapeo por línea de producto</a:t>
-            </a:r>
-          </a:p>
-          <a:p>
-            <a:pPr>
-              <a:spcBef>
-                <a:spcPts val="600"/>
-              </a:spcBef>
-            </a:pPr>
-          </a:p>
-          <a:p>
-            <a:pPr>
-              <a:spcBef>
-                <a:spcPts val="1600"/>
-              </a:spcBef>
-            </a:pPr>
-            <a:r>
-              <a:rPr sz="2000" b="1">
+                <a:spcPts val="500"/>
+              </a:spcBef>
+              <a:spcAft>
+                <a:spcPts val="200"/>
+              </a:spcAft>
+            </a:pPr>
+            <a:r>
+              <a:rPr sz="1400" b="0">
+                <a:solidFill>
+                  <a:srgbClr val="F0F4F8"/>
+                </a:solidFill>
+                <a:latin typeface="Segoe UI"/>
+              </a:rPr>
+              <a:t>▸ VINIBALL, VINIFAN, REPRESENTADAS</a:t>
+            </a:r>
+          </a:p>
+          <a:p>
+            <a:pPr>
+              <a:spcBef>
+                <a:spcPts val="500"/>
+              </a:spcBef>
+              <a:spcAft>
+                <a:spcPts val="200"/>
+              </a:spcAft>
+            </a:pPr>
+            <a:r>
+              <a:rPr sz="1400" b="0">
+                <a:solidFill>
+                  <a:srgbClr val="F0F4F8"/>
+                </a:solidFill>
+                <a:latin typeface="Segoe UI"/>
+              </a:rPr>
+              <a:t>▸ Mapeo automático por línea</a:t>
+            </a:r>
+          </a:p>
+          <a:p>
+            <a:pPr>
+              <a:spcBef>
+                <a:spcPts val="400"/>
+              </a:spcBef>
+              <a:spcAft>
+                <a:spcPts val="400"/>
+              </a:spcAft>
+            </a:pPr>
+          </a:p>
+          <a:p>
+            <a:pPr>
+              <a:spcBef>
+                <a:spcPts val="1400"/>
+              </a:spcBef>
+              <a:spcAft>
+                <a:spcPts val="400"/>
+              </a:spcAft>
+            </a:pPr>
+            <a:r>
+              <a:rPr sz="1800" b="1">
                 <a:solidFill>
                   <a:srgbClr val="00D084"/>
                 </a:solidFill>
+                <a:latin typeface="Segoe UI"/>
               </a:rPr>
               <a:t>Estados de Stock</a:t>
             </a:r>
@@ -5987,180 +6741,230 @@
           <a:p>
             <a:pPr>
               <a:spcBef>
-                <a:spcPts val="600"/>
-              </a:spcBef>
-            </a:pPr>
-            <a:r>
-              <a:rPr sz="1600" b="0">
-                <a:solidFill>
-                  <a:srgbClr val="F0F4F8"/>
-                </a:solidFill>
-              </a:rPr>
-              <a:t>  OK, BAJO, AGOTADO</a:t>
-            </a:r>
-          </a:p>
-          <a:p>
-            <a:pPr>
-              <a:spcBef>
-                <a:spcPts val="600"/>
-              </a:spcBef>
-            </a:pPr>
-            <a:r>
-              <a:rPr sz="1600" b="0">
-                <a:solidFill>
-                  <a:srgbClr val="F0F4F8"/>
-                </a:solidFill>
-              </a:rPr>
-              <a:t>  Cálculo por cajas (bx) y unidades</a:t>
-            </a:r>
-          </a:p>
-          <a:p>
-            <a:pPr>
-              <a:spcBef>
-                <a:spcPts val="600"/>
-              </a:spcBef>
-            </a:pPr>
-          </a:p>
-          <a:p>
-            <a:pPr>
-              <a:spcBef>
-                <a:spcPts val="1600"/>
-              </a:spcBef>
-            </a:pPr>
-            <a:r>
-              <a:rPr sz="2000" b="1">
+                <a:spcPts val="500"/>
+              </a:spcBef>
+              <a:spcAft>
+                <a:spcPts val="200"/>
+              </a:spcAft>
+            </a:pPr>
+            <a:r>
+              <a:rPr sz="1400" b="0">
+                <a:solidFill>
+                  <a:srgbClr val="F0F4F8"/>
+                </a:solidFill>
+                <a:latin typeface="Segoe UI"/>
+              </a:rPr>
+              <a:t>▸ OK, BAJO, AGOTADO</a:t>
+            </a:r>
+          </a:p>
+          <a:p>
+            <a:pPr>
+              <a:spcBef>
+                <a:spcPts val="500"/>
+              </a:spcBef>
+              <a:spcAft>
+                <a:spcPts val="200"/>
+              </a:spcAft>
+            </a:pPr>
+            <a:r>
+              <a:rPr sz="1400" b="0">
+                <a:solidFill>
+                  <a:srgbClr val="F0F4F8"/>
+                </a:solidFill>
+                <a:latin typeface="Segoe UI"/>
+              </a:rPr>
+              <a:t>▸ Cálculo por cajas (bx) y unidades</a:t>
+            </a:r>
+          </a:p>
+          <a:p>
+            <a:pPr>
+              <a:spcBef>
+                <a:spcPts val="400"/>
+              </a:spcBef>
+              <a:spcAft>
+                <a:spcPts val="400"/>
+              </a:spcAft>
+            </a:pPr>
+          </a:p>
+          <a:p>
+            <a:pPr>
+              <a:spcBef>
+                <a:spcPts val="1400"/>
+              </a:spcBef>
+              <a:spcAft>
+                <a:spcPts val="400"/>
+              </a:spcAft>
+            </a:pPr>
+            <a:r>
+              <a:rPr sz="1800" b="1">
                 <a:solidFill>
                   <a:srgbClr val="00D084"/>
                 </a:solidFill>
-              </a:rPr>
-              <a:t>Funcionalidades Principales</a:t>
-            </a:r>
-          </a:p>
-          <a:p>
-            <a:pPr>
-              <a:spcBef>
-                <a:spcPts val="600"/>
-              </a:spcBef>
-            </a:pPr>
-            <a:r>
-              <a:rPr sz="1600" b="0">
-                <a:solidFill>
-                  <a:srgbClr val="F0F4F8"/>
-                </a:solidFill>
-              </a:rPr>
-              <a:t>  Dashboard y panel de estado</a:t>
-            </a:r>
-          </a:p>
-          <a:p>
-            <a:pPr>
-              <a:spcBef>
-                <a:spcPts val="600"/>
-              </a:spcBef>
-            </a:pPr>
-            <a:r>
-              <a:rPr sz="1600" b="0">
-                <a:solidFill>
-                  <a:srgbClr val="F0F4F8"/>
-                </a:solidFill>
-              </a:rPr>
-              <a:t>  Búsqueda avanzada con Fuse.js</a:t>
-            </a:r>
-          </a:p>
-          <a:p>
-            <a:pPr>
-              <a:spcBef>
-                <a:spcPts val="600"/>
-              </a:spcBef>
-            </a:pPr>
-            <a:r>
-              <a:rPr sz="1600" b="0">
-                <a:solidFill>
-                  <a:srgbClr val="F0F4F8"/>
-                </a:solidFill>
-              </a:rPr>
-              <a:t>  Reportes XLSX exportables</a:t>
-            </a:r>
-          </a:p>
-          <a:p>
-            <a:pPr>
-              <a:spcBef>
-                <a:spcPts val="600"/>
-              </a:spcBef>
-            </a:pPr>
-            <a:r>
-              <a:rPr sz="1600" b="0">
-                <a:solidFill>
-                  <a:srgbClr val="F0F4F8"/>
-                </a:solidFill>
-              </a:rPr>
-              <a:t>  Alertas de stock crítico</a:t>
-            </a:r>
-          </a:p>
-          <a:p>
-            <a:pPr>
-              <a:spcBef>
-                <a:spcPts val="600"/>
-              </a:spcBef>
-            </a:pPr>
-          </a:p>
-          <a:p>
-            <a:pPr>
-              <a:spcBef>
-                <a:spcPts val="1600"/>
-              </a:spcBef>
-            </a:pPr>
-            <a:r>
-              <a:rPr sz="2000" b="1">
+                <a:latin typeface="Segoe UI"/>
+              </a:rPr>
+              <a:t>Funcionalidades</a:t>
+            </a:r>
+          </a:p>
+          <a:p>
+            <a:pPr>
+              <a:spcBef>
+                <a:spcPts val="500"/>
+              </a:spcBef>
+              <a:spcAft>
+                <a:spcPts val="200"/>
+              </a:spcAft>
+            </a:pPr>
+            <a:r>
+              <a:rPr sz="1400" b="0">
+                <a:solidFill>
+                  <a:srgbClr val="F0F4F8"/>
+                </a:solidFill>
+                <a:latin typeface="Segoe UI"/>
+              </a:rPr>
+              <a:t>▸ Dashboard en tiempo real</a:t>
+            </a:r>
+          </a:p>
+          <a:p>
+            <a:pPr>
+              <a:spcBef>
+                <a:spcPts val="500"/>
+              </a:spcBef>
+              <a:spcAft>
+                <a:spcPts val="200"/>
+              </a:spcAft>
+            </a:pPr>
+            <a:r>
+              <a:rPr sz="1400" b="0">
+                <a:solidFill>
+                  <a:srgbClr val="F0F4F8"/>
+                </a:solidFill>
+                <a:latin typeface="Segoe UI"/>
+              </a:rPr>
+              <a:t>▸ Búsqueda fuzzy con Fuse.js</a:t>
+            </a:r>
+          </a:p>
+          <a:p>
+            <a:pPr>
+              <a:spcBef>
+                <a:spcPts val="500"/>
+              </a:spcBef>
+              <a:spcAft>
+                <a:spcPts val="200"/>
+              </a:spcAft>
+            </a:pPr>
+            <a:r>
+              <a:rPr sz="1400" b="0">
+                <a:solidFill>
+                  <a:srgbClr val="F0F4F8"/>
+                </a:solidFill>
+                <a:latin typeface="Segoe UI"/>
+              </a:rPr>
+              <a:t>▸ Reportes XLSX exportables</a:t>
+            </a:r>
+          </a:p>
+          <a:p>
+            <a:pPr>
+              <a:spcBef>
+                <a:spcPts val="500"/>
+              </a:spcBef>
+              <a:spcAft>
+                <a:spcPts val="200"/>
+              </a:spcAft>
+            </a:pPr>
+            <a:r>
+              <a:rPr sz="1400" b="0">
+                <a:solidFill>
+                  <a:srgbClr val="F0F4F8"/>
+                </a:solidFill>
+                <a:latin typeface="Segoe UI"/>
+              </a:rPr>
+              <a:t>▸ Alertas de stock crítico</a:t>
+            </a:r>
+          </a:p>
+          <a:p>
+            <a:pPr>
+              <a:spcBef>
+                <a:spcPts val="400"/>
+              </a:spcBef>
+              <a:spcAft>
+                <a:spcPts val="400"/>
+              </a:spcAft>
+            </a:pPr>
+          </a:p>
+          <a:p>
+            <a:pPr>
+              <a:spcBef>
+                <a:spcPts val="1400"/>
+              </a:spcBef>
+              <a:spcAft>
+                <a:spcPts val="400"/>
+              </a:spcAft>
+            </a:pPr>
+            <a:r>
+              <a:rPr sz="1800" b="1">
                 <a:solidFill>
                   <a:srgbClr val="00D084"/>
                 </a:solidFill>
-              </a:rPr>
-              <a:t>Flujo de Operaciones</a:t>
-            </a:r>
-          </a:p>
-          <a:p>
-            <a:pPr>
-              <a:spcBef>
-                <a:spcPts val="600"/>
-              </a:spcBef>
-            </a:pPr>
-            <a:r>
-              <a:rPr sz="1600" b="0">
-                <a:solidFill>
-                  <a:srgbClr val="F0F4F8"/>
-                </a:solidFill>
-              </a:rPr>
-              <a:t>  Descarga desde appweb</a:t>
-            </a:r>
-          </a:p>
-          <a:p>
-            <a:pPr>
-              <a:spcBef>
-                <a:spcPts val="600"/>
-              </a:spcBef>
-            </a:pPr>
-            <a:r>
-              <a:rPr sz="1600" b="0">
-                <a:solidFill>
-                  <a:srgbClr val="F0F4F8"/>
-                </a:solidFill>
-              </a:rPr>
-              <a:t>  Enriquecimiento con catálogo maestro</a:t>
-            </a:r>
-          </a:p>
-          <a:p>
-            <a:pPr>
-              <a:spcBef>
-                <a:spcPts val="600"/>
-              </a:spcBef>
-            </a:pPr>
-            <a:r>
-              <a:rPr sz="1600" b="0">
-                <a:solidFill>
-                  <a:srgbClr val="F0F4F8"/>
-                </a:solidFill>
-              </a:rPr>
-              <a:t>  Generación de reportes</a:t>
+                <a:latin typeface="Segoe UI"/>
+              </a:rPr>
+              <a:t>Operación</a:t>
+            </a:r>
+          </a:p>
+          <a:p>
+            <a:pPr>
+              <a:spcBef>
+                <a:spcPts val="500"/>
+              </a:spcBef>
+              <a:spcAft>
+                <a:spcPts val="200"/>
+              </a:spcAft>
+            </a:pPr>
+            <a:r>
+              <a:rPr sz="1400" b="0">
+                <a:solidFill>
+                  <a:srgbClr val="F0F4F8"/>
+                </a:solidFill>
+                <a:latin typeface="Segoe UI"/>
+              </a:rPr>
+              <a:t>▸ Descarga desde appweb.cipsa.com.pe</a:t>
+            </a:r>
+          </a:p>
+          <a:p>
+            <a:pPr>
+              <a:spcBef>
+                <a:spcPts val="500"/>
+              </a:spcBef>
+              <a:spcAft>
+                <a:spcPts val="200"/>
+              </a:spcAft>
+            </a:pPr>
+            <a:r>
+              <a:rPr sz="1400" b="0">
+                <a:solidFill>
+                  <a:srgbClr val="F0F4F8"/>
+                </a:solidFill>
+                <a:latin typeface="Segoe UI"/>
+              </a:rPr>
+              <a:t>▸ Enriquecimiento con catálogo maestro</a:t>
+            </a:r>
+          </a:p>
+          <a:p>
+            <a:pPr>
+              <a:spcBef>
+                <a:spcPts val="500"/>
+              </a:spcBef>
+              <a:spcAft>
+                <a:spcPts val="200"/>
+              </a:spcAft>
+            </a:pPr>
+            <a:r>
+              <a:rPr sz="1400" b="0">
+                <a:solidFill>
+                  <a:srgbClr val="F0F4F8"/>
+                </a:solidFill>
+                <a:latin typeface="Segoe UI"/>
+              </a:rPr>
+              <a:t>▸ Ventana horaria: Lun-Sáb 07:00-22:59</a:t>
             </a:r>
           </a:p>
         </p:txBody>
@@ -6234,8 +7038,8 @@
         </p:nvSpPr>
         <p:spPr>
           <a:xfrm>
-            <a:off x="457200" y="2743200"/>
-            <a:ext cx="1828800" cy="54864"/>
+            <a:off x="457200" y="2377440"/>
+            <a:ext cx="2286000" cy="36576"/>
           </a:xfrm>
           <a:prstGeom prst="rect">
             <a:avLst/>
@@ -6277,8 +7081,8 @@
         </p:nvSpPr>
         <p:spPr>
           <a:xfrm>
-            <a:off x="457200" y="2377440"/>
-            <a:ext cx="10972800" cy="914400"/>
+            <a:off x="457200" y="2011680"/>
+            <a:ext cx="11277295" cy="914400"/>
           </a:xfrm>
           <a:prstGeom prst="rect">
             <a:avLst/>
@@ -6296,6 +7100,7 @@
                 <a:solidFill>
                   <a:srgbClr val="F0F4F8"/>
                 </a:solidFill>
+                <a:latin typeface="Segoe UI"/>
               </a:rPr>
               <a:t>Despliegue y Operación</a:t>
             </a:r>
@@ -6371,8 +7176,8 @@
         </p:nvSpPr>
         <p:spPr>
           <a:xfrm>
-            <a:off x="457200" y="274320"/>
-            <a:ext cx="11277295" cy="640080"/>
+            <a:off x="457200" y="228600"/>
+            <a:ext cx="11277295" cy="548640"/>
           </a:xfrm>
           <a:prstGeom prst="rect">
             <a:avLst/>
@@ -6390,6 +7195,7 @@
                 <a:solidFill>
                   <a:srgbClr val="F0F4F8"/>
                 </a:solidFill>
+                <a:latin typeface="Segoe UI"/>
               </a:rPr>
               <a:t>Infraestructura</a:t>
             </a:r>
@@ -6398,13 +7204,56 @@
       </p:sp>
       <p:sp>
         <p:nvSpPr>
-          <p:cNvPr id="4" name="TextBox 3"/>
+          <p:cNvPr id="4" name="Rectangle 3"/>
+          <p:cNvSpPr/>
+          <p:nvPr/>
+        </p:nvSpPr>
+        <p:spPr>
+          <a:xfrm>
+            <a:off x="457200" y="777240"/>
+            <a:ext cx="1371600" cy="27432"/>
+          </a:xfrm>
+          <a:prstGeom prst="rect">
+            <a:avLst/>
+          </a:prstGeom>
+          <a:solidFill>
+            <a:srgbClr val="00D084"/>
+          </a:solidFill>
+          <a:ln>
+            <a:noFill/>
+          </a:ln>
+        </p:spPr>
+        <p:style>
+          <a:lnRef idx="1">
+            <a:schemeClr val="accent1"/>
+          </a:lnRef>
+          <a:fillRef idx="3">
+            <a:schemeClr val="accent1"/>
+          </a:fillRef>
+          <a:effectRef idx="2">
+            <a:schemeClr val="accent1"/>
+          </a:effectRef>
+          <a:fontRef idx="minor">
+            <a:schemeClr val="lt1"/>
+          </a:fontRef>
+        </p:style>
+        <p:txBody>
+          <a:bodyPr rtlCol="0" anchor="ctr"/>
+          <a:lstStyle/>
+          <a:p>
+            <a:pPr algn="ctr"/>
+          </a:p>
+        </p:txBody>
+      </p:sp>
+      <p:sp>
+        <p:nvSpPr>
+          <p:cNvPr id="5" name="TextBox 4"/>
           <p:cNvSpPr txBox="1"/>
           <p:nvPr/>
         </p:nvSpPr>
         <p:spPr>
           <a:xfrm>
-            <a:off x="457200" y="1097280"/>
+            <a:off x="457200" y="914400"/>
             <a:ext cx="11277295" cy="5303520"/>
           </a:xfrm>
           <a:prstGeom prst="rect">
@@ -6420,163 +7269,190 @@
           <a:p>
             <a:pPr>
               <a:spcBef>
-                <a:spcPts val="1600"/>
-              </a:spcBef>
-            </a:pPr>
-            <a:r>
-              <a:rPr sz="2000" b="1">
+                <a:spcPts val="1400"/>
+              </a:spcBef>
+              <a:spcAft>
+                <a:spcPts val="400"/>
+              </a:spcAft>
+            </a:pPr>
+            <a:r>
+              <a:rPr sz="1800" b="1">
                 <a:solidFill>
                   <a:srgbClr val="00D084"/>
                 </a:solidFill>
-              </a:rPr>
-              <a:t>Frontend</a:t>
-            </a:r>
-          </a:p>
-          <a:p>
-            <a:pPr>
-              <a:spcBef>
-                <a:spcPts val="600"/>
-              </a:spcBef>
-            </a:pPr>
-            <a:r>
-              <a:rPr sz="1600" b="0">
-                <a:solidFill>
-                  <a:srgbClr val="F0F4F8"/>
-                </a:solidFill>
-              </a:rPr>
-              <a:t>  GitHub Pages (deploy automático desde main)</a:t>
-            </a:r>
-          </a:p>
-          <a:p>
-            <a:pPr>
-              <a:spcBef>
-                <a:spcPts val="600"/>
-              </a:spcBef>
-            </a:pPr>
-            <a:r>
-              <a:rPr sz="1600" b="0">
-                <a:solidFill>
-                  <a:srgbClr val="F0F4F8"/>
-                </a:solidFill>
-              </a:rPr>
-              <a:t>  Build: Vite + Lit</a:t>
-            </a:r>
-          </a:p>
-          <a:p>
-            <a:pPr>
-              <a:spcBef>
-                <a:spcPts val="600"/>
-              </a:spcBef>
-            </a:pPr>
-            <a:r>
-              <a:rPr sz="1600" b="0">
-                <a:solidFill>
-                  <a:srgbClr val="F0F4F8"/>
-                </a:solidFill>
-              </a:rPr>
-              <a:t>  URL: https://carloscus.github.io/g360-stock-reporter/</a:t>
-            </a:r>
-          </a:p>
-          <a:p>
-            <a:pPr>
-              <a:spcBef>
-                <a:spcPts val="600"/>
-              </a:spcBef>
-            </a:pPr>
-          </a:p>
-          <a:p>
-            <a:pPr>
-              <a:spcBef>
-                <a:spcPts val="1600"/>
-              </a:spcBef>
-            </a:pPr>
-            <a:r>
-              <a:rPr sz="2000" b="1">
+                <a:latin typeface="Segoe UI"/>
+              </a:rPr>
+              <a:t>Frontend — GitHub Pages</a:t>
+            </a:r>
+          </a:p>
+          <a:p>
+            <a:pPr>
+              <a:spcBef>
+                <a:spcPts val="500"/>
+              </a:spcBef>
+              <a:spcAft>
+                <a:spcPts val="200"/>
+              </a:spcAft>
+            </a:pPr>
+            <a:r>
+              <a:rPr sz="1400" b="0">
+                <a:solidFill>
+                  <a:srgbClr val="F0F4F8"/>
+                </a:solidFill>
+                <a:latin typeface="Segoe UI"/>
+              </a:rPr>
+              <a:t>▸ Deploy automático desde branch main</a:t>
+            </a:r>
+          </a:p>
+          <a:p>
+            <a:pPr>
+              <a:spcBef>
+                <a:spcPts val="500"/>
+              </a:spcBef>
+              <a:spcAft>
+                <a:spcPts val="200"/>
+              </a:spcAft>
+            </a:pPr>
+            <a:r>
+              <a:rPr sz="1400" b="0">
+                <a:solidFill>
+                  <a:srgbClr val="F0F4F8"/>
+                </a:solidFill>
+                <a:latin typeface="Segoe UI"/>
+              </a:rPr>
+              <a:t>▸ Build: Vite + Lit Web Components</a:t>
+            </a:r>
+          </a:p>
+          <a:p>
+            <a:pPr>
+              <a:spcBef>
+                <a:spcPts val="500"/>
+              </a:spcBef>
+              <a:spcAft>
+                <a:spcPts val="200"/>
+              </a:spcAft>
+            </a:pPr>
+            <a:r>
+              <a:rPr sz="1400" b="0">
+                <a:solidFill>
+                  <a:srgbClr val="F0F4F8"/>
+                </a:solidFill>
+                <a:latin typeface="Segoe UI"/>
+              </a:rPr>
+              <a:t>▸ URL: https://carloscus.github.io/g360-stock-reporter/</a:t>
+            </a:r>
+          </a:p>
+          <a:p>
+            <a:pPr>
+              <a:spcBef>
+                <a:spcPts val="400"/>
+              </a:spcBef>
+              <a:spcAft>
+                <a:spcPts val="400"/>
+              </a:spcAft>
+            </a:pPr>
+          </a:p>
+          <a:p>
+            <a:pPr>
+              <a:spcBef>
+                <a:spcPts val="1400"/>
+              </a:spcBef>
+              <a:spcAft>
+                <a:spcPts val="400"/>
+              </a:spcAft>
+            </a:pPr>
+            <a:r>
+              <a:rPr sz="1800" b="1">
                 <a:solidFill>
                   <a:srgbClr val="00D084"/>
                 </a:solidFill>
-              </a:rPr>
-              <a:t>Backend</a:t>
-            </a:r>
-          </a:p>
-          <a:p>
-            <a:pPr>
-              <a:spcBef>
-                <a:spcPts val="600"/>
-              </a:spcBef>
-            </a:pPr>
-            <a:r>
-              <a:rPr sz="1600" b="0">
-                <a:solidFill>
-                  <a:srgbClr val="F0F4F8"/>
-                </a:solidFill>
-              </a:rPr>
-              <a:t>  Render (servicio gratuito)</a:t>
-            </a:r>
-          </a:p>
-          <a:p>
-            <a:pPr>
-              <a:spcBef>
-                <a:spcPts val="600"/>
-              </a:spcBef>
-            </a:pPr>
-            <a:r>
-              <a:rPr sz="1600" b="0">
-                <a:solidFill>
-                  <a:srgbClr val="F0F4F8"/>
-                </a:solidFill>
-              </a:rPr>
-              <a:t>  URL: https://g360-stock-api.onrender.com</a:t>
-            </a:r>
-          </a:p>
-          <a:p>
-            <a:pPr>
-              <a:spcBef>
-                <a:spcPts val="600"/>
-              </a:spcBef>
-            </a:pPr>
-            <a:r>
-              <a:rPr sz="1600" b="0">
-                <a:solidFill>
-                  <a:srgbClr val="F0F4F8"/>
-                </a:solidFill>
-              </a:rPr>
-              <a:t>  Variables de entorno: S1_API_KEY, S1_READ_API_KEY</a:t>
-            </a:r>
-          </a:p>
-          <a:p>
-            <a:pPr>
-              <a:spcBef>
-                <a:spcPts val="600"/>
-              </a:spcBef>
-            </a:pPr>
-            <a:r>
-              <a:rPr sz="1600" b="0">
-                <a:solidFill>
-                  <a:srgbClr val="F0F4F8"/>
-                </a:solidFill>
-              </a:rPr>
-              <a:t>  Auto-restart si falla (keep-alive cada 15 min)</a:t>
-            </a:r>
-          </a:p>
-          <a:p>
-            <a:pPr>
-              <a:spcBef>
-                <a:spcPts val="600"/>
-              </a:spcBef>
-            </a:pPr>
-          </a:p>
-          <a:p>
-            <a:pPr>
-              <a:spcBef>
-                <a:spcPts val="1600"/>
-              </a:spcBef>
-            </a:pPr>
-            <a:r>
-              <a:rPr sz="2000" b="1">
+                <a:latin typeface="Segoe UI"/>
+              </a:rPr>
+              <a:t>Backend — Render</a:t>
+            </a:r>
+          </a:p>
+          <a:p>
+            <a:pPr>
+              <a:spcBef>
+                <a:spcPts val="500"/>
+              </a:spcBef>
+              <a:spcAft>
+                <a:spcPts val="200"/>
+              </a:spcAft>
+            </a:pPr>
+            <a:r>
+              <a:rPr sz="1400" b="0">
+                <a:solidFill>
+                  <a:srgbClr val="F0F4F8"/>
+                </a:solidFill>
+                <a:latin typeface="Segoe UI"/>
+              </a:rPr>
+              <a:t>▸ Servicio gratuito con auto-scaling</a:t>
+            </a:r>
+          </a:p>
+          <a:p>
+            <a:pPr>
+              <a:spcBef>
+                <a:spcPts val="500"/>
+              </a:spcBef>
+              <a:spcAft>
+                <a:spcPts val="200"/>
+              </a:spcAft>
+            </a:pPr>
+            <a:r>
+              <a:rPr sz="1400" b="0">
+                <a:solidFill>
+                  <a:srgbClr val="F0F4F8"/>
+                </a:solidFill>
+                <a:latin typeface="Segoe UI"/>
+              </a:rPr>
+              <a:t>▸ URL: https://g360-stock-api.onrender.com</a:t>
+            </a:r>
+          </a:p>
+          <a:p>
+            <a:pPr>
+              <a:spcBef>
+                <a:spcPts val="500"/>
+              </a:spcBef>
+              <a:spcAft>
+                <a:spcPts val="200"/>
+              </a:spcAft>
+            </a:pPr>
+            <a:r>
+              <a:rPr sz="1400" b="0">
+                <a:solidFill>
+                  <a:srgbClr val="F0F4F8"/>
+                </a:solidFill>
+                <a:latin typeface="Segoe UI"/>
+              </a:rPr>
+              <a:t>▸ Keep-alive cada 5 min para mantener activo</a:t>
+            </a:r>
+          </a:p>
+          <a:p>
+            <a:pPr>
+              <a:spcBef>
+                <a:spcPts val="400"/>
+              </a:spcBef>
+              <a:spcAft>
+                <a:spcPts val="400"/>
+              </a:spcAft>
+            </a:pPr>
+          </a:p>
+          <a:p>
+            <a:pPr>
+              <a:spcBef>
+                <a:spcPts val="1400"/>
+              </a:spcBef>
+              <a:spcAft>
+                <a:spcPts val="400"/>
+              </a:spcAft>
+            </a:pPr>
+            <a:r>
+              <a:rPr sz="1800" b="1">
                 <a:solidFill>
                   <a:srgbClr val="00D084"/>
                 </a:solidFill>
+                <a:latin typeface="Segoe UI"/>
               </a:rPr>
               <a:t>Ventana Operativa</a:t>
             </a:r>
@@ -6584,46 +7460,58 @@
           <a:p>
             <a:pPr>
               <a:spcBef>
-                <a:spcPts val="600"/>
-              </a:spcBef>
-            </a:pPr>
-            <a:r>
-              <a:rPr sz="1600" b="0">
-                <a:solidFill>
-                  <a:srgbClr val="F0F4F8"/>
-                </a:solidFill>
-              </a:rPr>
-              <a:t>  Lunes a Sábado, 07:00 - 22:59 (hora Lima)</a:t>
-            </a:r>
-          </a:p>
-          <a:p>
-            <a:pPr>
-              <a:spcBef>
-                <a:spcPts val="600"/>
-              </a:spcBef>
-            </a:pPr>
-            <a:r>
-              <a:rPr sz="1600" b="0">
-                <a:solidFill>
-                  <a:srgbClr val="F0F4F8"/>
-                </a:solidFill>
-              </a:rPr>
-              <a:t>  Domingo y madrugada: no se regenera reporte</a:t>
-            </a:r>
-          </a:p>
-          <a:p>
-            <a:pPr>
-              <a:spcBef>
-                <a:spcPts val="600"/>
-              </a:spcBef>
-            </a:pPr>
-            <a:r>
-              <a:rPr sz="1600" b="0">
-                <a:solidFill>
-                  <a:srgbClr val="F0F4F8"/>
-                </a:solidFill>
-              </a:rPr>
-              <a:t>  Cache sirve datos del último ciclo válido</a:t>
+                <a:spcPts val="500"/>
+              </a:spcBef>
+              <a:spcAft>
+                <a:spcPts val="200"/>
+              </a:spcAft>
+            </a:pPr>
+            <a:r>
+              <a:rPr sz="1400" b="0">
+                <a:solidFill>
+                  <a:srgbClr val="F0F4F8"/>
+                </a:solidFill>
+                <a:latin typeface="Segoe UI"/>
+              </a:rPr>
+              <a:t>▸ Lunes a Sábado, 07:00 - 22:59 (hora Lima)</a:t>
+            </a:r>
+          </a:p>
+          <a:p>
+            <a:pPr>
+              <a:spcBef>
+                <a:spcPts val="500"/>
+              </a:spcBef>
+              <a:spcAft>
+                <a:spcPts val="200"/>
+              </a:spcAft>
+            </a:pPr>
+            <a:r>
+              <a:rPr sz="1400" b="0">
+                <a:solidFill>
+                  <a:srgbClr val="F0F4F8"/>
+                </a:solidFill>
+                <a:latin typeface="Segoe UI"/>
+              </a:rPr>
+              <a:t>▸ Domingo y madrugada: no regenera reporte</a:t>
+            </a:r>
+          </a:p>
+          <a:p>
+            <a:pPr>
+              <a:spcBef>
+                <a:spcPts val="500"/>
+              </a:spcBef>
+              <a:spcAft>
+                <a:spcPts val="200"/>
+              </a:spcAft>
+            </a:pPr>
+            <a:r>
+              <a:rPr sz="1400" b="0">
+                <a:solidFill>
+                  <a:srgbClr val="F0F4F8"/>
+                </a:solidFill>
+                <a:latin typeface="Segoe UI"/>
+              </a:rPr>
+              <a:t>▸ Cache sirve últimos datos válidos</a:t>
             </a:r>
           </a:p>
         </p:txBody>
@@ -6697,8 +7585,8 @@
         </p:nvSpPr>
         <p:spPr>
           <a:xfrm>
-            <a:off x="457200" y="274320"/>
-            <a:ext cx="11277295" cy="640080"/>
+            <a:off x="457200" y="228600"/>
+            <a:ext cx="11277295" cy="548640"/>
           </a:xfrm>
           <a:prstGeom prst="rect">
             <a:avLst/>
@@ -6716,21 +7604,65 @@
                 <a:solidFill>
                   <a:srgbClr val="F0F4F8"/>
                 </a:solidFill>
-              </a:rPr>
-              <a:t>Instalación y Desarrollo</a:t>
-            </a:r>
-          </a:p>
-        </p:txBody>
-      </p:sp>
-      <p:sp>
-        <p:nvSpPr>
-          <p:cNvPr id="4" name="TextBox 3"/>
+                <a:latin typeface="Segoe UI"/>
+              </a:rPr>
+              <a:t>Instalación y Desarrollo Local</a:t>
+            </a:r>
+          </a:p>
+        </p:txBody>
+      </p:sp>
+      <p:sp>
+        <p:nvSpPr>
+          <p:cNvPr id="4" name="Rectangle 3"/>
+          <p:cNvSpPr/>
+          <p:nvPr/>
+        </p:nvSpPr>
+        <p:spPr>
+          <a:xfrm>
+            <a:off x="457200" y="777240"/>
+            <a:ext cx="1371600" cy="27432"/>
+          </a:xfrm>
+          <a:prstGeom prst="rect">
+            <a:avLst/>
+          </a:prstGeom>
+          <a:solidFill>
+            <a:srgbClr val="00D084"/>
+          </a:solidFill>
+          <a:ln>
+            <a:noFill/>
+          </a:ln>
+        </p:spPr>
+        <p:style>
+          <a:lnRef idx="1">
+            <a:schemeClr val="accent1"/>
+          </a:lnRef>
+          <a:fillRef idx="3">
+            <a:schemeClr val="accent1"/>
+          </a:fillRef>
+          <a:effectRef idx="2">
+            <a:schemeClr val="accent1"/>
+          </a:effectRef>
+          <a:fontRef idx="minor">
+            <a:schemeClr val="lt1"/>
+          </a:fontRef>
+        </p:style>
+        <p:txBody>
+          <a:bodyPr rtlCol="0" anchor="ctr"/>
+          <a:lstStyle/>
+          <a:p>
+            <a:pPr algn="ctr"/>
+          </a:p>
+        </p:txBody>
+      </p:sp>
+      <p:sp>
+        <p:nvSpPr>
+          <p:cNvPr id="5" name="TextBox 4"/>
           <p:cNvSpPr txBox="1"/>
           <p:nvPr/>
         </p:nvSpPr>
         <p:spPr>
           <a:xfrm>
-            <a:off x="457200" y="1097280"/>
+            <a:off x="457200" y="914400"/>
             <a:ext cx="11277295" cy="5303520"/>
           </a:xfrm>
           <a:prstGeom prst="rect">
@@ -6746,14 +7678,18 @@
           <a:p>
             <a:pPr>
               <a:spcBef>
-                <a:spcPts val="1600"/>
-              </a:spcBef>
-            </a:pPr>
-            <a:r>
-              <a:rPr sz="2000" b="1">
+                <a:spcPts val="1400"/>
+              </a:spcBef>
+              <a:spcAft>
+                <a:spcPts val="400"/>
+              </a:spcAft>
+            </a:pPr>
+            <a:r>
+              <a:rPr sz="1800" b="1">
                 <a:solidFill>
                   <a:srgbClr val="00D084"/>
                 </a:solidFill>
+                <a:latin typeface="Segoe UI"/>
               </a:rPr>
               <a:t>Frontend</a:t>
             </a:r>
@@ -6761,66 +7697,66 @@
           <a:p>
             <a:pPr>
               <a:spcBef>
-                <a:spcPts val="600"/>
-              </a:spcBef>
-            </a:pPr>
-            <a:r>
-              <a:rPr sz="1600" b="0">
-                <a:solidFill>
-                  <a:srgbClr val="F0F4F8"/>
-                </a:solidFill>
-              </a:rPr>
-              <a:t>  npm install</a:t>
-            </a:r>
-          </a:p>
-          <a:p>
-            <a:pPr>
-              <a:spcBef>
-                <a:spcPts val="600"/>
-              </a:spcBef>
-            </a:pPr>
-            <a:r>
-              <a:rPr sz="1600" b="0">
-                <a:solidFill>
-                  <a:srgbClr val="F0F4F8"/>
-                </a:solidFill>
-              </a:rPr>
-              <a:t>  npm run dev (puerto 3000)</a:t>
-            </a:r>
-          </a:p>
-          <a:p>
-            <a:pPr>
-              <a:spcBef>
-                <a:spcPts val="600"/>
-              </a:spcBef>
-            </a:pPr>
-            <a:r>
-              <a:rPr sz="1600" b="0">
-                <a:solidFill>
-                  <a:srgbClr val="F0F4F8"/>
-                </a:solidFill>
-              </a:rPr>
-              <a:t>  npm run build (genera dist/)</a:t>
-            </a:r>
-          </a:p>
-          <a:p>
-            <a:pPr>
-              <a:spcBef>
-                <a:spcPts val="600"/>
-              </a:spcBef>
-            </a:pPr>
-          </a:p>
-          <a:p>
-            <a:pPr>
-              <a:spcBef>
-                <a:spcPts val="1600"/>
-              </a:spcBef>
-            </a:pPr>
-            <a:r>
-              <a:rPr sz="2000" b="1">
+                <a:spcPts val="500"/>
+              </a:spcBef>
+              <a:spcAft>
+                <a:spcPts val="200"/>
+              </a:spcAft>
+            </a:pPr>
+            <a:r>
+              <a:rPr sz="1400" b="0">
+                <a:solidFill>
+                  <a:srgbClr val="F0F4F8"/>
+                </a:solidFill>
+                <a:latin typeface="Segoe UI"/>
+              </a:rPr>
+              <a:t>▸ npm install &amp;&amp; npm run dev (puerto 3000)</a:t>
+            </a:r>
+          </a:p>
+          <a:p>
+            <a:pPr>
+              <a:spcBef>
+                <a:spcPts val="500"/>
+              </a:spcBef>
+              <a:spcAft>
+                <a:spcPts val="200"/>
+              </a:spcAft>
+            </a:pPr>
+            <a:r>
+              <a:rPr sz="1400" b="0">
+                <a:solidFill>
+                  <a:srgbClr val="F0F4F8"/>
+                </a:solidFill>
+                <a:latin typeface="Segoe UI"/>
+              </a:rPr>
+              <a:t>▸ npm run build → genera dist/</a:t>
+            </a:r>
+          </a:p>
+          <a:p>
+            <a:pPr>
+              <a:spcBef>
+                <a:spcPts val="400"/>
+              </a:spcBef>
+              <a:spcAft>
+                <a:spcPts val="400"/>
+              </a:spcAft>
+            </a:pPr>
+          </a:p>
+          <a:p>
+            <a:pPr>
+              <a:spcBef>
+                <a:spcPts val="1400"/>
+              </a:spcBef>
+              <a:spcAft>
+                <a:spcPts val="400"/>
+              </a:spcAft>
+            </a:pPr>
+            <a:r>
+              <a:rPr sz="1800" b="1">
                 <a:solidFill>
                   <a:srgbClr val="00D084"/>
                 </a:solidFill>
+                <a:latin typeface="Segoe UI"/>
               </a:rPr>
               <a:t>Backend</a:t>
             </a:r>
@@ -6828,66 +7764,66 @@
           <a:p>
             <a:pPr>
               <a:spcBef>
-                <a:spcPts val="600"/>
-              </a:spcBef>
-            </a:pPr>
-            <a:r>
-              <a:rPr sz="1600" b="0">
-                <a:solidFill>
-                  <a:srgbClr val="F0F4F8"/>
-                </a:solidFill>
-              </a:rPr>
-              <a:t>  cd g360-stock-api</a:t>
-            </a:r>
-          </a:p>
-          <a:p>
-            <a:pPr>
-              <a:spcBef>
-                <a:spcPts val="600"/>
-              </a:spcBef>
-            </a:pPr>
-            <a:r>
-              <a:rPr sz="1600" b="0">
-                <a:solidFill>
-                  <a:srgbClr val="F0F4F8"/>
-                </a:solidFill>
-              </a:rPr>
-              <a:t>  pip install -r requirements.txt</a:t>
-            </a:r>
-          </a:p>
-          <a:p>
-            <a:pPr>
-              <a:spcBef>
-                <a:spcPts val="600"/>
-              </a:spcBef>
-            </a:pPr>
-            <a:r>
-              <a:rPr sz="1600" b="0">
-                <a:solidFill>
-                  <a:srgbClr val="F0F4F8"/>
-                </a:solidFill>
-              </a:rPr>
-              <a:t>  uvicorn app.main:app --reload --port 8000</a:t>
-            </a:r>
-          </a:p>
-          <a:p>
-            <a:pPr>
-              <a:spcBef>
-                <a:spcPts val="600"/>
-              </a:spcBef>
-            </a:pPr>
-          </a:p>
-          <a:p>
-            <a:pPr>
-              <a:spcBef>
-                <a:spcPts val="1600"/>
-              </a:spcBef>
-            </a:pPr>
-            <a:r>
-              <a:rPr sz="2000" b="1">
+                <a:spcPts val="500"/>
+              </a:spcBef>
+              <a:spcAft>
+                <a:spcPts val="200"/>
+              </a:spcAft>
+            </a:pPr>
+            <a:r>
+              <a:rPr sz="1400" b="0">
+                <a:solidFill>
+                  <a:srgbClr val="F0F4F8"/>
+                </a:solidFill>
+                <a:latin typeface="Segoe UI"/>
+              </a:rPr>
+              <a:t>▸ cd g360-stock-api &amp;&amp; pip install -r requirements.txt</a:t>
+            </a:r>
+          </a:p>
+          <a:p>
+            <a:pPr>
+              <a:spcBef>
+                <a:spcPts val="500"/>
+              </a:spcBef>
+              <a:spcAft>
+                <a:spcPts val="200"/>
+              </a:spcAft>
+            </a:pPr>
+            <a:r>
+              <a:rPr sz="1400" b="0">
+                <a:solidFill>
+                  <a:srgbClr val="F0F4F8"/>
+                </a:solidFill>
+                <a:latin typeface="Segoe UI"/>
+              </a:rPr>
+              <a:t>▸ uvicorn app.main:app --reload --port 8000</a:t>
+            </a:r>
+          </a:p>
+          <a:p>
+            <a:pPr>
+              <a:spcBef>
+                <a:spcPts val="400"/>
+              </a:spcBef>
+              <a:spcAft>
+                <a:spcPts val="400"/>
+              </a:spcAft>
+            </a:pPr>
+          </a:p>
+          <a:p>
+            <a:pPr>
+              <a:spcBef>
+                <a:spcPts val="1400"/>
+              </a:spcBef>
+              <a:spcAft>
+                <a:spcPts val="400"/>
+              </a:spcAft>
+            </a:pPr>
+            <a:r>
+              <a:rPr sz="1800" b="1">
                 <a:solidFill>
                   <a:srgbClr val="00D084"/>
                 </a:solidFill>
+                <a:latin typeface="Segoe UI"/>
               </a:rPr>
               <a:t>Variables de Entorno (.env)</a:t>
             </a:r>
@@ -6895,61 +7831,77 @@
           <a:p>
             <a:pPr>
               <a:spcBef>
-                <a:spcPts val="600"/>
-              </a:spcBef>
-            </a:pPr>
-            <a:r>
-              <a:rPr sz="1600" b="0">
-                <a:solidFill>
-                  <a:srgbClr val="F0F4F8"/>
-                </a:solidFill>
-              </a:rPr>
-              <a:t>  S1_SOURCE1_URL, S1_SOURCE2_URL (appweb)</a:t>
-            </a:r>
-          </a:p>
-          <a:p>
-            <a:pPr>
-              <a:spcBef>
-                <a:spcPts val="600"/>
-              </a:spcBef>
-            </a:pPr>
-            <a:r>
-              <a:rPr sz="1600" b="0">
-                <a:solidFill>
-                  <a:srgbClr val="F0F4F8"/>
-                </a:solidFill>
-              </a:rPr>
-              <a:t>  S1_CACHE_TTL_SEGUNDOS (default: 900)</a:t>
-            </a:r>
-          </a:p>
-          <a:p>
-            <a:pPr>
-              <a:spcBef>
-                <a:spcPts val="600"/>
-              </a:spcBef>
-            </a:pPr>
-            <a:r>
-              <a:rPr sz="1600" b="0">
-                <a:solidFill>
-                  <a:srgbClr val="F0F4F8"/>
-                </a:solidFill>
-              </a:rPr>
-              <a:t>  S1_API_KEY, S1_READ_API_KEY</a:t>
-            </a:r>
-          </a:p>
-          <a:p>
-            <a:pPr>
-              <a:spcBef>
-                <a:spcPts val="600"/>
-              </a:spcBef>
-            </a:pPr>
-            <a:r>
-              <a:rPr sz="1600" b="0">
-                <a:solidFill>
-                  <a:srgbClr val="F0F4F8"/>
-                </a:solidFill>
-              </a:rPr>
-              <a:t>  S1_CORS_ORIGINS</a:t>
+                <a:spcPts val="500"/>
+              </a:spcBef>
+              <a:spcAft>
+                <a:spcPts val="200"/>
+              </a:spcAft>
+            </a:pPr>
+            <a:r>
+              <a:rPr sz="1400" b="0">
+                <a:solidFill>
+                  <a:srgbClr val="F0F4F8"/>
+                </a:solidFill>
+                <a:latin typeface="Segoe UI"/>
+              </a:rPr>
+              <a:t>▸ S1_SOURCE1_URL, S1_SOURCE2_URL (appweb)</a:t>
+            </a:r>
+          </a:p>
+          <a:p>
+            <a:pPr>
+              <a:spcBef>
+                <a:spcPts val="500"/>
+              </a:spcBef>
+              <a:spcAft>
+                <a:spcPts val="200"/>
+              </a:spcAft>
+            </a:pPr>
+            <a:r>
+              <a:rPr sz="1400" b="0">
+                <a:solidFill>
+                  <a:srgbClr val="F0F4F8"/>
+                </a:solidFill>
+                <a:latin typeface="Segoe UI"/>
+              </a:rPr>
+              <a:t>▸ S1_CACHE_TTL_SEGUNDOS (default: 900)</a:t>
+            </a:r>
+          </a:p>
+          <a:p>
+            <a:pPr>
+              <a:spcBef>
+                <a:spcPts val="500"/>
+              </a:spcBef>
+              <a:spcAft>
+                <a:spcPts val="200"/>
+              </a:spcAft>
+            </a:pPr>
+            <a:r>
+              <a:rPr sz="1400" b="0">
+                <a:solidFill>
+                  <a:srgbClr val="F0F4F8"/>
+                </a:solidFill>
+                <a:latin typeface="Segoe UI"/>
+              </a:rPr>
+              <a:t>▸ S1_API_KEY, S1_READ_API_KEY (separar claves)</a:t>
+            </a:r>
+          </a:p>
+          <a:p>
+            <a:pPr>
+              <a:spcBef>
+                <a:spcPts val="500"/>
+              </a:spcBef>
+              <a:spcAft>
+                <a:spcPts val="200"/>
+              </a:spcAft>
+            </a:pPr>
+            <a:r>
+              <a:rPr sz="1400" b="0">
+                <a:solidFill>
+                  <a:srgbClr val="F0F4F8"/>
+                </a:solidFill>
+                <a:latin typeface="Segoe UI"/>
+              </a:rPr>
+              <a:t>▸ S1_CORS_ORIGINS</a:t>
             </a:r>
           </a:p>
         </p:txBody>
@@ -7023,8 +7975,8 @@
         </p:nvSpPr>
         <p:spPr>
           <a:xfrm>
-            <a:off x="457200" y="2743200"/>
-            <a:ext cx="1828800" cy="54864"/>
+            <a:off x="457200" y="2377440"/>
+            <a:ext cx="2286000" cy="36576"/>
           </a:xfrm>
           <a:prstGeom prst="rect">
             <a:avLst/>
@@ -7066,8 +8018,8 @@
         </p:nvSpPr>
         <p:spPr>
           <a:xfrm>
-            <a:off x="457200" y="2377440"/>
-            <a:ext cx="10972800" cy="914400"/>
+            <a:off x="457200" y="2011680"/>
+            <a:ext cx="11277295" cy="914400"/>
           </a:xfrm>
           <a:prstGeom prst="rect">
             <a:avLst/>
@@ -7085,6 +8037,7 @@
                 <a:solidFill>
                   <a:srgbClr val="F0F4F8"/>
                 </a:solidFill>
+                <a:latin typeface="Segoe UI"/>
               </a:rPr>
               <a:t>Troubleshooting</a:t>
             </a:r>
@@ -7160,8 +8113,8 @@
         </p:nvSpPr>
         <p:spPr>
           <a:xfrm>
-            <a:off x="457200" y="274320"/>
-            <a:ext cx="11277295" cy="640080"/>
+            <a:off x="457200" y="228600"/>
+            <a:ext cx="11277295" cy="548640"/>
           </a:xfrm>
           <a:prstGeom prst="rect">
             <a:avLst/>
@@ -7179,21 +8132,65 @@
                 <a:solidFill>
                   <a:srgbClr val="F0F4F8"/>
                 </a:solidFill>
-              </a:rPr>
-              <a:t>Problemas Comunes</a:t>
-            </a:r>
-          </a:p>
-        </p:txBody>
-      </p:sp>
-      <p:sp>
-        <p:nvSpPr>
-          <p:cNvPr id="4" name="TextBox 3"/>
+                <a:latin typeface="Segoe UI"/>
+              </a:rPr>
+              <a:t>Problemas Comunes y Soluciones</a:t>
+            </a:r>
+          </a:p>
+        </p:txBody>
+      </p:sp>
+      <p:sp>
+        <p:nvSpPr>
+          <p:cNvPr id="4" name="Rectangle 3"/>
+          <p:cNvSpPr/>
+          <p:nvPr/>
+        </p:nvSpPr>
+        <p:spPr>
+          <a:xfrm>
+            <a:off x="457200" y="777240"/>
+            <a:ext cx="1371600" cy="27432"/>
+          </a:xfrm>
+          <a:prstGeom prst="rect">
+            <a:avLst/>
+          </a:prstGeom>
+          <a:solidFill>
+            <a:srgbClr val="00D084"/>
+          </a:solidFill>
+          <a:ln>
+            <a:noFill/>
+          </a:ln>
+        </p:spPr>
+        <p:style>
+          <a:lnRef idx="1">
+            <a:schemeClr val="accent1"/>
+          </a:lnRef>
+          <a:fillRef idx="3">
+            <a:schemeClr val="accent1"/>
+          </a:fillRef>
+          <a:effectRef idx="2">
+            <a:schemeClr val="accent1"/>
+          </a:effectRef>
+          <a:fontRef idx="minor">
+            <a:schemeClr val="lt1"/>
+          </a:fontRef>
+        </p:style>
+        <p:txBody>
+          <a:bodyPr rtlCol="0" anchor="ctr"/>
+          <a:lstStyle/>
+          <a:p>
+            <a:pPr algn="ctr"/>
+          </a:p>
+        </p:txBody>
+      </p:sp>
+      <p:sp>
+        <p:nvSpPr>
+          <p:cNvPr id="5" name="TextBox 4"/>
           <p:cNvSpPr txBox="1"/>
           <p:nvPr/>
         </p:nvSpPr>
         <p:spPr>
           <a:xfrm>
-            <a:off x="457200" y="1097280"/>
+            <a:off x="457200" y="914400"/>
             <a:ext cx="11277295" cy="5303520"/>
           </a:xfrm>
           <a:prstGeom prst="rect">
@@ -7209,232 +8206,316 @@
           <a:p>
             <a:pPr>
               <a:spcBef>
-                <a:spcPts val="1600"/>
-              </a:spcBef>
-            </a:pPr>
-            <a:r>
-              <a:rPr sz="2000" b="1">
+                <a:spcPts val="1400"/>
+              </a:spcBef>
+              <a:spcAft>
+                <a:spcPts val="400"/>
+              </a:spcAft>
+            </a:pPr>
+            <a:r>
+              <a:rPr sz="1800" b="1">
                 <a:solidFill>
                   <a:srgbClr val="00D084"/>
                 </a:solidFill>
-              </a:rPr>
-              <a:t>Cache Stale</a:t>
-            </a:r>
-          </a:p>
-          <a:p>
-            <a:pPr>
-              <a:spcBef>
-                <a:spcPts val="600"/>
-              </a:spcBef>
-            </a:pPr>
-            <a:r>
-              <a:rPr sz="1600" b="0">
-                <a:solidFill>
-                  <a:srgbClr val="F0F4F8"/>
-                </a:solidFill>
-              </a:rPr>
-              <a:t>  Problema: datos viejos, no se actualizan</a:t>
-            </a:r>
-          </a:p>
-          <a:p>
-            <a:pPr>
-              <a:spcBef>
-                <a:spcPts val="600"/>
-              </a:spcBef>
-            </a:pPr>
-            <a:r>
-              <a:rPr sz="1600" b="0">
-                <a:solidFill>
-                  <a:srgbClr val="F0F4F8"/>
-                </a:solidFill>
-              </a:rPr>
-              <a:t>  Solución: Forzar refresh en UI o limpiar localStorage</a:t>
-            </a:r>
-          </a:p>
-          <a:p>
-            <a:pPr>
-              <a:spcBef>
-                <a:spcPts val="600"/>
-              </a:spcBef>
-            </a:pPr>
-          </a:p>
-          <a:p>
-            <a:pPr>
-              <a:spcBef>
-                <a:spcPts val="1600"/>
-              </a:spcBef>
-            </a:pPr>
-            <a:r>
-              <a:rPr sz="2000" b="1">
+                <a:latin typeface="Segoe UI"/>
+              </a:rPr>
+              <a:t>Cache Stale (datos viejos)</a:t>
+            </a:r>
+          </a:p>
+          <a:p>
+            <a:pPr>
+              <a:spcBef>
+                <a:spcPts val="500"/>
+              </a:spcBef>
+              <a:spcAft>
+                <a:spcPts val="200"/>
+              </a:spcAft>
+            </a:pPr>
+            <a:r>
+              <a:rPr sz="1400" b="0">
+                <a:solidFill>
+                  <a:srgbClr val="F0F4F8"/>
+                </a:solidFill>
+                <a:latin typeface="Segoe UI"/>
+              </a:rPr>
+              <a:t>▸ Síntoma: datos no se actualizan aunque cambió el API</a:t>
+            </a:r>
+          </a:p>
+          <a:p>
+            <a:pPr>
+              <a:spcBef>
+                <a:spcPts val="500"/>
+              </a:spcBef>
+              <a:spcAft>
+                <a:spcPts val="200"/>
+              </a:spcAft>
+            </a:pPr>
+            <a:r>
+              <a:rPr sz="1400" b="0">
+                <a:solidFill>
+                  <a:srgbClr val="F0F4F8"/>
+                </a:solidFill>
+                <a:latin typeface="Segoe UI"/>
+              </a:rPr>
+              <a:t>▸ Causa: localStorage TTL de 7 días</a:t>
+            </a:r>
+          </a:p>
+          <a:p>
+            <a:pPr>
+              <a:spcBef>
+                <a:spcPts val="500"/>
+              </a:spcBef>
+              <a:spcAft>
+                <a:spcPts val="200"/>
+              </a:spcAft>
+            </a:pPr>
+            <a:r>
+              <a:rPr sz="1400" b="0">
+                <a:solidFill>
+                  <a:srgbClr val="F0F4F8"/>
+                </a:solidFill>
+                <a:latin typeface="Segoe UI"/>
+              </a:rPr>
+              <a:t>▸ Solución: Forzar refresh en UI o limpiar storage</a:t>
+            </a:r>
+          </a:p>
+          <a:p>
+            <a:pPr>
+              <a:spcBef>
+                <a:spcPts val="400"/>
+              </a:spcBef>
+              <a:spcAft>
+                <a:spcPts val="400"/>
+              </a:spcAft>
+            </a:pPr>
+          </a:p>
+          <a:p>
+            <a:pPr>
+              <a:spcBef>
+                <a:spcPts val="1400"/>
+              </a:spcBef>
+              <a:spcAft>
+                <a:spcPts val="400"/>
+              </a:spcAft>
+            </a:pPr>
+            <a:r>
+              <a:rPr sz="1800" b="1">
                 <a:solidFill>
                   <a:srgbClr val="00D084"/>
                 </a:solidFill>
-              </a:rPr>
-              <a:t>SKUs Sin Categoría</a:t>
-            </a:r>
-          </a:p>
-          <a:p>
-            <a:pPr>
-              <a:spcBef>
-                <a:spcPts val="600"/>
-              </a:spcBef>
-            </a:pPr>
-            <a:r>
-              <a:rPr sz="1600" b="0">
-                <a:solidFill>
-                  <a:srgbClr val="F0F4F8"/>
-                </a:solidFill>
-              </a:rPr>
-              <a:t>  Problema: categoria muestra 'OTROS'</a:t>
-            </a:r>
-          </a:p>
-          <a:p>
-            <a:pPr>
-              <a:spcBef>
-                <a:spcPts val="600"/>
-              </a:spcBef>
-            </a:pPr>
-            <a:r>
-              <a:rPr sz="1600" b="0">
-                <a:solidFill>
-                  <a:srgbClr val="F0F4F8"/>
-                </a:solidFill>
-              </a:rPr>
-              <a:t>  Causa: línea no mapeada en CATEGORIAS dict</a:t>
-            </a:r>
-          </a:p>
-          <a:p>
-            <a:pPr>
-              <a:spcBef>
-                <a:spcPts val="600"/>
-              </a:spcBef>
-            </a:pPr>
-            <a:r>
-              <a:rPr sz="1600" b="0">
-                <a:solidFill>
-                  <a:srgbClr val="F0F4F8"/>
-                </a:solidFill>
-              </a:rPr>
-              <a:t>  Solución: Agregar código de línea al mapeo</a:t>
-            </a:r>
-          </a:p>
-          <a:p>
-            <a:pPr>
-              <a:spcBef>
-                <a:spcPts val="600"/>
-              </a:spcBef>
-            </a:pPr>
-          </a:p>
-          <a:p>
-            <a:pPr>
-              <a:spcBef>
-                <a:spcPts val="1600"/>
-              </a:spcBef>
-            </a:pPr>
-            <a:r>
-              <a:rPr sz="2000" b="1">
+                <a:latin typeface="Segoe UI"/>
+              </a:rPr>
+              <a:t>Categoría OTROS (esperado VINIFAN/VINIBALL)</a:t>
+            </a:r>
+          </a:p>
+          <a:p>
+            <a:pPr>
+              <a:spcBef>
+                <a:spcPts val="500"/>
+              </a:spcBef>
+              <a:spcAft>
+                <a:spcPts val="200"/>
+              </a:spcAft>
+            </a:pPr>
+            <a:r>
+              <a:rPr sz="1400" b="0">
+                <a:solidFill>
+                  <a:srgbClr val="F0F4F8"/>
+                </a:solidFill>
+                <a:latin typeface="Segoe UI"/>
+              </a:rPr>
+              <a:t>▸ Síntoma: SKU aparece en categoría genérica</a:t>
+            </a:r>
+          </a:p>
+          <a:p>
+            <a:pPr>
+              <a:spcBef>
+                <a:spcPts val="500"/>
+              </a:spcBef>
+              <a:spcAft>
+                <a:spcPts val="200"/>
+              </a:spcAft>
+            </a:pPr>
+            <a:r>
+              <a:rPr sz="1400" b="0">
+                <a:solidFill>
+                  <a:srgbClr val="F0F4F8"/>
+                </a:solidFill>
+                <a:latin typeface="Segoe UI"/>
+              </a:rPr>
+              <a:t>▸ Causa: código de línea no mapeado en CATEGORIAS</a:t>
+            </a:r>
+          </a:p>
+          <a:p>
+            <a:pPr>
+              <a:spcBef>
+                <a:spcPts val="500"/>
+              </a:spcBef>
+              <a:spcAft>
+                <a:spcPts val="200"/>
+              </a:spcAft>
+            </a:pPr>
+            <a:r>
+              <a:rPr sz="1400" b="0">
+                <a:solidFill>
+                  <a:srgbClr val="F0F4F8"/>
+                </a:solidFill>
+                <a:latin typeface="Segoe UI"/>
+              </a:rPr>
+              <a:t>▸ Solución: Agregar código al dict de categorías en constants.py</a:t>
+            </a:r>
+          </a:p>
+          <a:p>
+            <a:pPr>
+              <a:spcBef>
+                <a:spcPts val="400"/>
+              </a:spcBef>
+              <a:spcAft>
+                <a:spcPts val="400"/>
+              </a:spcAft>
+            </a:pPr>
+          </a:p>
+          <a:p>
+            <a:pPr>
+              <a:spcBef>
+                <a:spcPts val="1400"/>
+              </a:spcBef>
+              <a:spcAft>
+                <a:spcPts val="400"/>
+              </a:spcAft>
+            </a:pPr>
+            <a:r>
+              <a:rPr sz="1800" b="1">
                 <a:solidFill>
                   <a:srgbClr val="00D084"/>
                 </a:solidFill>
-              </a:rPr>
-              <a:t>Stock 0 Incorrecto</a:t>
-            </a:r>
-          </a:p>
-          <a:p>
-            <a:pPr>
-              <a:spcBef>
-                <a:spcPts val="600"/>
-              </a:spcBef>
-            </a:pPr>
-            <a:r>
-              <a:rPr sz="1600" b="0">
-                <a:solidFill>
-                  <a:srgbClr val="F0F4F8"/>
-                </a:solidFill>
-              </a:rPr>
-              <a:t>  Problema: SKU con stock en 118 muestra 0</a:t>
-            </a:r>
-          </a:p>
-          <a:p>
-            <a:pPr>
-              <a:spcBef>
-                <a:spcPts val="600"/>
-              </a:spcBef>
-            </a:pPr>
-            <a:r>
-              <a:rPr sz="1600" b="0">
-                <a:solidFill>
-                  <a:srgbClr val="F0F4F8"/>
-                </a:solidFill>
-              </a:rPr>
-              <a:t>  Causa: 118 es tipo mktd, no cuenta para venta</a:t>
-            </a:r>
-          </a:p>
-          <a:p>
-            <a:pPr>
-              <a:spcBef>
-                <a:spcPts val="600"/>
-              </a:spcBef>
-            </a:pPr>
-            <a:r>
-              <a:rPr sz="1600" b="0">
-                <a:solidFill>
-                  <a:srgbClr val="F0F4F8"/>
-                </a:solidFill>
-              </a:rPr>
-              <a:t>  Solución: Verificar si el SKU tiene almacenes de venta</a:t>
-            </a:r>
-          </a:p>
-          <a:p>
-            <a:pPr>
-              <a:spcBef>
-                <a:spcPts val="600"/>
-              </a:spcBef>
-            </a:pPr>
-          </a:p>
-          <a:p>
-            <a:pPr>
-              <a:spcBef>
-                <a:spcPts val="1600"/>
-              </a:spcBef>
-            </a:pPr>
-            <a:r>
-              <a:rPr sz="2000" b="1">
+                <a:latin typeface="Segoe UI"/>
+              </a:rPr>
+              <a:t>Stock 0 con existencias en almacén</a:t>
+            </a:r>
+          </a:p>
+          <a:p>
+            <a:pPr>
+              <a:spcBef>
+                <a:spcPts val="500"/>
+              </a:spcBef>
+              <a:spcAft>
+                <a:spcPts val="200"/>
+              </a:spcAft>
+            </a:pPr>
+            <a:r>
+              <a:rPr sz="1400" b="0">
+                <a:solidFill>
+                  <a:srgbClr val="F0F4F8"/>
+                </a:solidFill>
+                <a:latin typeface="Segoe UI"/>
+              </a:rPr>
+              <a:t>▸ Síntoma: SKU con stock en 118 muestra 0 disponible</a:t>
+            </a:r>
+          </a:p>
+          <a:p>
+            <a:pPr>
+              <a:spcBef>
+                <a:spcPts val="500"/>
+              </a:spcBef>
+              <a:spcAft>
+                <a:spcPts val="200"/>
+              </a:spcAft>
+            </a:pPr>
+            <a:r>
+              <a:rPr sz="1400" b="0">
+                <a:solidFill>
+                  <a:srgbClr val="F0F4F8"/>
+                </a:solidFill>
+                <a:latin typeface="Segoe UI"/>
+              </a:rPr>
+              <a:t>▸ Causa: 118 es tipo 'mktd', no cuenta para venta</a:t>
+            </a:r>
+          </a:p>
+          <a:p>
+            <a:pPr>
+              <a:spcBef>
+                <a:spcPts val="500"/>
+              </a:spcBef>
+              <a:spcAft>
+                <a:spcPts val="200"/>
+              </a:spcAft>
+            </a:pPr>
+            <a:r>
+              <a:rPr sz="1400" b="0">
+                <a:solidFill>
+                  <a:srgbClr val="F0F4F8"/>
+                </a:solidFill>
+                <a:latin typeface="Segoe UI"/>
+              </a:rPr>
+              <a:t>▸ Solución: Verificar tipo de almacén en el backend</a:t>
+            </a:r>
+          </a:p>
+          <a:p>
+            <a:pPr>
+              <a:spcBef>
+                <a:spcPts val="400"/>
+              </a:spcBef>
+              <a:spcAft>
+                <a:spcPts val="400"/>
+              </a:spcAft>
+            </a:pPr>
+          </a:p>
+          <a:p>
+            <a:pPr>
+              <a:spcBef>
+                <a:spcPts val="1400"/>
+              </a:spcBef>
+              <a:spcAft>
+                <a:spcPts val="400"/>
+              </a:spcAft>
+            </a:pPr>
+            <a:r>
+              <a:rPr sz="1800" b="1">
                 <a:solidFill>
                   <a:srgbClr val="00D084"/>
                 </a:solidFill>
-              </a:rPr>
-              <a:t>API No Responde</a:t>
-            </a:r>
-          </a:p>
-          <a:p>
-            <a:pPr>
-              <a:spcBef>
-                <a:spcPts val="600"/>
-              </a:spcBef>
-            </a:pPr>
-            <a:r>
-              <a:rPr sz="1600" b="0">
-                <a:solidFill>
-                  <a:srgbClr val="F0F4F8"/>
-                </a:solidFill>
-              </a:rPr>
-              <a:t>  Verificar que S1_API_KEY esté configurada en Render</a:t>
-            </a:r>
-          </a:p>
-          <a:p>
-            <a:pPr>
-              <a:spcBef>
-                <a:spcPts val="600"/>
-              </a:spcBef>
-            </a:pPr>
-            <a:r>
-              <a:rPr sz="1600" b="0">
-                <a:solidFill>
-                  <a:srgbClr val="F0F4F8"/>
-                </a:solidFill>
-              </a:rPr>
-              <a:t>  Check logs de Render si el servicio está awake</a:t>
+                <a:latin typeface="Segoe UI"/>
+              </a:rPr>
+              <a:t>API 403 Forbidden</a:t>
+            </a:r>
+          </a:p>
+          <a:p>
+            <a:pPr>
+              <a:spcBef>
+                <a:spcPts val="500"/>
+              </a:spcBef>
+              <a:spcAft>
+                <a:spcPts val="200"/>
+              </a:spcAft>
+            </a:pPr>
+            <a:r>
+              <a:rPr sz="1400" b="0">
+                <a:solidFill>
+                  <a:srgbClr val="F0F4F8"/>
+                </a:solidFill>
+                <a:latin typeface="Segoe UI"/>
+              </a:rPr>
+              <a:t>▸ Verificar X-API-Key en header (no query string)</a:t>
+            </a:r>
+          </a:p>
+          <a:p>
+            <a:pPr>
+              <a:spcBef>
+                <a:spcPts val="500"/>
+              </a:spcBef>
+              <a:spcAft>
+                <a:spcPts val="200"/>
+              </a:spcAft>
+            </a:pPr>
+            <a:r>
+              <a:rPr sz="1400" b="0">
+                <a:solidFill>
+                  <a:srgbClr val="F0F4F8"/>
+                </a:solidFill>
+                <a:latin typeface="Segoe UI"/>
+              </a:rPr>
+              <a:t>▸ Confirmar que la key coincide con S1_READ_API_KEY</a:t>
             </a:r>
           </a:p>
         </p:txBody>
@@ -7508,8 +8589,8 @@
         </p:nvSpPr>
         <p:spPr>
           <a:xfrm>
-            <a:off x="457200" y="274320"/>
-            <a:ext cx="11277295" cy="640080"/>
+            <a:off x="457200" y="228600"/>
+            <a:ext cx="11277295" cy="548640"/>
           </a:xfrm>
           <a:prstGeom prst="rect">
             <a:avLst/>
@@ -7527,6 +8608,7 @@
                 <a:solidFill>
                   <a:srgbClr val="F0F4F8"/>
                 </a:solidFill>
+                <a:latin typeface="Segoe UI"/>
               </a:rPr>
               <a:t>Mejoras Futuras Planeadas</a:t>
             </a:r>
@@ -7535,14 +8617,57 @@
       </p:sp>
       <p:sp>
         <p:nvSpPr>
-          <p:cNvPr id="4" name="TextBox 3"/>
+          <p:cNvPr id="4" name="Rectangle 3"/>
+          <p:cNvSpPr/>
+          <p:nvPr/>
+        </p:nvSpPr>
+        <p:spPr>
+          <a:xfrm>
+            <a:off x="457200" y="777240"/>
+            <a:ext cx="1371600" cy="27432"/>
+          </a:xfrm>
+          <a:prstGeom prst="rect">
+            <a:avLst/>
+          </a:prstGeom>
+          <a:solidFill>
+            <a:srgbClr val="00D084"/>
+          </a:solidFill>
+          <a:ln>
+            <a:noFill/>
+          </a:ln>
+        </p:spPr>
+        <p:style>
+          <a:lnRef idx="1">
+            <a:schemeClr val="accent1"/>
+          </a:lnRef>
+          <a:fillRef idx="3">
+            <a:schemeClr val="accent1"/>
+          </a:fillRef>
+          <a:effectRef idx="2">
+            <a:schemeClr val="accent1"/>
+          </a:effectRef>
+          <a:fontRef idx="minor">
+            <a:schemeClr val="lt1"/>
+          </a:fontRef>
+        </p:style>
+        <p:txBody>
+          <a:bodyPr rtlCol="0" anchor="ctr"/>
+          <a:lstStyle/>
+          <a:p>
+            <a:pPr algn="ctr"/>
+          </a:p>
+        </p:txBody>
+      </p:sp>
+      <p:sp>
+        <p:nvSpPr>
+          <p:cNvPr id="5" name="TextBox 4"/>
           <p:cNvSpPr txBox="1"/>
           <p:nvPr/>
         </p:nvSpPr>
         <p:spPr>
           <a:xfrm>
-            <a:off x="457200" y="1097280"/>
-            <a:ext cx="11277295" cy="5303520"/>
+            <a:off x="457200" y="1005840"/>
+            <a:ext cx="11277295" cy="5029200"/>
           </a:xfrm>
           <a:prstGeom prst="rect">
             <a:avLst/>
@@ -7557,106 +8682,134 @@
           <a:p>
             <a:pPr>
               <a:spcBef>
-                <a:spcPts val="600"/>
-              </a:spcBef>
-            </a:pPr>
-            <a:r>
-              <a:rPr sz="1600" b="0">
-                <a:solidFill>
-                  <a:srgbClr val="F0F4F8"/>
-                </a:solidFill>
-              </a:rPr>
-              <a:t>  Integración con ERP para rotación de SKUs</a:t>
-            </a:r>
-          </a:p>
-          <a:p>
-            <a:pPr>
-              <a:spcBef>
-                <a:spcPts val="600"/>
-              </a:spcBef>
-            </a:pPr>
-            <a:r>
-              <a:rPr sz="1600" b="0">
-                <a:solidFill>
-                  <a:srgbClr val="F0F4F8"/>
-                </a:solidFill>
-              </a:rPr>
-              <a:t>  Alertas push/notificaciones en tiempo real</a:t>
-            </a:r>
-          </a:p>
-          <a:p>
-            <a:pPr>
-              <a:spcBef>
-                <a:spcPts val="600"/>
-              </a:spcBef>
-            </a:pPr>
-            <a:r>
-              <a:rPr sz="1600" b="0">
-                <a:solidFill>
-                  <a:srgbClr val="F0F4F8"/>
-                </a:solidFill>
-              </a:rPr>
-              <a:t>  Reportes por almacén específico</a:t>
-            </a:r>
-          </a:p>
-          <a:p>
-            <a:pPr>
-              <a:spcBef>
-                <a:spcPts val="600"/>
-              </a:spcBef>
-            </a:pPr>
-            <a:r>
-              <a:rPr sz="1600" b="0">
-                <a:solidFill>
-                  <a:srgbClr val="F0F4F8"/>
-                </a:solidFill>
-              </a:rPr>
-              <a:t>  Gráficos de tendencia histórica</a:t>
-            </a:r>
-          </a:p>
-          <a:p>
-            <a:pPr>
-              <a:spcBef>
-                <a:spcPts val="600"/>
-              </a:spcBef>
-            </a:pPr>
-            <a:r>
-              <a:rPr sz="1600" b="0">
-                <a:solidFill>
-                  <a:srgbClr val="F0F4F8"/>
-                </a:solidFill>
-              </a:rPr>
-              <a:t>  Módulo de reposición automática</a:t>
-            </a:r>
-          </a:p>
-          <a:p>
-            <a:pPr>
-              <a:spcBef>
-                <a:spcPts val="600"/>
-              </a:spcBef>
-            </a:pPr>
-            <a:r>
-              <a:rPr sz="1600" b="0">
-                <a:solidFill>
-                  <a:srgbClr val="F0F4F8"/>
-                </a:solidFill>
-              </a:rPr>
-              <a:t>  App nativa móvil (React Native/Flutter)</a:t>
-            </a:r>
-          </a:p>
-          <a:p>
-            <a:pPr>
-              <a:spcBef>
-                <a:spcPts val="600"/>
-              </a:spcBef>
-            </a:pPr>
-            <a:r>
-              <a:rPr sz="1600" b="0">
-                <a:solidFill>
-                  <a:srgbClr val="F0F4F8"/>
-                </a:solidFill>
-              </a:rPr>
-              <a:t>  Dashboard ejecutivo con KPIs avanzados</a:t>
+                <a:spcPts val="500"/>
+              </a:spcBef>
+              <a:spcAft>
+                <a:spcPts val="200"/>
+              </a:spcAft>
+            </a:pPr>
+            <a:r>
+              <a:rPr sz="1400" b="0">
+                <a:solidFill>
+                  <a:srgbClr val="F0F4F8"/>
+                </a:solidFill>
+                <a:latin typeface="Segoe UI"/>
+              </a:rPr>
+              <a:t>▸ Integración con ERP para rotación de SKUs</a:t>
+            </a:r>
+          </a:p>
+          <a:p>
+            <a:pPr>
+              <a:spcBef>
+                <a:spcPts val="500"/>
+              </a:spcBef>
+              <a:spcAft>
+                <a:spcPts val="200"/>
+              </a:spcAft>
+            </a:pPr>
+            <a:r>
+              <a:rPr sz="1400" b="0">
+                <a:solidFill>
+                  <a:srgbClr val="F0F4F8"/>
+                </a:solidFill>
+                <a:latin typeface="Segoe UI"/>
+              </a:rPr>
+              <a:t>▸ Alertas push y notificaciones en tiempo real</a:t>
+            </a:r>
+          </a:p>
+          <a:p>
+            <a:pPr>
+              <a:spcBef>
+                <a:spcPts val="500"/>
+              </a:spcBef>
+              <a:spcAft>
+                <a:spcPts val="200"/>
+              </a:spcAft>
+            </a:pPr>
+            <a:r>
+              <a:rPr sz="1400" b="0">
+                <a:solidFill>
+                  <a:srgbClr val="F0F4F8"/>
+                </a:solidFill>
+                <a:latin typeface="Segoe UI"/>
+              </a:rPr>
+              <a:t>▸ Reportes filtrados por almacén específico</a:t>
+            </a:r>
+          </a:p>
+          <a:p>
+            <a:pPr>
+              <a:spcBef>
+                <a:spcPts val="500"/>
+              </a:spcBef>
+              <a:spcAft>
+                <a:spcPts val="200"/>
+              </a:spcAft>
+            </a:pPr>
+            <a:r>
+              <a:rPr sz="1400" b="0">
+                <a:solidFill>
+                  <a:srgbClr val="F0F4F8"/>
+                </a:solidFill>
+                <a:latin typeface="Segoe UI"/>
+              </a:rPr>
+              <a:t>▸ Gráficos de tendencia histórica de stock</a:t>
+            </a:r>
+          </a:p>
+          <a:p>
+            <a:pPr>
+              <a:spcBef>
+                <a:spcPts val="500"/>
+              </a:spcBef>
+              <a:spcAft>
+                <a:spcPts val="200"/>
+              </a:spcAft>
+            </a:pPr>
+            <a:r>
+              <a:rPr sz="1400" b="0">
+                <a:solidFill>
+                  <a:srgbClr val="F0F4F8"/>
+                </a:solidFill>
+                <a:latin typeface="Segoe UI"/>
+              </a:rPr>
+              <a:t>▸ Módulo de reposición automática sugerida</a:t>
+            </a:r>
+          </a:p>
+          <a:p>
+            <a:pPr>
+              <a:spcBef>
+                <a:spcPts val="500"/>
+              </a:spcBef>
+              <a:spcAft>
+                <a:spcPts val="200"/>
+              </a:spcAft>
+            </a:pPr>
+            <a:r>
+              <a:rPr sz="1400" b="0">
+                <a:solidFill>
+                  <a:srgbClr val="F0F4F8"/>
+                </a:solidFill>
+                <a:latin typeface="Segoe UI"/>
+              </a:rPr>
+              <a:t>▸ App nativa móvil (React Native / Flutter)</a:t>
+            </a:r>
+          </a:p>
+          <a:p>
+            <a:pPr>
+              <a:spcBef>
+                <a:spcPts val="500"/>
+              </a:spcBef>
+              <a:spcAft>
+                <a:spcPts val="200"/>
+              </a:spcAft>
+            </a:pPr>
+            <a:r>
+              <a:rPr sz="1400" b="0">
+                <a:solidFill>
+                  <a:srgbClr val="F0F4F8"/>
+                </a:solidFill>
+                <a:latin typeface="Segoe UI"/>
+              </a:rPr>
+              <a:t>▸ Dashboard ejecutivo con KPIs avanzados</a:t>
             </a:r>
           </a:p>
         </p:txBody>
@@ -7724,14 +8877,57 @@
       </p:sp>
       <p:sp>
         <p:nvSpPr>
-          <p:cNvPr id="3" name="TextBox 2"/>
+          <p:cNvPr id="3" name="Rectangle 2"/>
+          <p:cNvSpPr/>
+          <p:nvPr/>
+        </p:nvSpPr>
+        <p:spPr>
+          <a:xfrm>
+            <a:off x="457200" y="3200400"/>
+            <a:ext cx="1828800" cy="36576"/>
+          </a:xfrm>
+          <a:prstGeom prst="rect">
+            <a:avLst/>
+          </a:prstGeom>
+          <a:solidFill>
+            <a:srgbClr val="00D084"/>
+          </a:solidFill>
+          <a:ln>
+            <a:noFill/>
+          </a:ln>
+        </p:spPr>
+        <p:style>
+          <a:lnRef idx="1">
+            <a:schemeClr val="accent1"/>
+          </a:lnRef>
+          <a:fillRef idx="3">
+            <a:schemeClr val="accent1"/>
+          </a:fillRef>
+          <a:effectRef idx="2">
+            <a:schemeClr val="accent1"/>
+          </a:effectRef>
+          <a:fontRef idx="minor">
+            <a:schemeClr val="lt1"/>
+          </a:fontRef>
+        </p:style>
+        <p:txBody>
+          <a:bodyPr rtlCol="0" anchor="ctr"/>
+          <a:lstStyle/>
+          <a:p>
+            <a:pPr algn="ctr"/>
+          </a:p>
+        </p:txBody>
+      </p:sp>
+      <p:sp>
+        <p:nvSpPr>
+          <p:cNvPr id="4" name="TextBox 3"/>
           <p:cNvSpPr txBox="1"/>
           <p:nvPr/>
         </p:nvSpPr>
         <p:spPr>
           <a:xfrm>
-            <a:off x="457200" y="2286000"/>
-            <a:ext cx="11277295" cy="1097280"/>
+            <a:off x="457200" y="2011680"/>
+            <a:ext cx="11277295" cy="914400"/>
           </a:xfrm>
           <a:prstGeom prst="rect">
             <a:avLst/>
@@ -7750,6 +8946,7 @@
                 <a:solidFill>
                   <a:srgbClr val="F0F4F8"/>
                 </a:solidFill>
+                <a:latin typeface="Segoe UI"/>
               </a:rPr>
               <a:t>StockPulse CIPSA</a:t>
             </a:r>
@@ -7758,14 +8955,14 @@
       </p:sp>
       <p:sp>
         <p:nvSpPr>
-          <p:cNvPr id="4" name="TextBox 3"/>
+          <p:cNvPr id="5" name="TextBox 4"/>
           <p:cNvSpPr txBox="1"/>
           <p:nvPr/>
         </p:nvSpPr>
         <p:spPr>
           <a:xfrm>
-            <a:off x="457200" y="3657600"/>
-            <a:ext cx="11277295" cy="731520"/>
+            <a:off x="457200" y="3200400"/>
+            <a:ext cx="11277295" cy="548640"/>
           </a:xfrm>
           <a:prstGeom prst="rect">
             <a:avLst/>
@@ -7780,10 +8977,11 @@
           <a:p>
             <a:pPr algn="ctr"/>
             <a:r>
-              <a:rPr sz="2200" b="0">
+              <a:rPr sz="2000" b="0">
                 <a:solidFill>
                   <a:srgbClr val="94A3B8"/>
                 </a:solidFill>
+                <a:latin typeface="Segoe UI"/>
               </a:rPr>
               <a:t>Inteligencia de Stock en Tiempo Real</a:t>
             </a:r>
@@ -7792,13 +8990,13 @@
       </p:sp>
       <p:sp>
         <p:nvSpPr>
-          <p:cNvPr id="5" name="TextBox 4"/>
+          <p:cNvPr id="6" name="TextBox 5"/>
           <p:cNvSpPr txBox="1"/>
           <p:nvPr/>
         </p:nvSpPr>
         <p:spPr>
           <a:xfrm>
-            <a:off x="457200" y="5303520"/>
+            <a:off x="457200" y="5029200"/>
             <a:ext cx="11277295" cy="457200"/>
           </a:xfrm>
           <a:prstGeom prst="rect">
@@ -7814,12 +9012,48 @@
           <a:p>
             <a:pPr algn="ctr"/>
             <a:r>
-              <a:rPr sz="1600" b="0">
+              <a:rPr sz="1400" b="0">
                 <a:solidFill>
                   <a:srgbClr val="00D084"/>
                 </a:solidFill>
+                <a:latin typeface="Segoe UI"/>
               </a:rPr>
               <a:t>¿Consultas? Contactar al equipo G360</a:t>
+            </a:r>
+          </a:p>
+        </p:txBody>
+      </p:sp>
+      <p:sp>
+        <p:nvSpPr>
+          <p:cNvPr id="7" name="TextBox 6"/>
+          <p:cNvSpPr txBox="1"/>
+          <p:nvPr/>
+        </p:nvSpPr>
+        <p:spPr>
+          <a:xfrm>
+            <a:off x="457200" y="6217920"/>
+            <a:ext cx="11277295" cy="365760"/>
+          </a:xfrm>
+          <a:prstGeom prst="rect">
+            <a:avLst/>
+          </a:prstGeom>
+          <a:noFill/>
+        </p:spPr>
+        <p:txBody>
+          <a:bodyPr wrap="none">
+            <a:spAutoFit/>
+          </a:bodyPr>
+          <a:lstStyle/>
+          <a:p>
+            <a:pPr algn="r"/>
+            <a:r>
+              <a:rPr sz="1000" b="0">
+                <a:solidFill>
+                  <a:srgbClr val="94A3B8"/>
+                </a:solidFill>
+                <a:latin typeface="Segoe UI"/>
+              </a:rPr>
+              <a:t>g360-stock-reporter-lit · GitHub</a:t>
             </a:r>
           </a:p>
         </p:txBody>
@@ -7893,8 +9127,8 @@
         </p:nvSpPr>
         <p:spPr>
           <a:xfrm>
-            <a:off x="457200" y="2743200"/>
-            <a:ext cx="1828800" cy="54864"/>
+            <a:off x="457200" y="2377440"/>
+            <a:ext cx="2286000" cy="36576"/>
           </a:xfrm>
           <a:prstGeom prst="rect">
             <a:avLst/>
@@ -7936,8 +9170,8 @@
         </p:nvSpPr>
         <p:spPr>
           <a:xfrm>
-            <a:off x="457200" y="2377440"/>
-            <a:ext cx="10972800" cy="914400"/>
+            <a:off x="457200" y="2011680"/>
+            <a:ext cx="11277295" cy="914400"/>
           </a:xfrm>
           <a:prstGeom prst="rect">
             <a:avLst/>
@@ -7955,6 +9189,7 @@
                 <a:solidFill>
                   <a:srgbClr val="F0F4F8"/>
                 </a:solidFill>
+                <a:latin typeface="Segoe UI"/>
               </a:rPr>
               <a:t>Arquitectura del Sistema</a:t>
             </a:r>
@@ -8030,8 +9265,8 @@
         </p:nvSpPr>
         <p:spPr>
           <a:xfrm>
-            <a:off x="457200" y="274320"/>
-            <a:ext cx="11277295" cy="640080"/>
+            <a:off x="457200" y="228600"/>
+            <a:ext cx="11277295" cy="548640"/>
           </a:xfrm>
           <a:prstGeom prst="rect">
             <a:avLst/>
@@ -8049,6 +9284,7 @@
                 <a:solidFill>
                   <a:srgbClr val="F0F4F8"/>
                 </a:solidFill>
+                <a:latin typeface="Segoe UI"/>
               </a:rPr>
               <a:t>Componentes Principales</a:t>
             </a:r>
@@ -8057,13 +9293,56 @@
       </p:sp>
       <p:sp>
         <p:nvSpPr>
-          <p:cNvPr id="4" name="TextBox 3"/>
+          <p:cNvPr id="4" name="Rectangle 3"/>
+          <p:cNvSpPr/>
+          <p:nvPr/>
+        </p:nvSpPr>
+        <p:spPr>
+          <a:xfrm>
+            <a:off x="457200" y="777240"/>
+            <a:ext cx="1371600" cy="27432"/>
+          </a:xfrm>
+          <a:prstGeom prst="rect">
+            <a:avLst/>
+          </a:prstGeom>
+          <a:solidFill>
+            <a:srgbClr val="00D084"/>
+          </a:solidFill>
+          <a:ln>
+            <a:noFill/>
+          </a:ln>
+        </p:spPr>
+        <p:style>
+          <a:lnRef idx="1">
+            <a:schemeClr val="accent1"/>
+          </a:lnRef>
+          <a:fillRef idx="3">
+            <a:schemeClr val="accent1"/>
+          </a:fillRef>
+          <a:effectRef idx="2">
+            <a:schemeClr val="accent1"/>
+          </a:effectRef>
+          <a:fontRef idx="minor">
+            <a:schemeClr val="lt1"/>
+          </a:fontRef>
+        </p:style>
+        <p:txBody>
+          <a:bodyPr rtlCol="0" anchor="ctr"/>
+          <a:lstStyle/>
+          <a:p>
+            <a:pPr algn="ctr"/>
+          </a:p>
+        </p:txBody>
+      </p:sp>
+      <p:sp>
+        <p:nvSpPr>
+          <p:cNvPr id="5" name="TextBox 4"/>
           <p:cNvSpPr txBox="1"/>
           <p:nvPr/>
         </p:nvSpPr>
         <p:spPr>
           <a:xfrm>
-            <a:off x="457200" y="1097280"/>
+            <a:off x="457200" y="914400"/>
             <a:ext cx="11277295" cy="5303520"/>
           </a:xfrm>
           <a:prstGeom prst="rect">
@@ -8079,163 +9358,209 @@
           <a:p>
             <a:pPr>
               <a:spcBef>
-                <a:spcPts val="1600"/>
-              </a:spcBef>
-            </a:pPr>
-            <a:r>
-              <a:rPr sz="2000" b="1">
+                <a:spcPts val="1400"/>
+              </a:spcBef>
+              <a:spcAft>
+                <a:spcPts val="400"/>
+              </a:spcAft>
+            </a:pPr>
+            <a:r>
+              <a:rPr sz="1800" b="1">
                 <a:solidFill>
                   <a:srgbClr val="00D084"/>
                 </a:solidFill>
-              </a:rPr>
-              <a:t>Frontend (GitHub Pages)</a:t>
-            </a:r>
-          </a:p>
-          <a:p>
-            <a:pPr>
-              <a:spcBef>
-                <a:spcPts val="600"/>
-              </a:spcBef>
-            </a:pPr>
-            <a:r>
-              <a:rPr sz="1600" b="0">
-                <a:solidFill>
-                  <a:srgbClr val="F0F4F8"/>
-                </a:solidFill>
-              </a:rPr>
-              <a:t>  g360-stock-reporter-lit (Lit 3 PWA)</a:t>
-            </a:r>
-          </a:p>
-          <a:p>
-            <a:pPr>
-              <a:spcBef>
-                <a:spcPts val="600"/>
-              </a:spcBef>
-            </a:pPr>
-            <a:r>
-              <a:rPr sz="1600" b="0">
-                <a:solidFill>
-                  <a:srgbClr val="F0F4F8"/>
-                </a:solidFill>
-              </a:rPr>
-              <a:t>  Service Worker para offline/respaldo</a:t>
-            </a:r>
-          </a:p>
-          <a:p>
-            <a:pPr>
-              <a:spcBef>
-                <a:spcPts val="600"/>
-              </a:spcBef>
-            </a:pPr>
-            <a:r>
-              <a:rPr sz="1600" b="0">
-                <a:solidFill>
-                  <a:srgbClr val="F0F4F8"/>
-                </a:solidFill>
-              </a:rPr>
-              <a:t>  Cache de 3 capas: memoria → sessionStorage → localStorage</a:t>
-            </a:r>
-          </a:p>
-          <a:p>
-            <a:pPr>
-              <a:spcBef>
-                <a:spcPts val="600"/>
-              </a:spcBef>
-            </a:pPr>
-          </a:p>
-          <a:p>
-            <a:pPr>
-              <a:spcBef>
-                <a:spcPts val="1600"/>
-              </a:spcBef>
-            </a:pPr>
-            <a:r>
-              <a:rPr sz="2000" b="1">
+                <a:latin typeface="Segoe UI"/>
+              </a:rPr>
+              <a:t>Frontend — GitHub Pages</a:t>
+            </a:r>
+          </a:p>
+          <a:p>
+            <a:pPr>
+              <a:spcBef>
+                <a:spcPts val="500"/>
+              </a:spcBef>
+              <a:spcAft>
+                <a:spcPts val="200"/>
+              </a:spcAft>
+            </a:pPr>
+            <a:r>
+              <a:rPr sz="1400" b="0">
+                <a:solidFill>
+                  <a:srgbClr val="F0F4F8"/>
+                </a:solidFill>
+                <a:latin typeface="Segoe UI"/>
+              </a:rPr>
+              <a:t>▸ g360-stock-reporter-lit (Lit 3 PWA)</a:t>
+            </a:r>
+          </a:p>
+          <a:p>
+            <a:pPr>
+              <a:spcBef>
+                <a:spcPts val="500"/>
+              </a:spcBef>
+              <a:spcAft>
+                <a:spcPts val="200"/>
+              </a:spcAft>
+            </a:pPr>
+            <a:r>
+              <a:rPr sz="1400" b="0">
+                <a:solidFill>
+                  <a:srgbClr val="F0F4F8"/>
+                </a:solidFill>
+                <a:latin typeface="Segoe UI"/>
+              </a:rPr>
+              <a:t>▸ Service Worker para respaldo offline</a:t>
+            </a:r>
+          </a:p>
+          <a:p>
+            <a:pPr>
+              <a:spcBef>
+                <a:spcPts val="500"/>
+              </a:spcBef>
+              <a:spcAft>
+                <a:spcPts val="200"/>
+              </a:spcAft>
+            </a:pPr>
+            <a:r>
+              <a:rPr sz="1400" b="0">
+                <a:solidFill>
+                  <a:srgbClr val="F0F4F8"/>
+                </a:solidFill>
+                <a:latin typeface="Segoe UI"/>
+              </a:rPr>
+              <a:t>▸ Cache 3 capas: memoria → session → local</a:t>
+            </a:r>
+          </a:p>
+          <a:p>
+            <a:pPr>
+              <a:spcBef>
+                <a:spcPts val="400"/>
+              </a:spcBef>
+              <a:spcAft>
+                <a:spcPts val="400"/>
+              </a:spcAft>
+            </a:pPr>
+          </a:p>
+          <a:p>
+            <a:pPr>
+              <a:spcBef>
+                <a:spcPts val="1400"/>
+              </a:spcBef>
+              <a:spcAft>
+                <a:spcPts val="400"/>
+              </a:spcAft>
+            </a:pPr>
+            <a:r>
+              <a:rPr sz="1800" b="1">
                 <a:solidFill>
                   <a:srgbClr val="00D084"/>
                 </a:solidFill>
-              </a:rPr>
-              <a:t>Backend (Render)</a:t>
-            </a:r>
-          </a:p>
-          <a:p>
-            <a:pPr>
-              <a:spcBef>
-                <a:spcPts val="600"/>
-              </a:spcBef>
-            </a:pPr>
-            <a:r>
-              <a:rPr sz="1600" b="0">
-                <a:solidFill>
-                  <a:srgbClr val="F0F4F8"/>
-                </a:solidFill>
-              </a:rPr>
-              <a:t>  g360-stock-api (FastAPI + Python)</a:t>
-            </a:r>
-          </a:p>
-          <a:p>
-            <a:pPr>
-              <a:spcBef>
-                <a:spcPts val="600"/>
-              </a:spcBef>
-            </a:pPr>
-            <a:r>
-              <a:rPr sz="1600" b="0">
-                <a:solidFill>
-                  <a:srgbClr val="F0F4F8"/>
-                </a:solidFill>
-              </a:rPr>
-              <a:t>  Fuente: appweb.cipsa.com.pe:8054</a:t>
-            </a:r>
-          </a:p>
-          <a:p>
-            <a:pPr>
-              <a:spcBef>
-                <a:spcPts val="600"/>
-              </a:spcBef>
-            </a:pPr>
-            <a:r>
-              <a:rPr sz="1600" b="0">
-                <a:solidFill>
-                  <a:srgbClr val="F0F4F8"/>
-                </a:solidFill>
-              </a:rPr>
-              <a:t>  Enriquecimiento con catálogo maestro</a:t>
-            </a:r>
-          </a:p>
-          <a:p>
-            <a:pPr>
-              <a:spcBef>
-                <a:spcPts val="600"/>
-              </a:spcBef>
-            </a:pPr>
-            <a:r>
-              <a:rPr sz="1600" b="0">
-                <a:solidFill>
-                  <a:srgbClr val="F0F4F8"/>
-                </a:solidFill>
-              </a:rPr>
-              <a:t>  TTL de caché: 15 minutos</a:t>
-            </a:r>
-          </a:p>
-          <a:p>
-            <a:pPr>
-              <a:spcBef>
-                <a:spcPts val="600"/>
-              </a:spcBef>
-            </a:pPr>
-          </a:p>
-          <a:p>
-            <a:pPr>
-              <a:spcBef>
-                <a:spcPts val="1600"/>
-              </a:spcBef>
-            </a:pPr>
-            <a:r>
-              <a:rPr sz="2000" b="1">
+                <a:latin typeface="Segoe UI"/>
+              </a:rPr>
+              <a:t>Backend — Render</a:t>
+            </a:r>
+          </a:p>
+          <a:p>
+            <a:pPr>
+              <a:spcBef>
+                <a:spcPts val="500"/>
+              </a:spcBef>
+              <a:spcAft>
+                <a:spcPts val="200"/>
+              </a:spcAft>
+            </a:pPr>
+            <a:r>
+              <a:rPr sz="1400" b="0">
+                <a:solidFill>
+                  <a:srgbClr val="F0F4F8"/>
+                </a:solidFill>
+                <a:latin typeface="Segoe UI"/>
+              </a:rPr>
+              <a:t>▸ g360-stock-api (FastAPI + Python)</a:t>
+            </a:r>
+          </a:p>
+          <a:p>
+            <a:pPr>
+              <a:spcBef>
+                <a:spcPts val="500"/>
+              </a:spcBef>
+              <a:spcAft>
+                <a:spcPts val="200"/>
+              </a:spcAft>
+            </a:pPr>
+            <a:r>
+              <a:rPr sz="1400" b="0">
+                <a:solidFill>
+                  <a:srgbClr val="F0F4F8"/>
+                </a:solidFill>
+                <a:latin typeface="Segoe UI"/>
+              </a:rPr>
+              <a:t>▸ Fuente: appweb.cipsa.com.pe:8054</a:t>
+            </a:r>
+          </a:p>
+          <a:p>
+            <a:pPr>
+              <a:spcBef>
+                <a:spcPts val="500"/>
+              </a:spcBef>
+              <a:spcAft>
+                <a:spcPts val="200"/>
+              </a:spcAft>
+            </a:pPr>
+            <a:r>
+              <a:rPr sz="1400" b="0">
+                <a:solidFill>
+                  <a:srgbClr val="F0F4F8"/>
+                </a:solidFill>
+                <a:latin typeface="Segoe UI"/>
+              </a:rPr>
+              <a:t>▸ Enriquecimiento automático con catálogo</a:t>
+            </a:r>
+          </a:p>
+          <a:p>
+            <a:pPr>
+              <a:spcBef>
+                <a:spcPts val="500"/>
+              </a:spcBef>
+              <a:spcAft>
+                <a:spcPts val="200"/>
+              </a:spcAft>
+            </a:pPr>
+            <a:r>
+              <a:rPr sz="1400" b="0">
+                <a:solidFill>
+                  <a:srgbClr val="F0F4F8"/>
+                </a:solidFill>
+                <a:latin typeface="Segoe UI"/>
+              </a:rPr>
+              <a:t>▸ TTL cache: 15 minutos</a:t>
+            </a:r>
+          </a:p>
+          <a:p>
+            <a:pPr>
+              <a:spcBef>
+                <a:spcPts val="400"/>
+              </a:spcBef>
+              <a:spcAft>
+                <a:spcPts val="400"/>
+              </a:spcAft>
+            </a:pPr>
+          </a:p>
+          <a:p>
+            <a:pPr>
+              <a:spcBef>
+                <a:spcPts val="1400"/>
+              </a:spcBef>
+              <a:spcAft>
+                <a:spcPts val="400"/>
+              </a:spcAft>
+            </a:pPr>
+            <a:r>
+              <a:rPr sz="1800" b="1">
                 <a:solidFill>
                   <a:srgbClr val="00D084"/>
                 </a:solidFill>
+                <a:latin typeface="Segoe UI"/>
               </a:rPr>
               <a:t>Catálogo Maestro</a:t>
             </a:r>
@@ -8243,46 +9568,58 @@
           <a:p>
             <a:pPr>
               <a:spcBef>
-                <a:spcPts val="600"/>
-              </a:spcBef>
-            </a:pPr>
-            <a:r>
-              <a:rPr sz="1600" b="0">
-                <a:solidFill>
-                  <a:srgbClr val="F0F4F8"/>
-                </a:solidFill>
-              </a:rPr>
-              <a:t>  g360-master-data (JSON)</a:t>
-            </a:r>
-          </a:p>
-          <a:p>
-            <a:pPr>
-              <a:spcBef>
-                <a:spcPts val="600"/>
-              </a:spcBef>
-            </a:pPr>
-            <a:r>
-              <a:rPr sz="1600" b="0">
-                <a:solidFill>
-                  <a:srgbClr val="F0F4F8"/>
-                </a:solidFill>
-              </a:rPr>
-              <a:t>  Campos: SKU, descripción, un_bx, peso, líneas, categorías</a:t>
-            </a:r>
-          </a:p>
-          <a:p>
-            <a:pPr>
-              <a:spcBef>
-                <a:spcPts val="600"/>
-              </a:spcBef>
-            </a:pPr>
-            <a:r>
-              <a:rPr sz="1600" b="0">
-                <a:solidFill>
-                  <a:srgbClr val="F0F4F8"/>
-                </a:solidFill>
-              </a:rPr>
-              <a:t>  Auto-carga desde GitHub en cada reinicio</a:t>
+                <a:spcPts val="500"/>
+              </a:spcBef>
+              <a:spcAft>
+                <a:spcPts val="200"/>
+              </a:spcAft>
+            </a:pPr>
+            <a:r>
+              <a:rPr sz="1400" b="0">
+                <a:solidFill>
+                  <a:srgbClr val="F0F4F8"/>
+                </a:solidFill>
+                <a:latin typeface="Segoe UI"/>
+              </a:rPr>
+              <a:t>▸ g360-master-data (JSON alojado en GitHub)</a:t>
+            </a:r>
+          </a:p>
+          <a:p>
+            <a:pPr>
+              <a:spcBef>
+                <a:spcPts val="500"/>
+              </a:spcBef>
+              <a:spcAft>
+                <a:spcPts val="200"/>
+              </a:spcAft>
+            </a:pPr>
+            <a:r>
+              <a:rPr sz="1400" b="0">
+                <a:solidFill>
+                  <a:srgbClr val="F0F4F8"/>
+                </a:solidFill>
+                <a:latin typeface="Segoe UI"/>
+              </a:rPr>
+              <a:t>▸ Campos: SKU, descripción, un_bx, peso, líneas</a:t>
+            </a:r>
+          </a:p>
+          <a:p>
+            <a:pPr>
+              <a:spcBef>
+                <a:spcPts val="500"/>
+              </a:spcBef>
+              <a:spcAft>
+                <a:spcPts val="200"/>
+              </a:spcAft>
+            </a:pPr>
+            <a:r>
+              <a:rPr sz="1400" b="0">
+                <a:solidFill>
+                  <a:srgbClr val="F0F4F8"/>
+                </a:solidFill>
+                <a:latin typeface="Segoe UI"/>
+              </a:rPr>
+              <a:t>▸ Auto-carga al iniciar el servicio</a:t>
             </a:r>
           </a:p>
         </p:txBody>
@@ -8356,8 +9693,8 @@
         </p:nvSpPr>
         <p:spPr>
           <a:xfrm>
-            <a:off x="457200" y="274320"/>
-            <a:ext cx="11277295" cy="640080"/>
+            <a:off x="457200" y="228600"/>
+            <a:ext cx="11277295" cy="548640"/>
           </a:xfrm>
           <a:prstGeom prst="rect">
             <a:avLst/>
@@ -8375,6 +9712,7 @@
                 <a:solidFill>
                   <a:srgbClr val="F0F4F8"/>
                 </a:solidFill>
+                <a:latin typeface="Segoe UI"/>
               </a:rPr>
               <a:t>Diagrama de Flujo de Datos</a:t>
             </a:r>
@@ -8389,18 +9727,61 @@
         </p:nvSpPr>
         <p:spPr>
           <a:xfrm>
-            <a:off x="731520" y="1188720"/>
-            <a:ext cx="10728655" cy="4754880"/>
+            <a:off x="457200" y="777240"/>
+            <a:ext cx="1371600" cy="27432"/>
           </a:xfrm>
           <a:prstGeom prst="rect">
+            <a:avLst/>
+          </a:prstGeom>
+          <a:solidFill>
+            <a:srgbClr val="00D084"/>
+          </a:solidFill>
+          <a:ln>
+            <a:noFill/>
+          </a:ln>
+        </p:spPr>
+        <p:style>
+          <a:lnRef idx="1">
+            <a:schemeClr val="accent1"/>
+          </a:lnRef>
+          <a:fillRef idx="3">
+            <a:schemeClr val="accent1"/>
+          </a:fillRef>
+          <a:effectRef idx="2">
+            <a:schemeClr val="accent1"/>
+          </a:effectRef>
+          <a:fontRef idx="minor">
+            <a:schemeClr val="lt1"/>
+          </a:fontRef>
+        </p:style>
+        <p:txBody>
+          <a:bodyPr rtlCol="0" anchor="ctr"/>
+          <a:lstStyle/>
+          <a:p>
+            <a:pPr algn="ctr"/>
+          </a:p>
+        </p:txBody>
+      </p:sp>
+      <p:sp>
+        <p:nvSpPr>
+          <p:cNvPr id="5" name="Rounded Rectangle 4"/>
+          <p:cNvSpPr/>
+          <p:nvPr/>
+        </p:nvSpPr>
+        <p:spPr>
+          <a:xfrm>
+            <a:off x="548640" y="1097280"/>
+            <a:ext cx="11064240" cy="5120640"/>
+          </a:xfrm>
+          <a:prstGeom prst="roundRect">
             <a:avLst/>
           </a:prstGeom>
           <a:solidFill>
             <a:srgbClr val="1E293B"/>
           </a:solidFill>
-          <a:ln w="25400">
+          <a:ln w="19050">
             <a:solidFill>
-              <a:srgbClr val="00D084"/>
+              <a:srgbClr val="334155"/>
             </a:solidFill>
           </a:ln>
         </p:spPr>
@@ -8422,25 +9803,31 @@
           <a:bodyPr rtlCol="0" anchor="ctr" wrap="square"/>
           <a:lstStyle/>
           <a:p>
+            <a:pPr algn="ctr">
+              <a:spcBef>
+                <a:spcPts val="2000"/>
+              </a:spcBef>
+            </a:pPr>
+            <a:r>
+              <a:rPr sz="2400" b="1">
+                <a:solidFill>
+                  <a:srgbClr val="94A3B8"/>
+                </a:solidFill>
+                <a:latin typeface="Segoe UI"/>
+              </a:rPr>
+              <a:t>[ CAPTURA DE PANTALLA ]</a:t>
+            </a:r>
+          </a:p>
+          <a:p>
             <a:pPr algn="ctr"/>
             <a:r>
-              <a:rPr sz="2400" b="1">
+              <a:rPr sz="1200" b="0">
                 <a:solidFill>
                   <a:srgbClr val="94A3B8"/>
                 </a:solidFill>
-              </a:rPr>
-              <a:t>[CAPTURA DE PANTALLA]</a:t>
-            </a:r>
-          </a:p>
-          <a:p>
-            <a:pPr algn="ctr"/>
-            <a:r>
-              <a:rPr sz="1400" b="0">
-                <a:solidFill>
-                  <a:srgbClr val="94A3B8"/>
-                </a:solidFill>
-              </a:rPr>
-              <a:t>Captura del diagrama arquitectura</a:t>
+                <a:latin typeface="Segoe UI"/>
+              </a:rPr>
+              <a:t>Captura del diagrama de arquitectura</a:t>
             </a:r>
           </a:p>
         </p:txBody>
@@ -8514,8 +9901,8 @@
         </p:nvSpPr>
         <p:spPr>
           <a:xfrm>
-            <a:off x="457200" y="274320"/>
-            <a:ext cx="11277295" cy="640080"/>
+            <a:off x="457200" y="228600"/>
+            <a:ext cx="11277295" cy="548640"/>
           </a:xfrm>
           <a:prstGeom prst="rect">
             <a:avLst/>
@@ -8533,6 +9920,7 @@
                 <a:solidFill>
                   <a:srgbClr val="F0F4F8"/>
                 </a:solidFill>
+                <a:latin typeface="Segoe UI"/>
               </a:rPr>
               <a:t>Fuentes de Datos (appweb)</a:t>
             </a:r>
@@ -8541,13 +9929,56 @@
       </p:sp>
       <p:sp>
         <p:nvSpPr>
-          <p:cNvPr id="4" name="TextBox 3"/>
+          <p:cNvPr id="4" name="Rectangle 3"/>
+          <p:cNvSpPr/>
+          <p:nvPr/>
+        </p:nvSpPr>
+        <p:spPr>
+          <a:xfrm>
+            <a:off x="457200" y="777240"/>
+            <a:ext cx="1371600" cy="27432"/>
+          </a:xfrm>
+          <a:prstGeom prst="rect">
+            <a:avLst/>
+          </a:prstGeom>
+          <a:solidFill>
+            <a:srgbClr val="00D084"/>
+          </a:solidFill>
+          <a:ln>
+            <a:noFill/>
+          </a:ln>
+        </p:spPr>
+        <p:style>
+          <a:lnRef idx="1">
+            <a:schemeClr val="accent1"/>
+          </a:lnRef>
+          <a:fillRef idx="3">
+            <a:schemeClr val="accent1"/>
+          </a:fillRef>
+          <a:effectRef idx="2">
+            <a:schemeClr val="accent1"/>
+          </a:effectRef>
+          <a:fontRef idx="minor">
+            <a:schemeClr val="lt1"/>
+          </a:fontRef>
+        </p:style>
+        <p:txBody>
+          <a:bodyPr rtlCol="0" anchor="ctr"/>
+          <a:lstStyle/>
+          <a:p>
+            <a:pPr algn="ctr"/>
+          </a:p>
+        </p:txBody>
+      </p:sp>
+      <p:sp>
+        <p:nvSpPr>
+          <p:cNvPr id="5" name="TextBox 4"/>
           <p:cNvSpPr txBox="1"/>
           <p:nvPr/>
         </p:nvSpPr>
         <p:spPr>
           <a:xfrm>
-            <a:off x="457200" y="1097280"/>
+            <a:off x="457200" y="914400"/>
             <a:ext cx="11277295" cy="5303520"/>
           </a:xfrm>
           <a:prstGeom prst="rect">
@@ -8563,165 +9994,192 @@
           <a:p>
             <a:pPr>
               <a:spcBef>
-                <a:spcPts val="1600"/>
-              </a:spcBef>
-            </a:pPr>
-            <a:r>
-              <a:rPr sz="2000" b="1">
+                <a:spcPts val="1400"/>
+              </a:spcBef>
+              <a:spcAft>
+                <a:spcPts val="400"/>
+              </a:spcAft>
+            </a:pPr>
+            <a:r>
+              <a:rPr sz="1800" b="1">
                 <a:solidFill>
                   <a:srgbClr val="00D084"/>
                 </a:solidFill>
-              </a:rPr>
-              <a:t>Appweb 1 - General</a:t>
-            </a:r>
-          </a:p>
-          <a:p>
-            <a:pPr>
-              <a:spcBef>
-                <a:spcPts val="600"/>
-              </a:spcBef>
-            </a:pPr>
-            <a:r>
-              <a:rPr sz="1600" b="0">
-                <a:solidFill>
-                  <a:srgbClr val="F0F4F8"/>
-                </a:solidFill>
-              </a:rPr>
-              <a:t>  Almacenes: VES, 40, 118, 121, 122, 129</a:t>
-            </a:r>
-          </a:p>
-          <a:p>
-            <a:pPr>
-              <a:spcBef>
-                <a:spcPts val="600"/>
-              </a:spcBef>
-            </a:pPr>
-            <a:r>
-              <a:rPr sz="1600" b="0">
-                <a:solidFill>
-                  <a:srgbClr val="F0F4F8"/>
-                </a:solidFill>
-              </a:rPr>
-              <a:t>  Fuente principal de stock de venta</a:t>
-            </a:r>
-          </a:p>
-          <a:p>
-            <a:pPr>
-              <a:spcBef>
-                <a:spcPts val="600"/>
-              </a:spcBef>
-            </a:pPr>
-          </a:p>
-          <a:p>
-            <a:pPr>
-              <a:spcBef>
-                <a:spcPts val="1600"/>
-              </a:spcBef>
-            </a:pPr>
-            <a:r>
-              <a:rPr sz="2000" b="1">
+                <a:latin typeface="Segoe UI"/>
+              </a:rPr>
+              <a:t>Appweb 1 — General</a:t>
+            </a:r>
+          </a:p>
+          <a:p>
+            <a:pPr>
+              <a:spcBef>
+                <a:spcPts val="500"/>
+              </a:spcBef>
+              <a:spcAft>
+                <a:spcPts val="200"/>
+              </a:spcAft>
+            </a:pPr>
+            <a:r>
+              <a:rPr sz="1400" b="0">
+                <a:solidFill>
+                  <a:srgbClr val="F0F4F8"/>
+                </a:solidFill>
+                <a:latin typeface="Segoe UI"/>
+              </a:rPr>
+              <a:t>▸ Almacenes: VES, 40, 118, 121, 122, 129</a:t>
+            </a:r>
+          </a:p>
+          <a:p>
+            <a:pPr>
+              <a:spcBef>
+                <a:spcPts val="500"/>
+              </a:spcBef>
+              <a:spcAft>
+                <a:spcPts val="200"/>
+              </a:spcAft>
+            </a:pPr>
+            <a:r>
+              <a:rPr sz="1400" b="0">
+                <a:solidFill>
+                  <a:srgbClr val="F0F4F8"/>
+                </a:solidFill>
+                <a:latin typeface="Segoe UI"/>
+              </a:rPr>
+              <a:t>▸ Stock de venta principal</a:t>
+            </a:r>
+          </a:p>
+          <a:p>
+            <a:pPr>
+              <a:spcBef>
+                <a:spcPts val="400"/>
+              </a:spcBef>
+              <a:spcAft>
+                <a:spcPts val="400"/>
+              </a:spcAft>
+            </a:pPr>
+          </a:p>
+          <a:p>
+            <a:pPr>
+              <a:spcBef>
+                <a:spcPts val="1400"/>
+              </a:spcBef>
+              <a:spcAft>
+                <a:spcPts val="400"/>
+              </a:spcAft>
+            </a:pPr>
+            <a:r>
+              <a:rPr sz="1800" b="1">
                 <a:solidFill>
                   <a:srgbClr val="00D084"/>
                 </a:solidFill>
-              </a:rPr>
-              <a:t>Appweb 2 - Sucursales</a:t>
-            </a:r>
-          </a:p>
-          <a:p>
-            <a:pPr>
-              <a:spcBef>
-                <a:spcPts val="600"/>
-              </a:spcBef>
-            </a:pPr>
-            <a:r>
-              <a:rPr sz="1600" b="0">
-                <a:solidFill>
-                  <a:srgbClr val="F0F4F8"/>
-                </a:solidFill>
-              </a:rPr>
-              <a:t>  Almacenes: S1, S2, S3, S5, S6, S9, S11, S14, S17</a:t>
-            </a:r>
-          </a:p>
-          <a:p>
-            <a:pPr>
-              <a:spcBef>
-                <a:spcPts val="600"/>
-              </a:spcBef>
-            </a:pPr>
-            <a:r>
-              <a:rPr sz="1600" b="0">
-                <a:solidFill>
-                  <a:srgbClr val="F0F4F8"/>
-                </a:solidFill>
-              </a:rPr>
-              <a:t>  Datos consolidados de sucursales</a:t>
-            </a:r>
-          </a:p>
-          <a:p>
-            <a:pPr>
-              <a:spcBef>
-                <a:spcPts val="600"/>
-              </a:spcBef>
-            </a:pPr>
-          </a:p>
-          <a:p>
-            <a:pPr>
-              <a:spcBef>
-                <a:spcPts val="1600"/>
-              </a:spcBef>
-            </a:pPr>
-            <a:r>
-              <a:rPr sz="2000" b="1">
+                <a:latin typeface="Segoe UI"/>
+              </a:rPr>
+              <a:t>Appweb 2 — Sucursales</a:t>
+            </a:r>
+          </a:p>
+          <a:p>
+            <a:pPr>
+              <a:spcBef>
+                <a:spcPts val="500"/>
+              </a:spcBef>
+              <a:spcAft>
+                <a:spcPts val="200"/>
+              </a:spcAft>
+            </a:pPr>
+            <a:r>
+              <a:rPr sz="1400" b="0">
+                <a:solidFill>
+                  <a:srgbClr val="F0F4F8"/>
+                </a:solidFill>
+                <a:latin typeface="Segoe UI"/>
+              </a:rPr>
+              <a:t>▸ Almacenes: S1, S2, S3, S5, S6, S9, S11, S14, S17</a:t>
+            </a:r>
+          </a:p>
+          <a:p>
+            <a:pPr>
+              <a:spcBef>
+                <a:spcPts val="500"/>
+              </a:spcBef>
+              <a:spcAft>
+                <a:spcPts val="200"/>
+              </a:spcAft>
+            </a:pPr>
+            <a:r>
+              <a:rPr sz="1400" b="0">
+                <a:solidFill>
+                  <a:srgbClr val="F0F4F8"/>
+                </a:solidFill>
+                <a:latin typeface="Segoe UI"/>
+              </a:rPr>
+              <a:t>▸ Datos consolidados regionales</a:t>
+            </a:r>
+          </a:p>
+          <a:p>
+            <a:pPr>
+              <a:spcBef>
+                <a:spcPts val="400"/>
+              </a:spcBef>
+              <a:spcAft>
+                <a:spcPts val="400"/>
+              </a:spcAft>
+            </a:pPr>
+          </a:p>
+          <a:p>
+            <a:pPr>
+              <a:spcBef>
+                <a:spcPts val="1400"/>
+              </a:spcBef>
+              <a:spcAft>
+                <a:spcPts val="400"/>
+              </a:spcAft>
+            </a:pPr>
+            <a:r>
+              <a:rPr sz="1800" b="1">
                 <a:solidFill>
                   <a:srgbClr val="00D084"/>
                 </a:solidFill>
-              </a:rPr>
-              <a:t>Tipo de Almacén</a:t>
-            </a:r>
-          </a:p>
-          <a:p>
-            <a:pPr>
-              <a:spcBef>
-                <a:spcPts val="600"/>
-              </a:spcBef>
-            </a:pPr>
-            <a:r>
-              <a:rPr sz="1600" b="0">
-                <a:solidFill>
-                  <a:srgbClr val="F0F4F8"/>
-                </a:solidFill>
-              </a:rPr>
-              <a:t>  venta: VES, 40, 121 (inspección), 122, 129</a:t>
-            </a:r>
-          </a:p>
-          <a:p>
-            <a:pPr>
-              <a:spcBef>
-                <a:spcPts val="600"/>
-              </a:spcBef>
-            </a:pPr>
-            <a:r>
-              <a:rPr sz="1600" b="0">
-                <a:solidFill>
-                  <a:srgbClr val="F0F4F8"/>
-                </a:solidFill>
-              </a:rPr>
-              <a:t>  mktd: 118, S* (sucursales)</a:t>
-            </a:r>
-          </a:p>
-          <a:p>
-            <a:pPr>
-              <a:spcBef>
-                <a:spcPts val="600"/>
-              </a:spcBef>
-            </a:pPr>
-            <a:r>
-              <a:rPr sz="1600" b="0">
-                <a:solidFill>
-                  <a:srgbClr val="F0F4F8"/>
-                </a:solidFill>
-              </a:rPr>
-              <a:t>  Solo almacenes tipo 'venta' cuentan para el stock comercial</a:t>
+                <a:latin typeface="Segoe UI"/>
+              </a:rPr>
+              <a:t>Clasificación de Almacenes</a:t>
+            </a:r>
+          </a:p>
+          <a:p>
+            <a:pPr>
+              <a:spcBef>
+                <a:spcPts val="500"/>
+              </a:spcBef>
+              <a:spcAft>
+                <a:spcPts val="200"/>
+              </a:spcAft>
+            </a:pPr>
+            <a:r>
+              <a:rPr sz="1400" b="0">
+                <a:solidFill>
+                  <a:srgbClr val="F0F4F8"/>
+                </a:solidFill>
+                <a:latin typeface="Segoe UI"/>
+              </a:rPr>
+              <a:t>▸ Venta: VES, 40, 121, 122, 129 → cuentan para stock comercial</a:t>
+            </a:r>
+          </a:p>
+          <a:p>
+            <a:pPr>
+              <a:spcBef>
+                <a:spcPts val="500"/>
+              </a:spcBef>
+              <a:spcAft>
+                <a:spcPts val="200"/>
+              </a:spcAft>
+            </a:pPr>
+            <a:r>
+              <a:rPr sz="1400" b="0">
+                <a:solidFill>
+                  <a:srgbClr val="F0F4F8"/>
+                </a:solidFill>
+                <a:latin typeface="Segoe UI"/>
+              </a:rPr>
+              <a:t>▸ Mktd: 118, S* → no cuentan para venta (solo info)</a:t>
             </a:r>
           </a:p>
         </p:txBody>
@@ -8795,8 +10253,8 @@
         </p:nvSpPr>
         <p:spPr>
           <a:xfrm>
-            <a:off x="457200" y="2743200"/>
-            <a:ext cx="1828800" cy="54864"/>
+            <a:off x="457200" y="2377440"/>
+            <a:ext cx="2286000" cy="36576"/>
           </a:xfrm>
           <a:prstGeom prst="rect">
             <a:avLst/>
@@ -8838,8 +10296,8 @@
         </p:nvSpPr>
         <p:spPr>
           <a:xfrm>
-            <a:off x="457200" y="2377440"/>
-            <a:ext cx="10972800" cy="914400"/>
+            <a:off x="457200" y="2011680"/>
+            <a:ext cx="11277295" cy="914400"/>
           </a:xfrm>
           <a:prstGeom prst="rect">
             <a:avLst/>
@@ -8857,6 +10315,7 @@
                 <a:solidFill>
                   <a:srgbClr val="F0F4F8"/>
                 </a:solidFill>
+                <a:latin typeface="Segoe UI"/>
               </a:rPr>
               <a:t>Categorías de Negocio</a:t>
             </a:r>
@@ -8932,8 +10391,8 @@
         </p:nvSpPr>
         <p:spPr>
           <a:xfrm>
-            <a:off x="457200" y="274320"/>
-            <a:ext cx="11277295" cy="640080"/>
+            <a:off x="457200" y="228600"/>
+            <a:ext cx="11277295" cy="548640"/>
           </a:xfrm>
           <a:prstGeom prst="rect">
             <a:avLst/>
@@ -8951,21 +10410,65 @@
                 <a:solidFill>
                   <a:srgbClr val="F0F4F8"/>
                 </a:solidFill>
-              </a:rPr>
-              <a:t>Lineas y Categorías</a:t>
-            </a:r>
-          </a:p>
-        </p:txBody>
-      </p:sp>
-      <p:sp>
-        <p:nvSpPr>
-          <p:cNvPr id="4" name="TextBox 3"/>
+                <a:latin typeface="Segoe UI"/>
+              </a:rPr>
+              <a:t>Mapeo Línea → Categoría</a:t>
+            </a:r>
+          </a:p>
+        </p:txBody>
+      </p:sp>
+      <p:sp>
+        <p:nvSpPr>
+          <p:cNvPr id="4" name="Rectangle 3"/>
+          <p:cNvSpPr/>
+          <p:nvPr/>
+        </p:nvSpPr>
+        <p:spPr>
+          <a:xfrm>
+            <a:off x="457200" y="777240"/>
+            <a:ext cx="1371600" cy="27432"/>
+          </a:xfrm>
+          <a:prstGeom prst="rect">
+            <a:avLst/>
+          </a:prstGeom>
+          <a:solidFill>
+            <a:srgbClr val="00D084"/>
+          </a:solidFill>
+          <a:ln>
+            <a:noFill/>
+          </a:ln>
+        </p:spPr>
+        <p:style>
+          <a:lnRef idx="1">
+            <a:schemeClr val="accent1"/>
+          </a:lnRef>
+          <a:fillRef idx="3">
+            <a:schemeClr val="accent1"/>
+          </a:fillRef>
+          <a:effectRef idx="2">
+            <a:schemeClr val="accent1"/>
+          </a:effectRef>
+          <a:fontRef idx="minor">
+            <a:schemeClr val="lt1"/>
+          </a:fontRef>
+        </p:style>
+        <p:txBody>
+          <a:bodyPr rtlCol="0" anchor="ctr"/>
+          <a:lstStyle/>
+          <a:p>
+            <a:pPr algn="ctr"/>
+          </a:p>
+        </p:txBody>
+      </p:sp>
+      <p:sp>
+        <p:nvSpPr>
+          <p:cNvPr id="5" name="TextBox 4"/>
           <p:cNvSpPr txBox="1"/>
           <p:nvPr/>
         </p:nvSpPr>
         <p:spPr>
           <a:xfrm>
-            <a:off x="457200" y="1097280"/>
+            <a:off x="457200" y="914400"/>
             <a:ext cx="11277295" cy="5303520"/>
           </a:xfrm>
           <a:prstGeom prst="rect">
@@ -8981,173 +10484,220 @@
           <a:p>
             <a:pPr>
               <a:spcBef>
-                <a:spcPts val="1600"/>
-              </a:spcBef>
-            </a:pPr>
-            <a:r>
-              <a:rPr sz="2000" b="1">
+                <a:spcPts val="1400"/>
+              </a:spcBef>
+              <a:spcAft>
+                <a:spcPts val="400"/>
+              </a:spcAft>
+            </a:pPr>
+            <a:r>
+              <a:rPr sz="1800" b="1">
                 <a:solidFill>
                   <a:srgbClr val="00D084"/>
                 </a:solidFill>
-              </a:rPr>
-              <a:t>Mapeo Automático por Código de Línea</a:t>
-            </a:r>
-          </a:p>
-          <a:p>
-            <a:pPr>
-              <a:spcBef>
-                <a:spcPts val="600"/>
-              </a:spcBef>
-            </a:pPr>
-            <a:r>
-              <a:rPr sz="1600" b="0">
-                <a:solidFill>
-                  <a:srgbClr val="F0F4F8"/>
-                </a:solidFill>
-              </a:rPr>
-              <a:t>  VINIBALL → líneas: 01, MA, 14, AD</a:t>
-            </a:r>
-          </a:p>
-          <a:p>
-            <a:pPr>
-              <a:spcBef>
-                <a:spcPts val="600"/>
-              </a:spcBef>
-            </a:pPr>
-            <a:r>
-              <a:rPr sz="1600" b="0">
-                <a:solidFill>
-                  <a:srgbClr val="F0F4F8"/>
-                </a:solidFill>
-              </a:rPr>
-              <a:t>  VINIFAN → líneas: 02, 09, 11, 72-79, CE, CF</a:t>
-            </a:r>
-          </a:p>
-          <a:p>
-            <a:pPr>
-              <a:spcBef>
-                <a:spcPts val="600"/>
-              </a:spcBef>
-            </a:pPr>
-            <a:r>
-              <a:rPr sz="1600" b="0">
-                <a:solidFill>
-                  <a:srgbClr val="F0F4F8"/>
-                </a:solidFill>
-              </a:rPr>
-              <a:t>  INDUMENTARIA → líneas: 57, 52</a:t>
-            </a:r>
-          </a:p>
-          <a:p>
-            <a:pPr>
-              <a:spcBef>
-                <a:spcPts val="600"/>
-              </a:spcBef>
-            </a:pPr>
-            <a:r>
-              <a:rPr sz="1600" b="0">
-                <a:solidFill>
-                  <a:srgbClr val="F0F4F8"/>
-                </a:solidFill>
-              </a:rPr>
-              <a:t>  REPRESENTADAS → línea: 85</a:t>
-            </a:r>
-          </a:p>
-          <a:p>
-            <a:pPr>
-              <a:spcBef>
-                <a:spcPts val="600"/>
-              </a:spcBef>
-            </a:pPr>
-            <a:r>
-              <a:rPr sz="1600" b="0">
-                <a:solidFill>
-                  <a:srgbClr val="F0F4F8"/>
-                </a:solidFill>
-              </a:rPr>
-              <a:t>  PUBLICIDAD → líneas: 80, 81</a:t>
-            </a:r>
-          </a:p>
-          <a:p>
-            <a:pPr>
-              <a:spcBef>
-                <a:spcPts val="600"/>
-              </a:spcBef>
-            </a:pPr>
-          </a:p>
-          <a:p>
-            <a:pPr>
-              <a:spcBef>
-                <a:spcPts val="1600"/>
-              </a:spcBef>
-            </a:pPr>
-            <a:r>
-              <a:rPr sz="2000" b="1">
+                <a:latin typeface="Segoe UI"/>
+              </a:rPr>
+              <a:t>Reglas de Asignación Automática</a:t>
+            </a:r>
+          </a:p>
+          <a:p>
+            <a:pPr>
+              <a:spcBef>
+                <a:spcPts val="500"/>
+              </a:spcBef>
+              <a:spcAft>
+                <a:spcPts val="200"/>
+              </a:spcAft>
+            </a:pPr>
+            <a:r>
+              <a:rPr sz="1400" b="0">
+                <a:solidFill>
+                  <a:srgbClr val="F0F4F8"/>
+                </a:solidFill>
+                <a:latin typeface="Segoe UI"/>
+              </a:rPr>
+              <a:t>▸ VINIBALL → líneas: 01, MA, 14, AD</a:t>
+            </a:r>
+          </a:p>
+          <a:p>
+            <a:pPr>
+              <a:spcBef>
+                <a:spcPts val="500"/>
+              </a:spcBef>
+              <a:spcAft>
+                <a:spcPts val="200"/>
+              </a:spcAft>
+            </a:pPr>
+            <a:r>
+              <a:rPr sz="1400" b="0">
+                <a:solidFill>
+                  <a:srgbClr val="F0F4F8"/>
+                </a:solidFill>
+                <a:latin typeface="Segoe UI"/>
+              </a:rPr>
+              <a:t>▸ VINIFAN → líneas: 02, 09, 11, 72-79, CE, CF</a:t>
+            </a:r>
+          </a:p>
+          <a:p>
+            <a:pPr>
+              <a:spcBef>
+                <a:spcPts val="500"/>
+              </a:spcBef>
+              <a:spcAft>
+                <a:spcPts val="200"/>
+              </a:spcAft>
+            </a:pPr>
+            <a:r>
+              <a:rPr sz="1400" b="0">
+                <a:solidFill>
+                  <a:srgbClr val="F0F4F8"/>
+                </a:solidFill>
+                <a:latin typeface="Segoe UI"/>
+              </a:rPr>
+              <a:t>▸ INDUMENTARIA → líneas: 57, 52</a:t>
+            </a:r>
+          </a:p>
+          <a:p>
+            <a:pPr>
+              <a:spcBef>
+                <a:spcPts val="500"/>
+              </a:spcBef>
+              <a:spcAft>
+                <a:spcPts val="200"/>
+              </a:spcAft>
+            </a:pPr>
+            <a:r>
+              <a:rPr sz="1400" b="0">
+                <a:solidFill>
+                  <a:srgbClr val="F0F4F8"/>
+                </a:solidFill>
+                <a:latin typeface="Segoe UI"/>
+              </a:rPr>
+              <a:t>▸ REPRESENTADAS → línea: 85</a:t>
+            </a:r>
+          </a:p>
+          <a:p>
+            <a:pPr>
+              <a:spcBef>
+                <a:spcPts val="500"/>
+              </a:spcBef>
+              <a:spcAft>
+                <a:spcPts val="200"/>
+              </a:spcAft>
+            </a:pPr>
+            <a:r>
+              <a:rPr sz="1400" b="0">
+                <a:solidFill>
+                  <a:srgbClr val="F0F4F8"/>
+                </a:solidFill>
+                <a:latin typeface="Segoe UI"/>
+              </a:rPr>
+              <a:t>▸ PUBLICIDAD → líneas: 80, 81</a:t>
+            </a:r>
+          </a:p>
+          <a:p>
+            <a:pPr>
+              <a:spcBef>
+                <a:spcPts val="400"/>
+              </a:spcBef>
+              <a:spcAft>
+                <a:spcPts val="400"/>
+              </a:spcAft>
+            </a:pPr>
+          </a:p>
+          <a:p>
+            <a:pPr>
+              <a:spcBef>
+                <a:spcPts val="1400"/>
+              </a:spcBef>
+              <a:spcAft>
+                <a:spcPts val="400"/>
+              </a:spcAft>
+            </a:pPr>
+            <a:r>
+              <a:rPr sz="1800" b="1">
                 <a:solidFill>
                   <a:srgbClr val="00D084"/>
                 </a:solidFill>
-              </a:rPr>
-              <a:t>Reglas de Asignación</a:t>
-            </a:r>
-          </a:p>
-          <a:p>
-            <a:pPr>
-              <a:spcBef>
-                <a:spcPts val="600"/>
-              </a:spcBef>
-            </a:pPr>
-            <a:r>
-              <a:rPr sz="1600" b="0">
-                <a:solidFill>
-                  <a:srgbClr val="F0F4F8"/>
-                </a:solidFill>
-              </a:rPr>
-              <a:t>  El código de línea se extrae del reporte appweb</a:t>
-            </a:r>
-          </a:p>
-          <a:p>
-            <a:pPr>
-              <a:spcBef>
-                <a:spcPts val="600"/>
-              </a:spcBef>
-            </a:pPr>
-            <a:r>
-              <a:rPr sz="1600" b="0">
-                <a:solidFill>
-                  <a:srgbClr val="F0F4F8"/>
-                </a:solidFill>
-              </a:rPr>
-              <a:t>  Normalización: '0179 - ACCESORIOS' → '79 - ACCESORIOS'</a:t>
-            </a:r>
-          </a:p>
-          <a:p>
-            <a:pPr>
-              <a:spcBef>
-                <a:spcPts val="600"/>
-              </a:spcBef>
-            </a:pPr>
-            <a:r>
-              <a:rPr sz="1600" b="0">
-                <a:solidFill>
-                  <a:srgbClr val="F0F4F8"/>
-                </a:solidFill>
-              </a:rPr>
-              <a:t>  Código '79' → categoría VINIFAN</a:t>
-            </a:r>
-          </a:p>
-          <a:p>
-            <a:pPr>
-              <a:spcBef>
-                <a:spcPts val="600"/>
-              </a:spcBef>
-            </a:pPr>
-            <a:r>
-              <a:rPr sz="1600" b="0">
-                <a:solidFill>
-                  <a:srgbClr val="F0F4F8"/>
-                </a:solidFill>
-              </a:rPr>
-              <a:t>  SKUs sin línea asignada → 'OTROS'</a:t>
+                <a:latin typeface="Segoe UI"/>
+              </a:rPr>
+              <a:t>Proceso de Normalización</a:t>
+            </a:r>
+          </a:p>
+          <a:p>
+            <a:pPr>
+              <a:spcBef>
+                <a:spcPts val="500"/>
+              </a:spcBef>
+              <a:spcAft>
+                <a:spcPts val="200"/>
+              </a:spcAft>
+            </a:pPr>
+            <a:r>
+              <a:rPr sz="1400" b="0">
+                <a:solidFill>
+                  <a:srgbClr val="F0F4F8"/>
+                </a:solidFill>
+                <a:latin typeface="Segoe UI"/>
+              </a:rPr>
+              <a:t>▸ Entrada: '0179 - ACCESORIOS' del reporte appweb</a:t>
+            </a:r>
+          </a:p>
+          <a:p>
+            <a:pPr>
+              <a:spcBef>
+                <a:spcPts val="500"/>
+              </a:spcBef>
+              <a:spcAft>
+                <a:spcPts val="200"/>
+              </a:spcAft>
+            </a:pPr>
+            <a:r>
+              <a:rPr sz="1400" b="0">
+                <a:solidFill>
+                  <a:srgbClr val="F0F4F8"/>
+                </a:solidFill>
+                <a:latin typeface="Segoe UI"/>
+              </a:rPr>
+              <a:t>▸ Normalizado: '79 - ACCESORIOS' (se elimina prefijo '01')</a:t>
+            </a:r>
+          </a:p>
+          <a:p>
+            <a:pPr>
+              <a:spcBef>
+                <a:spcPts val="500"/>
+              </a:spcBef>
+              <a:spcAft>
+                <a:spcPts val="200"/>
+              </a:spcAft>
+            </a:pPr>
+            <a:r>
+              <a:rPr sz="1400" b="0">
+                <a:solidFill>
+                  <a:srgbClr val="F0F4F8"/>
+                </a:solidFill>
+                <a:latin typeface="Segoe UI"/>
+              </a:rPr>
+              <a:t>▸ Código '79' → categoría asignada: VINIFAN</a:t>
+            </a:r>
+          </a:p>
+          <a:p>
+            <a:pPr>
+              <a:spcBef>
+                <a:spcPts val="500"/>
+              </a:spcBef>
+              <a:spcAft>
+                <a:spcPts val="200"/>
+              </a:spcAft>
+            </a:pPr>
+            <a:r>
+              <a:rPr sz="1400" b="0">
+                <a:solidFill>
+                  <a:srgbClr val="F0F4F8"/>
+                </a:solidFill>
+                <a:latin typeface="Segoe UI"/>
+              </a:rPr>
+              <a:t>▸ SKUs sin línea válida → categoría 'OTROS'</a:t>
             </a:r>
           </a:p>
         </p:txBody>
@@ -9221,8 +10771,8 @@
         </p:nvSpPr>
         <p:spPr>
           <a:xfrm>
-            <a:off x="457200" y="2743200"/>
-            <a:ext cx="1828800" cy="54864"/>
+            <a:off x="457200" y="2377440"/>
+            <a:ext cx="2286000" cy="36576"/>
           </a:xfrm>
           <a:prstGeom prst="rect">
             <a:avLst/>
@@ -9264,8 +10814,8 @@
         </p:nvSpPr>
         <p:spPr>
           <a:xfrm>
-            <a:off x="457200" y="2377440"/>
-            <a:ext cx="10972800" cy="914400"/>
+            <a:off x="457200" y="2011680"/>
+            <a:ext cx="11277295" cy="914400"/>
           </a:xfrm>
           <a:prstGeom prst="rect">
             <a:avLst/>
@@ -9283,6 +10833,7 @@
                 <a:solidFill>
                   <a:srgbClr val="F0F4F8"/>
                 </a:solidFill>
+                <a:latin typeface="Segoe UI"/>
               </a:rPr>
               <a:t>Estados de Stock</a:t>
             </a:r>
